--- a/Science_Teesside/Teaching_Packs/GROW/lessons/W3A/GROW_Science_Autumn1_W3A_Friction.pptx
+++ b/Science_Teesside/Teaching_Packs/GROW/lessons/W3A/GROW_Science_Autumn1_W3A_Friction.pptx
@@ -2,24 +2,24 @@
 <file path=ppt/presentation.xml><?xml version="1.0" encoding="utf-8"?>
 <p:presentation xmlns:p="http://schemas.openxmlformats.org/presentationml/2006/main">
   <p:sldMasterIdLst>
-    <p:sldMasterId xmlns:r="http://schemas.openxmlformats.org/officeDocument/2006/relationships" id="2147483648" r:id="Rbb6ae005a00e4dff"/>
+    <p:sldMasterId xmlns:r="http://schemas.openxmlformats.org/officeDocument/2006/relationships" id="2147483648" r:id="R8e7b94a0646149db"/>
   </p:sldMasterIdLst>
   <p:notesMasterIdLst>
-    <p:notesMasterId xmlns:r="http://schemas.openxmlformats.org/officeDocument/2006/relationships" r:id="R14019863f0834fd2"/>
+    <p:notesMasterId xmlns:r="http://schemas.openxmlformats.org/officeDocument/2006/relationships" r:id="Rd6de5dee10ec4f1a"/>
   </p:notesMasterIdLst>
   <p:sldIdLst>
-    <p:sldId xmlns:r="http://schemas.openxmlformats.org/officeDocument/2006/relationships" id="256" r:id="Rcb9a856ae2b94acb"/>
-    <p:sldId xmlns:r="http://schemas.openxmlformats.org/officeDocument/2006/relationships" id="257" r:id="R7feb95698093482a"/>
-    <p:sldId xmlns:r="http://schemas.openxmlformats.org/officeDocument/2006/relationships" id="258" r:id="Rd858281edfb44f08"/>
-    <p:sldId xmlns:r="http://schemas.openxmlformats.org/officeDocument/2006/relationships" id="259" r:id="R3afe56a75b1243c9"/>
-    <p:sldId xmlns:r="http://schemas.openxmlformats.org/officeDocument/2006/relationships" id="260" r:id="R4c36d760a9074577"/>
-    <p:sldId xmlns:r="http://schemas.openxmlformats.org/officeDocument/2006/relationships" id="261" r:id="Rc166193890fe4c0d"/>
-    <p:sldId xmlns:r="http://schemas.openxmlformats.org/officeDocument/2006/relationships" id="262" r:id="Rb4fd0202c4584d71"/>
-    <p:sldId xmlns:r="http://schemas.openxmlformats.org/officeDocument/2006/relationships" id="263" r:id="Ra2842e7fdf0949aa"/>
-    <p:sldId xmlns:r="http://schemas.openxmlformats.org/officeDocument/2006/relationships" id="264" r:id="R0aaf843d6f5840fa"/>
-    <p:sldId xmlns:r="http://schemas.openxmlformats.org/officeDocument/2006/relationships" id="265" r:id="Rc63829073af14955"/>
-    <p:sldId xmlns:r="http://schemas.openxmlformats.org/officeDocument/2006/relationships" id="266" r:id="R6d13b58fddd74395"/>
-    <p:sldId xmlns:r="http://schemas.openxmlformats.org/officeDocument/2006/relationships" id="267" r:id="Re82a158498644360"/>
+    <p:sldId xmlns:r="http://schemas.openxmlformats.org/officeDocument/2006/relationships" id="256" r:id="Redad29aceff447a9"/>
+    <p:sldId xmlns:r="http://schemas.openxmlformats.org/officeDocument/2006/relationships" id="257" r:id="Rad0f69016a014f3f"/>
+    <p:sldId xmlns:r="http://schemas.openxmlformats.org/officeDocument/2006/relationships" id="258" r:id="R40cbc1ca4b564d9a"/>
+    <p:sldId xmlns:r="http://schemas.openxmlformats.org/officeDocument/2006/relationships" id="259" r:id="R0d268844fc034c12"/>
+    <p:sldId xmlns:r="http://schemas.openxmlformats.org/officeDocument/2006/relationships" id="260" r:id="Rb3c962301d234049"/>
+    <p:sldId xmlns:r="http://schemas.openxmlformats.org/officeDocument/2006/relationships" id="261" r:id="R97a867cae43e45f1"/>
+    <p:sldId xmlns:r="http://schemas.openxmlformats.org/officeDocument/2006/relationships" id="262" r:id="R713a10f3cf444d47"/>
+    <p:sldId xmlns:r="http://schemas.openxmlformats.org/officeDocument/2006/relationships" id="263" r:id="R231ebfc4c75f47fc"/>
+    <p:sldId xmlns:r="http://schemas.openxmlformats.org/officeDocument/2006/relationships" id="264" r:id="R751e5edd2c874fe0"/>
+    <p:sldId xmlns:r="http://schemas.openxmlformats.org/officeDocument/2006/relationships" id="265" r:id="Rf908cf893f98496a"/>
+    <p:sldId xmlns:r="http://schemas.openxmlformats.org/officeDocument/2006/relationships" id="266" r:id="R400940ac5f71484f"/>
+    <p:sldId xmlns:r="http://schemas.openxmlformats.org/officeDocument/2006/relationships" id="267" r:id="Rca6c0e1513314823"/>
   </p:sldIdLst>
   <p:sldSz cx="12192000" cy="6858000"/>
   <p:notesSz cx="6858000" cy="9144000"/>
@@ -486,6 +486,14 @@
               <a:t>[/Sources]</a:t>
             </a:r>
           </a:p>
+          <a:p xmlns:a="http://schemas.openxmlformats.org/drawingml/2006/main">
+            <a:r>
+              <a:t>
+[Sources]
+Generated contextual illustration for this visual edition; not measured or recorded experimental evidence.
+[/Sources]</a:t>
+            </a:r>
+          </a:p>
         </p:txBody>
       </p:sp>
       <p:sp>
@@ -1651,7 +1659,7 @@
   </p:cSld>
   <p:clrMap bg1="lt1" tx1="dk1" bg2="lt2" tx2="dk2" accent1="accent1" accent2="accent2" accent3="accent3" accent4="accent4" accent5="accent5" accent6="accent6" hlink="hlink" folHlink="folHlink"/>
   <p:sldLayoutIdLst>
-    <p:sldLayoutId xmlns:r="http://schemas.openxmlformats.org/officeDocument/2006/relationships" id="2147483649" r:id="Rbf8c814ae5b443cf"/>
+    <p:sldLayoutId xmlns:r="http://schemas.openxmlformats.org/officeDocument/2006/relationships" id="2147483649" r:id="R734f59882d4c4936"/>
   </p:sldLayoutIdLst>
   <p:txStyles>
     <p:titleStyle>
@@ -2184,7 +2192,7 @@
     <p:bg>
       <p:bgPr>
         <a:solidFill xmlns:a="http://schemas.openxmlformats.org/drawingml/2006/main">
-          <a:srgbClr val="F5F1E8"/>
+          <a:srgbClr val="FAF9F5"/>
         </a:solidFill>
       </p:bgPr>
     </p:bg>
@@ -2213,8 +2221,8 @@
         </p:nvSpPr>
         <p:spPr>
           <a:xfrm xmlns:a="http://schemas.openxmlformats.org/drawingml/2006/main">
-            <a:off x="609600" y="552450"/>
-            <a:ext cx="781050" cy="57150"/>
+            <a:off x="609600" y="733425"/>
+            <a:ext cx="781050" cy="38100"/>
           </a:xfrm>
           <a:prstGeom xmlns:a="http://schemas.openxmlformats.org/drawingml/2006/main" prst="rect">
             <a:avLst/>
@@ -2244,371 +2252,459 @@
         </p:nvSpPr>
         <p:spPr>
           <a:xfrm xmlns:a="http://schemas.openxmlformats.org/drawingml/2006/main">
-            <a:off x="609600" y="762000"/>
-            <a:ext cx="7143750" cy="285750"/>
-          </a:xfrm>
-          <a:prstGeom xmlns:a="http://schemas.openxmlformats.org/drawingml/2006/main" prst="rect">
-            <a:avLst/>
-          </a:prstGeom>
-          <a:noFill xmlns:a="http://schemas.openxmlformats.org/drawingml/2006/main"/>
-          <a:ln xmlns:a="http://schemas.openxmlformats.org/drawingml/2006/main" w="0">
-            <a:noFill/>
-            <a:prstDash val="solid"/>
-          </a:ln>
-        </p:spPr>
-        <p:txBody>
-          <a:bodyPr xmlns:a="http://schemas.openxmlformats.org/drawingml/2006/main" lIns="0" tIns="0" rIns="0" bIns="0" anchor="ctr"/>
-          <a:lstStyle xmlns:a="http://schemas.openxmlformats.org/drawingml/2006/main"/>
-          <a:p xmlns:a="http://schemas.openxmlformats.org/drawingml/2006/main">
-            <a:pPr>
+            <a:off x="609600" y="342900"/>
+            <a:ext cx="9334500" cy="304800"/>
+          </a:xfrm>
+          <a:prstGeom xmlns:a="http://schemas.openxmlformats.org/drawingml/2006/main" prst="rect">
+            <a:avLst/>
+          </a:prstGeom>
+          <a:noFill xmlns:a="http://schemas.openxmlformats.org/drawingml/2006/main"/>
+          <a:ln xmlns:a="http://schemas.openxmlformats.org/drawingml/2006/main" w="0">
+            <a:noFill/>
+            <a:prstDash val="solid"/>
+          </a:ln>
+        </p:spPr>
+        <p:txBody>
+          <a:bodyPr xmlns:a="http://schemas.openxmlformats.org/drawingml/2006/main" lIns="0" tIns="0" rIns="0" bIns="0" anchor="ctr">
+            <a:noAutofit/>
+          </a:bodyPr>
+          <a:lstStyle xmlns:a="http://schemas.openxmlformats.org/drawingml/2006/main"/>
+          <a:p xmlns:a="http://schemas.openxmlformats.org/drawingml/2006/main">
+            <a:pPr algn="l">
+              <a:buNone/>
+              <a:defRPr sz="1350" b="1">
+                <a:solidFill>
+                  <a:srgbClr val="28685E"/>
+                </a:solidFill>
+                <a:latin typeface="Calibri"/>
+                <a:ea typeface="Calibri"/>
+                <a:cs typeface="Calibri"/>
+              </a:defRPr>
+            </a:pPr>
+            <a:r>
+              <a:rPr sz="1350" b="1">
+                <a:solidFill>
+                  <a:srgbClr val="28685E"/>
+                </a:solidFill>
+                <a:latin typeface="Calibri"/>
+                <a:ea typeface="Calibri"/>
+                <a:cs typeface="Calibri"/>
+              </a:rPr>
+              <a:t>MADE BY MATT  /  GROW SCIENCE</a:t>
+            </a:r>
+          </a:p>
+        </p:txBody>
+      </p:sp>
+      <p:sp>
+        <p:nvSpPr>
+          <p:cNvPr id="3" name="title">
+            <a:extLst xmlns:a="http://schemas.openxmlformats.org/drawingml/2006/main">
+              <a:ext uri="{FF2B5EF4-FFF2-40B4-BE49-F238E27FC236}">
+                <a16:creationId xmlns:a16="http://schemas.microsoft.com/office/drawing/2014/main" id="{6ED2A6C4-AD23-4525-AB8D-ABAFE4B8CC2A}"/>
+              </a:ext>
+            </a:extLst>
+          </p:cNvPr>
+          <p:cNvSpPr>
+            <a:spLocks xmlns:a="http://schemas.openxmlformats.org/drawingml/2006/main" noGrp="1"/>
+          </p:cNvSpPr>
+          <p:nvPr/>
+        </p:nvSpPr>
+        <p:spPr>
+          <a:xfrm xmlns:a="http://schemas.openxmlformats.org/drawingml/2006/main">
+            <a:off x="609600" y="990600"/>
+            <a:ext cx="10972800" cy="1000125"/>
+          </a:xfrm>
+          <a:prstGeom xmlns:a="http://schemas.openxmlformats.org/drawingml/2006/main" prst="rect">
+            <a:avLst/>
+          </a:prstGeom>
+          <a:noFill xmlns:a="http://schemas.openxmlformats.org/drawingml/2006/main"/>
+          <a:ln xmlns:a="http://schemas.openxmlformats.org/drawingml/2006/main" w="0">
+            <a:noFill/>
+            <a:prstDash val="solid"/>
+          </a:ln>
+        </p:spPr>
+        <p:txBody>
+          <a:bodyPr xmlns:a="http://schemas.openxmlformats.org/drawingml/2006/main" lIns="0" tIns="0" rIns="0" bIns="0" anchor="ctr">
+            <a:noAutofit/>
+          </a:bodyPr>
+          <a:lstStyle xmlns:a="http://schemas.openxmlformats.org/drawingml/2006/main"/>
+          <a:p xmlns:a="http://schemas.openxmlformats.org/drawingml/2006/main">
+            <a:pPr algn="l">
+              <a:buNone/>
+              <a:defRPr sz="3675" b="1">
+                <a:solidFill>
+                  <a:srgbClr val="152B3A"/>
+                </a:solidFill>
+                <a:latin typeface="Calibri"/>
+                <a:ea typeface="Calibri"/>
+                <a:cs typeface="Calibri"/>
+              </a:defRPr>
+            </a:pPr>
+            <a:r>
+              <a:rPr sz="3675" b="1">
+                <a:solidFill>
+                  <a:srgbClr val="152B3A"/>
+                </a:solidFill>
+                <a:latin typeface="Calibri"/>
+                <a:ea typeface="Calibri"/>
+                <a:cs typeface="Calibri"/>
+              </a:rPr>
+              <a:t>Friction: friend and enemy</a:t>
+            </a:r>
+          </a:p>
+        </p:txBody>
+      </p:sp>
+      <p:sp>
+        <p:nvSpPr>
+          <p:cNvPr id="4" name="footer-line">
+            <a:extLst xmlns:a="http://schemas.openxmlformats.org/drawingml/2006/main">
+              <a:ext uri="{FF2B5EF4-FFF2-40B4-BE49-F238E27FC236}">
+                <a16:creationId xmlns:a16="http://schemas.microsoft.com/office/drawing/2014/main" id="{78267B8A-646B-43F0-AACA-F54005C2B0B2}"/>
+              </a:ext>
+            </a:extLst>
+          </p:cNvPr>
+          <p:cNvSpPr>
+            <a:spLocks xmlns:a="http://schemas.openxmlformats.org/drawingml/2006/main" noGrp="1"/>
+          </p:cNvSpPr>
+          <p:nvPr/>
+        </p:nvSpPr>
+        <p:spPr>
+          <a:xfrm xmlns:a="http://schemas.openxmlformats.org/drawingml/2006/main">
+            <a:off x="609600" y="6191250"/>
+            <a:ext cx="10972800" cy="9525"/>
+          </a:xfrm>
+          <a:prstGeom xmlns:a="http://schemas.openxmlformats.org/drawingml/2006/main" prst="rect">
+            <a:avLst/>
+          </a:prstGeom>
+          <a:solidFill xmlns:a="http://schemas.openxmlformats.org/drawingml/2006/main">
+            <a:srgbClr val="CEDBD3"/>
+          </a:solidFill>
+          <a:ln xmlns:a="http://schemas.openxmlformats.org/drawingml/2006/main" w="0">
+            <a:noFill/>
+            <a:prstDash val="solid"/>
+          </a:ln>
+        </p:spPr>
+      </p:sp>
+      <p:sp>
+        <p:nvSpPr>
+          <p:cNvPr id="5" name="footer">
+            <a:extLst xmlns:a="http://schemas.openxmlformats.org/drawingml/2006/main">
+              <a:ext uri="{FF2B5EF4-FFF2-40B4-BE49-F238E27FC236}">
+                <a16:creationId xmlns:a16="http://schemas.microsoft.com/office/drawing/2014/main" id="{F5221EB5-F52C-4322-B906-4B2F9AF8D444}"/>
+              </a:ext>
+            </a:extLst>
+          </p:cNvPr>
+          <p:cNvSpPr>
+            <a:spLocks xmlns:a="http://schemas.openxmlformats.org/drawingml/2006/main" noGrp="1"/>
+          </p:cNvSpPr>
+          <p:nvPr/>
+        </p:nvSpPr>
+        <p:spPr>
+          <a:xfrm xmlns:a="http://schemas.openxmlformats.org/drawingml/2006/main">
+            <a:off x="609600" y="6419850"/>
+            <a:ext cx="9525000" cy="219075"/>
+          </a:xfrm>
+          <a:prstGeom xmlns:a="http://schemas.openxmlformats.org/drawingml/2006/main" prst="rect">
+            <a:avLst/>
+          </a:prstGeom>
+          <a:noFill xmlns:a="http://schemas.openxmlformats.org/drawingml/2006/main"/>
+          <a:ln xmlns:a="http://schemas.openxmlformats.org/drawingml/2006/main" w="0">
+            <a:noFill/>
+            <a:prstDash val="solid"/>
+          </a:ln>
+        </p:spPr>
+        <p:txBody>
+          <a:bodyPr xmlns:a="http://schemas.openxmlformats.org/drawingml/2006/main" lIns="0" tIns="0" rIns="0" bIns="0" anchor="ctr">
+            <a:noAutofit/>
+          </a:bodyPr>
+          <a:lstStyle xmlns:a="http://schemas.openxmlformats.org/drawingml/2006/main"/>
+          <a:p xmlns:a="http://schemas.openxmlformats.org/drawingml/2006/main">
+            <a:pPr algn="l">
+              <a:buNone/>
+              <a:defRPr sz="1200" b="0">
+                <a:solidFill>
+                  <a:srgbClr val="50616B"/>
+                </a:solidFill>
+                <a:latin typeface="Calibri"/>
+                <a:ea typeface="Calibri"/>
+                <a:cs typeface="Calibri"/>
+              </a:defRPr>
+            </a:pPr>
+            <a:r>
+              <a:rPr sz="1200" b="0">
+                <a:solidFill>
+                  <a:srgbClr val="50616B"/>
+                </a:solidFill>
+                <a:latin typeface="Calibri"/>
+                <a:ea typeface="Calibri"/>
+                <a:cs typeface="Calibri"/>
+              </a:rPr>
+              <a:t>AUTUMN 1  ·  WEEK 3  ·  LESSON A</a:t>
+            </a:r>
+          </a:p>
+        </p:txBody>
+      </p:sp>
+      <p:sp>
+        <p:nvSpPr>
+          <p:cNvPr id="6" name="page">
+            <a:extLst xmlns:a="http://schemas.openxmlformats.org/drawingml/2006/main">
+              <a:ext uri="{FF2B5EF4-FFF2-40B4-BE49-F238E27FC236}">
+                <a16:creationId xmlns:a16="http://schemas.microsoft.com/office/drawing/2014/main" id="{558CFBC5-163D-424D-B65D-909211C0F669}"/>
+              </a:ext>
+            </a:extLst>
+          </p:cNvPr>
+          <p:cNvSpPr>
+            <a:spLocks xmlns:a="http://schemas.openxmlformats.org/drawingml/2006/main" noGrp="1"/>
+          </p:cNvSpPr>
+          <p:nvPr/>
+        </p:nvSpPr>
+        <p:spPr>
+          <a:xfrm xmlns:a="http://schemas.openxmlformats.org/drawingml/2006/main">
+            <a:off x="11106150" y="6400800"/>
+            <a:ext cx="476250" cy="247650"/>
+          </a:xfrm>
+          <a:prstGeom xmlns:a="http://schemas.openxmlformats.org/drawingml/2006/main" prst="rect">
+            <a:avLst/>
+          </a:prstGeom>
+          <a:noFill xmlns:a="http://schemas.openxmlformats.org/drawingml/2006/main"/>
+          <a:ln xmlns:a="http://schemas.openxmlformats.org/drawingml/2006/main" w="0">
+            <a:noFill/>
+            <a:prstDash val="solid"/>
+          </a:ln>
+        </p:spPr>
+        <p:txBody>
+          <a:bodyPr xmlns:a="http://schemas.openxmlformats.org/drawingml/2006/main" lIns="0" tIns="0" rIns="0" bIns="0" anchor="ctr">
+            <a:noAutofit/>
+          </a:bodyPr>
+          <a:lstStyle xmlns:a="http://schemas.openxmlformats.org/drawingml/2006/main"/>
+          <a:p xmlns:a="http://schemas.openxmlformats.org/drawingml/2006/main">
+            <a:pPr algn="l">
+              <a:buNone/>
+              <a:defRPr sz="1350" b="1">
+                <a:solidFill>
+                  <a:srgbClr val="28685E"/>
+                </a:solidFill>
+                <a:latin typeface="Calibri"/>
+                <a:ea typeface="Calibri"/>
+                <a:cs typeface="Calibri"/>
+              </a:defRPr>
+            </a:pPr>
+            <a:r>
+              <a:rPr sz="1350" b="1">
+                <a:solidFill>
+                  <a:srgbClr val="28685E"/>
+                </a:solidFill>
+                <a:latin typeface="Calibri"/>
+                <a:ea typeface="Calibri"/>
+                <a:cs typeface="Calibri"/>
+              </a:rPr>
+              <a:t>01</a:t>
+            </a:r>
+          </a:p>
+        </p:txBody>
+      </p:sp>
+      <p:sp>
+        <p:nvSpPr>
+          <p:cNvPr id="7" name="opening">
+            <a:extLst xmlns:a="http://schemas.openxmlformats.org/drawingml/2006/main">
+              <a:ext uri="{FF2B5EF4-FFF2-40B4-BE49-F238E27FC236}">
+                <a16:creationId xmlns:a16="http://schemas.microsoft.com/office/drawing/2014/main" id="{6C5E46FC-8A38-4047-9884-219480C6DF48}"/>
+              </a:ext>
+            </a:extLst>
+          </p:cNvPr>
+          <p:cNvSpPr>
+            <a:spLocks xmlns:a="http://schemas.openxmlformats.org/drawingml/2006/main" noGrp="1"/>
+          </p:cNvSpPr>
+          <p:nvPr/>
+        </p:nvSpPr>
+        <p:spPr>
+          <a:xfrm xmlns:a="http://schemas.openxmlformats.org/drawingml/2006/main">
+            <a:off x="609600" y="2447925"/>
+            <a:ext cx="5429250" cy="1638300"/>
+          </a:xfrm>
+          <a:prstGeom xmlns:a="http://schemas.openxmlformats.org/drawingml/2006/main" prst="rect">
+            <a:avLst/>
+          </a:prstGeom>
+          <a:noFill xmlns:a="http://schemas.openxmlformats.org/drawingml/2006/main"/>
+          <a:ln xmlns:a="http://schemas.openxmlformats.org/drawingml/2006/main" w="0">
+            <a:noFill/>
+            <a:prstDash val="solid"/>
+          </a:ln>
+        </p:spPr>
+        <p:txBody>
+          <a:bodyPr xmlns:a="http://schemas.openxmlformats.org/drawingml/2006/main" lIns="0" tIns="0" rIns="0" bIns="0" anchor="ctr">
+            <a:noAutofit/>
+          </a:bodyPr>
+          <a:lstStyle xmlns:a="http://schemas.openxmlformats.org/drawingml/2006/main"/>
+          <a:p xmlns:a="http://schemas.openxmlformats.org/drawingml/2006/main">
+            <a:pPr algn="l">
+              <a:buNone/>
+              <a:defRPr sz="3600" b="1">
+                <a:solidFill>
+                  <a:srgbClr val="28685E"/>
+                </a:solidFill>
+                <a:latin typeface="Calibri"/>
+                <a:ea typeface="Calibri"/>
+                <a:cs typeface="Calibri"/>
+              </a:defRPr>
+            </a:pPr>
+            <a:r>
+              <a:rPr sz="3600" b="1">
+                <a:solidFill>
+                  <a:srgbClr val="28685E"/>
+                </a:solidFill>
+                <a:latin typeface="Calibri"/>
+                <a:ea typeface="Calibri"/>
+                <a:cs typeface="Calibri"/>
+              </a:rPr>
+              <a:t>One force. Different jobs.</a:t>
+            </a:r>
+          </a:p>
+        </p:txBody>
+      </p:sp>
+      <p:sp>
+        <p:nvSpPr>
+          <p:cNvPr id="8" name="objective">
+            <a:extLst xmlns:a="http://schemas.openxmlformats.org/drawingml/2006/main">
+              <a:ext uri="{FF2B5EF4-FFF2-40B4-BE49-F238E27FC236}">
+                <a16:creationId xmlns:a16="http://schemas.microsoft.com/office/drawing/2014/main" id="{78C33AF0-4140-418D-BECB-4C9ED1DB3C42}"/>
+              </a:ext>
+            </a:extLst>
+          </p:cNvPr>
+          <p:cNvSpPr>
+            <a:spLocks xmlns:a="http://schemas.openxmlformats.org/drawingml/2006/main" noGrp="1"/>
+          </p:cNvSpPr>
+          <p:nvPr/>
+        </p:nvSpPr>
+        <p:spPr>
+          <a:xfrm xmlns:a="http://schemas.openxmlformats.org/drawingml/2006/main">
+            <a:off x="609600" y="4286250"/>
+            <a:ext cx="5314950" cy="1466850"/>
+          </a:xfrm>
+          <a:prstGeom xmlns:a="http://schemas.openxmlformats.org/drawingml/2006/main" prst="rect">
+            <a:avLst/>
+          </a:prstGeom>
+          <a:noFill xmlns:a="http://schemas.openxmlformats.org/drawingml/2006/main"/>
+          <a:ln xmlns:a="http://schemas.openxmlformats.org/drawingml/2006/main" w="0">
+            <a:noFill/>
+            <a:prstDash val="solid"/>
+          </a:ln>
+        </p:spPr>
+        <p:txBody>
+          <a:bodyPr xmlns:a="http://schemas.openxmlformats.org/drawingml/2006/main" lIns="0" tIns="0" rIns="0" bIns="0" anchor="ctr">
+            <a:noAutofit/>
+          </a:bodyPr>
+          <a:lstStyle xmlns:a="http://schemas.openxmlformats.org/drawingml/2006/main"/>
+          <a:p xmlns:a="http://schemas.openxmlformats.org/drawingml/2006/main">
+            <a:pPr algn="l">
+              <a:buNone/>
+              <a:defRPr sz="2400" b="0">
+                <a:solidFill>
+                  <a:srgbClr val="152B3A"/>
+                </a:solidFill>
+                <a:latin typeface="Calibri"/>
+                <a:ea typeface="Calibri"/>
+                <a:cs typeface="Calibri"/>
+              </a:defRPr>
+            </a:pPr>
+            <a:r>
+              <a:rPr sz="2400" b="0">
+                <a:solidFill>
+                  <a:srgbClr val="152B3A"/>
+                </a:solidFill>
+                <a:latin typeface="Calibri"/>
+                <a:ea typeface="Calibri"/>
+                <a:cs typeface="Calibri"/>
+              </a:rPr>
+              <a:t>Explain what friction does, and when it helps or hinders.</a:t>
+            </a:r>
+          </a:p>
+        </p:txBody>
+      </p:sp>
+      <p:sp>
+        <p:nvSpPr>
+          <p:cNvPr id="9" name="topic">
+            <a:extLst xmlns:a="http://schemas.openxmlformats.org/drawingml/2006/main">
+              <a:ext uri="{FF2B5EF4-FFF2-40B4-BE49-F238E27FC236}">
+                <a16:creationId xmlns:a16="http://schemas.microsoft.com/office/drawing/2014/main" id="{2BB752A2-66C0-4CAC-A908-5B6EA1ABED10}"/>
+              </a:ext>
+            </a:extLst>
+          </p:cNvPr>
+          <p:cNvSpPr>
+            <a:spLocks xmlns:a="http://schemas.openxmlformats.org/drawingml/2006/main" noGrp="1"/>
+          </p:cNvSpPr>
+          <p:nvPr/>
+        </p:nvSpPr>
+        <p:spPr>
+          <a:xfrm xmlns:a="http://schemas.openxmlformats.org/drawingml/2006/main">
+            <a:off x="609600" y="5753100"/>
+            <a:ext cx="5524500" cy="285750"/>
+          </a:xfrm>
+          <a:prstGeom xmlns:a="http://schemas.openxmlformats.org/drawingml/2006/main" prst="rect">
+            <a:avLst/>
+          </a:prstGeom>
+          <a:noFill xmlns:a="http://schemas.openxmlformats.org/drawingml/2006/main"/>
+          <a:ln xmlns:a="http://schemas.openxmlformats.org/drawingml/2006/main" w="0">
+            <a:noFill/>
+            <a:prstDash val="solid"/>
+          </a:ln>
+        </p:spPr>
+        <p:txBody>
+          <a:bodyPr xmlns:a="http://schemas.openxmlformats.org/drawingml/2006/main" lIns="0" tIns="0" rIns="0" bIns="0" anchor="ctr">
+            <a:noAutofit/>
+          </a:bodyPr>
+          <a:lstStyle xmlns:a="http://schemas.openxmlformats.org/drawingml/2006/main"/>
+          <a:p xmlns:a="http://schemas.openxmlformats.org/drawingml/2006/main">
+            <a:pPr algn="l">
+              <a:buNone/>
               <a:defRPr sz="1500" b="1">
                 <a:solidFill>
-                  <a:srgbClr val="28685E"/>
-                </a:solidFill>
+                  <a:srgbClr val="50616B"/>
+                </a:solidFill>
+                <a:latin typeface="Calibri"/>
+                <a:ea typeface="Calibri"/>
+                <a:cs typeface="Calibri"/>
               </a:defRPr>
             </a:pPr>
             <a:r>
               <a:rPr sz="1500" b="1">
                 <a:solidFill>
-                  <a:srgbClr val="28685E"/>
-                </a:solidFill>
-              </a:rPr>
-              <a:t>MADE BY MATT  /  GROW SCIENCE</a:t>
-            </a:r>
-          </a:p>
-        </p:txBody>
-      </p:sp>
-      <p:sp>
-        <p:nvSpPr>
-          <p:cNvPr id="3" name="title">
-            <a:extLst xmlns:a="http://schemas.openxmlformats.org/drawingml/2006/main">
-              <a:ext uri="{FF2B5EF4-FFF2-40B4-BE49-F238E27FC236}">
-                <a16:creationId xmlns:a16="http://schemas.microsoft.com/office/drawing/2014/main" id="{6ED2A6C4-AD23-4525-AB8D-ABAFE4B8CC2A}"/>
-              </a:ext>
-            </a:extLst>
-          </p:cNvPr>
-          <p:cNvSpPr>
-            <a:spLocks xmlns:a="http://schemas.openxmlformats.org/drawingml/2006/main" noGrp="1"/>
-          </p:cNvSpPr>
-          <p:nvPr/>
-        </p:nvSpPr>
-        <p:spPr>
-          <a:xfrm xmlns:a="http://schemas.openxmlformats.org/drawingml/2006/main">
-            <a:off x="609600" y="1352550"/>
-            <a:ext cx="10972800" cy="952500"/>
-          </a:xfrm>
-          <a:prstGeom xmlns:a="http://schemas.openxmlformats.org/drawingml/2006/main" prst="rect">
-            <a:avLst/>
-          </a:prstGeom>
-          <a:noFill xmlns:a="http://schemas.openxmlformats.org/drawingml/2006/main"/>
-          <a:ln xmlns:a="http://schemas.openxmlformats.org/drawingml/2006/main" w="0">
-            <a:noFill/>
-            <a:prstDash val="solid"/>
-          </a:ln>
-        </p:spPr>
-        <p:txBody>
-          <a:bodyPr xmlns:a="http://schemas.openxmlformats.org/drawingml/2006/main" lIns="0" tIns="0" rIns="0" bIns="0" anchor="ctr"/>
-          <a:lstStyle xmlns:a="http://schemas.openxmlformats.org/drawingml/2006/main"/>
-          <a:p xmlns:a="http://schemas.openxmlformats.org/drawingml/2006/main">
-            <a:pPr>
-              <a:defRPr sz="3750" b="1">
-                <a:solidFill>
-                  <a:srgbClr val="152B3A"/>
-                </a:solidFill>
-              </a:defRPr>
-            </a:pPr>
-            <a:r>
-              <a:rPr sz="3750" b="1">
-                <a:solidFill>
-                  <a:srgbClr val="152B3A"/>
-                </a:solidFill>
-              </a:rPr>
-              <a:t>Friction: friend and enemy</a:t>
-            </a:r>
-          </a:p>
-        </p:txBody>
-      </p:sp>
-      <p:sp>
-        <p:nvSpPr>
-          <p:cNvPr id="4" name="footer-line">
-            <a:extLst xmlns:a="http://schemas.openxmlformats.org/drawingml/2006/main">
-              <a:ext uri="{FF2B5EF4-FFF2-40B4-BE49-F238E27FC236}">
-                <a16:creationId xmlns:a16="http://schemas.microsoft.com/office/drawing/2014/main" id="{78267B8A-646B-43F0-AACA-F54005C2B0B2}"/>
-              </a:ext>
-            </a:extLst>
-          </p:cNvPr>
-          <p:cNvSpPr>
-            <a:spLocks xmlns:a="http://schemas.openxmlformats.org/drawingml/2006/main" noGrp="1"/>
-          </p:cNvSpPr>
-          <p:nvPr/>
-        </p:nvSpPr>
-        <p:spPr>
-          <a:xfrm xmlns:a="http://schemas.openxmlformats.org/drawingml/2006/main">
-            <a:off x="609600" y="6219825"/>
-            <a:ext cx="10972800" cy="9525"/>
-          </a:xfrm>
-          <a:prstGeom xmlns:a="http://schemas.openxmlformats.org/drawingml/2006/main" prst="rect">
-            <a:avLst/>
-          </a:prstGeom>
-          <a:solidFill xmlns:a="http://schemas.openxmlformats.org/drawingml/2006/main">
-            <a:srgbClr val="DCE7DD"/>
-          </a:solidFill>
-          <a:ln xmlns:a="http://schemas.openxmlformats.org/drawingml/2006/main" w="0">
-            <a:noFill/>
-            <a:prstDash val="solid"/>
-          </a:ln>
-        </p:spPr>
-      </p:sp>
-      <p:sp>
-        <p:nvSpPr>
-          <p:cNvPr id="5" name="footer">
-            <a:extLst xmlns:a="http://schemas.openxmlformats.org/drawingml/2006/main">
-              <a:ext uri="{FF2B5EF4-FFF2-40B4-BE49-F238E27FC236}">
-                <a16:creationId xmlns:a16="http://schemas.microsoft.com/office/drawing/2014/main" id="{F5221EB5-F52C-4322-B906-4B2F9AF8D444}"/>
-              </a:ext>
-            </a:extLst>
-          </p:cNvPr>
-          <p:cNvSpPr>
-            <a:spLocks xmlns:a="http://schemas.openxmlformats.org/drawingml/2006/main" noGrp="1"/>
-          </p:cNvSpPr>
-          <p:nvPr/>
-        </p:nvSpPr>
-        <p:spPr>
-          <a:xfrm xmlns:a="http://schemas.openxmlformats.org/drawingml/2006/main">
-            <a:off x="609600" y="6381750"/>
-            <a:ext cx="9525000" cy="228600"/>
-          </a:xfrm>
-          <a:prstGeom xmlns:a="http://schemas.openxmlformats.org/drawingml/2006/main" prst="rect">
-            <a:avLst/>
-          </a:prstGeom>
-          <a:noFill xmlns:a="http://schemas.openxmlformats.org/drawingml/2006/main"/>
-          <a:ln xmlns:a="http://schemas.openxmlformats.org/drawingml/2006/main" w="0">
-            <a:noFill/>
-            <a:prstDash val="solid"/>
-          </a:ln>
-        </p:spPr>
-        <p:txBody>
-          <a:bodyPr xmlns:a="http://schemas.openxmlformats.org/drawingml/2006/main" lIns="0" tIns="0" rIns="0" bIns="0" anchor="ctr"/>
-          <a:lstStyle xmlns:a="http://schemas.openxmlformats.org/drawingml/2006/main"/>
-          <a:p xmlns:a="http://schemas.openxmlformats.org/drawingml/2006/main">
-            <a:pPr>
-              <a:defRPr sz="1275" b="0">
-                <a:solidFill>
                   <a:srgbClr val="50616B"/>
                 </a:solidFill>
-              </a:defRPr>
-            </a:pPr>
-            <a:r>
-              <a:rPr sz="1275" b="0">
-                <a:solidFill>
-                  <a:srgbClr val="50616B"/>
-                </a:solidFill>
-              </a:rPr>
-              <a:t>AUTUMN 1  ·  WEEK 3  ·  LESSON A</a:t>
-            </a:r>
-          </a:p>
-        </p:txBody>
-      </p:sp>
-      <p:sp>
-        <p:nvSpPr>
-          <p:cNvPr id="6" name="page">
-            <a:extLst xmlns:a="http://schemas.openxmlformats.org/drawingml/2006/main">
-              <a:ext uri="{FF2B5EF4-FFF2-40B4-BE49-F238E27FC236}">
-                <a16:creationId xmlns:a16="http://schemas.microsoft.com/office/drawing/2014/main" id="{558CFBC5-163D-424D-B65D-909211C0F669}"/>
-              </a:ext>
-            </a:extLst>
-          </p:cNvPr>
-          <p:cNvSpPr>
-            <a:spLocks xmlns:a="http://schemas.openxmlformats.org/drawingml/2006/main" noGrp="1"/>
-          </p:cNvSpPr>
-          <p:nvPr/>
-        </p:nvSpPr>
-        <p:spPr>
-          <a:xfrm xmlns:a="http://schemas.openxmlformats.org/drawingml/2006/main">
-            <a:off x="11106150" y="6362700"/>
-            <a:ext cx="476250" cy="238125"/>
-          </a:xfrm>
-          <a:prstGeom xmlns:a="http://schemas.openxmlformats.org/drawingml/2006/main" prst="rect">
-            <a:avLst/>
-          </a:prstGeom>
-          <a:noFill xmlns:a="http://schemas.openxmlformats.org/drawingml/2006/main"/>
-          <a:ln xmlns:a="http://schemas.openxmlformats.org/drawingml/2006/main" w="0">
-            <a:noFill/>
-            <a:prstDash val="solid"/>
-          </a:ln>
-        </p:spPr>
-        <p:txBody>
-          <a:bodyPr xmlns:a="http://schemas.openxmlformats.org/drawingml/2006/main" lIns="0" tIns="0" rIns="0" bIns="0" anchor="ctr"/>
-          <a:lstStyle xmlns:a="http://schemas.openxmlformats.org/drawingml/2006/main"/>
-          <a:p xmlns:a="http://schemas.openxmlformats.org/drawingml/2006/main">
-            <a:pPr>
-              <a:defRPr sz="1350" b="1">
-                <a:solidFill>
-                  <a:srgbClr val="28685E"/>
-                </a:solidFill>
-              </a:defRPr>
-            </a:pPr>
-            <a:r>
-              <a:rPr sz="1350" b="1">
-                <a:solidFill>
-                  <a:srgbClr val="28685E"/>
-                </a:solidFill>
-              </a:rPr>
-              <a:t>01</a:t>
-            </a:r>
-          </a:p>
-        </p:txBody>
-      </p:sp>
-      <p:sp>
-        <p:nvSpPr>
-          <p:cNvPr id="7" name="opening">
-            <a:extLst xmlns:a="http://schemas.openxmlformats.org/drawingml/2006/main">
-              <a:ext uri="{FF2B5EF4-FFF2-40B4-BE49-F238E27FC236}">
-                <a16:creationId xmlns:a16="http://schemas.microsoft.com/office/drawing/2014/main" id="{6C5E46FC-8A38-4047-9884-219480C6DF48}"/>
-              </a:ext>
-            </a:extLst>
-          </p:cNvPr>
-          <p:cNvSpPr>
-            <a:spLocks xmlns:a="http://schemas.openxmlformats.org/drawingml/2006/main" noGrp="1"/>
-          </p:cNvSpPr>
-          <p:nvPr/>
-        </p:nvSpPr>
-        <p:spPr>
-          <a:xfrm xmlns:a="http://schemas.openxmlformats.org/drawingml/2006/main">
-            <a:off x="609600" y="2809875"/>
-            <a:ext cx="10287000" cy="714375"/>
-          </a:xfrm>
-          <a:prstGeom xmlns:a="http://schemas.openxmlformats.org/drawingml/2006/main" prst="rect">
-            <a:avLst/>
-          </a:prstGeom>
-          <a:noFill xmlns:a="http://schemas.openxmlformats.org/drawingml/2006/main"/>
-          <a:ln xmlns:a="http://schemas.openxmlformats.org/drawingml/2006/main" w="0">
-            <a:noFill/>
-            <a:prstDash val="solid"/>
-          </a:ln>
-        </p:spPr>
-        <p:txBody>
-          <a:bodyPr xmlns:a="http://schemas.openxmlformats.org/drawingml/2006/main" lIns="0" tIns="0" rIns="0" bIns="0" anchor="ctr"/>
-          <a:lstStyle xmlns:a="http://schemas.openxmlformats.org/drawingml/2006/main"/>
-          <a:p xmlns:a="http://schemas.openxmlformats.org/drawingml/2006/main">
-            <a:pPr>
-              <a:defRPr sz="4125" b="1">
-                <a:solidFill>
-                  <a:srgbClr val="28685E"/>
-                </a:solidFill>
-              </a:defRPr>
-            </a:pPr>
-            <a:r>
-              <a:rPr sz="4125" b="1">
-                <a:solidFill>
-                  <a:srgbClr val="28685E"/>
-                </a:solidFill>
-              </a:rPr>
-              <a:t>One force. Different jobs.</a:t>
-            </a:r>
-          </a:p>
-        </p:txBody>
-      </p:sp>
-      <p:sp>
-        <p:nvSpPr>
-          <p:cNvPr id="8" name="objective">
-            <a:extLst xmlns:a="http://schemas.openxmlformats.org/drawingml/2006/main">
-              <a:ext uri="{FF2B5EF4-FFF2-40B4-BE49-F238E27FC236}">
-                <a16:creationId xmlns:a16="http://schemas.microsoft.com/office/drawing/2014/main" id="{78C33AF0-4140-418D-BECB-4C9ED1DB3C42}"/>
-              </a:ext>
-            </a:extLst>
-          </p:cNvPr>
-          <p:cNvSpPr>
-            <a:spLocks xmlns:a="http://schemas.openxmlformats.org/drawingml/2006/main" noGrp="1"/>
-          </p:cNvSpPr>
-          <p:nvPr/>
-        </p:nvSpPr>
-        <p:spPr>
-          <a:xfrm xmlns:a="http://schemas.openxmlformats.org/drawingml/2006/main">
-            <a:off x="609600" y="3952875"/>
-            <a:ext cx="9239250" cy="952500"/>
-          </a:xfrm>
-          <a:prstGeom xmlns:a="http://schemas.openxmlformats.org/drawingml/2006/main" prst="rect">
-            <a:avLst/>
-          </a:prstGeom>
-          <a:noFill xmlns:a="http://schemas.openxmlformats.org/drawingml/2006/main"/>
-          <a:ln xmlns:a="http://schemas.openxmlformats.org/drawingml/2006/main" w="0">
-            <a:noFill/>
-            <a:prstDash val="solid"/>
-          </a:ln>
-        </p:spPr>
-        <p:txBody>
-          <a:bodyPr xmlns:a="http://schemas.openxmlformats.org/drawingml/2006/main" lIns="0" tIns="0" rIns="0" bIns="0" anchor="ctr"/>
-          <a:lstStyle xmlns:a="http://schemas.openxmlformats.org/drawingml/2006/main"/>
-          <a:p xmlns:a="http://schemas.openxmlformats.org/drawingml/2006/main">
-            <a:pPr>
-              <a:defRPr sz="2550" b="0">
-                <a:solidFill>
-                  <a:srgbClr val="152B3A"/>
-                </a:solidFill>
-              </a:defRPr>
-            </a:pPr>
-            <a:r>
-              <a:rPr sz="2550" b="0">
-                <a:solidFill>
-                  <a:srgbClr val="152B3A"/>
-                </a:solidFill>
-              </a:rPr>
-              <a:t>Explain what friction does, and when it helps or hinders.</a:t>
-            </a:r>
-          </a:p>
-        </p:txBody>
-      </p:sp>
-      <p:sp>
-        <p:nvSpPr>
-          <p:cNvPr id="9" name="topic">
-            <a:extLst xmlns:a="http://schemas.openxmlformats.org/drawingml/2006/main">
-              <a:ext uri="{FF2B5EF4-FFF2-40B4-BE49-F238E27FC236}">
-                <a16:creationId xmlns:a16="http://schemas.microsoft.com/office/drawing/2014/main" id="{2BB752A2-66C0-4CAC-A908-5B6EA1ABED10}"/>
-              </a:ext>
-            </a:extLst>
-          </p:cNvPr>
-          <p:cNvSpPr>
-            <a:spLocks xmlns:a="http://schemas.openxmlformats.org/drawingml/2006/main" noGrp="1"/>
-          </p:cNvSpPr>
-          <p:nvPr/>
-        </p:nvSpPr>
-        <p:spPr>
-          <a:xfrm xmlns:a="http://schemas.openxmlformats.org/drawingml/2006/main">
-            <a:off x="609600" y="5476875"/>
-            <a:ext cx="10191750" cy="285750"/>
-          </a:xfrm>
-          <a:prstGeom xmlns:a="http://schemas.openxmlformats.org/drawingml/2006/main" prst="rect">
-            <a:avLst/>
-          </a:prstGeom>
-          <a:noFill xmlns:a="http://schemas.openxmlformats.org/drawingml/2006/main"/>
-          <a:ln xmlns:a="http://schemas.openxmlformats.org/drawingml/2006/main" w="0">
-            <a:noFill/>
-            <a:prstDash val="solid"/>
-          </a:ln>
-        </p:spPr>
-        <p:txBody>
-          <a:bodyPr xmlns:a="http://schemas.openxmlformats.org/drawingml/2006/main" lIns="0" tIns="0" rIns="0" bIns="0" anchor="ctr"/>
-          <a:lstStyle xmlns:a="http://schemas.openxmlformats.org/drawingml/2006/main"/>
-          <a:p xmlns:a="http://schemas.openxmlformats.org/drawingml/2006/main">
-            <a:pPr>
-              <a:defRPr sz="1575" b="1">
-                <a:solidFill>
-                  <a:srgbClr val="50616B"/>
-                </a:solidFill>
-              </a:defRPr>
-            </a:pPr>
-            <a:r>
-              <a:rPr sz="1575" b="1">
-                <a:solidFill>
-                  <a:srgbClr val="50616B"/>
-                </a:solidFill>
+                <a:latin typeface="Calibri"/>
+                <a:ea typeface="Calibri"/>
+                <a:cs typeface="Calibri"/>
               </a:rPr>
               <a:t>FORCES  /  CONTACT  /  EVIDENCE</a:t>
             </a:r>
           </a:p>
         </p:txBody>
       </p:sp>
+      <p:pic>
+        <p:nvPicPr>
+          <p:cNvPr id="21" name=""/>
+          <p:cNvPicPr>
+            <a:picLocks xmlns:a="http://schemas.openxmlformats.org/drawingml/2006/main" noChangeAspect="1"/>
+          </p:cNvPicPr>
+          <p:nvPr/>
+        </p:nvPicPr>
+        <p:blipFill>
+          <a:blip xmlns:r="http://schemas.openxmlformats.org/officeDocument/2006/relationships" xmlns:a="http://schemas.openxmlformats.org/drawingml/2006/main" r:embed="R396f4ce84b664d99"/>
+          <a:srcRect xmlns:a="http://schemas.openxmlformats.org/drawingml/2006/main" l="0" t="14154" r="0" b="14154"/>
+          <a:stretch xmlns:a="http://schemas.openxmlformats.org/drawingml/2006/main">
+            <a:fillRect l="0" t="0" r="0" b="0"/>
+          </a:stretch>
+        </p:blipFill>
+        <p:spPr>
+          <a:xfrm xmlns:a="http://schemas.openxmlformats.org/drawingml/2006/main">
+            <a:off x="6400800" y="2200275"/>
+            <a:ext cx="5181600" cy="3714750"/>
+          </a:xfrm>
+          <a:prstGeom xmlns:a="http://schemas.openxmlformats.org/drawingml/2006/main" prst="rect">
+            <a:avLst/>
+          </a:prstGeom>
+        </p:spPr>
+      </p:pic>
     </p:spTree>
     <p:extLst>
       <p:ext uri="{BB962C8B-B14F-4D97-AF65-F5344CB8AC3E}">
@@ -2625,7 +2721,7 @@
     <p:bg>
       <p:bgPr>
         <a:solidFill xmlns:a="http://schemas.openxmlformats.org/drawingml/2006/main">
-          <a:srgbClr val="F5F1E8"/>
+          <a:srgbClr val="FAF9F5"/>
         </a:solidFill>
       </p:bgPr>
     </p:bg>
@@ -2654,8 +2750,8 @@
         </p:nvSpPr>
         <p:spPr>
           <a:xfrm xmlns:a="http://schemas.openxmlformats.org/drawingml/2006/main">
-            <a:off x="609600" y="552450"/>
-            <a:ext cx="781050" cy="57150"/>
+            <a:off x="609600" y="733425"/>
+            <a:ext cx="781050" cy="38100"/>
           </a:xfrm>
           <a:prstGeom xmlns:a="http://schemas.openxmlformats.org/drawingml/2006/main" prst="rect">
             <a:avLst/>
@@ -2685,34 +2781,43 @@
         </p:nvSpPr>
         <p:spPr>
           <a:xfrm xmlns:a="http://schemas.openxmlformats.org/drawingml/2006/main">
-            <a:off x="609600" y="762000"/>
-            <a:ext cx="7143750" cy="285750"/>
-          </a:xfrm>
-          <a:prstGeom xmlns:a="http://schemas.openxmlformats.org/drawingml/2006/main" prst="rect">
-            <a:avLst/>
-          </a:prstGeom>
-          <a:noFill xmlns:a="http://schemas.openxmlformats.org/drawingml/2006/main"/>
-          <a:ln xmlns:a="http://schemas.openxmlformats.org/drawingml/2006/main" w="0">
-            <a:noFill/>
-            <a:prstDash val="solid"/>
-          </a:ln>
-        </p:spPr>
-        <p:txBody>
-          <a:bodyPr xmlns:a="http://schemas.openxmlformats.org/drawingml/2006/main" lIns="0" tIns="0" rIns="0" bIns="0" anchor="ctr"/>
-          <a:lstStyle xmlns:a="http://schemas.openxmlformats.org/drawingml/2006/main"/>
-          <a:p xmlns:a="http://schemas.openxmlformats.org/drawingml/2006/main">
-            <a:pPr>
-              <a:defRPr sz="1500" b="1">
+            <a:off x="609600" y="342900"/>
+            <a:ext cx="9334500" cy="304800"/>
+          </a:xfrm>
+          <a:prstGeom xmlns:a="http://schemas.openxmlformats.org/drawingml/2006/main" prst="rect">
+            <a:avLst/>
+          </a:prstGeom>
+          <a:noFill xmlns:a="http://schemas.openxmlformats.org/drawingml/2006/main"/>
+          <a:ln xmlns:a="http://schemas.openxmlformats.org/drawingml/2006/main" w="0">
+            <a:noFill/>
+            <a:prstDash val="solid"/>
+          </a:ln>
+        </p:spPr>
+        <p:txBody>
+          <a:bodyPr xmlns:a="http://schemas.openxmlformats.org/drawingml/2006/main" lIns="0" tIns="0" rIns="0" bIns="0" anchor="ctr">
+            <a:noAutofit/>
+          </a:bodyPr>
+          <a:lstStyle xmlns:a="http://schemas.openxmlformats.org/drawingml/2006/main"/>
+          <a:p xmlns:a="http://schemas.openxmlformats.org/drawingml/2006/main">
+            <a:pPr algn="l">
+              <a:buNone/>
+              <a:defRPr sz="1350" b="1">
                 <a:solidFill>
                   <a:srgbClr val="28685E"/>
                 </a:solidFill>
-              </a:defRPr>
-            </a:pPr>
-            <a:r>
-              <a:rPr sz="1500" b="1">
+                <a:latin typeface="Calibri"/>
+                <a:ea typeface="Calibri"/>
+                <a:cs typeface="Calibri"/>
+              </a:defRPr>
+            </a:pPr>
+            <a:r>
+              <a:rPr sz="1350" b="1">
                 <a:solidFill>
                   <a:srgbClr val="28685E"/>
                 </a:solidFill>
+                <a:latin typeface="Calibri"/>
+                <a:ea typeface="Calibri"/>
+                <a:cs typeface="Calibri"/>
               </a:rPr>
               <a:t>MADE BY MATT  /  GROW SCIENCE</a:t>
             </a:r>
@@ -2735,34 +2840,43 @@
         </p:nvSpPr>
         <p:spPr>
           <a:xfrm xmlns:a="http://schemas.openxmlformats.org/drawingml/2006/main">
-            <a:off x="609600" y="1352550"/>
-            <a:ext cx="10972800" cy="952500"/>
-          </a:xfrm>
-          <a:prstGeom xmlns:a="http://schemas.openxmlformats.org/drawingml/2006/main" prst="rect">
-            <a:avLst/>
-          </a:prstGeom>
-          <a:noFill xmlns:a="http://schemas.openxmlformats.org/drawingml/2006/main"/>
-          <a:ln xmlns:a="http://schemas.openxmlformats.org/drawingml/2006/main" w="0">
-            <a:noFill/>
-            <a:prstDash val="solid"/>
-          </a:ln>
-        </p:spPr>
-        <p:txBody>
-          <a:bodyPr xmlns:a="http://schemas.openxmlformats.org/drawingml/2006/main" lIns="0" tIns="0" rIns="0" bIns="0" anchor="ctr"/>
-          <a:lstStyle xmlns:a="http://schemas.openxmlformats.org/drawingml/2006/main"/>
-          <a:p xmlns:a="http://schemas.openxmlformats.org/drawingml/2006/main">
-            <a:pPr>
-              <a:defRPr sz="3750" b="1">
+            <a:off x="609600" y="990600"/>
+            <a:ext cx="10972800" cy="1000125"/>
+          </a:xfrm>
+          <a:prstGeom xmlns:a="http://schemas.openxmlformats.org/drawingml/2006/main" prst="rect">
+            <a:avLst/>
+          </a:prstGeom>
+          <a:noFill xmlns:a="http://schemas.openxmlformats.org/drawingml/2006/main"/>
+          <a:ln xmlns:a="http://schemas.openxmlformats.org/drawingml/2006/main" w="0">
+            <a:noFill/>
+            <a:prstDash val="solid"/>
+          </a:ln>
+        </p:spPr>
+        <p:txBody>
+          <a:bodyPr xmlns:a="http://schemas.openxmlformats.org/drawingml/2006/main" lIns="0" tIns="0" rIns="0" bIns="0" anchor="ctr">
+            <a:noAutofit/>
+          </a:bodyPr>
+          <a:lstStyle xmlns:a="http://schemas.openxmlformats.org/drawingml/2006/main"/>
+          <a:p xmlns:a="http://schemas.openxmlformats.org/drawingml/2006/main">
+            <a:pPr algn="l">
+              <a:buNone/>
+              <a:defRPr sz="3675" b="1">
                 <a:solidFill>
                   <a:srgbClr val="152B3A"/>
                 </a:solidFill>
-              </a:defRPr>
-            </a:pPr>
-            <a:r>
-              <a:rPr sz="3750" b="1">
+                <a:latin typeface="Calibri"/>
+                <a:ea typeface="Calibri"/>
+                <a:cs typeface="Calibri"/>
+              </a:defRPr>
+            </a:pPr>
+            <a:r>
+              <a:rPr sz="3675" b="1">
                 <a:solidFill>
                   <a:srgbClr val="152B3A"/>
                 </a:solidFill>
+                <a:latin typeface="Calibri"/>
+                <a:ea typeface="Calibri"/>
+                <a:cs typeface="Calibri"/>
               </a:rPr>
               <a:t>Check the science</a:t>
             </a:r>
@@ -2785,14 +2899,14 @@
         </p:nvSpPr>
         <p:spPr>
           <a:xfrm xmlns:a="http://schemas.openxmlformats.org/drawingml/2006/main">
-            <a:off x="609600" y="6219825"/>
+            <a:off x="609600" y="6191250"/>
             <a:ext cx="10972800" cy="9525"/>
           </a:xfrm>
           <a:prstGeom xmlns:a="http://schemas.openxmlformats.org/drawingml/2006/main" prst="rect">
             <a:avLst/>
           </a:prstGeom>
           <a:solidFill xmlns:a="http://schemas.openxmlformats.org/drawingml/2006/main">
-            <a:srgbClr val="DCE7DD"/>
+            <a:srgbClr val="CEDBD3"/>
           </a:solidFill>
           <a:ln xmlns:a="http://schemas.openxmlformats.org/drawingml/2006/main" w="0">
             <a:noFill/>
@@ -2816,34 +2930,43 @@
         </p:nvSpPr>
         <p:spPr>
           <a:xfrm xmlns:a="http://schemas.openxmlformats.org/drawingml/2006/main">
-            <a:off x="609600" y="6381750"/>
-            <a:ext cx="9525000" cy="228600"/>
-          </a:xfrm>
-          <a:prstGeom xmlns:a="http://schemas.openxmlformats.org/drawingml/2006/main" prst="rect">
-            <a:avLst/>
-          </a:prstGeom>
-          <a:noFill xmlns:a="http://schemas.openxmlformats.org/drawingml/2006/main"/>
-          <a:ln xmlns:a="http://schemas.openxmlformats.org/drawingml/2006/main" w="0">
-            <a:noFill/>
-            <a:prstDash val="solid"/>
-          </a:ln>
-        </p:spPr>
-        <p:txBody>
-          <a:bodyPr xmlns:a="http://schemas.openxmlformats.org/drawingml/2006/main" lIns="0" tIns="0" rIns="0" bIns="0" anchor="ctr"/>
-          <a:lstStyle xmlns:a="http://schemas.openxmlformats.org/drawingml/2006/main"/>
-          <a:p xmlns:a="http://schemas.openxmlformats.org/drawingml/2006/main">
-            <a:pPr>
-              <a:defRPr sz="1275" b="0">
+            <a:off x="609600" y="6419850"/>
+            <a:ext cx="9525000" cy="219075"/>
+          </a:xfrm>
+          <a:prstGeom xmlns:a="http://schemas.openxmlformats.org/drawingml/2006/main" prst="rect">
+            <a:avLst/>
+          </a:prstGeom>
+          <a:noFill xmlns:a="http://schemas.openxmlformats.org/drawingml/2006/main"/>
+          <a:ln xmlns:a="http://schemas.openxmlformats.org/drawingml/2006/main" w="0">
+            <a:noFill/>
+            <a:prstDash val="solid"/>
+          </a:ln>
+        </p:spPr>
+        <p:txBody>
+          <a:bodyPr xmlns:a="http://schemas.openxmlformats.org/drawingml/2006/main" lIns="0" tIns="0" rIns="0" bIns="0" anchor="ctr">
+            <a:noAutofit/>
+          </a:bodyPr>
+          <a:lstStyle xmlns:a="http://schemas.openxmlformats.org/drawingml/2006/main"/>
+          <a:p xmlns:a="http://schemas.openxmlformats.org/drawingml/2006/main">
+            <a:pPr algn="l">
+              <a:buNone/>
+              <a:defRPr sz="1200" b="0">
                 <a:solidFill>
                   <a:srgbClr val="50616B"/>
                 </a:solidFill>
-              </a:defRPr>
-            </a:pPr>
-            <a:r>
-              <a:rPr sz="1275" b="0">
+                <a:latin typeface="Calibri"/>
+                <a:ea typeface="Calibri"/>
+                <a:cs typeface="Calibri"/>
+              </a:defRPr>
+            </a:pPr>
+            <a:r>
+              <a:rPr sz="1200" b="0">
                 <a:solidFill>
                   <a:srgbClr val="50616B"/>
                 </a:solidFill>
+                <a:latin typeface="Calibri"/>
+                <a:ea typeface="Calibri"/>
+                <a:cs typeface="Calibri"/>
               </a:rPr>
               <a:t>AUTUMN 1  ·  WEEK 3  ·  LESSON A</a:t>
             </a:r>
@@ -2866,27 +2989,33 @@
         </p:nvSpPr>
         <p:spPr>
           <a:xfrm xmlns:a="http://schemas.openxmlformats.org/drawingml/2006/main">
-            <a:off x="11106150" y="6362700"/>
-            <a:ext cx="476250" cy="238125"/>
-          </a:xfrm>
-          <a:prstGeom xmlns:a="http://schemas.openxmlformats.org/drawingml/2006/main" prst="rect">
-            <a:avLst/>
-          </a:prstGeom>
-          <a:noFill xmlns:a="http://schemas.openxmlformats.org/drawingml/2006/main"/>
-          <a:ln xmlns:a="http://schemas.openxmlformats.org/drawingml/2006/main" w="0">
-            <a:noFill/>
-            <a:prstDash val="solid"/>
-          </a:ln>
-        </p:spPr>
-        <p:txBody>
-          <a:bodyPr xmlns:a="http://schemas.openxmlformats.org/drawingml/2006/main" lIns="0" tIns="0" rIns="0" bIns="0" anchor="ctr"/>
-          <a:lstStyle xmlns:a="http://schemas.openxmlformats.org/drawingml/2006/main"/>
-          <a:p xmlns:a="http://schemas.openxmlformats.org/drawingml/2006/main">
-            <a:pPr>
+            <a:off x="11106150" y="6400800"/>
+            <a:ext cx="476250" cy="247650"/>
+          </a:xfrm>
+          <a:prstGeom xmlns:a="http://schemas.openxmlformats.org/drawingml/2006/main" prst="rect">
+            <a:avLst/>
+          </a:prstGeom>
+          <a:noFill xmlns:a="http://schemas.openxmlformats.org/drawingml/2006/main"/>
+          <a:ln xmlns:a="http://schemas.openxmlformats.org/drawingml/2006/main" w="0">
+            <a:noFill/>
+            <a:prstDash val="solid"/>
+          </a:ln>
+        </p:spPr>
+        <p:txBody>
+          <a:bodyPr xmlns:a="http://schemas.openxmlformats.org/drawingml/2006/main" lIns="0" tIns="0" rIns="0" bIns="0" anchor="ctr">
+            <a:noAutofit/>
+          </a:bodyPr>
+          <a:lstStyle xmlns:a="http://schemas.openxmlformats.org/drawingml/2006/main"/>
+          <a:p xmlns:a="http://schemas.openxmlformats.org/drawingml/2006/main">
+            <a:pPr algn="l">
+              <a:buNone/>
               <a:defRPr sz="1350" b="1">
                 <a:solidFill>
                   <a:srgbClr val="28685E"/>
                 </a:solidFill>
+                <a:latin typeface="Calibri"/>
+                <a:ea typeface="Calibri"/>
+                <a:cs typeface="Calibri"/>
               </a:defRPr>
             </a:pPr>
             <a:r>
@@ -2894,6 +3023,9 @@
                 <a:solidFill>
                   <a:srgbClr val="28685E"/>
                 </a:solidFill>
+                <a:latin typeface="Calibri"/>
+                <a:ea typeface="Calibri"/>
+                <a:cs typeface="Calibri"/>
               </a:rPr>
               <a:t>10</a:t>
             </a:r>
@@ -2916,34 +3048,43 @@
         </p:nvSpPr>
         <p:spPr>
           <a:xfrm xmlns:a="http://schemas.openxmlformats.org/drawingml/2006/main">
-            <a:off x="609600" y="2667000"/>
-            <a:ext cx="10668000" cy="542925"/>
-          </a:xfrm>
-          <a:prstGeom xmlns:a="http://schemas.openxmlformats.org/drawingml/2006/main" prst="rect">
-            <a:avLst/>
-          </a:prstGeom>
-          <a:noFill xmlns:a="http://schemas.openxmlformats.org/drawingml/2006/main"/>
-          <a:ln xmlns:a="http://schemas.openxmlformats.org/drawingml/2006/main" w="0">
-            <a:noFill/>
-            <a:prstDash val="solid"/>
-          </a:ln>
-        </p:spPr>
-        <p:txBody>
-          <a:bodyPr xmlns:a="http://schemas.openxmlformats.org/drawingml/2006/main" lIns="0" tIns="0" rIns="0" bIns="0" anchor="ctr"/>
-          <a:lstStyle xmlns:a="http://schemas.openxmlformats.org/drawingml/2006/main"/>
-          <a:p xmlns:a="http://schemas.openxmlformats.org/drawingml/2006/main">
-            <a:pPr>
-              <a:defRPr sz="2175" b="0">
+            <a:off x="1000125" y="2333625"/>
+            <a:ext cx="10382250" cy="622935"/>
+          </a:xfrm>
+          <a:prstGeom xmlns:a="http://schemas.openxmlformats.org/drawingml/2006/main" prst="rect">
+            <a:avLst/>
+          </a:prstGeom>
+          <a:noFill xmlns:a="http://schemas.openxmlformats.org/drawingml/2006/main"/>
+          <a:ln xmlns:a="http://schemas.openxmlformats.org/drawingml/2006/main" w="0">
+            <a:noFill/>
+            <a:prstDash val="solid"/>
+          </a:ln>
+        </p:spPr>
+        <p:txBody>
+          <a:bodyPr xmlns:a="http://schemas.openxmlformats.org/drawingml/2006/main" lIns="0" tIns="0" rIns="0" bIns="0" anchor="ctr">
+            <a:noAutofit/>
+          </a:bodyPr>
+          <a:lstStyle xmlns:a="http://schemas.openxmlformats.org/drawingml/2006/main"/>
+          <a:p xmlns:a="http://schemas.openxmlformats.org/drawingml/2006/main">
+            <a:pPr algn="l">
+              <a:buNone/>
+              <a:defRPr sz="2400" b="0">
                 <a:solidFill>
                   <a:srgbClr val="152B3A"/>
                 </a:solidFill>
-              </a:defRPr>
-            </a:pPr>
-            <a:r>
-              <a:rPr sz="2175" b="0">
+                <a:latin typeface="Calibri"/>
+                <a:ea typeface="Calibri"/>
+                <a:cs typeface="Calibri"/>
+              </a:defRPr>
+            </a:pPr>
+            <a:r>
+              <a:rPr sz="2400" b="0">
                 <a:solidFill>
                   <a:srgbClr val="152B3A"/>
                 </a:solidFill>
+                <a:latin typeface="Calibri"/>
+                <a:ea typeface="Calibri"/>
+                <a:cs typeface="Calibri"/>
               </a:rPr>
               <a:t>TRUE   Sliding friction opposes sliding at the contact.</a:t>
             </a:r>
@@ -2966,34 +3107,43 @@
         </p:nvSpPr>
         <p:spPr>
           <a:xfrm xmlns:a="http://schemas.openxmlformats.org/drawingml/2006/main">
-            <a:off x="609600" y="3305175"/>
-            <a:ext cx="10668000" cy="542925"/>
-          </a:xfrm>
-          <a:prstGeom xmlns:a="http://schemas.openxmlformats.org/drawingml/2006/main" prst="rect">
-            <a:avLst/>
-          </a:prstGeom>
-          <a:noFill xmlns:a="http://schemas.openxmlformats.org/drawingml/2006/main"/>
-          <a:ln xmlns:a="http://schemas.openxmlformats.org/drawingml/2006/main" w="0">
-            <a:noFill/>
-            <a:prstDash val="solid"/>
-          </a:ln>
-        </p:spPr>
-        <p:txBody>
-          <a:bodyPr xmlns:a="http://schemas.openxmlformats.org/drawingml/2006/main" lIns="0" tIns="0" rIns="0" bIns="0" anchor="ctr"/>
-          <a:lstStyle xmlns:a="http://schemas.openxmlformats.org/drawingml/2006/main"/>
-          <a:p xmlns:a="http://schemas.openxmlformats.org/drawingml/2006/main">
-            <a:pPr>
-              <a:defRPr sz="2175" b="0">
+            <a:off x="1000125" y="3013710"/>
+            <a:ext cx="10382250" cy="622935"/>
+          </a:xfrm>
+          <a:prstGeom xmlns:a="http://schemas.openxmlformats.org/drawingml/2006/main" prst="rect">
+            <a:avLst/>
+          </a:prstGeom>
+          <a:noFill xmlns:a="http://schemas.openxmlformats.org/drawingml/2006/main"/>
+          <a:ln xmlns:a="http://schemas.openxmlformats.org/drawingml/2006/main" w="0">
+            <a:noFill/>
+            <a:prstDash val="solid"/>
+          </a:ln>
+        </p:spPr>
+        <p:txBody>
+          <a:bodyPr xmlns:a="http://schemas.openxmlformats.org/drawingml/2006/main" lIns="0" tIns="0" rIns="0" bIns="0" anchor="ctr">
+            <a:noAutofit/>
+          </a:bodyPr>
+          <a:lstStyle xmlns:a="http://schemas.openxmlformats.org/drawingml/2006/main"/>
+          <a:p xmlns:a="http://schemas.openxmlformats.org/drawingml/2006/main">
+            <a:pPr algn="l">
+              <a:buNone/>
+              <a:defRPr sz="2400" b="0">
                 <a:solidFill>
                   <a:srgbClr val="152B3A"/>
                 </a:solidFill>
-              </a:defRPr>
-            </a:pPr>
-            <a:r>
-              <a:rPr sz="2175" b="0">
+                <a:latin typeface="Calibri"/>
+                <a:ea typeface="Calibri"/>
+                <a:cs typeface="Calibri"/>
+              </a:defRPr>
+            </a:pPr>
+            <a:r>
+              <a:rPr sz="2400" b="0">
                 <a:solidFill>
                   <a:srgbClr val="152B3A"/>
                 </a:solidFill>
+                <a:latin typeface="Calibri"/>
+                <a:ea typeface="Calibri"/>
+                <a:cs typeface="Calibri"/>
               </a:rPr>
               <a:t>FALSE   Smooth surfaces can have friction too.</a:t>
             </a:r>
@@ -3016,34 +3166,43 @@
         </p:nvSpPr>
         <p:spPr>
           <a:xfrm xmlns:a="http://schemas.openxmlformats.org/drawingml/2006/main">
-            <a:off x="609600" y="3943350"/>
-            <a:ext cx="10668000" cy="542925"/>
-          </a:xfrm>
-          <a:prstGeom xmlns:a="http://schemas.openxmlformats.org/drawingml/2006/main" prst="rect">
-            <a:avLst/>
-          </a:prstGeom>
-          <a:noFill xmlns:a="http://schemas.openxmlformats.org/drawingml/2006/main"/>
-          <a:ln xmlns:a="http://schemas.openxmlformats.org/drawingml/2006/main" w="0">
-            <a:noFill/>
-            <a:prstDash val="solid"/>
-          </a:ln>
-        </p:spPr>
-        <p:txBody>
-          <a:bodyPr xmlns:a="http://schemas.openxmlformats.org/drawingml/2006/main" lIns="0" tIns="0" rIns="0" bIns="0" anchor="ctr"/>
-          <a:lstStyle xmlns:a="http://schemas.openxmlformats.org/drawingml/2006/main"/>
-          <a:p xmlns:a="http://schemas.openxmlformats.org/drawingml/2006/main">
-            <a:pPr>
-              <a:defRPr sz="2175" b="0">
+            <a:off x="1000125" y="3693795"/>
+            <a:ext cx="10382250" cy="622935"/>
+          </a:xfrm>
+          <a:prstGeom xmlns:a="http://schemas.openxmlformats.org/drawingml/2006/main" prst="rect">
+            <a:avLst/>
+          </a:prstGeom>
+          <a:noFill xmlns:a="http://schemas.openxmlformats.org/drawingml/2006/main"/>
+          <a:ln xmlns:a="http://schemas.openxmlformats.org/drawingml/2006/main" w="0">
+            <a:noFill/>
+            <a:prstDash val="solid"/>
+          </a:ln>
+        </p:spPr>
+        <p:txBody>
+          <a:bodyPr xmlns:a="http://schemas.openxmlformats.org/drawingml/2006/main" lIns="0" tIns="0" rIns="0" bIns="0" anchor="ctr">
+            <a:noAutofit/>
+          </a:bodyPr>
+          <a:lstStyle xmlns:a="http://schemas.openxmlformats.org/drawingml/2006/main"/>
+          <a:p xmlns:a="http://schemas.openxmlformats.org/drawingml/2006/main">
+            <a:pPr algn="l">
+              <a:buNone/>
+              <a:defRPr sz="2400" b="0">
                 <a:solidFill>
                   <a:srgbClr val="152B3A"/>
                 </a:solidFill>
-              </a:defRPr>
-            </a:pPr>
-            <a:r>
-              <a:rPr sz="2175" b="0">
+                <a:latin typeface="Calibri"/>
+                <a:ea typeface="Calibri"/>
+                <a:cs typeface="Calibri"/>
+              </a:defRPr>
+            </a:pPr>
+            <a:r>
+              <a:rPr sz="2400" b="0">
                 <a:solidFill>
                   <a:srgbClr val="152B3A"/>
                 </a:solidFill>
+                <a:latin typeface="Calibri"/>
+                <a:ea typeface="Calibri"/>
+                <a:cs typeface="Calibri"/>
               </a:rPr>
               <a:t>TRUE   Suitable lubrication can reduce friction.</a:t>
             </a:r>
@@ -3066,34 +3225,43 @@
         </p:nvSpPr>
         <p:spPr>
           <a:xfrm xmlns:a="http://schemas.openxmlformats.org/drawingml/2006/main">
-            <a:off x="609600" y="4581525"/>
-            <a:ext cx="10668000" cy="542925"/>
-          </a:xfrm>
-          <a:prstGeom xmlns:a="http://schemas.openxmlformats.org/drawingml/2006/main" prst="rect">
-            <a:avLst/>
-          </a:prstGeom>
-          <a:noFill xmlns:a="http://schemas.openxmlformats.org/drawingml/2006/main"/>
-          <a:ln xmlns:a="http://schemas.openxmlformats.org/drawingml/2006/main" w="0">
-            <a:noFill/>
-            <a:prstDash val="solid"/>
-          </a:ln>
-        </p:spPr>
-        <p:txBody>
-          <a:bodyPr xmlns:a="http://schemas.openxmlformats.org/drawingml/2006/main" lIns="0" tIns="0" rIns="0" bIns="0" anchor="ctr"/>
-          <a:lstStyle xmlns:a="http://schemas.openxmlformats.org/drawingml/2006/main"/>
-          <a:p xmlns:a="http://schemas.openxmlformats.org/drawingml/2006/main">
-            <a:pPr>
-              <a:defRPr sz="2175" b="0">
+            <a:off x="1000125" y="4373880"/>
+            <a:ext cx="10382250" cy="622935"/>
+          </a:xfrm>
+          <a:prstGeom xmlns:a="http://schemas.openxmlformats.org/drawingml/2006/main" prst="rect">
+            <a:avLst/>
+          </a:prstGeom>
+          <a:noFill xmlns:a="http://schemas.openxmlformats.org/drawingml/2006/main"/>
+          <a:ln xmlns:a="http://schemas.openxmlformats.org/drawingml/2006/main" w="0">
+            <a:noFill/>
+            <a:prstDash val="solid"/>
+          </a:ln>
+        </p:spPr>
+        <p:txBody>
+          <a:bodyPr xmlns:a="http://schemas.openxmlformats.org/drawingml/2006/main" lIns="0" tIns="0" rIns="0" bIns="0" anchor="ctr">
+            <a:noAutofit/>
+          </a:bodyPr>
+          <a:lstStyle xmlns:a="http://schemas.openxmlformats.org/drawingml/2006/main"/>
+          <a:p xmlns:a="http://schemas.openxmlformats.org/drawingml/2006/main">
+            <a:pPr algn="l">
+              <a:buNone/>
+              <a:defRPr sz="2400" b="0">
                 <a:solidFill>
                   <a:srgbClr val="152B3A"/>
                 </a:solidFill>
-              </a:defRPr>
-            </a:pPr>
-            <a:r>
-              <a:rPr sz="2175" b="0">
+                <a:latin typeface="Calibri"/>
+                <a:ea typeface="Calibri"/>
+                <a:cs typeface="Calibri"/>
+              </a:defRPr>
+            </a:pPr>
+            <a:r>
+              <a:rPr sz="2400" b="0">
                 <a:solidFill>
                   <a:srgbClr val="152B3A"/>
                 </a:solidFill>
+                <a:latin typeface="Calibri"/>
+                <a:ea typeface="Calibri"/>
+                <a:cs typeface="Calibri"/>
               </a:rPr>
               <a:t>TRUE   Walking normally needs grip at the ground.</a:t>
             </a:r>
@@ -3116,36 +3284,450 @@
         </p:nvSpPr>
         <p:spPr>
           <a:xfrm xmlns:a="http://schemas.openxmlformats.org/drawingml/2006/main">
-            <a:off x="609600" y="5219700"/>
-            <a:ext cx="10668000" cy="542925"/>
-          </a:xfrm>
-          <a:prstGeom xmlns:a="http://schemas.openxmlformats.org/drawingml/2006/main" prst="rect">
-            <a:avLst/>
-          </a:prstGeom>
-          <a:noFill xmlns:a="http://schemas.openxmlformats.org/drawingml/2006/main"/>
-          <a:ln xmlns:a="http://schemas.openxmlformats.org/drawingml/2006/main" w="0">
-            <a:noFill/>
-            <a:prstDash val="solid"/>
-          </a:ln>
-        </p:spPr>
-        <p:txBody>
-          <a:bodyPr xmlns:a="http://schemas.openxmlformats.org/drawingml/2006/main" lIns="0" tIns="0" rIns="0" bIns="0" anchor="ctr"/>
-          <a:lstStyle xmlns:a="http://schemas.openxmlformats.org/drawingml/2006/main"/>
-          <a:p xmlns:a="http://schemas.openxmlformats.org/drawingml/2006/main">
-            <a:pPr>
-              <a:defRPr sz="2175" b="0">
+            <a:off x="1000125" y="5053965"/>
+            <a:ext cx="10382250" cy="622935"/>
+          </a:xfrm>
+          <a:prstGeom xmlns:a="http://schemas.openxmlformats.org/drawingml/2006/main" prst="rect">
+            <a:avLst/>
+          </a:prstGeom>
+          <a:noFill xmlns:a="http://schemas.openxmlformats.org/drawingml/2006/main"/>
+          <a:ln xmlns:a="http://schemas.openxmlformats.org/drawingml/2006/main" w="0">
+            <a:noFill/>
+            <a:prstDash val="solid"/>
+          </a:ln>
+        </p:spPr>
+        <p:txBody>
+          <a:bodyPr xmlns:a="http://schemas.openxmlformats.org/drawingml/2006/main" lIns="0" tIns="0" rIns="0" bIns="0" anchor="ctr">
+            <a:noAutofit/>
+          </a:bodyPr>
+          <a:lstStyle xmlns:a="http://schemas.openxmlformats.org/drawingml/2006/main"/>
+          <a:p xmlns:a="http://schemas.openxmlformats.org/drawingml/2006/main">
+            <a:pPr algn="l">
+              <a:buNone/>
+              <a:defRPr sz="2400" b="0">
                 <a:solidFill>
                   <a:srgbClr val="152B3A"/>
                 </a:solidFill>
-              </a:defRPr>
-            </a:pPr>
-            <a:r>
-              <a:rPr sz="2175" b="0">
+                <a:latin typeface="Calibri"/>
+                <a:ea typeface="Calibri"/>
+                <a:cs typeface="Calibri"/>
+              </a:defRPr>
+            </a:pPr>
+            <a:r>
+              <a:rPr sz="2400" b="0">
                 <a:solidFill>
                   <a:srgbClr val="152B3A"/>
                 </a:solidFill>
+                <a:latin typeface="Calibri"/>
+                <a:ea typeface="Calibri"/>
+                <a:cs typeface="Calibri"/>
               </a:rPr>
               <a:t>JUDGEMENT   “Bad” depends on the job.</a:t>
+            </a:r>
+          </a:p>
+        </p:txBody>
+      </p:sp>
+      <p:sp>
+        <p:nvSpPr>
+          <p:cNvPr id="13" name="cue-0">
+            <a:extLst xmlns:a="http://schemas.openxmlformats.org/drawingml/2006/main">
+              <a:ext uri="{FF2B5EF4-FFF2-40B4-BE49-F238E27FC236}">
+                <a16:creationId xmlns:a16="http://schemas.microsoft.com/office/drawing/2014/main" id="{7FB37C7F-BD7D-4ADA-9C6A-8251B492CA78}"/>
+              </a:ext>
+            </a:extLst>
+          </p:cNvPr>
+          <p:cNvSpPr>
+            <a:spLocks xmlns:a="http://schemas.openxmlformats.org/drawingml/2006/main" noGrp="1"/>
+          </p:cNvSpPr>
+          <p:nvPr/>
+        </p:nvSpPr>
+        <p:spPr>
+          <a:xfrm xmlns:a="http://schemas.openxmlformats.org/drawingml/2006/main">
+            <a:off x="609600" y="2362200"/>
+            <a:ext cx="323850" cy="323850"/>
+          </a:xfrm>
+          <a:prstGeom xmlns:a="http://schemas.openxmlformats.org/drawingml/2006/main" prst="rect">
+            <a:avLst/>
+          </a:prstGeom>
+          <a:noFill xmlns:a="http://schemas.openxmlformats.org/drawingml/2006/main"/>
+          <a:ln xmlns:a="http://schemas.openxmlformats.org/drawingml/2006/main" w="0">
+            <a:noFill/>
+          </a:ln>
+        </p:spPr>
+        <p:txBody>
+          <a:bodyPr xmlns:a="http://schemas.openxmlformats.org/drawingml/2006/main" lIns="0" tIns="0" rIns="0" bIns="0" anchor="ctr">
+            <a:noAutofit/>
+          </a:bodyPr>
+          <a:lstStyle xmlns:a="http://schemas.openxmlformats.org/drawingml/2006/main"/>
+          <a:p xmlns:a="http://schemas.openxmlformats.org/drawingml/2006/main">
+            <a:pPr algn="l">
+              <a:defRPr sz="1350" b="1">
+                <a:solidFill>
+                  <a:srgbClr val="28685E"/>
+                </a:solidFill>
+                <a:latin typeface="Calibri"/>
+                <a:ea typeface="Calibri"/>
+                <a:cs typeface="Calibri"/>
+              </a:defRPr>
+            </a:pPr>
+            <a:r>
+              <a:rPr sz="1350" b="1">
+                <a:solidFill>
+                  <a:srgbClr val="28685E"/>
+                </a:solidFill>
+                <a:latin typeface="Calibri"/>
+                <a:ea typeface="Calibri"/>
+                <a:cs typeface="Calibri"/>
+              </a:rPr>
+              <a:t>01</a:t>
+            </a:r>
+          </a:p>
+        </p:txBody>
+      </p:sp>
+      <p:sp>
+        <p:nvSpPr>
+          <p:cNvPr id="14" name="row-rule-0">
+            <a:extLst xmlns:a="http://schemas.openxmlformats.org/drawingml/2006/main">
+              <a:ext uri="{FF2B5EF4-FFF2-40B4-BE49-F238E27FC236}">
+                <a16:creationId xmlns:a16="http://schemas.microsoft.com/office/drawing/2014/main" id="{6938109C-6CAB-4536-A17D-4174022E161D}"/>
+              </a:ext>
+            </a:extLst>
+          </p:cNvPr>
+          <p:cNvSpPr>
+            <a:spLocks xmlns:a="http://schemas.openxmlformats.org/drawingml/2006/main" noGrp="1"/>
+          </p:cNvSpPr>
+          <p:nvPr/>
+        </p:nvSpPr>
+        <p:spPr>
+          <a:xfrm xmlns:a="http://schemas.openxmlformats.org/drawingml/2006/main">
+            <a:off x="1000125" y="2966085"/>
+            <a:ext cx="10334625" cy="0"/>
+          </a:xfrm>
+          <a:prstGeom xmlns:a="http://schemas.openxmlformats.org/drawingml/2006/main" prst="line">
+            <a:avLst/>
+          </a:prstGeom>
+          <a:noFill xmlns:a="http://schemas.openxmlformats.org/drawingml/2006/main"/>
+          <a:ln xmlns:a="http://schemas.openxmlformats.org/drawingml/2006/main" w="9525">
+            <a:solidFill>
+              <a:srgbClr val="CEDBD3"/>
+            </a:solidFill>
+          </a:ln>
+        </p:spPr>
+      </p:sp>
+      <p:sp>
+        <p:nvSpPr>
+          <p:cNvPr id="15" name="cue-1">
+            <a:extLst xmlns:a="http://schemas.openxmlformats.org/drawingml/2006/main">
+              <a:ext uri="{FF2B5EF4-FFF2-40B4-BE49-F238E27FC236}">
+                <a16:creationId xmlns:a16="http://schemas.microsoft.com/office/drawing/2014/main" id="{8F572875-46A5-4535-858C-10D6B5FB7C41}"/>
+              </a:ext>
+            </a:extLst>
+          </p:cNvPr>
+          <p:cNvSpPr>
+            <a:spLocks xmlns:a="http://schemas.openxmlformats.org/drawingml/2006/main" noGrp="1"/>
+          </p:cNvSpPr>
+          <p:nvPr/>
+        </p:nvSpPr>
+        <p:spPr>
+          <a:xfrm xmlns:a="http://schemas.openxmlformats.org/drawingml/2006/main">
+            <a:off x="609600" y="3042285"/>
+            <a:ext cx="323850" cy="323850"/>
+          </a:xfrm>
+          <a:prstGeom xmlns:a="http://schemas.openxmlformats.org/drawingml/2006/main" prst="rect">
+            <a:avLst/>
+          </a:prstGeom>
+          <a:noFill xmlns:a="http://schemas.openxmlformats.org/drawingml/2006/main"/>
+          <a:ln xmlns:a="http://schemas.openxmlformats.org/drawingml/2006/main" w="0">
+            <a:noFill/>
+          </a:ln>
+        </p:spPr>
+        <p:txBody>
+          <a:bodyPr xmlns:a="http://schemas.openxmlformats.org/drawingml/2006/main" lIns="0" tIns="0" rIns="0" bIns="0" anchor="ctr">
+            <a:noAutofit/>
+          </a:bodyPr>
+          <a:lstStyle xmlns:a="http://schemas.openxmlformats.org/drawingml/2006/main"/>
+          <a:p xmlns:a="http://schemas.openxmlformats.org/drawingml/2006/main">
+            <a:pPr algn="l">
+              <a:defRPr sz="1350" b="1">
+                <a:solidFill>
+                  <a:srgbClr val="28685E"/>
+                </a:solidFill>
+                <a:latin typeface="Calibri"/>
+                <a:ea typeface="Calibri"/>
+                <a:cs typeface="Calibri"/>
+              </a:defRPr>
+            </a:pPr>
+            <a:r>
+              <a:rPr sz="1350" b="1">
+                <a:solidFill>
+                  <a:srgbClr val="28685E"/>
+                </a:solidFill>
+                <a:latin typeface="Calibri"/>
+                <a:ea typeface="Calibri"/>
+                <a:cs typeface="Calibri"/>
+              </a:rPr>
+              <a:t>02</a:t>
+            </a:r>
+          </a:p>
+        </p:txBody>
+      </p:sp>
+      <p:sp>
+        <p:nvSpPr>
+          <p:cNvPr id="16" name="row-rule-1">
+            <a:extLst xmlns:a="http://schemas.openxmlformats.org/drawingml/2006/main">
+              <a:ext uri="{FF2B5EF4-FFF2-40B4-BE49-F238E27FC236}">
+                <a16:creationId xmlns:a16="http://schemas.microsoft.com/office/drawing/2014/main" id="{076F9AD6-E2E3-4FC2-A16F-03602A983B62}"/>
+              </a:ext>
+            </a:extLst>
+          </p:cNvPr>
+          <p:cNvSpPr>
+            <a:spLocks xmlns:a="http://schemas.openxmlformats.org/drawingml/2006/main" noGrp="1"/>
+          </p:cNvSpPr>
+          <p:nvPr/>
+        </p:nvSpPr>
+        <p:spPr>
+          <a:xfrm xmlns:a="http://schemas.openxmlformats.org/drawingml/2006/main">
+            <a:off x="1000125" y="3646170"/>
+            <a:ext cx="10334625" cy="0"/>
+          </a:xfrm>
+          <a:prstGeom xmlns:a="http://schemas.openxmlformats.org/drawingml/2006/main" prst="line">
+            <a:avLst/>
+          </a:prstGeom>
+          <a:noFill xmlns:a="http://schemas.openxmlformats.org/drawingml/2006/main"/>
+          <a:ln xmlns:a="http://schemas.openxmlformats.org/drawingml/2006/main" w="9525">
+            <a:solidFill>
+              <a:srgbClr val="CEDBD3"/>
+            </a:solidFill>
+          </a:ln>
+        </p:spPr>
+      </p:sp>
+      <p:sp>
+        <p:nvSpPr>
+          <p:cNvPr id="17" name="cue-2">
+            <a:extLst xmlns:a="http://schemas.openxmlformats.org/drawingml/2006/main">
+              <a:ext uri="{FF2B5EF4-FFF2-40B4-BE49-F238E27FC236}">
+                <a16:creationId xmlns:a16="http://schemas.microsoft.com/office/drawing/2014/main" id="{CCF0792A-1411-4B4E-8893-E8DDE9DFD2D4}"/>
+              </a:ext>
+            </a:extLst>
+          </p:cNvPr>
+          <p:cNvSpPr>
+            <a:spLocks xmlns:a="http://schemas.openxmlformats.org/drawingml/2006/main" noGrp="1"/>
+          </p:cNvSpPr>
+          <p:nvPr/>
+        </p:nvSpPr>
+        <p:spPr>
+          <a:xfrm xmlns:a="http://schemas.openxmlformats.org/drawingml/2006/main">
+            <a:off x="609600" y="3722370"/>
+            <a:ext cx="323850" cy="323850"/>
+          </a:xfrm>
+          <a:prstGeom xmlns:a="http://schemas.openxmlformats.org/drawingml/2006/main" prst="rect">
+            <a:avLst/>
+          </a:prstGeom>
+          <a:noFill xmlns:a="http://schemas.openxmlformats.org/drawingml/2006/main"/>
+          <a:ln xmlns:a="http://schemas.openxmlformats.org/drawingml/2006/main" w="0">
+            <a:noFill/>
+          </a:ln>
+        </p:spPr>
+        <p:txBody>
+          <a:bodyPr xmlns:a="http://schemas.openxmlformats.org/drawingml/2006/main" lIns="0" tIns="0" rIns="0" bIns="0" anchor="ctr">
+            <a:noAutofit/>
+          </a:bodyPr>
+          <a:lstStyle xmlns:a="http://schemas.openxmlformats.org/drawingml/2006/main"/>
+          <a:p xmlns:a="http://schemas.openxmlformats.org/drawingml/2006/main">
+            <a:pPr algn="l">
+              <a:defRPr sz="1350" b="1">
+                <a:solidFill>
+                  <a:srgbClr val="28685E"/>
+                </a:solidFill>
+                <a:latin typeface="Calibri"/>
+                <a:ea typeface="Calibri"/>
+                <a:cs typeface="Calibri"/>
+              </a:defRPr>
+            </a:pPr>
+            <a:r>
+              <a:rPr sz="1350" b="1">
+                <a:solidFill>
+                  <a:srgbClr val="28685E"/>
+                </a:solidFill>
+                <a:latin typeface="Calibri"/>
+                <a:ea typeface="Calibri"/>
+                <a:cs typeface="Calibri"/>
+              </a:rPr>
+              <a:t>03</a:t>
+            </a:r>
+          </a:p>
+        </p:txBody>
+      </p:sp>
+      <p:sp>
+        <p:nvSpPr>
+          <p:cNvPr id="18" name="row-rule-2">
+            <a:extLst xmlns:a="http://schemas.openxmlformats.org/drawingml/2006/main">
+              <a:ext uri="{FF2B5EF4-FFF2-40B4-BE49-F238E27FC236}">
+                <a16:creationId xmlns:a16="http://schemas.microsoft.com/office/drawing/2014/main" id="{60C638AF-52AA-4460-84D0-542DCC474843}"/>
+              </a:ext>
+            </a:extLst>
+          </p:cNvPr>
+          <p:cNvSpPr>
+            <a:spLocks xmlns:a="http://schemas.openxmlformats.org/drawingml/2006/main" noGrp="1"/>
+          </p:cNvSpPr>
+          <p:nvPr/>
+        </p:nvSpPr>
+        <p:spPr>
+          <a:xfrm xmlns:a="http://schemas.openxmlformats.org/drawingml/2006/main">
+            <a:off x="1000125" y="4326255"/>
+            <a:ext cx="10334625" cy="0"/>
+          </a:xfrm>
+          <a:prstGeom xmlns:a="http://schemas.openxmlformats.org/drawingml/2006/main" prst="line">
+            <a:avLst/>
+          </a:prstGeom>
+          <a:noFill xmlns:a="http://schemas.openxmlformats.org/drawingml/2006/main"/>
+          <a:ln xmlns:a="http://schemas.openxmlformats.org/drawingml/2006/main" w="9525">
+            <a:solidFill>
+              <a:srgbClr val="CEDBD3"/>
+            </a:solidFill>
+          </a:ln>
+        </p:spPr>
+      </p:sp>
+      <p:sp>
+        <p:nvSpPr>
+          <p:cNvPr id="19" name="cue-3">
+            <a:extLst xmlns:a="http://schemas.openxmlformats.org/drawingml/2006/main">
+              <a:ext uri="{FF2B5EF4-FFF2-40B4-BE49-F238E27FC236}">
+                <a16:creationId xmlns:a16="http://schemas.microsoft.com/office/drawing/2014/main" id="{22146FBA-4D89-456C-ADED-9691BBC99AFA}"/>
+              </a:ext>
+            </a:extLst>
+          </p:cNvPr>
+          <p:cNvSpPr>
+            <a:spLocks xmlns:a="http://schemas.openxmlformats.org/drawingml/2006/main" noGrp="1"/>
+          </p:cNvSpPr>
+          <p:nvPr/>
+        </p:nvSpPr>
+        <p:spPr>
+          <a:xfrm xmlns:a="http://schemas.openxmlformats.org/drawingml/2006/main">
+            <a:off x="609600" y="4402455"/>
+            <a:ext cx="323850" cy="323850"/>
+          </a:xfrm>
+          <a:prstGeom xmlns:a="http://schemas.openxmlformats.org/drawingml/2006/main" prst="rect">
+            <a:avLst/>
+          </a:prstGeom>
+          <a:noFill xmlns:a="http://schemas.openxmlformats.org/drawingml/2006/main"/>
+          <a:ln xmlns:a="http://schemas.openxmlformats.org/drawingml/2006/main" w="0">
+            <a:noFill/>
+          </a:ln>
+        </p:spPr>
+        <p:txBody>
+          <a:bodyPr xmlns:a="http://schemas.openxmlformats.org/drawingml/2006/main" lIns="0" tIns="0" rIns="0" bIns="0" anchor="ctr">
+            <a:noAutofit/>
+          </a:bodyPr>
+          <a:lstStyle xmlns:a="http://schemas.openxmlformats.org/drawingml/2006/main"/>
+          <a:p xmlns:a="http://schemas.openxmlformats.org/drawingml/2006/main">
+            <a:pPr algn="l">
+              <a:defRPr sz="1350" b="1">
+                <a:solidFill>
+                  <a:srgbClr val="28685E"/>
+                </a:solidFill>
+                <a:latin typeface="Calibri"/>
+                <a:ea typeface="Calibri"/>
+                <a:cs typeface="Calibri"/>
+              </a:defRPr>
+            </a:pPr>
+            <a:r>
+              <a:rPr sz="1350" b="1">
+                <a:solidFill>
+                  <a:srgbClr val="28685E"/>
+                </a:solidFill>
+                <a:latin typeface="Calibri"/>
+                <a:ea typeface="Calibri"/>
+                <a:cs typeface="Calibri"/>
+              </a:rPr>
+              <a:t>04</a:t>
+            </a:r>
+          </a:p>
+        </p:txBody>
+      </p:sp>
+      <p:sp>
+        <p:nvSpPr>
+          <p:cNvPr id="20" name="row-rule-3">
+            <a:extLst xmlns:a="http://schemas.openxmlformats.org/drawingml/2006/main">
+              <a:ext uri="{FF2B5EF4-FFF2-40B4-BE49-F238E27FC236}">
+                <a16:creationId xmlns:a16="http://schemas.microsoft.com/office/drawing/2014/main" id="{E3504D6F-5BA5-41F4-9819-F267F7D9C1AF}"/>
+              </a:ext>
+            </a:extLst>
+          </p:cNvPr>
+          <p:cNvSpPr>
+            <a:spLocks xmlns:a="http://schemas.openxmlformats.org/drawingml/2006/main" noGrp="1"/>
+          </p:cNvSpPr>
+          <p:nvPr/>
+        </p:nvSpPr>
+        <p:spPr>
+          <a:xfrm xmlns:a="http://schemas.openxmlformats.org/drawingml/2006/main">
+            <a:off x="1000125" y="5006340"/>
+            <a:ext cx="10334625" cy="0"/>
+          </a:xfrm>
+          <a:prstGeom xmlns:a="http://schemas.openxmlformats.org/drawingml/2006/main" prst="line">
+            <a:avLst/>
+          </a:prstGeom>
+          <a:noFill xmlns:a="http://schemas.openxmlformats.org/drawingml/2006/main"/>
+          <a:ln xmlns:a="http://schemas.openxmlformats.org/drawingml/2006/main" w="9525">
+            <a:solidFill>
+              <a:srgbClr val="CEDBD3"/>
+            </a:solidFill>
+          </a:ln>
+        </p:spPr>
+      </p:sp>
+      <p:sp>
+        <p:nvSpPr>
+          <p:cNvPr id="21" name="cue-4">
+            <a:extLst xmlns:a="http://schemas.openxmlformats.org/drawingml/2006/main">
+              <a:ext uri="{FF2B5EF4-FFF2-40B4-BE49-F238E27FC236}">
+                <a16:creationId xmlns:a16="http://schemas.microsoft.com/office/drawing/2014/main" id="{2C128A5B-7398-43C1-A3A9-3E79865FF0DA}"/>
+              </a:ext>
+            </a:extLst>
+          </p:cNvPr>
+          <p:cNvSpPr>
+            <a:spLocks xmlns:a="http://schemas.openxmlformats.org/drawingml/2006/main" noGrp="1"/>
+          </p:cNvSpPr>
+          <p:nvPr/>
+        </p:nvSpPr>
+        <p:spPr>
+          <a:xfrm xmlns:a="http://schemas.openxmlformats.org/drawingml/2006/main">
+            <a:off x="609600" y="5082540"/>
+            <a:ext cx="323850" cy="323850"/>
+          </a:xfrm>
+          <a:prstGeom xmlns:a="http://schemas.openxmlformats.org/drawingml/2006/main" prst="rect">
+            <a:avLst/>
+          </a:prstGeom>
+          <a:noFill xmlns:a="http://schemas.openxmlformats.org/drawingml/2006/main"/>
+          <a:ln xmlns:a="http://schemas.openxmlformats.org/drawingml/2006/main" w="0">
+            <a:noFill/>
+          </a:ln>
+        </p:spPr>
+        <p:txBody>
+          <a:bodyPr xmlns:a="http://schemas.openxmlformats.org/drawingml/2006/main" lIns="0" tIns="0" rIns="0" bIns="0" anchor="ctr">
+            <a:noAutofit/>
+          </a:bodyPr>
+          <a:lstStyle xmlns:a="http://schemas.openxmlformats.org/drawingml/2006/main"/>
+          <a:p xmlns:a="http://schemas.openxmlformats.org/drawingml/2006/main">
+            <a:pPr algn="l">
+              <a:defRPr sz="1350" b="1">
+                <a:solidFill>
+                  <a:srgbClr val="28685E"/>
+                </a:solidFill>
+                <a:latin typeface="Calibri"/>
+                <a:ea typeface="Calibri"/>
+                <a:cs typeface="Calibri"/>
+              </a:defRPr>
+            </a:pPr>
+            <a:r>
+              <a:rPr sz="1350" b="1">
+                <a:solidFill>
+                  <a:srgbClr val="28685E"/>
+                </a:solidFill>
+                <a:latin typeface="Calibri"/>
+                <a:ea typeface="Calibri"/>
+                <a:cs typeface="Calibri"/>
+              </a:rPr>
+              <a:t>05</a:t>
             </a:r>
           </a:p>
         </p:txBody>
@@ -3166,7 +3748,7 @@
     <p:bg>
       <p:bgPr>
         <a:solidFill xmlns:a="http://schemas.openxmlformats.org/drawingml/2006/main">
-          <a:srgbClr val="F5F1E8"/>
+          <a:srgbClr val="FAF9F5"/>
         </a:solidFill>
       </p:bgPr>
     </p:bg>
@@ -3195,8 +3777,8 @@
         </p:nvSpPr>
         <p:spPr>
           <a:xfrm xmlns:a="http://schemas.openxmlformats.org/drawingml/2006/main">
-            <a:off x="609600" y="552450"/>
-            <a:ext cx="781050" cy="57150"/>
+            <a:off x="609600" y="733425"/>
+            <a:ext cx="781050" cy="38100"/>
           </a:xfrm>
           <a:prstGeom xmlns:a="http://schemas.openxmlformats.org/drawingml/2006/main" prst="rect">
             <a:avLst/>
@@ -3226,34 +3808,43 @@
         </p:nvSpPr>
         <p:spPr>
           <a:xfrm xmlns:a="http://schemas.openxmlformats.org/drawingml/2006/main">
-            <a:off x="609600" y="762000"/>
-            <a:ext cx="7143750" cy="285750"/>
-          </a:xfrm>
-          <a:prstGeom xmlns:a="http://schemas.openxmlformats.org/drawingml/2006/main" prst="rect">
-            <a:avLst/>
-          </a:prstGeom>
-          <a:noFill xmlns:a="http://schemas.openxmlformats.org/drawingml/2006/main"/>
-          <a:ln xmlns:a="http://schemas.openxmlformats.org/drawingml/2006/main" w="0">
-            <a:noFill/>
-            <a:prstDash val="solid"/>
-          </a:ln>
-        </p:spPr>
-        <p:txBody>
-          <a:bodyPr xmlns:a="http://schemas.openxmlformats.org/drawingml/2006/main" lIns="0" tIns="0" rIns="0" bIns="0" anchor="ctr"/>
-          <a:lstStyle xmlns:a="http://schemas.openxmlformats.org/drawingml/2006/main"/>
-          <a:p xmlns:a="http://schemas.openxmlformats.org/drawingml/2006/main">
-            <a:pPr>
-              <a:defRPr sz="1500" b="1">
+            <a:off x="609600" y="342900"/>
+            <a:ext cx="9334500" cy="304800"/>
+          </a:xfrm>
+          <a:prstGeom xmlns:a="http://schemas.openxmlformats.org/drawingml/2006/main" prst="rect">
+            <a:avLst/>
+          </a:prstGeom>
+          <a:noFill xmlns:a="http://schemas.openxmlformats.org/drawingml/2006/main"/>
+          <a:ln xmlns:a="http://schemas.openxmlformats.org/drawingml/2006/main" w="0">
+            <a:noFill/>
+            <a:prstDash val="solid"/>
+          </a:ln>
+        </p:spPr>
+        <p:txBody>
+          <a:bodyPr xmlns:a="http://schemas.openxmlformats.org/drawingml/2006/main" lIns="0" tIns="0" rIns="0" bIns="0" anchor="ctr">
+            <a:noAutofit/>
+          </a:bodyPr>
+          <a:lstStyle xmlns:a="http://schemas.openxmlformats.org/drawingml/2006/main"/>
+          <a:p xmlns:a="http://schemas.openxmlformats.org/drawingml/2006/main">
+            <a:pPr algn="l">
+              <a:buNone/>
+              <a:defRPr sz="1350" b="1">
                 <a:solidFill>
                   <a:srgbClr val="28685E"/>
                 </a:solidFill>
-              </a:defRPr>
-            </a:pPr>
-            <a:r>
-              <a:rPr sz="1500" b="1">
+                <a:latin typeface="Calibri"/>
+                <a:ea typeface="Calibri"/>
+                <a:cs typeface="Calibri"/>
+              </a:defRPr>
+            </a:pPr>
+            <a:r>
+              <a:rPr sz="1350" b="1">
                 <a:solidFill>
                   <a:srgbClr val="28685E"/>
                 </a:solidFill>
+                <a:latin typeface="Calibri"/>
+                <a:ea typeface="Calibri"/>
+                <a:cs typeface="Calibri"/>
               </a:rPr>
               <a:t>MADE BY MATT  /  GROW SCIENCE</a:t>
             </a:r>
@@ -3276,34 +3867,43 @@
         </p:nvSpPr>
         <p:spPr>
           <a:xfrm xmlns:a="http://schemas.openxmlformats.org/drawingml/2006/main">
-            <a:off x="609600" y="1352550"/>
-            <a:ext cx="10972800" cy="952500"/>
-          </a:xfrm>
-          <a:prstGeom xmlns:a="http://schemas.openxmlformats.org/drawingml/2006/main" prst="rect">
-            <a:avLst/>
-          </a:prstGeom>
-          <a:noFill xmlns:a="http://schemas.openxmlformats.org/drawingml/2006/main"/>
-          <a:ln xmlns:a="http://schemas.openxmlformats.org/drawingml/2006/main" w="0">
-            <a:noFill/>
-            <a:prstDash val="solid"/>
-          </a:ln>
-        </p:spPr>
-        <p:txBody>
-          <a:bodyPr xmlns:a="http://schemas.openxmlformats.org/drawingml/2006/main" lIns="0" tIns="0" rIns="0" bIns="0" anchor="ctr"/>
-          <a:lstStyle xmlns:a="http://schemas.openxmlformats.org/drawingml/2006/main"/>
-          <a:p xmlns:a="http://schemas.openxmlformats.org/drawingml/2006/main">
-            <a:pPr>
-              <a:defRPr sz="3750" b="1">
+            <a:off x="609600" y="990600"/>
+            <a:ext cx="10972800" cy="1000125"/>
+          </a:xfrm>
+          <a:prstGeom xmlns:a="http://schemas.openxmlformats.org/drawingml/2006/main" prst="rect">
+            <a:avLst/>
+          </a:prstGeom>
+          <a:noFill xmlns:a="http://schemas.openxmlformats.org/drawingml/2006/main"/>
+          <a:ln xmlns:a="http://schemas.openxmlformats.org/drawingml/2006/main" w="0">
+            <a:noFill/>
+            <a:prstDash val="solid"/>
+          </a:ln>
+        </p:spPr>
+        <p:txBody>
+          <a:bodyPr xmlns:a="http://schemas.openxmlformats.org/drawingml/2006/main" lIns="0" tIns="0" rIns="0" bIns="0" anchor="ctr">
+            <a:noAutofit/>
+          </a:bodyPr>
+          <a:lstStyle xmlns:a="http://schemas.openxmlformats.org/drawingml/2006/main"/>
+          <a:p xmlns:a="http://schemas.openxmlformats.org/drawingml/2006/main">
+            <a:pPr algn="l">
+              <a:buNone/>
+              <a:defRPr sz="3675" b="1">
                 <a:solidFill>
                   <a:srgbClr val="152B3A"/>
                 </a:solidFill>
-              </a:defRPr>
-            </a:pPr>
-            <a:r>
-              <a:rPr sz="3750" b="1">
+                <a:latin typeface="Calibri"/>
+                <a:ea typeface="Calibri"/>
+                <a:cs typeface="Calibri"/>
+              </a:defRPr>
+            </a:pPr>
+            <a:r>
+              <a:rPr sz="3675" b="1">
                 <a:solidFill>
                   <a:srgbClr val="152B3A"/>
                 </a:solidFill>
+                <a:latin typeface="Calibri"/>
+                <a:ea typeface="Calibri"/>
+                <a:cs typeface="Calibri"/>
               </a:rPr>
               <a:t>Build a complete explanation</a:t>
             </a:r>
@@ -3326,14 +3926,14 @@
         </p:nvSpPr>
         <p:spPr>
           <a:xfrm xmlns:a="http://schemas.openxmlformats.org/drawingml/2006/main">
-            <a:off x="609600" y="6219825"/>
+            <a:off x="609600" y="6191250"/>
             <a:ext cx="10972800" cy="9525"/>
           </a:xfrm>
           <a:prstGeom xmlns:a="http://schemas.openxmlformats.org/drawingml/2006/main" prst="rect">
             <a:avLst/>
           </a:prstGeom>
           <a:solidFill xmlns:a="http://schemas.openxmlformats.org/drawingml/2006/main">
-            <a:srgbClr val="DCE7DD"/>
+            <a:srgbClr val="CEDBD3"/>
           </a:solidFill>
           <a:ln xmlns:a="http://schemas.openxmlformats.org/drawingml/2006/main" w="0">
             <a:noFill/>
@@ -3357,34 +3957,43 @@
         </p:nvSpPr>
         <p:spPr>
           <a:xfrm xmlns:a="http://schemas.openxmlformats.org/drawingml/2006/main">
-            <a:off x="609600" y="6381750"/>
-            <a:ext cx="9525000" cy="228600"/>
-          </a:xfrm>
-          <a:prstGeom xmlns:a="http://schemas.openxmlformats.org/drawingml/2006/main" prst="rect">
-            <a:avLst/>
-          </a:prstGeom>
-          <a:noFill xmlns:a="http://schemas.openxmlformats.org/drawingml/2006/main"/>
-          <a:ln xmlns:a="http://schemas.openxmlformats.org/drawingml/2006/main" w="0">
-            <a:noFill/>
-            <a:prstDash val="solid"/>
-          </a:ln>
-        </p:spPr>
-        <p:txBody>
-          <a:bodyPr xmlns:a="http://schemas.openxmlformats.org/drawingml/2006/main" lIns="0" tIns="0" rIns="0" bIns="0" anchor="ctr"/>
-          <a:lstStyle xmlns:a="http://schemas.openxmlformats.org/drawingml/2006/main"/>
-          <a:p xmlns:a="http://schemas.openxmlformats.org/drawingml/2006/main">
-            <a:pPr>
-              <a:defRPr sz="1275" b="0">
+            <a:off x="609600" y="6419850"/>
+            <a:ext cx="9525000" cy="219075"/>
+          </a:xfrm>
+          <a:prstGeom xmlns:a="http://schemas.openxmlformats.org/drawingml/2006/main" prst="rect">
+            <a:avLst/>
+          </a:prstGeom>
+          <a:noFill xmlns:a="http://schemas.openxmlformats.org/drawingml/2006/main"/>
+          <a:ln xmlns:a="http://schemas.openxmlformats.org/drawingml/2006/main" w="0">
+            <a:noFill/>
+            <a:prstDash val="solid"/>
+          </a:ln>
+        </p:spPr>
+        <p:txBody>
+          <a:bodyPr xmlns:a="http://schemas.openxmlformats.org/drawingml/2006/main" lIns="0" tIns="0" rIns="0" bIns="0" anchor="ctr">
+            <a:noAutofit/>
+          </a:bodyPr>
+          <a:lstStyle xmlns:a="http://schemas.openxmlformats.org/drawingml/2006/main"/>
+          <a:p xmlns:a="http://schemas.openxmlformats.org/drawingml/2006/main">
+            <a:pPr algn="l">
+              <a:buNone/>
+              <a:defRPr sz="1200" b="0">
                 <a:solidFill>
                   <a:srgbClr val="50616B"/>
                 </a:solidFill>
-              </a:defRPr>
-            </a:pPr>
-            <a:r>
-              <a:rPr sz="1275" b="0">
+                <a:latin typeface="Calibri"/>
+                <a:ea typeface="Calibri"/>
+                <a:cs typeface="Calibri"/>
+              </a:defRPr>
+            </a:pPr>
+            <a:r>
+              <a:rPr sz="1200" b="0">
                 <a:solidFill>
                   <a:srgbClr val="50616B"/>
                 </a:solidFill>
+                <a:latin typeface="Calibri"/>
+                <a:ea typeface="Calibri"/>
+                <a:cs typeface="Calibri"/>
               </a:rPr>
               <a:t>AUTUMN 1  ·  WEEK 3  ·  LESSON A</a:t>
             </a:r>
@@ -3407,27 +4016,33 @@
         </p:nvSpPr>
         <p:spPr>
           <a:xfrm xmlns:a="http://schemas.openxmlformats.org/drawingml/2006/main">
-            <a:off x="11106150" y="6362700"/>
-            <a:ext cx="476250" cy="238125"/>
-          </a:xfrm>
-          <a:prstGeom xmlns:a="http://schemas.openxmlformats.org/drawingml/2006/main" prst="rect">
-            <a:avLst/>
-          </a:prstGeom>
-          <a:noFill xmlns:a="http://schemas.openxmlformats.org/drawingml/2006/main"/>
-          <a:ln xmlns:a="http://schemas.openxmlformats.org/drawingml/2006/main" w="0">
-            <a:noFill/>
-            <a:prstDash val="solid"/>
-          </a:ln>
-        </p:spPr>
-        <p:txBody>
-          <a:bodyPr xmlns:a="http://schemas.openxmlformats.org/drawingml/2006/main" lIns="0" tIns="0" rIns="0" bIns="0" anchor="ctr"/>
-          <a:lstStyle xmlns:a="http://schemas.openxmlformats.org/drawingml/2006/main"/>
-          <a:p xmlns:a="http://schemas.openxmlformats.org/drawingml/2006/main">
-            <a:pPr>
+            <a:off x="11106150" y="6400800"/>
+            <a:ext cx="476250" cy="247650"/>
+          </a:xfrm>
+          <a:prstGeom xmlns:a="http://schemas.openxmlformats.org/drawingml/2006/main" prst="rect">
+            <a:avLst/>
+          </a:prstGeom>
+          <a:noFill xmlns:a="http://schemas.openxmlformats.org/drawingml/2006/main"/>
+          <a:ln xmlns:a="http://schemas.openxmlformats.org/drawingml/2006/main" w="0">
+            <a:noFill/>
+            <a:prstDash val="solid"/>
+          </a:ln>
+        </p:spPr>
+        <p:txBody>
+          <a:bodyPr xmlns:a="http://schemas.openxmlformats.org/drawingml/2006/main" lIns="0" tIns="0" rIns="0" bIns="0" anchor="ctr">
+            <a:noAutofit/>
+          </a:bodyPr>
+          <a:lstStyle xmlns:a="http://schemas.openxmlformats.org/drawingml/2006/main"/>
+          <a:p xmlns:a="http://schemas.openxmlformats.org/drawingml/2006/main">
+            <a:pPr algn="l">
+              <a:buNone/>
               <a:defRPr sz="1350" b="1">
                 <a:solidFill>
                   <a:srgbClr val="28685E"/>
                 </a:solidFill>
+                <a:latin typeface="Calibri"/>
+                <a:ea typeface="Calibri"/>
+                <a:cs typeface="Calibri"/>
               </a:defRPr>
             </a:pPr>
             <a:r>
@@ -3435,6 +4050,9 @@
                 <a:solidFill>
                   <a:srgbClr val="28685E"/>
                 </a:solidFill>
+                <a:latin typeface="Calibri"/>
+                <a:ea typeface="Calibri"/>
+                <a:cs typeface="Calibri"/>
               </a:rPr>
               <a:t>11</a:t>
             </a:r>
@@ -3457,34 +4075,43 @@
         </p:nvSpPr>
         <p:spPr>
           <a:xfrm xmlns:a="http://schemas.openxmlformats.org/drawingml/2006/main">
-            <a:off x="609600" y="2714625"/>
-            <a:ext cx="10715625" cy="1285875"/>
-          </a:xfrm>
-          <a:prstGeom xmlns:a="http://schemas.openxmlformats.org/drawingml/2006/main" prst="rect">
-            <a:avLst/>
-          </a:prstGeom>
-          <a:noFill xmlns:a="http://schemas.openxmlformats.org/drawingml/2006/main"/>
-          <a:ln xmlns:a="http://schemas.openxmlformats.org/drawingml/2006/main" w="0">
-            <a:noFill/>
-            <a:prstDash val="solid"/>
-          </a:ln>
-        </p:spPr>
-        <p:txBody>
-          <a:bodyPr xmlns:a="http://schemas.openxmlformats.org/drawingml/2006/main" lIns="0" tIns="0" rIns="0" bIns="0" anchor="ctr"/>
-          <a:lstStyle xmlns:a="http://schemas.openxmlformats.org/drawingml/2006/main"/>
-          <a:p xmlns:a="http://schemas.openxmlformats.org/drawingml/2006/main">
-            <a:pPr>
-              <a:defRPr sz="2850" b="1">
+            <a:off x="609600" y="2381250"/>
+            <a:ext cx="5238750" cy="2000250"/>
+          </a:xfrm>
+          <a:prstGeom xmlns:a="http://schemas.openxmlformats.org/drawingml/2006/main" prst="rect">
+            <a:avLst/>
+          </a:prstGeom>
+          <a:noFill xmlns:a="http://schemas.openxmlformats.org/drawingml/2006/main"/>
+          <a:ln xmlns:a="http://schemas.openxmlformats.org/drawingml/2006/main" w="0">
+            <a:noFill/>
+            <a:prstDash val="solid"/>
+          </a:ln>
+        </p:spPr>
+        <p:txBody>
+          <a:bodyPr xmlns:a="http://schemas.openxmlformats.org/drawingml/2006/main" lIns="0" tIns="0" rIns="0" bIns="0" anchor="ctr">
+            <a:noAutofit/>
+          </a:bodyPr>
+          <a:lstStyle xmlns:a="http://schemas.openxmlformats.org/drawingml/2006/main"/>
+          <a:p xmlns:a="http://schemas.openxmlformats.org/drawingml/2006/main">
+            <a:pPr algn="l">
+              <a:buNone/>
+              <a:defRPr sz="2625" b="1">
                 <a:solidFill>
                   <a:srgbClr val="28685E"/>
                 </a:solidFill>
-              </a:defRPr>
-            </a:pPr>
-            <a:r>
-              <a:rPr sz="2850" b="1">
+                <a:latin typeface="Calibri"/>
+                <a:ea typeface="Calibri"/>
+                <a:cs typeface="Calibri"/>
+              </a:defRPr>
+            </a:pPr>
+            <a:r>
+              <a:rPr sz="2625" b="1">
                 <a:solidFill>
                   <a:srgbClr val="28685E"/>
                 </a:solidFill>
+                <a:latin typeface="Calibri"/>
+                <a:ea typeface="Calibri"/>
+                <a:cs typeface="Calibri"/>
               </a:rPr>
               <a:t>Friction is helpful at a bike brake: it transfers movement energy to heat and slows the wheel.</a:t>
             </a:r>
@@ -3507,36 +4134,249 @@
         </p:nvSpPr>
         <p:spPr>
           <a:xfrm xmlns:a="http://schemas.openxmlformats.org/drawingml/2006/main">
-            <a:off x="609600" y="4362450"/>
-            <a:ext cx="10715625" cy="1285875"/>
-          </a:xfrm>
-          <a:prstGeom xmlns:a="http://schemas.openxmlformats.org/drawingml/2006/main" prst="rect">
-            <a:avLst/>
-          </a:prstGeom>
-          <a:noFill xmlns:a="http://schemas.openxmlformats.org/drawingml/2006/main"/>
-          <a:ln xmlns:a="http://schemas.openxmlformats.org/drawingml/2006/main" w="0">
-            <a:noFill/>
-            <a:prstDash val="solid"/>
-          </a:ln>
-        </p:spPr>
-        <p:txBody>
-          <a:bodyPr xmlns:a="http://schemas.openxmlformats.org/drawingml/2006/main" lIns="0" tIns="0" rIns="0" bIns="0" anchor="ctr"/>
-          <a:lstStyle xmlns:a="http://schemas.openxmlformats.org/drawingml/2006/main"/>
-          <a:p xmlns:a="http://schemas.openxmlformats.org/drawingml/2006/main">
-            <a:pPr>
-              <a:defRPr sz="2850" b="0">
+            <a:off x="609600" y="4476750"/>
+            <a:ext cx="5238750" cy="1447800"/>
+          </a:xfrm>
+          <a:prstGeom xmlns:a="http://schemas.openxmlformats.org/drawingml/2006/main" prst="rect">
+            <a:avLst/>
+          </a:prstGeom>
+          <a:noFill xmlns:a="http://schemas.openxmlformats.org/drawingml/2006/main"/>
+          <a:ln xmlns:a="http://schemas.openxmlformats.org/drawingml/2006/main" w="0">
+            <a:noFill/>
+            <a:prstDash val="solid"/>
+          </a:ln>
+        </p:spPr>
+        <p:txBody>
+          <a:bodyPr xmlns:a="http://schemas.openxmlformats.org/drawingml/2006/main" lIns="0" tIns="0" rIns="0" bIns="0" anchor="ctr">
+            <a:noAutofit/>
+          </a:bodyPr>
+          <a:lstStyle xmlns:a="http://schemas.openxmlformats.org/drawingml/2006/main"/>
+          <a:p xmlns:a="http://schemas.openxmlformats.org/drawingml/2006/main">
+            <a:pPr algn="l">
+              <a:buNone/>
+              <a:defRPr sz="2400" b="0">
                 <a:solidFill>
                   <a:srgbClr val="152B3A"/>
                 </a:solidFill>
-              </a:defRPr>
-            </a:pPr>
-            <a:r>
-              <a:rPr sz="2850" b="0">
+                <a:latin typeface="Calibri"/>
+                <a:ea typeface="Calibri"/>
+                <a:cs typeface="Calibri"/>
+              </a:defRPr>
+            </a:pPr>
+            <a:r>
+              <a:rPr sz="2400" b="0">
                 <a:solidFill>
                   <a:srgbClr val="152B3A"/>
                 </a:solidFill>
+                <a:latin typeface="Calibri"/>
+                <a:ea typeface="Calibri"/>
+                <a:cs typeface="Calibri"/>
               </a:rPr>
               <a:t>It can be unhelpful between moving engine parts because rubbing heats and wears them.</a:t>
+            </a:r>
+          </a:p>
+        </p:txBody>
+      </p:sp>
+      <p:sp>
+        <p:nvSpPr>
+          <p:cNvPr id="10" name="energy-motion">
+            <a:extLst xmlns:a="http://schemas.openxmlformats.org/drawingml/2006/main">
+              <a:ext uri="{FF2B5EF4-FFF2-40B4-BE49-F238E27FC236}">
+                <a16:creationId xmlns:a16="http://schemas.microsoft.com/office/drawing/2014/main" id="{75FCF2ED-E6B4-4B02-8F04-40FBADD1B735}"/>
+              </a:ext>
+            </a:extLst>
+          </p:cNvPr>
+          <p:cNvSpPr>
+            <a:spLocks xmlns:a="http://schemas.openxmlformats.org/drawingml/2006/main" noGrp="1"/>
+          </p:cNvSpPr>
+          <p:nvPr/>
+        </p:nvSpPr>
+        <p:spPr>
+          <a:xfrm xmlns:a="http://schemas.openxmlformats.org/drawingml/2006/main">
+            <a:off x="7000875" y="2714625"/>
+            <a:ext cx="4171950" cy="952500"/>
+          </a:xfrm>
+          <a:prstGeom xmlns:a="http://schemas.openxmlformats.org/drawingml/2006/main" prst="rect">
+            <a:avLst/>
+          </a:prstGeom>
+          <a:solidFill xmlns:a="http://schemas.openxmlformats.org/drawingml/2006/main">
+            <a:srgbClr val="E7EFE9"/>
+          </a:solidFill>
+          <a:ln xmlns:a="http://schemas.openxmlformats.org/drawingml/2006/main" w="0">
+            <a:noFill/>
+          </a:ln>
+        </p:spPr>
+      </p:sp>
+      <p:sp>
+        <p:nvSpPr>
+          <p:cNvPr id="11" name="energy-motion-label">
+            <a:extLst xmlns:a="http://schemas.openxmlformats.org/drawingml/2006/main">
+              <a:ext uri="{FF2B5EF4-FFF2-40B4-BE49-F238E27FC236}">
+                <a16:creationId xmlns:a16="http://schemas.microsoft.com/office/drawing/2014/main" id="{5657A987-AB3F-4FB1-8ED9-FCC783153B7C}"/>
+              </a:ext>
+            </a:extLst>
+          </p:cNvPr>
+          <p:cNvSpPr>
+            <a:spLocks xmlns:a="http://schemas.openxmlformats.org/drawingml/2006/main" noGrp="1"/>
+          </p:cNvSpPr>
+          <p:nvPr/>
+        </p:nvSpPr>
+        <p:spPr>
+          <a:xfrm xmlns:a="http://schemas.openxmlformats.org/drawingml/2006/main">
+            <a:off x="7191375" y="2905125"/>
+            <a:ext cx="3790950" cy="571500"/>
+          </a:xfrm>
+          <a:prstGeom xmlns:a="http://schemas.openxmlformats.org/drawingml/2006/main" prst="rect">
+            <a:avLst/>
+          </a:prstGeom>
+          <a:noFill xmlns:a="http://schemas.openxmlformats.org/drawingml/2006/main"/>
+          <a:ln xmlns:a="http://schemas.openxmlformats.org/drawingml/2006/main" w="0">
+            <a:noFill/>
+          </a:ln>
+        </p:spPr>
+        <p:txBody>
+          <a:bodyPr xmlns:a="http://schemas.openxmlformats.org/drawingml/2006/main" lIns="0" tIns="0" rIns="0" bIns="0" anchor="ctr">
+            <a:noAutofit/>
+          </a:bodyPr>
+          <a:lstStyle xmlns:a="http://schemas.openxmlformats.org/drawingml/2006/main"/>
+          <a:p xmlns:a="http://schemas.openxmlformats.org/drawingml/2006/main">
+            <a:pPr algn="ctr">
+              <a:defRPr sz="2175" b="1">
+                <a:solidFill>
+                  <a:srgbClr val="28685E"/>
+                </a:solidFill>
+                <a:latin typeface="Calibri"/>
+                <a:ea typeface="Calibri"/>
+                <a:cs typeface="Calibri"/>
+              </a:defRPr>
+            </a:pPr>
+            <a:r>
+              <a:rPr sz="2175" b="1">
+                <a:solidFill>
+                  <a:srgbClr val="28685E"/>
+                </a:solidFill>
+                <a:latin typeface="Calibri"/>
+                <a:ea typeface="Calibri"/>
+                <a:cs typeface="Calibri"/>
+              </a:rPr>
+              <a:t>MOVEMENT ENERGY</a:t>
+            </a:r>
+          </a:p>
+        </p:txBody>
+      </p:sp>
+      <p:sp>
+        <p:nvSpPr>
+          <p:cNvPr id="12" name="energy-transfer">
+            <a:extLst xmlns:a="http://schemas.openxmlformats.org/drawingml/2006/main">
+              <a:ext uri="{FF2B5EF4-FFF2-40B4-BE49-F238E27FC236}">
+                <a16:creationId xmlns:a16="http://schemas.microsoft.com/office/drawing/2014/main" id="{5AC43CAB-011E-447B-8701-7083B41C8D04}"/>
+              </a:ext>
+            </a:extLst>
+          </p:cNvPr>
+          <p:cNvSpPr>
+            <a:spLocks xmlns:a="http://schemas.openxmlformats.org/drawingml/2006/main" noGrp="1"/>
+          </p:cNvSpPr>
+          <p:nvPr/>
+        </p:nvSpPr>
+        <p:spPr>
+          <a:xfrm xmlns:a="http://schemas.openxmlformats.org/drawingml/2006/main" rot="5400000">
+            <a:off x="8562975" y="3895725"/>
+            <a:ext cx="933450" cy="247650"/>
+          </a:xfrm>
+          <a:prstGeom xmlns:a="http://schemas.openxmlformats.org/drawingml/2006/main" prst="rightArrow">
+            <a:avLst/>
+          </a:prstGeom>
+          <a:solidFill xmlns:a="http://schemas.openxmlformats.org/drawingml/2006/main">
+            <a:srgbClr val="A95D21"/>
+          </a:solidFill>
+          <a:ln xmlns:a="http://schemas.openxmlformats.org/drawingml/2006/main" w="0">
+            <a:noFill/>
+          </a:ln>
+        </p:spPr>
+      </p:sp>
+      <p:sp>
+        <p:nvSpPr>
+          <p:cNvPr id="13" name="energy-heat">
+            <a:extLst xmlns:a="http://schemas.openxmlformats.org/drawingml/2006/main">
+              <a:ext uri="{FF2B5EF4-FFF2-40B4-BE49-F238E27FC236}">
+                <a16:creationId xmlns:a16="http://schemas.microsoft.com/office/drawing/2014/main" id="{B2A2A219-8E45-43A4-9B8D-55DDAEB00F61}"/>
+              </a:ext>
+            </a:extLst>
+          </p:cNvPr>
+          <p:cNvSpPr>
+            <a:spLocks xmlns:a="http://schemas.openxmlformats.org/drawingml/2006/main" noGrp="1"/>
+          </p:cNvSpPr>
+          <p:nvPr/>
+        </p:nvSpPr>
+        <p:spPr>
+          <a:xfrm xmlns:a="http://schemas.openxmlformats.org/drawingml/2006/main">
+            <a:off x="7000875" y="4705350"/>
+            <a:ext cx="4171950" cy="952500"/>
+          </a:xfrm>
+          <a:prstGeom xmlns:a="http://schemas.openxmlformats.org/drawingml/2006/main" prst="rect">
+            <a:avLst/>
+          </a:prstGeom>
+          <a:solidFill xmlns:a="http://schemas.openxmlformats.org/drawingml/2006/main">
+            <a:srgbClr val="F0EBE3"/>
+          </a:solidFill>
+          <a:ln xmlns:a="http://schemas.openxmlformats.org/drawingml/2006/main" w="0">
+            <a:noFill/>
+          </a:ln>
+        </p:spPr>
+      </p:sp>
+      <p:sp>
+        <p:nvSpPr>
+          <p:cNvPr id="14" name="energy-heat-label">
+            <a:extLst xmlns:a="http://schemas.openxmlformats.org/drawingml/2006/main">
+              <a:ext uri="{FF2B5EF4-FFF2-40B4-BE49-F238E27FC236}">
+                <a16:creationId xmlns:a16="http://schemas.microsoft.com/office/drawing/2014/main" id="{2A8C4F01-8032-4575-9438-7277E949297D}"/>
+              </a:ext>
+            </a:extLst>
+          </p:cNvPr>
+          <p:cNvSpPr>
+            <a:spLocks xmlns:a="http://schemas.openxmlformats.org/drawingml/2006/main" noGrp="1"/>
+          </p:cNvSpPr>
+          <p:nvPr/>
+        </p:nvSpPr>
+        <p:spPr>
+          <a:xfrm xmlns:a="http://schemas.openxmlformats.org/drawingml/2006/main">
+            <a:off x="7191375" y="4905375"/>
+            <a:ext cx="3790950" cy="571500"/>
+          </a:xfrm>
+          <a:prstGeom xmlns:a="http://schemas.openxmlformats.org/drawingml/2006/main" prst="rect">
+            <a:avLst/>
+          </a:prstGeom>
+          <a:noFill xmlns:a="http://schemas.openxmlformats.org/drawingml/2006/main"/>
+          <a:ln xmlns:a="http://schemas.openxmlformats.org/drawingml/2006/main" w="0">
+            <a:noFill/>
+          </a:ln>
+        </p:spPr>
+        <p:txBody>
+          <a:bodyPr xmlns:a="http://schemas.openxmlformats.org/drawingml/2006/main" lIns="0" tIns="0" rIns="0" bIns="0" anchor="ctr">
+            <a:noAutofit/>
+          </a:bodyPr>
+          <a:lstStyle xmlns:a="http://schemas.openxmlformats.org/drawingml/2006/main"/>
+          <a:p xmlns:a="http://schemas.openxmlformats.org/drawingml/2006/main">
+            <a:pPr algn="ctr">
+              <a:defRPr sz="2175" b="1">
+                <a:solidFill>
+                  <a:srgbClr val="A95D21"/>
+                </a:solidFill>
+                <a:latin typeface="Calibri"/>
+                <a:ea typeface="Calibri"/>
+                <a:cs typeface="Calibri"/>
+              </a:defRPr>
+            </a:pPr>
+            <a:r>
+              <a:rPr sz="2175" b="1">
+                <a:solidFill>
+                  <a:srgbClr val="A95D21"/>
+                </a:solidFill>
+                <a:latin typeface="Calibri"/>
+                <a:ea typeface="Calibri"/>
+                <a:cs typeface="Calibri"/>
+              </a:rPr>
+              <a:t>HEAT</a:t>
             </a:r>
           </a:p>
         </p:txBody>
@@ -3557,7 +4397,7 @@
     <p:bg>
       <p:bgPr>
         <a:solidFill xmlns:a="http://schemas.openxmlformats.org/drawingml/2006/main">
-          <a:srgbClr val="F5F1E8"/>
+          <a:srgbClr val="FAF9F5"/>
         </a:solidFill>
       </p:bgPr>
     </p:bg>
@@ -3586,8 +4426,8 @@
         </p:nvSpPr>
         <p:spPr>
           <a:xfrm xmlns:a="http://schemas.openxmlformats.org/drawingml/2006/main">
-            <a:off x="609600" y="552450"/>
-            <a:ext cx="781050" cy="57150"/>
+            <a:off x="609600" y="733425"/>
+            <a:ext cx="781050" cy="38100"/>
           </a:xfrm>
           <a:prstGeom xmlns:a="http://schemas.openxmlformats.org/drawingml/2006/main" prst="rect">
             <a:avLst/>
@@ -3617,34 +4457,43 @@
         </p:nvSpPr>
         <p:spPr>
           <a:xfrm xmlns:a="http://schemas.openxmlformats.org/drawingml/2006/main">
-            <a:off x="609600" y="762000"/>
-            <a:ext cx="7143750" cy="285750"/>
-          </a:xfrm>
-          <a:prstGeom xmlns:a="http://schemas.openxmlformats.org/drawingml/2006/main" prst="rect">
-            <a:avLst/>
-          </a:prstGeom>
-          <a:noFill xmlns:a="http://schemas.openxmlformats.org/drawingml/2006/main"/>
-          <a:ln xmlns:a="http://schemas.openxmlformats.org/drawingml/2006/main" w="0">
-            <a:noFill/>
-            <a:prstDash val="solid"/>
-          </a:ln>
-        </p:spPr>
-        <p:txBody>
-          <a:bodyPr xmlns:a="http://schemas.openxmlformats.org/drawingml/2006/main" lIns="0" tIns="0" rIns="0" bIns="0" anchor="ctr"/>
-          <a:lstStyle xmlns:a="http://schemas.openxmlformats.org/drawingml/2006/main"/>
-          <a:p xmlns:a="http://schemas.openxmlformats.org/drawingml/2006/main">
-            <a:pPr>
-              <a:defRPr sz="1500" b="1">
+            <a:off x="609600" y="342900"/>
+            <a:ext cx="9334500" cy="304800"/>
+          </a:xfrm>
+          <a:prstGeom xmlns:a="http://schemas.openxmlformats.org/drawingml/2006/main" prst="rect">
+            <a:avLst/>
+          </a:prstGeom>
+          <a:noFill xmlns:a="http://schemas.openxmlformats.org/drawingml/2006/main"/>
+          <a:ln xmlns:a="http://schemas.openxmlformats.org/drawingml/2006/main" w="0">
+            <a:noFill/>
+            <a:prstDash val="solid"/>
+          </a:ln>
+        </p:spPr>
+        <p:txBody>
+          <a:bodyPr xmlns:a="http://schemas.openxmlformats.org/drawingml/2006/main" lIns="0" tIns="0" rIns="0" bIns="0" anchor="ctr">
+            <a:noAutofit/>
+          </a:bodyPr>
+          <a:lstStyle xmlns:a="http://schemas.openxmlformats.org/drawingml/2006/main"/>
+          <a:p xmlns:a="http://schemas.openxmlformats.org/drawingml/2006/main">
+            <a:pPr algn="l">
+              <a:buNone/>
+              <a:defRPr sz="1350" b="1">
                 <a:solidFill>
                   <a:srgbClr val="28685E"/>
                 </a:solidFill>
-              </a:defRPr>
-            </a:pPr>
-            <a:r>
-              <a:rPr sz="1500" b="1">
+                <a:latin typeface="Calibri"/>
+                <a:ea typeface="Calibri"/>
+                <a:cs typeface="Calibri"/>
+              </a:defRPr>
+            </a:pPr>
+            <a:r>
+              <a:rPr sz="1350" b="1">
                 <a:solidFill>
                   <a:srgbClr val="28685E"/>
                 </a:solidFill>
+                <a:latin typeface="Calibri"/>
+                <a:ea typeface="Calibri"/>
+                <a:cs typeface="Calibri"/>
               </a:rPr>
               <a:t>MADE BY MATT  /  GROW SCIENCE</a:t>
             </a:r>
@@ -3667,34 +4516,43 @@
         </p:nvSpPr>
         <p:spPr>
           <a:xfrm xmlns:a="http://schemas.openxmlformats.org/drawingml/2006/main">
-            <a:off x="609600" y="1352550"/>
-            <a:ext cx="10972800" cy="952500"/>
-          </a:xfrm>
-          <a:prstGeom xmlns:a="http://schemas.openxmlformats.org/drawingml/2006/main" prst="rect">
-            <a:avLst/>
-          </a:prstGeom>
-          <a:noFill xmlns:a="http://schemas.openxmlformats.org/drawingml/2006/main"/>
-          <a:ln xmlns:a="http://schemas.openxmlformats.org/drawingml/2006/main" w="0">
-            <a:noFill/>
-            <a:prstDash val="solid"/>
-          </a:ln>
-        </p:spPr>
-        <p:txBody>
-          <a:bodyPr xmlns:a="http://schemas.openxmlformats.org/drawingml/2006/main" lIns="0" tIns="0" rIns="0" bIns="0" anchor="ctr"/>
-          <a:lstStyle xmlns:a="http://schemas.openxmlformats.org/drawingml/2006/main"/>
-          <a:p xmlns:a="http://schemas.openxmlformats.org/drawingml/2006/main">
-            <a:pPr>
-              <a:defRPr sz="3750" b="1">
+            <a:off x="609600" y="990600"/>
+            <a:ext cx="10972800" cy="1000125"/>
+          </a:xfrm>
+          <a:prstGeom xmlns:a="http://schemas.openxmlformats.org/drawingml/2006/main" prst="rect">
+            <a:avLst/>
+          </a:prstGeom>
+          <a:noFill xmlns:a="http://schemas.openxmlformats.org/drawingml/2006/main"/>
+          <a:ln xmlns:a="http://schemas.openxmlformats.org/drawingml/2006/main" w="0">
+            <a:noFill/>
+            <a:prstDash val="solid"/>
+          </a:ln>
+        </p:spPr>
+        <p:txBody>
+          <a:bodyPr xmlns:a="http://schemas.openxmlformats.org/drawingml/2006/main" lIns="0" tIns="0" rIns="0" bIns="0" anchor="ctr">
+            <a:noAutofit/>
+          </a:bodyPr>
+          <a:lstStyle xmlns:a="http://schemas.openxmlformats.org/drawingml/2006/main"/>
+          <a:p xmlns:a="http://schemas.openxmlformats.org/drawingml/2006/main">
+            <a:pPr algn="l">
+              <a:buNone/>
+              <a:defRPr sz="3675" b="1">
                 <a:solidFill>
                   <a:srgbClr val="152B3A"/>
                 </a:solidFill>
-              </a:defRPr>
-            </a:pPr>
-            <a:r>
-              <a:rPr sz="3750" b="1">
+                <a:latin typeface="Calibri"/>
+                <a:ea typeface="Calibri"/>
+                <a:cs typeface="Calibri"/>
+              </a:defRPr>
+            </a:pPr>
+            <a:r>
+              <a:rPr sz="3675" b="1">
                 <a:solidFill>
                   <a:srgbClr val="152B3A"/>
                 </a:solidFill>
+                <a:latin typeface="Calibri"/>
+                <a:ea typeface="Calibri"/>
+                <a:cs typeface="Calibri"/>
               </a:rPr>
               <a:t>Keep your prediction for next time</a:t>
             </a:r>
@@ -3717,14 +4575,14 @@
         </p:nvSpPr>
         <p:spPr>
           <a:xfrm xmlns:a="http://schemas.openxmlformats.org/drawingml/2006/main">
-            <a:off x="609600" y="6219825"/>
+            <a:off x="609600" y="6191250"/>
             <a:ext cx="10972800" cy="9525"/>
           </a:xfrm>
           <a:prstGeom xmlns:a="http://schemas.openxmlformats.org/drawingml/2006/main" prst="rect">
             <a:avLst/>
           </a:prstGeom>
           <a:solidFill xmlns:a="http://schemas.openxmlformats.org/drawingml/2006/main">
-            <a:srgbClr val="DCE7DD"/>
+            <a:srgbClr val="CEDBD3"/>
           </a:solidFill>
           <a:ln xmlns:a="http://schemas.openxmlformats.org/drawingml/2006/main" w="0">
             <a:noFill/>
@@ -3748,34 +4606,43 @@
         </p:nvSpPr>
         <p:spPr>
           <a:xfrm xmlns:a="http://schemas.openxmlformats.org/drawingml/2006/main">
-            <a:off x="609600" y="6381750"/>
-            <a:ext cx="9525000" cy="228600"/>
-          </a:xfrm>
-          <a:prstGeom xmlns:a="http://schemas.openxmlformats.org/drawingml/2006/main" prst="rect">
-            <a:avLst/>
-          </a:prstGeom>
-          <a:noFill xmlns:a="http://schemas.openxmlformats.org/drawingml/2006/main"/>
-          <a:ln xmlns:a="http://schemas.openxmlformats.org/drawingml/2006/main" w="0">
-            <a:noFill/>
-            <a:prstDash val="solid"/>
-          </a:ln>
-        </p:spPr>
-        <p:txBody>
-          <a:bodyPr xmlns:a="http://schemas.openxmlformats.org/drawingml/2006/main" lIns="0" tIns="0" rIns="0" bIns="0" anchor="ctr"/>
-          <a:lstStyle xmlns:a="http://schemas.openxmlformats.org/drawingml/2006/main"/>
-          <a:p xmlns:a="http://schemas.openxmlformats.org/drawingml/2006/main">
-            <a:pPr>
-              <a:defRPr sz="1275" b="0">
+            <a:off x="609600" y="6419850"/>
+            <a:ext cx="9525000" cy="219075"/>
+          </a:xfrm>
+          <a:prstGeom xmlns:a="http://schemas.openxmlformats.org/drawingml/2006/main" prst="rect">
+            <a:avLst/>
+          </a:prstGeom>
+          <a:noFill xmlns:a="http://schemas.openxmlformats.org/drawingml/2006/main"/>
+          <a:ln xmlns:a="http://schemas.openxmlformats.org/drawingml/2006/main" w="0">
+            <a:noFill/>
+            <a:prstDash val="solid"/>
+          </a:ln>
+        </p:spPr>
+        <p:txBody>
+          <a:bodyPr xmlns:a="http://schemas.openxmlformats.org/drawingml/2006/main" lIns="0" tIns="0" rIns="0" bIns="0" anchor="ctr">
+            <a:noAutofit/>
+          </a:bodyPr>
+          <a:lstStyle xmlns:a="http://schemas.openxmlformats.org/drawingml/2006/main"/>
+          <a:p xmlns:a="http://schemas.openxmlformats.org/drawingml/2006/main">
+            <a:pPr algn="l">
+              <a:buNone/>
+              <a:defRPr sz="1200" b="0">
                 <a:solidFill>
                   <a:srgbClr val="50616B"/>
                 </a:solidFill>
-              </a:defRPr>
-            </a:pPr>
-            <a:r>
-              <a:rPr sz="1275" b="0">
+                <a:latin typeface="Calibri"/>
+                <a:ea typeface="Calibri"/>
+                <a:cs typeface="Calibri"/>
+              </a:defRPr>
+            </a:pPr>
+            <a:r>
+              <a:rPr sz="1200" b="0">
                 <a:solidFill>
                   <a:srgbClr val="50616B"/>
                 </a:solidFill>
+                <a:latin typeface="Calibri"/>
+                <a:ea typeface="Calibri"/>
+                <a:cs typeface="Calibri"/>
               </a:rPr>
               <a:t>AUTUMN 1  ·  WEEK 3  ·  LESSON A</a:t>
             </a:r>
@@ -3798,27 +4665,33 @@
         </p:nvSpPr>
         <p:spPr>
           <a:xfrm xmlns:a="http://schemas.openxmlformats.org/drawingml/2006/main">
-            <a:off x="11106150" y="6362700"/>
-            <a:ext cx="476250" cy="238125"/>
-          </a:xfrm>
-          <a:prstGeom xmlns:a="http://schemas.openxmlformats.org/drawingml/2006/main" prst="rect">
-            <a:avLst/>
-          </a:prstGeom>
-          <a:noFill xmlns:a="http://schemas.openxmlformats.org/drawingml/2006/main"/>
-          <a:ln xmlns:a="http://schemas.openxmlformats.org/drawingml/2006/main" w="0">
-            <a:noFill/>
-            <a:prstDash val="solid"/>
-          </a:ln>
-        </p:spPr>
-        <p:txBody>
-          <a:bodyPr xmlns:a="http://schemas.openxmlformats.org/drawingml/2006/main" lIns="0" tIns="0" rIns="0" bIns="0" anchor="ctr"/>
-          <a:lstStyle xmlns:a="http://schemas.openxmlformats.org/drawingml/2006/main"/>
-          <a:p xmlns:a="http://schemas.openxmlformats.org/drawingml/2006/main">
-            <a:pPr>
+            <a:off x="11106150" y="6400800"/>
+            <a:ext cx="476250" cy="247650"/>
+          </a:xfrm>
+          <a:prstGeom xmlns:a="http://schemas.openxmlformats.org/drawingml/2006/main" prst="rect">
+            <a:avLst/>
+          </a:prstGeom>
+          <a:noFill xmlns:a="http://schemas.openxmlformats.org/drawingml/2006/main"/>
+          <a:ln xmlns:a="http://schemas.openxmlformats.org/drawingml/2006/main" w="0">
+            <a:noFill/>
+            <a:prstDash val="solid"/>
+          </a:ln>
+        </p:spPr>
+        <p:txBody>
+          <a:bodyPr xmlns:a="http://schemas.openxmlformats.org/drawingml/2006/main" lIns="0" tIns="0" rIns="0" bIns="0" anchor="ctr">
+            <a:noAutofit/>
+          </a:bodyPr>
+          <a:lstStyle xmlns:a="http://schemas.openxmlformats.org/drawingml/2006/main"/>
+          <a:p xmlns:a="http://schemas.openxmlformats.org/drawingml/2006/main">
+            <a:pPr algn="l">
+              <a:buNone/>
               <a:defRPr sz="1350" b="1">
                 <a:solidFill>
                   <a:srgbClr val="28685E"/>
                 </a:solidFill>
+                <a:latin typeface="Calibri"/>
+                <a:ea typeface="Calibri"/>
+                <a:cs typeface="Calibri"/>
               </a:defRPr>
             </a:pPr>
             <a:r>
@@ -3826,6 +4699,9 @@
                 <a:solidFill>
                   <a:srgbClr val="28685E"/>
                 </a:solidFill>
+                <a:latin typeface="Calibri"/>
+                <a:ea typeface="Calibri"/>
+                <a:cs typeface="Calibri"/>
               </a:rPr>
               <a:t>12</a:t>
             </a:r>
@@ -3848,27 +4724,33 @@
         </p:nvSpPr>
         <p:spPr>
           <a:xfrm xmlns:a="http://schemas.openxmlformats.org/drawingml/2006/main">
-            <a:off x="609600" y="2809875"/>
-            <a:ext cx="10668000" cy="819150"/>
-          </a:xfrm>
-          <a:prstGeom xmlns:a="http://schemas.openxmlformats.org/drawingml/2006/main" prst="rect">
-            <a:avLst/>
-          </a:prstGeom>
-          <a:noFill xmlns:a="http://schemas.openxmlformats.org/drawingml/2006/main"/>
-          <a:ln xmlns:a="http://schemas.openxmlformats.org/drawingml/2006/main" w="0">
-            <a:noFill/>
-            <a:prstDash val="solid"/>
-          </a:ln>
-        </p:spPr>
-        <p:txBody>
-          <a:bodyPr xmlns:a="http://schemas.openxmlformats.org/drawingml/2006/main" lIns="0" tIns="0" rIns="0" bIns="0" anchor="ctr"/>
-          <a:lstStyle xmlns:a="http://schemas.openxmlformats.org/drawingml/2006/main"/>
-          <a:p xmlns:a="http://schemas.openxmlformats.org/drawingml/2006/main">
-            <a:pPr>
+            <a:off x="1000125" y="2333625"/>
+            <a:ext cx="10382250" cy="1076325"/>
+          </a:xfrm>
+          <a:prstGeom xmlns:a="http://schemas.openxmlformats.org/drawingml/2006/main" prst="rect">
+            <a:avLst/>
+          </a:prstGeom>
+          <a:noFill xmlns:a="http://schemas.openxmlformats.org/drawingml/2006/main"/>
+          <a:ln xmlns:a="http://schemas.openxmlformats.org/drawingml/2006/main" w="0">
+            <a:noFill/>
+            <a:prstDash val="solid"/>
+          </a:ln>
+        </p:spPr>
+        <p:txBody>
+          <a:bodyPr xmlns:a="http://schemas.openxmlformats.org/drawingml/2006/main" lIns="0" tIns="0" rIns="0" bIns="0" anchor="ctr">
+            <a:noAutofit/>
+          </a:bodyPr>
+          <a:lstStyle xmlns:a="http://schemas.openxmlformats.org/drawingml/2006/main"/>
+          <a:p xmlns:a="http://schemas.openxmlformats.org/drawingml/2006/main">
+            <a:pPr algn="l">
+              <a:buNone/>
               <a:defRPr sz="2625" b="0">
                 <a:solidFill>
                   <a:srgbClr val="152B3A"/>
                 </a:solidFill>
+                <a:latin typeface="Calibri"/>
+                <a:ea typeface="Calibri"/>
+                <a:cs typeface="Calibri"/>
               </a:defRPr>
             </a:pPr>
             <a:r>
@@ -3876,6 +4758,9 @@
                 <a:solidFill>
                   <a:srgbClr val="152B3A"/>
                 </a:solidFill>
+                <a:latin typeface="Calibri"/>
+                <a:ea typeface="Calibri"/>
+                <a:cs typeface="Calibri"/>
               </a:rPr>
               <a:t>Keep your named worksheet and first prediction.</a:t>
             </a:r>
@@ -3898,27 +4783,33 @@
         </p:nvSpPr>
         <p:spPr>
           <a:xfrm xmlns:a="http://schemas.openxmlformats.org/drawingml/2006/main">
-            <a:off x="609600" y="3724275"/>
-            <a:ext cx="10668000" cy="819150"/>
-          </a:xfrm>
-          <a:prstGeom xmlns:a="http://schemas.openxmlformats.org/drawingml/2006/main" prst="rect">
-            <a:avLst/>
-          </a:prstGeom>
-          <a:noFill xmlns:a="http://schemas.openxmlformats.org/drawingml/2006/main"/>
-          <a:ln xmlns:a="http://schemas.openxmlformats.org/drawingml/2006/main" w="0">
-            <a:noFill/>
-            <a:prstDash val="solid"/>
-          </a:ln>
-        </p:spPr>
-        <p:txBody>
-          <a:bodyPr xmlns:a="http://schemas.openxmlformats.org/drawingml/2006/main" lIns="0" tIns="0" rIns="0" bIns="0" anchor="ctr"/>
-          <a:lstStyle xmlns:a="http://schemas.openxmlformats.org/drawingml/2006/main"/>
-          <a:p xmlns:a="http://schemas.openxmlformats.org/drawingml/2006/main">
-            <a:pPr>
+            <a:off x="1000125" y="3467100"/>
+            <a:ext cx="10382250" cy="1076325"/>
+          </a:xfrm>
+          <a:prstGeom xmlns:a="http://schemas.openxmlformats.org/drawingml/2006/main" prst="rect">
+            <a:avLst/>
+          </a:prstGeom>
+          <a:noFill xmlns:a="http://schemas.openxmlformats.org/drawingml/2006/main"/>
+          <a:ln xmlns:a="http://schemas.openxmlformats.org/drawingml/2006/main" w="0">
+            <a:noFill/>
+            <a:prstDash val="solid"/>
+          </a:ln>
+        </p:spPr>
+        <p:txBody>
+          <a:bodyPr xmlns:a="http://schemas.openxmlformats.org/drawingml/2006/main" lIns="0" tIns="0" rIns="0" bIns="0" anchor="ctr">
+            <a:noAutofit/>
+          </a:bodyPr>
+          <a:lstStyle xmlns:a="http://schemas.openxmlformats.org/drawingml/2006/main"/>
+          <a:p xmlns:a="http://schemas.openxmlformats.org/drawingml/2006/main">
+            <a:pPr algn="l">
+              <a:buNone/>
               <a:defRPr sz="2625" b="0">
                 <a:solidFill>
                   <a:srgbClr val="152B3A"/>
                 </a:solidFill>
+                <a:latin typeface="Calibri"/>
+                <a:ea typeface="Calibri"/>
+                <a:cs typeface="Calibri"/>
               </a:defRPr>
             </a:pPr>
             <a:r>
@@ -3926,6 +4817,9 @@
                 <a:solidFill>
                   <a:srgbClr val="152B3A"/>
                 </a:solidFill>
+                <a:latin typeface="Calibri"/>
+                <a:ea typeface="Calibri"/>
+                <a:cs typeface="Calibri"/>
               </a:rPr>
               <a:t>Next lesson: compare three surfaces and repeated results.</a:t>
             </a:r>
@@ -3948,27 +4842,33 @@
         </p:nvSpPr>
         <p:spPr>
           <a:xfrm xmlns:a="http://schemas.openxmlformats.org/drawingml/2006/main">
-            <a:off x="609600" y="4638675"/>
-            <a:ext cx="10668000" cy="819150"/>
-          </a:xfrm>
-          <a:prstGeom xmlns:a="http://schemas.openxmlformats.org/drawingml/2006/main" prst="rect">
-            <a:avLst/>
-          </a:prstGeom>
-          <a:noFill xmlns:a="http://schemas.openxmlformats.org/drawingml/2006/main"/>
-          <a:ln xmlns:a="http://schemas.openxmlformats.org/drawingml/2006/main" w="0">
-            <a:noFill/>
-            <a:prstDash val="solid"/>
-          </a:ln>
-        </p:spPr>
-        <p:txBody>
-          <a:bodyPr xmlns:a="http://schemas.openxmlformats.org/drawingml/2006/main" lIns="0" tIns="0" rIns="0" bIns="0" anchor="ctr"/>
-          <a:lstStyle xmlns:a="http://schemas.openxmlformats.org/drawingml/2006/main"/>
-          <a:p xmlns:a="http://schemas.openxmlformats.org/drawingml/2006/main">
-            <a:pPr>
+            <a:off x="1000125" y="4600575"/>
+            <a:ext cx="10382250" cy="1076325"/>
+          </a:xfrm>
+          <a:prstGeom xmlns:a="http://schemas.openxmlformats.org/drawingml/2006/main" prst="rect">
+            <a:avLst/>
+          </a:prstGeom>
+          <a:noFill xmlns:a="http://schemas.openxmlformats.org/drawingml/2006/main"/>
+          <a:ln xmlns:a="http://schemas.openxmlformats.org/drawingml/2006/main" w="0">
+            <a:noFill/>
+            <a:prstDash val="solid"/>
+          </a:ln>
+        </p:spPr>
+        <p:txBody>
+          <a:bodyPr xmlns:a="http://schemas.openxmlformats.org/drawingml/2006/main" lIns="0" tIns="0" rIns="0" bIns="0" anchor="ctr">
+            <a:noAutofit/>
+          </a:bodyPr>
+          <a:lstStyle xmlns:a="http://schemas.openxmlformats.org/drawingml/2006/main"/>
+          <a:p xmlns:a="http://schemas.openxmlformats.org/drawingml/2006/main">
+            <a:pPr algn="l">
+              <a:buNone/>
               <a:defRPr sz="2625" b="0">
                 <a:solidFill>
                   <a:srgbClr val="152B3A"/>
                 </a:solidFill>
+                <a:latin typeface="Calibri"/>
+                <a:ea typeface="Calibri"/>
+                <a:cs typeface="Calibri"/>
               </a:defRPr>
             </a:pPr>
             <a:r>
@@ -3976,8 +4876,242 @@
                 <a:solidFill>
                   <a:srgbClr val="152B3A"/>
                 </a:solidFill>
+                <a:latin typeface="Calibri"/>
+                <a:ea typeface="Calibri"/>
+                <a:cs typeface="Calibri"/>
               </a:rPr>
               <a:t>Point to one idea you want to check again.</a:t>
+            </a:r>
+          </a:p>
+        </p:txBody>
+      </p:sp>
+      <p:sp>
+        <p:nvSpPr>
+          <p:cNvPr id="11" name="cue-0">
+            <a:extLst xmlns:a="http://schemas.openxmlformats.org/drawingml/2006/main">
+              <a:ext uri="{FF2B5EF4-FFF2-40B4-BE49-F238E27FC236}">
+                <a16:creationId xmlns:a16="http://schemas.microsoft.com/office/drawing/2014/main" id="{5FF5315A-42CE-46E0-A0A4-303EADCD5114}"/>
+              </a:ext>
+            </a:extLst>
+          </p:cNvPr>
+          <p:cNvSpPr>
+            <a:spLocks xmlns:a="http://schemas.openxmlformats.org/drawingml/2006/main" noGrp="1"/>
+          </p:cNvSpPr>
+          <p:nvPr/>
+        </p:nvSpPr>
+        <p:spPr>
+          <a:xfrm xmlns:a="http://schemas.openxmlformats.org/drawingml/2006/main">
+            <a:off x="609600" y="2362200"/>
+            <a:ext cx="323850" cy="323850"/>
+          </a:xfrm>
+          <a:prstGeom xmlns:a="http://schemas.openxmlformats.org/drawingml/2006/main" prst="rect">
+            <a:avLst/>
+          </a:prstGeom>
+          <a:noFill xmlns:a="http://schemas.openxmlformats.org/drawingml/2006/main"/>
+          <a:ln xmlns:a="http://schemas.openxmlformats.org/drawingml/2006/main" w="0">
+            <a:noFill/>
+          </a:ln>
+        </p:spPr>
+        <p:txBody>
+          <a:bodyPr xmlns:a="http://schemas.openxmlformats.org/drawingml/2006/main" lIns="0" tIns="0" rIns="0" bIns="0" anchor="ctr">
+            <a:noAutofit/>
+          </a:bodyPr>
+          <a:lstStyle xmlns:a="http://schemas.openxmlformats.org/drawingml/2006/main"/>
+          <a:p xmlns:a="http://schemas.openxmlformats.org/drawingml/2006/main">
+            <a:pPr algn="l">
+              <a:defRPr sz="1350" b="1">
+                <a:solidFill>
+                  <a:srgbClr val="28685E"/>
+                </a:solidFill>
+                <a:latin typeface="Calibri"/>
+                <a:ea typeface="Calibri"/>
+                <a:cs typeface="Calibri"/>
+              </a:defRPr>
+            </a:pPr>
+            <a:r>
+              <a:rPr sz="1350" b="1">
+                <a:solidFill>
+                  <a:srgbClr val="28685E"/>
+                </a:solidFill>
+                <a:latin typeface="Calibri"/>
+                <a:ea typeface="Calibri"/>
+                <a:cs typeface="Calibri"/>
+              </a:rPr>
+              <a:t>01</a:t>
+            </a:r>
+          </a:p>
+        </p:txBody>
+      </p:sp>
+      <p:sp>
+        <p:nvSpPr>
+          <p:cNvPr id="12" name="row-rule-0">
+            <a:extLst xmlns:a="http://schemas.openxmlformats.org/drawingml/2006/main">
+              <a:ext uri="{FF2B5EF4-FFF2-40B4-BE49-F238E27FC236}">
+                <a16:creationId xmlns:a16="http://schemas.microsoft.com/office/drawing/2014/main" id="{04DF5160-4BD4-44A7-A474-3DCCBACDF90F}"/>
+              </a:ext>
+            </a:extLst>
+          </p:cNvPr>
+          <p:cNvSpPr>
+            <a:spLocks xmlns:a="http://schemas.openxmlformats.org/drawingml/2006/main" noGrp="1"/>
+          </p:cNvSpPr>
+          <p:nvPr/>
+        </p:nvSpPr>
+        <p:spPr>
+          <a:xfrm xmlns:a="http://schemas.openxmlformats.org/drawingml/2006/main">
+            <a:off x="1000125" y="3419475"/>
+            <a:ext cx="10334625" cy="0"/>
+          </a:xfrm>
+          <a:prstGeom xmlns:a="http://schemas.openxmlformats.org/drawingml/2006/main" prst="line">
+            <a:avLst/>
+          </a:prstGeom>
+          <a:noFill xmlns:a="http://schemas.openxmlformats.org/drawingml/2006/main"/>
+          <a:ln xmlns:a="http://schemas.openxmlformats.org/drawingml/2006/main" w="9525">
+            <a:solidFill>
+              <a:srgbClr val="CEDBD3"/>
+            </a:solidFill>
+          </a:ln>
+        </p:spPr>
+      </p:sp>
+      <p:sp>
+        <p:nvSpPr>
+          <p:cNvPr id="13" name="cue-1">
+            <a:extLst xmlns:a="http://schemas.openxmlformats.org/drawingml/2006/main">
+              <a:ext uri="{FF2B5EF4-FFF2-40B4-BE49-F238E27FC236}">
+                <a16:creationId xmlns:a16="http://schemas.microsoft.com/office/drawing/2014/main" id="{D4A92D15-E543-44EE-B2F2-CFFF964C47AF}"/>
+              </a:ext>
+            </a:extLst>
+          </p:cNvPr>
+          <p:cNvSpPr>
+            <a:spLocks xmlns:a="http://schemas.openxmlformats.org/drawingml/2006/main" noGrp="1"/>
+          </p:cNvSpPr>
+          <p:nvPr/>
+        </p:nvSpPr>
+        <p:spPr>
+          <a:xfrm xmlns:a="http://schemas.openxmlformats.org/drawingml/2006/main">
+            <a:off x="609600" y="3495675"/>
+            <a:ext cx="323850" cy="323850"/>
+          </a:xfrm>
+          <a:prstGeom xmlns:a="http://schemas.openxmlformats.org/drawingml/2006/main" prst="rect">
+            <a:avLst/>
+          </a:prstGeom>
+          <a:noFill xmlns:a="http://schemas.openxmlformats.org/drawingml/2006/main"/>
+          <a:ln xmlns:a="http://schemas.openxmlformats.org/drawingml/2006/main" w="0">
+            <a:noFill/>
+          </a:ln>
+        </p:spPr>
+        <p:txBody>
+          <a:bodyPr xmlns:a="http://schemas.openxmlformats.org/drawingml/2006/main" lIns="0" tIns="0" rIns="0" bIns="0" anchor="ctr">
+            <a:noAutofit/>
+          </a:bodyPr>
+          <a:lstStyle xmlns:a="http://schemas.openxmlformats.org/drawingml/2006/main"/>
+          <a:p xmlns:a="http://schemas.openxmlformats.org/drawingml/2006/main">
+            <a:pPr algn="l">
+              <a:defRPr sz="1350" b="1">
+                <a:solidFill>
+                  <a:srgbClr val="28685E"/>
+                </a:solidFill>
+                <a:latin typeface="Calibri"/>
+                <a:ea typeface="Calibri"/>
+                <a:cs typeface="Calibri"/>
+              </a:defRPr>
+            </a:pPr>
+            <a:r>
+              <a:rPr sz="1350" b="1">
+                <a:solidFill>
+                  <a:srgbClr val="28685E"/>
+                </a:solidFill>
+                <a:latin typeface="Calibri"/>
+                <a:ea typeface="Calibri"/>
+                <a:cs typeface="Calibri"/>
+              </a:rPr>
+              <a:t>02</a:t>
+            </a:r>
+          </a:p>
+        </p:txBody>
+      </p:sp>
+      <p:sp>
+        <p:nvSpPr>
+          <p:cNvPr id="14" name="row-rule-1">
+            <a:extLst xmlns:a="http://schemas.openxmlformats.org/drawingml/2006/main">
+              <a:ext uri="{FF2B5EF4-FFF2-40B4-BE49-F238E27FC236}">
+                <a16:creationId xmlns:a16="http://schemas.microsoft.com/office/drawing/2014/main" id="{6ADAD402-1806-455D-A630-095343DADA17}"/>
+              </a:ext>
+            </a:extLst>
+          </p:cNvPr>
+          <p:cNvSpPr>
+            <a:spLocks xmlns:a="http://schemas.openxmlformats.org/drawingml/2006/main" noGrp="1"/>
+          </p:cNvSpPr>
+          <p:nvPr/>
+        </p:nvSpPr>
+        <p:spPr>
+          <a:xfrm xmlns:a="http://schemas.openxmlformats.org/drawingml/2006/main">
+            <a:off x="1000125" y="4552950"/>
+            <a:ext cx="10334625" cy="0"/>
+          </a:xfrm>
+          <a:prstGeom xmlns:a="http://schemas.openxmlformats.org/drawingml/2006/main" prst="line">
+            <a:avLst/>
+          </a:prstGeom>
+          <a:noFill xmlns:a="http://schemas.openxmlformats.org/drawingml/2006/main"/>
+          <a:ln xmlns:a="http://schemas.openxmlformats.org/drawingml/2006/main" w="9525">
+            <a:solidFill>
+              <a:srgbClr val="CEDBD3"/>
+            </a:solidFill>
+          </a:ln>
+        </p:spPr>
+      </p:sp>
+      <p:sp>
+        <p:nvSpPr>
+          <p:cNvPr id="15" name="cue-2">
+            <a:extLst xmlns:a="http://schemas.openxmlformats.org/drawingml/2006/main">
+              <a:ext uri="{FF2B5EF4-FFF2-40B4-BE49-F238E27FC236}">
+                <a16:creationId xmlns:a16="http://schemas.microsoft.com/office/drawing/2014/main" id="{8BA77266-C0C4-41F5-9D95-05E56C42F394}"/>
+              </a:ext>
+            </a:extLst>
+          </p:cNvPr>
+          <p:cNvSpPr>
+            <a:spLocks xmlns:a="http://schemas.openxmlformats.org/drawingml/2006/main" noGrp="1"/>
+          </p:cNvSpPr>
+          <p:nvPr/>
+        </p:nvSpPr>
+        <p:spPr>
+          <a:xfrm xmlns:a="http://schemas.openxmlformats.org/drawingml/2006/main">
+            <a:off x="609600" y="4629150"/>
+            <a:ext cx="323850" cy="323850"/>
+          </a:xfrm>
+          <a:prstGeom xmlns:a="http://schemas.openxmlformats.org/drawingml/2006/main" prst="rect">
+            <a:avLst/>
+          </a:prstGeom>
+          <a:noFill xmlns:a="http://schemas.openxmlformats.org/drawingml/2006/main"/>
+          <a:ln xmlns:a="http://schemas.openxmlformats.org/drawingml/2006/main" w="0">
+            <a:noFill/>
+          </a:ln>
+        </p:spPr>
+        <p:txBody>
+          <a:bodyPr xmlns:a="http://schemas.openxmlformats.org/drawingml/2006/main" lIns="0" tIns="0" rIns="0" bIns="0" anchor="ctr">
+            <a:noAutofit/>
+          </a:bodyPr>
+          <a:lstStyle xmlns:a="http://schemas.openxmlformats.org/drawingml/2006/main"/>
+          <a:p xmlns:a="http://schemas.openxmlformats.org/drawingml/2006/main">
+            <a:pPr algn="l">
+              <a:defRPr sz="1350" b="1">
+                <a:solidFill>
+                  <a:srgbClr val="28685E"/>
+                </a:solidFill>
+                <a:latin typeface="Calibri"/>
+                <a:ea typeface="Calibri"/>
+                <a:cs typeface="Calibri"/>
+              </a:defRPr>
+            </a:pPr>
+            <a:r>
+              <a:rPr sz="1350" b="1">
+                <a:solidFill>
+                  <a:srgbClr val="28685E"/>
+                </a:solidFill>
+                <a:latin typeface="Calibri"/>
+                <a:ea typeface="Calibri"/>
+                <a:cs typeface="Calibri"/>
+              </a:rPr>
+              <a:t>03</a:t>
             </a:r>
           </a:p>
         </p:txBody>
@@ -3998,7 +5132,7 @@
     <p:bg>
       <p:bgPr>
         <a:solidFill xmlns:a="http://schemas.openxmlformats.org/drawingml/2006/main">
-          <a:srgbClr val="F5F1E8"/>
+          <a:srgbClr val="FAF9F5"/>
         </a:solidFill>
       </p:bgPr>
     </p:bg>
@@ -4027,8 +5161,8 @@
         </p:nvSpPr>
         <p:spPr>
           <a:xfrm xmlns:a="http://schemas.openxmlformats.org/drawingml/2006/main">
-            <a:off x="609600" y="552450"/>
-            <a:ext cx="781050" cy="57150"/>
+            <a:off x="609600" y="733425"/>
+            <a:ext cx="781050" cy="38100"/>
           </a:xfrm>
           <a:prstGeom xmlns:a="http://schemas.openxmlformats.org/drawingml/2006/main" prst="rect">
             <a:avLst/>
@@ -4058,34 +5192,43 @@
         </p:nvSpPr>
         <p:spPr>
           <a:xfrm xmlns:a="http://schemas.openxmlformats.org/drawingml/2006/main">
-            <a:off x="609600" y="762000"/>
-            <a:ext cx="7143750" cy="285750"/>
-          </a:xfrm>
-          <a:prstGeom xmlns:a="http://schemas.openxmlformats.org/drawingml/2006/main" prst="rect">
-            <a:avLst/>
-          </a:prstGeom>
-          <a:noFill xmlns:a="http://schemas.openxmlformats.org/drawingml/2006/main"/>
-          <a:ln xmlns:a="http://schemas.openxmlformats.org/drawingml/2006/main" w="0">
-            <a:noFill/>
-            <a:prstDash val="solid"/>
-          </a:ln>
-        </p:spPr>
-        <p:txBody>
-          <a:bodyPr xmlns:a="http://schemas.openxmlformats.org/drawingml/2006/main" lIns="0" tIns="0" rIns="0" bIns="0" anchor="ctr"/>
-          <a:lstStyle xmlns:a="http://schemas.openxmlformats.org/drawingml/2006/main"/>
-          <a:p xmlns:a="http://schemas.openxmlformats.org/drawingml/2006/main">
-            <a:pPr>
-              <a:defRPr sz="1500" b="1">
+            <a:off x="609600" y="342900"/>
+            <a:ext cx="9334500" cy="304800"/>
+          </a:xfrm>
+          <a:prstGeom xmlns:a="http://schemas.openxmlformats.org/drawingml/2006/main" prst="rect">
+            <a:avLst/>
+          </a:prstGeom>
+          <a:noFill xmlns:a="http://schemas.openxmlformats.org/drawingml/2006/main"/>
+          <a:ln xmlns:a="http://schemas.openxmlformats.org/drawingml/2006/main" w="0">
+            <a:noFill/>
+            <a:prstDash val="solid"/>
+          </a:ln>
+        </p:spPr>
+        <p:txBody>
+          <a:bodyPr xmlns:a="http://schemas.openxmlformats.org/drawingml/2006/main" lIns="0" tIns="0" rIns="0" bIns="0" anchor="ctr">
+            <a:noAutofit/>
+          </a:bodyPr>
+          <a:lstStyle xmlns:a="http://schemas.openxmlformats.org/drawingml/2006/main"/>
+          <a:p xmlns:a="http://schemas.openxmlformats.org/drawingml/2006/main">
+            <a:pPr algn="l">
+              <a:buNone/>
+              <a:defRPr sz="1350" b="1">
                 <a:solidFill>
                   <a:srgbClr val="28685E"/>
                 </a:solidFill>
-              </a:defRPr>
-            </a:pPr>
-            <a:r>
-              <a:rPr sz="1500" b="1">
+                <a:latin typeface="Calibri"/>
+                <a:ea typeface="Calibri"/>
+                <a:cs typeface="Calibri"/>
+              </a:defRPr>
+            </a:pPr>
+            <a:r>
+              <a:rPr sz="1350" b="1">
                 <a:solidFill>
                   <a:srgbClr val="28685E"/>
                 </a:solidFill>
+                <a:latin typeface="Calibri"/>
+                <a:ea typeface="Calibri"/>
+                <a:cs typeface="Calibri"/>
               </a:rPr>
               <a:t>MADE BY MATT  /  GROW SCIENCE</a:t>
             </a:r>
@@ -4108,34 +5251,43 @@
         </p:nvSpPr>
         <p:spPr>
           <a:xfrm xmlns:a="http://schemas.openxmlformats.org/drawingml/2006/main">
-            <a:off x="609600" y="1352550"/>
-            <a:ext cx="10972800" cy="952500"/>
-          </a:xfrm>
-          <a:prstGeom xmlns:a="http://schemas.openxmlformats.org/drawingml/2006/main" prst="rect">
-            <a:avLst/>
-          </a:prstGeom>
-          <a:noFill xmlns:a="http://schemas.openxmlformats.org/drawingml/2006/main"/>
-          <a:ln xmlns:a="http://schemas.openxmlformats.org/drawingml/2006/main" w="0">
-            <a:noFill/>
-            <a:prstDash val="solid"/>
-          </a:ln>
-        </p:spPr>
-        <p:txBody>
-          <a:bodyPr xmlns:a="http://schemas.openxmlformats.org/drawingml/2006/main" lIns="0" tIns="0" rIns="0" bIns="0" anchor="ctr"/>
-          <a:lstStyle xmlns:a="http://schemas.openxmlformats.org/drawingml/2006/main"/>
-          <a:p xmlns:a="http://schemas.openxmlformats.org/drawingml/2006/main">
-            <a:pPr>
-              <a:defRPr sz="3750" b="1">
+            <a:off x="609600" y="990600"/>
+            <a:ext cx="10972800" cy="1000125"/>
+          </a:xfrm>
+          <a:prstGeom xmlns:a="http://schemas.openxmlformats.org/drawingml/2006/main" prst="rect">
+            <a:avLst/>
+          </a:prstGeom>
+          <a:noFill xmlns:a="http://schemas.openxmlformats.org/drawingml/2006/main"/>
+          <a:ln xmlns:a="http://schemas.openxmlformats.org/drawingml/2006/main" w="0">
+            <a:noFill/>
+            <a:prstDash val="solid"/>
+          </a:ln>
+        </p:spPr>
+        <p:txBody>
+          <a:bodyPr xmlns:a="http://schemas.openxmlformats.org/drawingml/2006/main" lIns="0" tIns="0" rIns="0" bIns="0" anchor="ctr">
+            <a:noAutofit/>
+          </a:bodyPr>
+          <a:lstStyle xmlns:a="http://schemas.openxmlformats.org/drawingml/2006/main"/>
+          <a:p xmlns:a="http://schemas.openxmlformats.org/drawingml/2006/main">
+            <a:pPr algn="l">
+              <a:buNone/>
+              <a:defRPr sz="3675" b="1">
                 <a:solidFill>
                   <a:srgbClr val="152B3A"/>
                 </a:solidFill>
-              </a:defRPr>
-            </a:pPr>
-            <a:r>
-              <a:rPr sz="3750" b="1">
+                <a:latin typeface="Calibri"/>
+                <a:ea typeface="Calibri"/>
+                <a:cs typeface="Calibri"/>
+              </a:defRPr>
+            </a:pPr>
+            <a:r>
+              <a:rPr sz="3675" b="1">
                 <a:solidFill>
                   <a:srgbClr val="152B3A"/>
                 </a:solidFill>
+                <a:latin typeface="Calibri"/>
+                <a:ea typeface="Calibri"/>
+                <a:cs typeface="Calibri"/>
               </a:rPr>
               <a:t>What do you notice?</a:t>
             </a:r>
@@ -4158,14 +5310,14 @@
         </p:nvSpPr>
         <p:spPr>
           <a:xfrm xmlns:a="http://schemas.openxmlformats.org/drawingml/2006/main">
-            <a:off x="609600" y="6219825"/>
+            <a:off x="609600" y="6191250"/>
             <a:ext cx="10972800" cy="9525"/>
           </a:xfrm>
           <a:prstGeom xmlns:a="http://schemas.openxmlformats.org/drawingml/2006/main" prst="rect">
             <a:avLst/>
           </a:prstGeom>
           <a:solidFill xmlns:a="http://schemas.openxmlformats.org/drawingml/2006/main">
-            <a:srgbClr val="DCE7DD"/>
+            <a:srgbClr val="CEDBD3"/>
           </a:solidFill>
           <a:ln xmlns:a="http://schemas.openxmlformats.org/drawingml/2006/main" w="0">
             <a:noFill/>
@@ -4189,34 +5341,43 @@
         </p:nvSpPr>
         <p:spPr>
           <a:xfrm xmlns:a="http://schemas.openxmlformats.org/drawingml/2006/main">
-            <a:off x="609600" y="6381750"/>
-            <a:ext cx="9525000" cy="228600"/>
-          </a:xfrm>
-          <a:prstGeom xmlns:a="http://schemas.openxmlformats.org/drawingml/2006/main" prst="rect">
-            <a:avLst/>
-          </a:prstGeom>
-          <a:noFill xmlns:a="http://schemas.openxmlformats.org/drawingml/2006/main"/>
-          <a:ln xmlns:a="http://schemas.openxmlformats.org/drawingml/2006/main" w="0">
-            <a:noFill/>
-            <a:prstDash val="solid"/>
-          </a:ln>
-        </p:spPr>
-        <p:txBody>
-          <a:bodyPr xmlns:a="http://schemas.openxmlformats.org/drawingml/2006/main" lIns="0" tIns="0" rIns="0" bIns="0" anchor="ctr"/>
-          <a:lstStyle xmlns:a="http://schemas.openxmlformats.org/drawingml/2006/main"/>
-          <a:p xmlns:a="http://schemas.openxmlformats.org/drawingml/2006/main">
-            <a:pPr>
-              <a:defRPr sz="1275" b="0">
+            <a:off x="609600" y="6419850"/>
+            <a:ext cx="9525000" cy="219075"/>
+          </a:xfrm>
+          <a:prstGeom xmlns:a="http://schemas.openxmlformats.org/drawingml/2006/main" prst="rect">
+            <a:avLst/>
+          </a:prstGeom>
+          <a:noFill xmlns:a="http://schemas.openxmlformats.org/drawingml/2006/main"/>
+          <a:ln xmlns:a="http://schemas.openxmlformats.org/drawingml/2006/main" w="0">
+            <a:noFill/>
+            <a:prstDash val="solid"/>
+          </a:ln>
+        </p:spPr>
+        <p:txBody>
+          <a:bodyPr xmlns:a="http://schemas.openxmlformats.org/drawingml/2006/main" lIns="0" tIns="0" rIns="0" bIns="0" anchor="ctr">
+            <a:noAutofit/>
+          </a:bodyPr>
+          <a:lstStyle xmlns:a="http://schemas.openxmlformats.org/drawingml/2006/main"/>
+          <a:p xmlns:a="http://schemas.openxmlformats.org/drawingml/2006/main">
+            <a:pPr algn="l">
+              <a:buNone/>
+              <a:defRPr sz="1200" b="0">
                 <a:solidFill>
                   <a:srgbClr val="50616B"/>
                 </a:solidFill>
-              </a:defRPr>
-            </a:pPr>
-            <a:r>
-              <a:rPr sz="1275" b="0">
+                <a:latin typeface="Calibri"/>
+                <a:ea typeface="Calibri"/>
+                <a:cs typeface="Calibri"/>
+              </a:defRPr>
+            </a:pPr>
+            <a:r>
+              <a:rPr sz="1200" b="0">
                 <a:solidFill>
                   <a:srgbClr val="50616B"/>
                 </a:solidFill>
+                <a:latin typeface="Calibri"/>
+                <a:ea typeface="Calibri"/>
+                <a:cs typeface="Calibri"/>
               </a:rPr>
               <a:t>AUTUMN 1  ·  WEEK 3  ·  LESSON A</a:t>
             </a:r>
@@ -4239,27 +5400,33 @@
         </p:nvSpPr>
         <p:spPr>
           <a:xfrm xmlns:a="http://schemas.openxmlformats.org/drawingml/2006/main">
-            <a:off x="11106150" y="6362700"/>
-            <a:ext cx="476250" cy="238125"/>
-          </a:xfrm>
-          <a:prstGeom xmlns:a="http://schemas.openxmlformats.org/drawingml/2006/main" prst="rect">
-            <a:avLst/>
-          </a:prstGeom>
-          <a:noFill xmlns:a="http://schemas.openxmlformats.org/drawingml/2006/main"/>
-          <a:ln xmlns:a="http://schemas.openxmlformats.org/drawingml/2006/main" w="0">
-            <a:noFill/>
-            <a:prstDash val="solid"/>
-          </a:ln>
-        </p:spPr>
-        <p:txBody>
-          <a:bodyPr xmlns:a="http://schemas.openxmlformats.org/drawingml/2006/main" lIns="0" tIns="0" rIns="0" bIns="0" anchor="ctr"/>
-          <a:lstStyle xmlns:a="http://schemas.openxmlformats.org/drawingml/2006/main"/>
-          <a:p xmlns:a="http://schemas.openxmlformats.org/drawingml/2006/main">
-            <a:pPr>
+            <a:off x="11106150" y="6400800"/>
+            <a:ext cx="476250" cy="247650"/>
+          </a:xfrm>
+          <a:prstGeom xmlns:a="http://schemas.openxmlformats.org/drawingml/2006/main" prst="rect">
+            <a:avLst/>
+          </a:prstGeom>
+          <a:noFill xmlns:a="http://schemas.openxmlformats.org/drawingml/2006/main"/>
+          <a:ln xmlns:a="http://schemas.openxmlformats.org/drawingml/2006/main" w="0">
+            <a:noFill/>
+            <a:prstDash val="solid"/>
+          </a:ln>
+        </p:spPr>
+        <p:txBody>
+          <a:bodyPr xmlns:a="http://schemas.openxmlformats.org/drawingml/2006/main" lIns="0" tIns="0" rIns="0" bIns="0" anchor="ctr">
+            <a:noAutofit/>
+          </a:bodyPr>
+          <a:lstStyle xmlns:a="http://schemas.openxmlformats.org/drawingml/2006/main"/>
+          <a:p xmlns:a="http://schemas.openxmlformats.org/drawingml/2006/main">
+            <a:pPr algn="l">
+              <a:buNone/>
               <a:defRPr sz="1350" b="1">
                 <a:solidFill>
                   <a:srgbClr val="28685E"/>
                 </a:solidFill>
+                <a:latin typeface="Calibri"/>
+                <a:ea typeface="Calibri"/>
+                <a:cs typeface="Calibri"/>
               </a:defRPr>
             </a:pPr>
             <a:r>
@@ -4267,6 +5434,9 @@
                 <a:solidFill>
                   <a:srgbClr val="28685E"/>
                 </a:solidFill>
+                <a:latin typeface="Calibri"/>
+                <a:ea typeface="Calibri"/>
+                <a:cs typeface="Calibri"/>
               </a:rPr>
               <a:t>02</a:t>
             </a:r>
@@ -4289,34 +5459,43 @@
         </p:nvSpPr>
         <p:spPr>
           <a:xfrm xmlns:a="http://schemas.openxmlformats.org/drawingml/2006/main">
-            <a:off x="609600" y="2667000"/>
-            <a:ext cx="10668000" cy="762000"/>
-          </a:xfrm>
-          <a:prstGeom xmlns:a="http://schemas.openxmlformats.org/drawingml/2006/main" prst="rect">
-            <a:avLst/>
-          </a:prstGeom>
-          <a:noFill xmlns:a="http://schemas.openxmlformats.org/drawingml/2006/main"/>
-          <a:ln xmlns:a="http://schemas.openxmlformats.org/drawingml/2006/main" w="0">
-            <a:noFill/>
-            <a:prstDash val="solid"/>
-          </a:ln>
-        </p:spPr>
-        <p:txBody>
-          <a:bodyPr xmlns:a="http://schemas.openxmlformats.org/drawingml/2006/main" lIns="0" tIns="0" rIns="0" bIns="0" anchor="ctr"/>
-          <a:lstStyle xmlns:a="http://schemas.openxmlformats.org/drawingml/2006/main"/>
-          <a:p xmlns:a="http://schemas.openxmlformats.org/drawingml/2006/main">
-            <a:pPr>
-              <a:defRPr sz="2400" b="0">
+            <a:off x="1000125" y="2333625"/>
+            <a:ext cx="10382250" cy="996950"/>
+          </a:xfrm>
+          <a:prstGeom xmlns:a="http://schemas.openxmlformats.org/drawingml/2006/main" prst="rect">
+            <a:avLst/>
+          </a:prstGeom>
+          <a:noFill xmlns:a="http://schemas.openxmlformats.org/drawingml/2006/main"/>
+          <a:ln xmlns:a="http://schemas.openxmlformats.org/drawingml/2006/main" w="0">
+            <a:noFill/>
+            <a:prstDash val="solid"/>
+          </a:ln>
+        </p:spPr>
+        <p:txBody>
+          <a:bodyPr xmlns:a="http://schemas.openxmlformats.org/drawingml/2006/main" lIns="0" tIns="0" rIns="0" bIns="0" anchor="ctr">
+            <a:noAutofit/>
+          </a:bodyPr>
+          <a:lstStyle xmlns:a="http://schemas.openxmlformats.org/drawingml/2006/main"/>
+          <a:p xmlns:a="http://schemas.openxmlformats.org/drawingml/2006/main">
+            <a:pPr algn="l">
+              <a:buNone/>
+              <a:defRPr sz="2625" b="0">
                 <a:solidFill>
                   <a:srgbClr val="152B3A"/>
                 </a:solidFill>
-              </a:defRPr>
-            </a:pPr>
-            <a:r>
-              <a:rPr sz="2400" b="0">
+                <a:latin typeface="Calibri"/>
+                <a:ea typeface="Calibri"/>
+                <a:cs typeface="Calibri"/>
+              </a:defRPr>
+            </a:pPr>
+            <a:r>
+              <a:rPr sz="2625" b="0">
                 <a:solidFill>
                   <a:srgbClr val="152B3A"/>
                 </a:solidFill>
+                <a:latin typeface="Calibri"/>
+                <a:ea typeface="Calibri"/>
+                <a:cs typeface="Calibri"/>
               </a:rPr>
               <a:t>Supported: gently rub your hands for five seconds.</a:t>
             </a:r>
@@ -4339,34 +5518,43 @@
         </p:nvSpPr>
         <p:spPr>
           <a:xfrm xmlns:a="http://schemas.openxmlformats.org/drawingml/2006/main">
-            <a:off x="609600" y="3524250"/>
-            <a:ext cx="10668000" cy="762000"/>
-          </a:xfrm>
-          <a:prstGeom xmlns:a="http://schemas.openxmlformats.org/drawingml/2006/main" prst="rect">
-            <a:avLst/>
-          </a:prstGeom>
-          <a:noFill xmlns:a="http://schemas.openxmlformats.org/drawingml/2006/main"/>
-          <a:ln xmlns:a="http://schemas.openxmlformats.org/drawingml/2006/main" w="0">
-            <a:noFill/>
-            <a:prstDash val="solid"/>
-          </a:ln>
-        </p:spPr>
-        <p:txBody>
-          <a:bodyPr xmlns:a="http://schemas.openxmlformats.org/drawingml/2006/main" lIns="0" tIns="0" rIns="0" bIns="0" anchor="ctr"/>
-          <a:lstStyle xmlns:a="http://schemas.openxmlformats.org/drawingml/2006/main"/>
-          <a:p xmlns:a="http://schemas.openxmlformats.org/drawingml/2006/main">
-            <a:pPr>
-              <a:defRPr sz="2400" b="0">
+            <a:off x="1000125" y="3387725"/>
+            <a:ext cx="10382250" cy="996950"/>
+          </a:xfrm>
+          <a:prstGeom xmlns:a="http://schemas.openxmlformats.org/drawingml/2006/main" prst="rect">
+            <a:avLst/>
+          </a:prstGeom>
+          <a:noFill xmlns:a="http://schemas.openxmlformats.org/drawingml/2006/main"/>
+          <a:ln xmlns:a="http://schemas.openxmlformats.org/drawingml/2006/main" w="0">
+            <a:noFill/>
+            <a:prstDash val="solid"/>
+          </a:ln>
+        </p:spPr>
+        <p:txBody>
+          <a:bodyPr xmlns:a="http://schemas.openxmlformats.org/drawingml/2006/main" lIns="0" tIns="0" rIns="0" bIns="0" anchor="ctr">
+            <a:noAutofit/>
+          </a:bodyPr>
+          <a:lstStyle xmlns:a="http://schemas.openxmlformats.org/drawingml/2006/main"/>
+          <a:p xmlns:a="http://schemas.openxmlformats.org/drawingml/2006/main">
+            <a:pPr algn="l">
+              <a:buNone/>
+              <a:defRPr sz="2625" b="0">
                 <a:solidFill>
                   <a:srgbClr val="152B3A"/>
                 </a:solidFill>
-              </a:defRPr>
-            </a:pPr>
-            <a:r>
-              <a:rPr sz="2400" b="0">
+                <a:latin typeface="Calibri"/>
+                <a:ea typeface="Calibri"/>
+                <a:cs typeface="Calibri"/>
+              </a:defRPr>
+            </a:pPr>
+            <a:r>
+              <a:rPr sz="2625" b="0">
                 <a:solidFill>
                   <a:srgbClr val="152B3A"/>
                 </a:solidFill>
+                <a:latin typeface="Calibri"/>
+                <a:ea typeface="Calibri"/>
+                <a:cs typeface="Calibri"/>
               </a:rPr>
               <a:t>Standard: describe what you feel and name the force.</a:t>
             </a:r>
@@ -4389,34 +5577,43 @@
         </p:nvSpPr>
         <p:spPr>
           <a:xfrm xmlns:a="http://schemas.openxmlformats.org/drawingml/2006/main">
-            <a:off x="609600" y="4381500"/>
-            <a:ext cx="10668000" cy="762000"/>
-          </a:xfrm>
-          <a:prstGeom xmlns:a="http://schemas.openxmlformats.org/drawingml/2006/main" prst="rect">
-            <a:avLst/>
-          </a:prstGeom>
-          <a:noFill xmlns:a="http://schemas.openxmlformats.org/drawingml/2006/main"/>
-          <a:ln xmlns:a="http://schemas.openxmlformats.org/drawingml/2006/main" w="0">
-            <a:noFill/>
-            <a:prstDash val="solid"/>
-          </a:ln>
-        </p:spPr>
-        <p:txBody>
-          <a:bodyPr xmlns:a="http://schemas.openxmlformats.org/drawingml/2006/main" lIns="0" tIns="0" rIns="0" bIns="0" anchor="ctr"/>
-          <a:lstStyle xmlns:a="http://schemas.openxmlformats.org/drawingml/2006/main"/>
-          <a:p xmlns:a="http://schemas.openxmlformats.org/drawingml/2006/main">
-            <a:pPr>
-              <a:defRPr sz="2400" b="0">
+            <a:off x="1000125" y="4441825"/>
+            <a:ext cx="10382250" cy="996950"/>
+          </a:xfrm>
+          <a:prstGeom xmlns:a="http://schemas.openxmlformats.org/drawingml/2006/main" prst="rect">
+            <a:avLst/>
+          </a:prstGeom>
+          <a:noFill xmlns:a="http://schemas.openxmlformats.org/drawingml/2006/main"/>
+          <a:ln xmlns:a="http://schemas.openxmlformats.org/drawingml/2006/main" w="0">
+            <a:noFill/>
+            <a:prstDash val="solid"/>
+          </a:ln>
+        </p:spPr>
+        <p:txBody>
+          <a:bodyPr xmlns:a="http://schemas.openxmlformats.org/drawingml/2006/main" lIns="0" tIns="0" rIns="0" bIns="0" anchor="ctr">
+            <a:noAutofit/>
+          </a:bodyPr>
+          <a:lstStyle xmlns:a="http://schemas.openxmlformats.org/drawingml/2006/main"/>
+          <a:p xmlns:a="http://schemas.openxmlformats.org/drawingml/2006/main">
+            <a:pPr algn="l">
+              <a:buNone/>
+              <a:defRPr sz="2625" b="0">
                 <a:solidFill>
                   <a:srgbClr val="152B3A"/>
                 </a:solidFill>
-              </a:defRPr>
-            </a:pPr>
-            <a:r>
-              <a:rPr sz="2400" b="0">
+                <a:latin typeface="Calibri"/>
+                <a:ea typeface="Calibri"/>
+                <a:cs typeface="Calibri"/>
+              </a:defRPr>
+            </a:pPr>
+            <a:r>
+              <a:rPr sz="2625" b="0">
                 <a:solidFill>
                   <a:srgbClr val="152B3A"/>
                 </a:solidFill>
+                <a:latin typeface="Calibri"/>
+                <a:ea typeface="Calibri"/>
+                <a:cs typeface="Calibri"/>
               </a:rPr>
               <a:t>Stretch: explain where the warmth came from.</a:t>
             </a:r>
@@ -4439,36 +5636,276 @@
         </p:nvSpPr>
         <p:spPr>
           <a:xfrm xmlns:a="http://schemas.openxmlformats.org/drawingml/2006/main">
-            <a:off x="609600" y="5476875"/>
-            <a:ext cx="10668000" cy="419100"/>
-          </a:xfrm>
-          <a:prstGeom xmlns:a="http://schemas.openxmlformats.org/drawingml/2006/main" prst="rect">
-            <a:avLst/>
-          </a:prstGeom>
-          <a:noFill xmlns:a="http://schemas.openxmlformats.org/drawingml/2006/main"/>
-          <a:ln xmlns:a="http://schemas.openxmlformats.org/drawingml/2006/main" w="0">
-            <a:noFill/>
-            <a:prstDash val="solid"/>
-          </a:ln>
-        </p:spPr>
-        <p:txBody>
-          <a:bodyPr xmlns:a="http://schemas.openxmlformats.org/drawingml/2006/main" lIns="0" tIns="0" rIns="0" bIns="0" anchor="ctr"/>
-          <a:lstStyle xmlns:a="http://schemas.openxmlformats.org/drawingml/2006/main"/>
-          <a:p xmlns:a="http://schemas.openxmlformats.org/drawingml/2006/main">
-            <a:pPr>
-              <a:defRPr sz="2100" b="1">
+            <a:off x="609600" y="5667375"/>
+            <a:ext cx="10972800" cy="381000"/>
+          </a:xfrm>
+          <a:prstGeom xmlns:a="http://schemas.openxmlformats.org/drawingml/2006/main" prst="rect">
+            <a:avLst/>
+          </a:prstGeom>
+          <a:noFill xmlns:a="http://schemas.openxmlformats.org/drawingml/2006/main"/>
+          <a:ln xmlns:a="http://schemas.openxmlformats.org/drawingml/2006/main" w="0">
+            <a:noFill/>
+            <a:prstDash val="solid"/>
+          </a:ln>
+        </p:spPr>
+        <p:txBody>
+          <a:bodyPr xmlns:a="http://schemas.openxmlformats.org/drawingml/2006/main" lIns="0" tIns="0" rIns="0" bIns="0" anchor="ctr">
+            <a:noAutofit/>
+          </a:bodyPr>
+          <a:lstStyle xmlns:a="http://schemas.openxmlformats.org/drawingml/2006/main"/>
+          <a:p xmlns:a="http://schemas.openxmlformats.org/drawingml/2006/main">
+            <a:pPr algn="l">
+              <a:buNone/>
+              <a:defRPr sz="1875" b="1">
                 <a:solidFill>
                   <a:srgbClr val="28685E"/>
                 </a:solidFill>
-              </a:defRPr>
-            </a:pPr>
-            <a:r>
-              <a:rPr sz="2100" b="1">
+                <a:latin typeface="Calibri"/>
+                <a:ea typeface="Calibri"/>
+                <a:cs typeface="Calibri"/>
+              </a:defRPr>
+            </a:pPr>
+            <a:r>
+              <a:rPr sz="1875" b="1">
                 <a:solidFill>
                   <a:srgbClr val="28685E"/>
                 </a:solidFill>
+                <a:latin typeface="Calibri"/>
+                <a:ea typeface="Calibri"/>
+                <a:cs typeface="Calibri"/>
               </a:rPr>
               <a:t>You can watch, point, speak, draw or write.</a:t>
+            </a:r>
+          </a:p>
+        </p:txBody>
+      </p:sp>
+      <p:sp>
+        <p:nvSpPr>
+          <p:cNvPr id="12" name="cue-0">
+            <a:extLst xmlns:a="http://schemas.openxmlformats.org/drawingml/2006/main">
+              <a:ext uri="{FF2B5EF4-FFF2-40B4-BE49-F238E27FC236}">
+                <a16:creationId xmlns:a16="http://schemas.microsoft.com/office/drawing/2014/main" id="{A57B1565-A920-4215-A8ED-AA8DBDFD3DA8}"/>
+              </a:ext>
+            </a:extLst>
+          </p:cNvPr>
+          <p:cNvSpPr>
+            <a:spLocks xmlns:a="http://schemas.openxmlformats.org/drawingml/2006/main" noGrp="1"/>
+          </p:cNvSpPr>
+          <p:nvPr/>
+        </p:nvSpPr>
+        <p:spPr>
+          <a:xfrm xmlns:a="http://schemas.openxmlformats.org/drawingml/2006/main">
+            <a:off x="609600" y="2362200"/>
+            <a:ext cx="323850" cy="323850"/>
+          </a:xfrm>
+          <a:prstGeom xmlns:a="http://schemas.openxmlformats.org/drawingml/2006/main" prst="rect">
+            <a:avLst/>
+          </a:prstGeom>
+          <a:noFill xmlns:a="http://schemas.openxmlformats.org/drawingml/2006/main"/>
+          <a:ln xmlns:a="http://schemas.openxmlformats.org/drawingml/2006/main" w="0">
+            <a:noFill/>
+          </a:ln>
+        </p:spPr>
+        <p:txBody>
+          <a:bodyPr xmlns:a="http://schemas.openxmlformats.org/drawingml/2006/main" lIns="0" tIns="0" rIns="0" bIns="0" anchor="ctr">
+            <a:noAutofit/>
+          </a:bodyPr>
+          <a:lstStyle xmlns:a="http://schemas.openxmlformats.org/drawingml/2006/main"/>
+          <a:p xmlns:a="http://schemas.openxmlformats.org/drawingml/2006/main">
+            <a:pPr algn="l">
+              <a:defRPr sz="1350" b="1">
+                <a:solidFill>
+                  <a:srgbClr val="28685E"/>
+                </a:solidFill>
+                <a:latin typeface="Calibri"/>
+                <a:ea typeface="Calibri"/>
+                <a:cs typeface="Calibri"/>
+              </a:defRPr>
+            </a:pPr>
+            <a:r>
+              <a:rPr sz="1350" b="1">
+                <a:solidFill>
+                  <a:srgbClr val="28685E"/>
+                </a:solidFill>
+                <a:latin typeface="Calibri"/>
+                <a:ea typeface="Calibri"/>
+                <a:cs typeface="Calibri"/>
+              </a:rPr>
+              <a:t>01</a:t>
+            </a:r>
+          </a:p>
+        </p:txBody>
+      </p:sp>
+      <p:sp>
+        <p:nvSpPr>
+          <p:cNvPr id="13" name="row-rule-0">
+            <a:extLst xmlns:a="http://schemas.openxmlformats.org/drawingml/2006/main">
+              <a:ext uri="{FF2B5EF4-FFF2-40B4-BE49-F238E27FC236}">
+                <a16:creationId xmlns:a16="http://schemas.microsoft.com/office/drawing/2014/main" id="{A85077F1-7CAF-4F56-9BAF-56D104791D77}"/>
+              </a:ext>
+            </a:extLst>
+          </p:cNvPr>
+          <p:cNvSpPr>
+            <a:spLocks xmlns:a="http://schemas.openxmlformats.org/drawingml/2006/main" noGrp="1"/>
+          </p:cNvSpPr>
+          <p:nvPr/>
+        </p:nvSpPr>
+        <p:spPr>
+          <a:xfrm xmlns:a="http://schemas.openxmlformats.org/drawingml/2006/main">
+            <a:off x="1000125" y="3340100"/>
+            <a:ext cx="10334625" cy="0"/>
+          </a:xfrm>
+          <a:prstGeom xmlns:a="http://schemas.openxmlformats.org/drawingml/2006/main" prst="line">
+            <a:avLst/>
+          </a:prstGeom>
+          <a:noFill xmlns:a="http://schemas.openxmlformats.org/drawingml/2006/main"/>
+          <a:ln xmlns:a="http://schemas.openxmlformats.org/drawingml/2006/main" w="9525">
+            <a:solidFill>
+              <a:srgbClr val="CEDBD3"/>
+            </a:solidFill>
+          </a:ln>
+        </p:spPr>
+      </p:sp>
+      <p:sp>
+        <p:nvSpPr>
+          <p:cNvPr id="14" name="cue-1">
+            <a:extLst xmlns:a="http://schemas.openxmlformats.org/drawingml/2006/main">
+              <a:ext uri="{FF2B5EF4-FFF2-40B4-BE49-F238E27FC236}">
+                <a16:creationId xmlns:a16="http://schemas.microsoft.com/office/drawing/2014/main" id="{954EB837-18D4-4499-A9FF-B230AD44E601}"/>
+              </a:ext>
+            </a:extLst>
+          </p:cNvPr>
+          <p:cNvSpPr>
+            <a:spLocks xmlns:a="http://schemas.openxmlformats.org/drawingml/2006/main" noGrp="1"/>
+          </p:cNvSpPr>
+          <p:nvPr/>
+        </p:nvSpPr>
+        <p:spPr>
+          <a:xfrm xmlns:a="http://schemas.openxmlformats.org/drawingml/2006/main">
+            <a:off x="609600" y="3416300"/>
+            <a:ext cx="323850" cy="323850"/>
+          </a:xfrm>
+          <a:prstGeom xmlns:a="http://schemas.openxmlformats.org/drawingml/2006/main" prst="rect">
+            <a:avLst/>
+          </a:prstGeom>
+          <a:noFill xmlns:a="http://schemas.openxmlformats.org/drawingml/2006/main"/>
+          <a:ln xmlns:a="http://schemas.openxmlformats.org/drawingml/2006/main" w="0">
+            <a:noFill/>
+          </a:ln>
+        </p:spPr>
+        <p:txBody>
+          <a:bodyPr xmlns:a="http://schemas.openxmlformats.org/drawingml/2006/main" lIns="0" tIns="0" rIns="0" bIns="0" anchor="ctr">
+            <a:noAutofit/>
+          </a:bodyPr>
+          <a:lstStyle xmlns:a="http://schemas.openxmlformats.org/drawingml/2006/main"/>
+          <a:p xmlns:a="http://schemas.openxmlformats.org/drawingml/2006/main">
+            <a:pPr algn="l">
+              <a:defRPr sz="1350" b="1">
+                <a:solidFill>
+                  <a:srgbClr val="28685E"/>
+                </a:solidFill>
+                <a:latin typeface="Calibri"/>
+                <a:ea typeface="Calibri"/>
+                <a:cs typeface="Calibri"/>
+              </a:defRPr>
+            </a:pPr>
+            <a:r>
+              <a:rPr sz="1350" b="1">
+                <a:solidFill>
+                  <a:srgbClr val="28685E"/>
+                </a:solidFill>
+                <a:latin typeface="Calibri"/>
+                <a:ea typeface="Calibri"/>
+                <a:cs typeface="Calibri"/>
+              </a:rPr>
+              <a:t>02</a:t>
+            </a:r>
+          </a:p>
+        </p:txBody>
+      </p:sp>
+      <p:sp>
+        <p:nvSpPr>
+          <p:cNvPr id="15" name="row-rule-1">
+            <a:extLst xmlns:a="http://schemas.openxmlformats.org/drawingml/2006/main">
+              <a:ext uri="{FF2B5EF4-FFF2-40B4-BE49-F238E27FC236}">
+                <a16:creationId xmlns:a16="http://schemas.microsoft.com/office/drawing/2014/main" id="{A5095F49-D9E7-425C-A5A0-B527A5C276D8}"/>
+              </a:ext>
+            </a:extLst>
+          </p:cNvPr>
+          <p:cNvSpPr>
+            <a:spLocks xmlns:a="http://schemas.openxmlformats.org/drawingml/2006/main" noGrp="1"/>
+          </p:cNvSpPr>
+          <p:nvPr/>
+        </p:nvSpPr>
+        <p:spPr>
+          <a:xfrm xmlns:a="http://schemas.openxmlformats.org/drawingml/2006/main">
+            <a:off x="1000125" y="4394200"/>
+            <a:ext cx="10334625" cy="0"/>
+          </a:xfrm>
+          <a:prstGeom xmlns:a="http://schemas.openxmlformats.org/drawingml/2006/main" prst="line">
+            <a:avLst/>
+          </a:prstGeom>
+          <a:noFill xmlns:a="http://schemas.openxmlformats.org/drawingml/2006/main"/>
+          <a:ln xmlns:a="http://schemas.openxmlformats.org/drawingml/2006/main" w="9525">
+            <a:solidFill>
+              <a:srgbClr val="CEDBD3"/>
+            </a:solidFill>
+          </a:ln>
+        </p:spPr>
+      </p:sp>
+      <p:sp>
+        <p:nvSpPr>
+          <p:cNvPr id="16" name="cue-2">
+            <a:extLst xmlns:a="http://schemas.openxmlformats.org/drawingml/2006/main">
+              <a:ext uri="{FF2B5EF4-FFF2-40B4-BE49-F238E27FC236}">
+                <a16:creationId xmlns:a16="http://schemas.microsoft.com/office/drawing/2014/main" id="{BF84359B-F655-4EDD-B7AE-C192BD709FAA}"/>
+              </a:ext>
+            </a:extLst>
+          </p:cNvPr>
+          <p:cNvSpPr>
+            <a:spLocks xmlns:a="http://schemas.openxmlformats.org/drawingml/2006/main" noGrp="1"/>
+          </p:cNvSpPr>
+          <p:nvPr/>
+        </p:nvSpPr>
+        <p:spPr>
+          <a:xfrm xmlns:a="http://schemas.openxmlformats.org/drawingml/2006/main">
+            <a:off x="609600" y="4470400"/>
+            <a:ext cx="323850" cy="323850"/>
+          </a:xfrm>
+          <a:prstGeom xmlns:a="http://schemas.openxmlformats.org/drawingml/2006/main" prst="rect">
+            <a:avLst/>
+          </a:prstGeom>
+          <a:noFill xmlns:a="http://schemas.openxmlformats.org/drawingml/2006/main"/>
+          <a:ln xmlns:a="http://schemas.openxmlformats.org/drawingml/2006/main" w="0">
+            <a:noFill/>
+          </a:ln>
+        </p:spPr>
+        <p:txBody>
+          <a:bodyPr xmlns:a="http://schemas.openxmlformats.org/drawingml/2006/main" lIns="0" tIns="0" rIns="0" bIns="0" anchor="ctr">
+            <a:noAutofit/>
+          </a:bodyPr>
+          <a:lstStyle xmlns:a="http://schemas.openxmlformats.org/drawingml/2006/main"/>
+          <a:p xmlns:a="http://schemas.openxmlformats.org/drawingml/2006/main">
+            <a:pPr algn="l">
+              <a:defRPr sz="1350" b="1">
+                <a:solidFill>
+                  <a:srgbClr val="28685E"/>
+                </a:solidFill>
+                <a:latin typeface="Calibri"/>
+                <a:ea typeface="Calibri"/>
+                <a:cs typeface="Calibri"/>
+              </a:defRPr>
+            </a:pPr>
+            <a:r>
+              <a:rPr sz="1350" b="1">
+                <a:solidFill>
+                  <a:srgbClr val="28685E"/>
+                </a:solidFill>
+                <a:latin typeface="Calibri"/>
+                <a:ea typeface="Calibri"/>
+                <a:cs typeface="Calibri"/>
+              </a:rPr>
+              <a:t>03</a:t>
             </a:r>
           </a:p>
         </p:txBody>
@@ -4489,7 +5926,7 @@
     <p:bg>
       <p:bgPr>
         <a:solidFill xmlns:a="http://schemas.openxmlformats.org/drawingml/2006/main">
-          <a:srgbClr val="F5F1E8"/>
+          <a:srgbClr val="FAF9F5"/>
         </a:solidFill>
       </p:bgPr>
     </p:bg>
@@ -4518,8 +5955,8 @@
         </p:nvSpPr>
         <p:spPr>
           <a:xfrm xmlns:a="http://schemas.openxmlformats.org/drawingml/2006/main">
-            <a:off x="609600" y="552450"/>
-            <a:ext cx="781050" cy="57150"/>
+            <a:off x="609600" y="733425"/>
+            <a:ext cx="781050" cy="38100"/>
           </a:xfrm>
           <a:prstGeom xmlns:a="http://schemas.openxmlformats.org/drawingml/2006/main" prst="rect">
             <a:avLst/>
@@ -4549,34 +5986,43 @@
         </p:nvSpPr>
         <p:spPr>
           <a:xfrm xmlns:a="http://schemas.openxmlformats.org/drawingml/2006/main">
-            <a:off x="609600" y="762000"/>
-            <a:ext cx="7143750" cy="285750"/>
-          </a:xfrm>
-          <a:prstGeom xmlns:a="http://schemas.openxmlformats.org/drawingml/2006/main" prst="rect">
-            <a:avLst/>
-          </a:prstGeom>
-          <a:noFill xmlns:a="http://schemas.openxmlformats.org/drawingml/2006/main"/>
-          <a:ln xmlns:a="http://schemas.openxmlformats.org/drawingml/2006/main" w="0">
-            <a:noFill/>
-            <a:prstDash val="solid"/>
-          </a:ln>
-        </p:spPr>
-        <p:txBody>
-          <a:bodyPr xmlns:a="http://schemas.openxmlformats.org/drawingml/2006/main" lIns="0" tIns="0" rIns="0" bIns="0" anchor="ctr"/>
-          <a:lstStyle xmlns:a="http://schemas.openxmlformats.org/drawingml/2006/main"/>
-          <a:p xmlns:a="http://schemas.openxmlformats.org/drawingml/2006/main">
-            <a:pPr>
-              <a:defRPr sz="1500" b="1">
+            <a:off x="609600" y="342900"/>
+            <a:ext cx="9334500" cy="304800"/>
+          </a:xfrm>
+          <a:prstGeom xmlns:a="http://schemas.openxmlformats.org/drawingml/2006/main" prst="rect">
+            <a:avLst/>
+          </a:prstGeom>
+          <a:noFill xmlns:a="http://schemas.openxmlformats.org/drawingml/2006/main"/>
+          <a:ln xmlns:a="http://schemas.openxmlformats.org/drawingml/2006/main" w="0">
+            <a:noFill/>
+            <a:prstDash val="solid"/>
+          </a:ln>
+        </p:spPr>
+        <p:txBody>
+          <a:bodyPr xmlns:a="http://schemas.openxmlformats.org/drawingml/2006/main" lIns="0" tIns="0" rIns="0" bIns="0" anchor="ctr">
+            <a:noAutofit/>
+          </a:bodyPr>
+          <a:lstStyle xmlns:a="http://schemas.openxmlformats.org/drawingml/2006/main"/>
+          <a:p xmlns:a="http://schemas.openxmlformats.org/drawingml/2006/main">
+            <a:pPr algn="l">
+              <a:buNone/>
+              <a:defRPr sz="1350" b="1">
                 <a:solidFill>
                   <a:srgbClr val="28685E"/>
                 </a:solidFill>
-              </a:defRPr>
-            </a:pPr>
-            <a:r>
-              <a:rPr sz="1500" b="1">
+                <a:latin typeface="Calibri"/>
+                <a:ea typeface="Calibri"/>
+                <a:cs typeface="Calibri"/>
+              </a:defRPr>
+            </a:pPr>
+            <a:r>
+              <a:rPr sz="1350" b="1">
                 <a:solidFill>
                   <a:srgbClr val="28685E"/>
                 </a:solidFill>
+                <a:latin typeface="Calibri"/>
+                <a:ea typeface="Calibri"/>
+                <a:cs typeface="Calibri"/>
               </a:rPr>
               <a:t>MADE BY MATT  /  GROW SCIENCE</a:t>
             </a:r>
@@ -4599,34 +6045,43 @@
         </p:nvSpPr>
         <p:spPr>
           <a:xfrm xmlns:a="http://schemas.openxmlformats.org/drawingml/2006/main">
-            <a:off x="609600" y="1352550"/>
-            <a:ext cx="10972800" cy="952500"/>
-          </a:xfrm>
-          <a:prstGeom xmlns:a="http://schemas.openxmlformats.org/drawingml/2006/main" prst="rect">
-            <a:avLst/>
-          </a:prstGeom>
-          <a:noFill xmlns:a="http://schemas.openxmlformats.org/drawingml/2006/main"/>
-          <a:ln xmlns:a="http://schemas.openxmlformats.org/drawingml/2006/main" w="0">
-            <a:noFill/>
-            <a:prstDash val="solid"/>
-          </a:ln>
-        </p:spPr>
-        <p:txBody>
-          <a:bodyPr xmlns:a="http://schemas.openxmlformats.org/drawingml/2006/main" lIns="0" tIns="0" rIns="0" bIns="0" anchor="ctr"/>
-          <a:lstStyle xmlns:a="http://schemas.openxmlformats.org/drawingml/2006/main"/>
-          <a:p xmlns:a="http://schemas.openxmlformats.org/drawingml/2006/main">
-            <a:pPr>
-              <a:defRPr sz="3750" b="1">
+            <a:off x="609600" y="990600"/>
+            <a:ext cx="10972800" cy="1000125"/>
+          </a:xfrm>
+          <a:prstGeom xmlns:a="http://schemas.openxmlformats.org/drawingml/2006/main" prst="rect">
+            <a:avLst/>
+          </a:prstGeom>
+          <a:noFill xmlns:a="http://schemas.openxmlformats.org/drawingml/2006/main"/>
+          <a:ln xmlns:a="http://schemas.openxmlformats.org/drawingml/2006/main" w="0">
+            <a:noFill/>
+            <a:prstDash val="solid"/>
+          </a:ln>
+        </p:spPr>
+        <p:txBody>
+          <a:bodyPr xmlns:a="http://schemas.openxmlformats.org/drawingml/2006/main" lIns="0" tIns="0" rIns="0" bIns="0" anchor="ctr">
+            <a:noAutofit/>
+          </a:bodyPr>
+          <a:lstStyle xmlns:a="http://schemas.openxmlformats.org/drawingml/2006/main"/>
+          <a:p xmlns:a="http://schemas.openxmlformats.org/drawingml/2006/main">
+            <a:pPr algn="l">
+              <a:buNone/>
+              <a:defRPr sz="3675" b="1">
                 <a:solidFill>
                   <a:srgbClr val="152B3A"/>
                 </a:solidFill>
-              </a:defRPr>
-            </a:pPr>
-            <a:r>
-              <a:rPr sz="3750" b="1">
+                <a:latin typeface="Calibri"/>
+                <a:ea typeface="Calibri"/>
+                <a:cs typeface="Calibri"/>
+              </a:defRPr>
+            </a:pPr>
+            <a:r>
+              <a:rPr sz="3675" b="1">
                 <a:solidFill>
                   <a:srgbClr val="152B3A"/>
                 </a:solidFill>
+                <a:latin typeface="Calibri"/>
+                <a:ea typeface="Calibri"/>
+                <a:cs typeface="Calibri"/>
               </a:rPr>
               <a:t>Three things to work out</a:t>
             </a:r>
@@ -4649,14 +6104,14 @@
         </p:nvSpPr>
         <p:spPr>
           <a:xfrm xmlns:a="http://schemas.openxmlformats.org/drawingml/2006/main">
-            <a:off x="609600" y="6219825"/>
+            <a:off x="609600" y="6191250"/>
             <a:ext cx="10972800" cy="9525"/>
           </a:xfrm>
           <a:prstGeom xmlns:a="http://schemas.openxmlformats.org/drawingml/2006/main" prst="rect">
             <a:avLst/>
           </a:prstGeom>
           <a:solidFill xmlns:a="http://schemas.openxmlformats.org/drawingml/2006/main">
-            <a:srgbClr val="DCE7DD"/>
+            <a:srgbClr val="CEDBD3"/>
           </a:solidFill>
           <a:ln xmlns:a="http://schemas.openxmlformats.org/drawingml/2006/main" w="0">
             <a:noFill/>
@@ -4680,34 +6135,43 @@
         </p:nvSpPr>
         <p:spPr>
           <a:xfrm xmlns:a="http://schemas.openxmlformats.org/drawingml/2006/main">
-            <a:off x="609600" y="6381750"/>
-            <a:ext cx="9525000" cy="228600"/>
-          </a:xfrm>
-          <a:prstGeom xmlns:a="http://schemas.openxmlformats.org/drawingml/2006/main" prst="rect">
-            <a:avLst/>
-          </a:prstGeom>
-          <a:noFill xmlns:a="http://schemas.openxmlformats.org/drawingml/2006/main"/>
-          <a:ln xmlns:a="http://schemas.openxmlformats.org/drawingml/2006/main" w="0">
-            <a:noFill/>
-            <a:prstDash val="solid"/>
-          </a:ln>
-        </p:spPr>
-        <p:txBody>
-          <a:bodyPr xmlns:a="http://schemas.openxmlformats.org/drawingml/2006/main" lIns="0" tIns="0" rIns="0" bIns="0" anchor="ctr"/>
-          <a:lstStyle xmlns:a="http://schemas.openxmlformats.org/drawingml/2006/main"/>
-          <a:p xmlns:a="http://schemas.openxmlformats.org/drawingml/2006/main">
-            <a:pPr>
-              <a:defRPr sz="1275" b="0">
+            <a:off x="609600" y="6419850"/>
+            <a:ext cx="9525000" cy="219075"/>
+          </a:xfrm>
+          <a:prstGeom xmlns:a="http://schemas.openxmlformats.org/drawingml/2006/main" prst="rect">
+            <a:avLst/>
+          </a:prstGeom>
+          <a:noFill xmlns:a="http://schemas.openxmlformats.org/drawingml/2006/main"/>
+          <a:ln xmlns:a="http://schemas.openxmlformats.org/drawingml/2006/main" w="0">
+            <a:noFill/>
+            <a:prstDash val="solid"/>
+          </a:ln>
+        </p:spPr>
+        <p:txBody>
+          <a:bodyPr xmlns:a="http://schemas.openxmlformats.org/drawingml/2006/main" lIns="0" tIns="0" rIns="0" bIns="0" anchor="ctr">
+            <a:noAutofit/>
+          </a:bodyPr>
+          <a:lstStyle xmlns:a="http://schemas.openxmlformats.org/drawingml/2006/main"/>
+          <a:p xmlns:a="http://schemas.openxmlformats.org/drawingml/2006/main">
+            <a:pPr algn="l">
+              <a:buNone/>
+              <a:defRPr sz="1200" b="0">
                 <a:solidFill>
                   <a:srgbClr val="50616B"/>
                 </a:solidFill>
-              </a:defRPr>
-            </a:pPr>
-            <a:r>
-              <a:rPr sz="1275" b="0">
+                <a:latin typeface="Calibri"/>
+                <a:ea typeface="Calibri"/>
+                <a:cs typeface="Calibri"/>
+              </a:defRPr>
+            </a:pPr>
+            <a:r>
+              <a:rPr sz="1200" b="0">
                 <a:solidFill>
                   <a:srgbClr val="50616B"/>
                 </a:solidFill>
+                <a:latin typeface="Calibri"/>
+                <a:ea typeface="Calibri"/>
+                <a:cs typeface="Calibri"/>
               </a:rPr>
               <a:t>AUTUMN 1  ·  WEEK 3  ·  LESSON A</a:t>
             </a:r>
@@ -4730,27 +6194,33 @@
         </p:nvSpPr>
         <p:spPr>
           <a:xfrm xmlns:a="http://schemas.openxmlformats.org/drawingml/2006/main">
-            <a:off x="11106150" y="6362700"/>
-            <a:ext cx="476250" cy="238125"/>
-          </a:xfrm>
-          <a:prstGeom xmlns:a="http://schemas.openxmlformats.org/drawingml/2006/main" prst="rect">
-            <a:avLst/>
-          </a:prstGeom>
-          <a:noFill xmlns:a="http://schemas.openxmlformats.org/drawingml/2006/main"/>
-          <a:ln xmlns:a="http://schemas.openxmlformats.org/drawingml/2006/main" w="0">
-            <a:noFill/>
-            <a:prstDash val="solid"/>
-          </a:ln>
-        </p:spPr>
-        <p:txBody>
-          <a:bodyPr xmlns:a="http://schemas.openxmlformats.org/drawingml/2006/main" lIns="0" tIns="0" rIns="0" bIns="0" anchor="ctr"/>
-          <a:lstStyle xmlns:a="http://schemas.openxmlformats.org/drawingml/2006/main"/>
-          <a:p xmlns:a="http://schemas.openxmlformats.org/drawingml/2006/main">
-            <a:pPr>
+            <a:off x="11106150" y="6400800"/>
+            <a:ext cx="476250" cy="247650"/>
+          </a:xfrm>
+          <a:prstGeom xmlns:a="http://schemas.openxmlformats.org/drawingml/2006/main" prst="rect">
+            <a:avLst/>
+          </a:prstGeom>
+          <a:noFill xmlns:a="http://schemas.openxmlformats.org/drawingml/2006/main"/>
+          <a:ln xmlns:a="http://schemas.openxmlformats.org/drawingml/2006/main" w="0">
+            <a:noFill/>
+            <a:prstDash val="solid"/>
+          </a:ln>
+        </p:spPr>
+        <p:txBody>
+          <a:bodyPr xmlns:a="http://schemas.openxmlformats.org/drawingml/2006/main" lIns="0" tIns="0" rIns="0" bIns="0" anchor="ctr">
+            <a:noAutofit/>
+          </a:bodyPr>
+          <a:lstStyle xmlns:a="http://schemas.openxmlformats.org/drawingml/2006/main"/>
+          <a:p xmlns:a="http://schemas.openxmlformats.org/drawingml/2006/main">
+            <a:pPr algn="l">
+              <a:buNone/>
               <a:defRPr sz="1350" b="1">
                 <a:solidFill>
                   <a:srgbClr val="28685E"/>
                 </a:solidFill>
+                <a:latin typeface="Calibri"/>
+                <a:ea typeface="Calibri"/>
+                <a:cs typeface="Calibri"/>
               </a:defRPr>
             </a:pPr>
             <a:r>
@@ -4758,6 +6228,9 @@
                 <a:solidFill>
                   <a:srgbClr val="28685E"/>
                 </a:solidFill>
+                <a:latin typeface="Calibri"/>
+                <a:ea typeface="Calibri"/>
+                <a:cs typeface="Calibri"/>
               </a:rPr>
               <a:t>03</a:t>
             </a:r>
@@ -4780,34 +6253,43 @@
         </p:nvSpPr>
         <p:spPr>
           <a:xfrm xmlns:a="http://schemas.openxmlformats.org/drawingml/2006/main">
-            <a:off x="609600" y="2667000"/>
-            <a:ext cx="10668000" cy="809625"/>
-          </a:xfrm>
-          <a:prstGeom xmlns:a="http://schemas.openxmlformats.org/drawingml/2006/main" prst="rect">
-            <a:avLst/>
-          </a:prstGeom>
-          <a:noFill xmlns:a="http://schemas.openxmlformats.org/drawingml/2006/main"/>
-          <a:ln xmlns:a="http://schemas.openxmlformats.org/drawingml/2006/main" w="0">
-            <a:noFill/>
-            <a:prstDash val="solid"/>
-          </a:ln>
-        </p:spPr>
-        <p:txBody>
-          <a:bodyPr xmlns:a="http://schemas.openxmlformats.org/drawingml/2006/main" lIns="0" tIns="0" rIns="0" bIns="0" anchor="ctr"/>
-          <a:lstStyle xmlns:a="http://schemas.openxmlformats.org/drawingml/2006/main"/>
-          <a:p xmlns:a="http://schemas.openxmlformats.org/drawingml/2006/main">
-            <a:pPr>
-              <a:defRPr sz="2850" b="0">
+            <a:off x="1000125" y="2333625"/>
+            <a:ext cx="10382250" cy="1076325"/>
+          </a:xfrm>
+          <a:prstGeom xmlns:a="http://schemas.openxmlformats.org/drawingml/2006/main" prst="rect">
+            <a:avLst/>
+          </a:prstGeom>
+          <a:noFill xmlns:a="http://schemas.openxmlformats.org/drawingml/2006/main"/>
+          <a:ln xmlns:a="http://schemas.openxmlformats.org/drawingml/2006/main" w="0">
+            <a:noFill/>
+            <a:prstDash val="solid"/>
+          </a:ln>
+        </p:spPr>
+        <p:txBody>
+          <a:bodyPr xmlns:a="http://schemas.openxmlformats.org/drawingml/2006/main" lIns="0" tIns="0" rIns="0" bIns="0" anchor="ctr">
+            <a:noAutofit/>
+          </a:bodyPr>
+          <a:lstStyle xmlns:a="http://schemas.openxmlformats.org/drawingml/2006/main"/>
+          <a:p xmlns:a="http://schemas.openxmlformats.org/drawingml/2006/main">
+            <a:pPr algn="l">
+              <a:buNone/>
+              <a:defRPr sz="2625" b="0">
                 <a:solidFill>
                   <a:srgbClr val="152B3A"/>
                 </a:solidFill>
-              </a:defRPr>
-            </a:pPr>
-            <a:r>
-              <a:rPr sz="2850" b="0">
+                <a:latin typeface="Calibri"/>
+                <a:ea typeface="Calibri"/>
+                <a:cs typeface="Calibri"/>
+              </a:defRPr>
+            </a:pPr>
+            <a:r>
+              <a:rPr sz="2625" b="0">
                 <a:solidFill>
                   <a:srgbClr val="152B3A"/>
                 </a:solidFill>
+                <a:latin typeface="Calibri"/>
+                <a:ea typeface="Calibri"/>
+                <a:cs typeface="Calibri"/>
               </a:rPr>
               <a:t>1   What is friction?</a:t>
             </a:r>
@@ -4830,34 +6312,43 @@
         </p:nvSpPr>
         <p:spPr>
           <a:xfrm xmlns:a="http://schemas.openxmlformats.org/drawingml/2006/main">
-            <a:off x="609600" y="3571875"/>
-            <a:ext cx="10668000" cy="809625"/>
-          </a:xfrm>
-          <a:prstGeom xmlns:a="http://schemas.openxmlformats.org/drawingml/2006/main" prst="rect">
-            <a:avLst/>
-          </a:prstGeom>
-          <a:noFill xmlns:a="http://schemas.openxmlformats.org/drawingml/2006/main"/>
-          <a:ln xmlns:a="http://schemas.openxmlformats.org/drawingml/2006/main" w="0">
-            <a:noFill/>
-            <a:prstDash val="solid"/>
-          </a:ln>
-        </p:spPr>
-        <p:txBody>
-          <a:bodyPr xmlns:a="http://schemas.openxmlformats.org/drawingml/2006/main" lIns="0" tIns="0" rIns="0" bIns="0" anchor="ctr"/>
-          <a:lstStyle xmlns:a="http://schemas.openxmlformats.org/drawingml/2006/main"/>
-          <a:p xmlns:a="http://schemas.openxmlformats.org/drawingml/2006/main">
-            <a:pPr>
-              <a:defRPr sz="2850" b="0">
+            <a:off x="1000125" y="3467100"/>
+            <a:ext cx="10382250" cy="1076325"/>
+          </a:xfrm>
+          <a:prstGeom xmlns:a="http://schemas.openxmlformats.org/drawingml/2006/main" prst="rect">
+            <a:avLst/>
+          </a:prstGeom>
+          <a:noFill xmlns:a="http://schemas.openxmlformats.org/drawingml/2006/main"/>
+          <a:ln xmlns:a="http://schemas.openxmlformats.org/drawingml/2006/main" w="0">
+            <a:noFill/>
+            <a:prstDash val="solid"/>
+          </a:ln>
+        </p:spPr>
+        <p:txBody>
+          <a:bodyPr xmlns:a="http://schemas.openxmlformats.org/drawingml/2006/main" lIns="0" tIns="0" rIns="0" bIns="0" anchor="ctr">
+            <a:noAutofit/>
+          </a:bodyPr>
+          <a:lstStyle xmlns:a="http://schemas.openxmlformats.org/drawingml/2006/main"/>
+          <a:p xmlns:a="http://schemas.openxmlformats.org/drawingml/2006/main">
+            <a:pPr algn="l">
+              <a:buNone/>
+              <a:defRPr sz="2625" b="0">
                 <a:solidFill>
                   <a:srgbClr val="152B3A"/>
                 </a:solidFill>
-              </a:defRPr>
-            </a:pPr>
-            <a:r>
-              <a:rPr sz="2850" b="0">
+                <a:latin typeface="Calibri"/>
+                <a:ea typeface="Calibri"/>
+                <a:cs typeface="Calibri"/>
+              </a:defRPr>
+            </a:pPr>
+            <a:r>
+              <a:rPr sz="2625" b="0">
                 <a:solidFill>
                   <a:srgbClr val="152B3A"/>
                 </a:solidFill>
+                <a:latin typeface="Calibri"/>
+                <a:ea typeface="Calibri"/>
+                <a:cs typeface="Calibri"/>
               </a:rPr>
               <a:t>2   When does friction help or hinder?</a:t>
             </a:r>
@@ -4880,39 +6371,108 @@
         </p:nvSpPr>
         <p:spPr>
           <a:xfrm xmlns:a="http://schemas.openxmlformats.org/drawingml/2006/main">
-            <a:off x="609600" y="4476750"/>
-            <a:ext cx="10668000" cy="809625"/>
-          </a:xfrm>
-          <a:prstGeom xmlns:a="http://schemas.openxmlformats.org/drawingml/2006/main" prst="rect">
-            <a:avLst/>
-          </a:prstGeom>
-          <a:noFill xmlns:a="http://schemas.openxmlformats.org/drawingml/2006/main"/>
-          <a:ln xmlns:a="http://schemas.openxmlformats.org/drawingml/2006/main" w="0">
-            <a:noFill/>
-            <a:prstDash val="solid"/>
-          </a:ln>
-        </p:spPr>
-        <p:txBody>
-          <a:bodyPr xmlns:a="http://schemas.openxmlformats.org/drawingml/2006/main" lIns="0" tIns="0" rIns="0" bIns="0" anchor="ctr"/>
-          <a:lstStyle xmlns:a="http://schemas.openxmlformats.org/drawingml/2006/main"/>
-          <a:p xmlns:a="http://schemas.openxmlformats.org/drawingml/2006/main">
-            <a:pPr>
-              <a:defRPr sz="2850" b="0">
+            <a:off x="1000125" y="4600575"/>
+            <a:ext cx="10382250" cy="1076325"/>
+          </a:xfrm>
+          <a:prstGeom xmlns:a="http://schemas.openxmlformats.org/drawingml/2006/main" prst="rect">
+            <a:avLst/>
+          </a:prstGeom>
+          <a:noFill xmlns:a="http://schemas.openxmlformats.org/drawingml/2006/main"/>
+          <a:ln xmlns:a="http://schemas.openxmlformats.org/drawingml/2006/main" w="0">
+            <a:noFill/>
+            <a:prstDash val="solid"/>
+          </a:ln>
+        </p:spPr>
+        <p:txBody>
+          <a:bodyPr xmlns:a="http://schemas.openxmlformats.org/drawingml/2006/main" lIns="0" tIns="0" rIns="0" bIns="0" anchor="ctr">
+            <a:noAutofit/>
+          </a:bodyPr>
+          <a:lstStyle xmlns:a="http://schemas.openxmlformats.org/drawingml/2006/main"/>
+          <a:p xmlns:a="http://schemas.openxmlformats.org/drawingml/2006/main">
+            <a:pPr algn="l">
+              <a:buNone/>
+              <a:defRPr sz="2625" b="0">
                 <a:solidFill>
                   <a:srgbClr val="152B3A"/>
                 </a:solidFill>
-              </a:defRPr>
-            </a:pPr>
-            <a:r>
-              <a:rPr sz="2850" b="0">
+                <a:latin typeface="Calibri"/>
+                <a:ea typeface="Calibri"/>
+                <a:cs typeface="Calibri"/>
+              </a:defRPr>
+            </a:pPr>
+            <a:r>
+              <a:rPr sz="2625" b="0">
                 <a:solidFill>
                   <a:srgbClr val="152B3A"/>
                 </a:solidFill>
+                <a:latin typeface="Calibri"/>
+                <a:ea typeface="Calibri"/>
+                <a:cs typeface="Calibri"/>
               </a:rPr>
               <a:t>3   What will happen on two different surfaces?</a:t>
             </a:r>
           </a:p>
         </p:txBody>
+      </p:sp>
+      <p:sp>
+        <p:nvSpPr>
+          <p:cNvPr id="11" name="row-rule-0">
+            <a:extLst xmlns:a="http://schemas.openxmlformats.org/drawingml/2006/main">
+              <a:ext uri="{FF2B5EF4-FFF2-40B4-BE49-F238E27FC236}">
+                <a16:creationId xmlns:a16="http://schemas.microsoft.com/office/drawing/2014/main" id="{BD3CACB9-B092-4FC1-AD6B-300129896825}"/>
+              </a:ext>
+            </a:extLst>
+          </p:cNvPr>
+          <p:cNvSpPr>
+            <a:spLocks xmlns:a="http://schemas.openxmlformats.org/drawingml/2006/main" noGrp="1"/>
+          </p:cNvSpPr>
+          <p:nvPr/>
+        </p:nvSpPr>
+        <p:spPr>
+          <a:xfrm xmlns:a="http://schemas.openxmlformats.org/drawingml/2006/main">
+            <a:off x="1000125" y="3419475"/>
+            <a:ext cx="10334625" cy="0"/>
+          </a:xfrm>
+          <a:prstGeom xmlns:a="http://schemas.openxmlformats.org/drawingml/2006/main" prst="line">
+            <a:avLst/>
+          </a:prstGeom>
+          <a:noFill xmlns:a="http://schemas.openxmlformats.org/drawingml/2006/main"/>
+          <a:ln xmlns:a="http://schemas.openxmlformats.org/drawingml/2006/main" w="9525">
+            <a:solidFill>
+              <a:srgbClr val="CEDBD3"/>
+            </a:solidFill>
+          </a:ln>
+        </p:spPr>
+      </p:sp>
+      <p:sp>
+        <p:nvSpPr>
+          <p:cNvPr id="12" name="row-rule-1">
+            <a:extLst xmlns:a="http://schemas.openxmlformats.org/drawingml/2006/main">
+              <a:ext uri="{FF2B5EF4-FFF2-40B4-BE49-F238E27FC236}">
+                <a16:creationId xmlns:a16="http://schemas.microsoft.com/office/drawing/2014/main" id="{45E79C69-819F-4F03-8BF8-B72DC50B5DBC}"/>
+              </a:ext>
+            </a:extLst>
+          </p:cNvPr>
+          <p:cNvSpPr>
+            <a:spLocks xmlns:a="http://schemas.openxmlformats.org/drawingml/2006/main" noGrp="1"/>
+          </p:cNvSpPr>
+          <p:nvPr/>
+        </p:nvSpPr>
+        <p:spPr>
+          <a:xfrm xmlns:a="http://schemas.openxmlformats.org/drawingml/2006/main">
+            <a:off x="1000125" y="4552950"/>
+            <a:ext cx="10334625" cy="0"/>
+          </a:xfrm>
+          <a:prstGeom xmlns:a="http://schemas.openxmlformats.org/drawingml/2006/main" prst="line">
+            <a:avLst/>
+          </a:prstGeom>
+          <a:noFill xmlns:a="http://schemas.openxmlformats.org/drawingml/2006/main"/>
+          <a:ln xmlns:a="http://schemas.openxmlformats.org/drawingml/2006/main" w="9525">
+            <a:solidFill>
+              <a:srgbClr val="CEDBD3"/>
+            </a:solidFill>
+          </a:ln>
+        </p:spPr>
       </p:sp>
     </p:spTree>
     <p:extLst>
@@ -4930,7 +6490,7 @@
     <p:bg>
       <p:bgPr>
         <a:solidFill xmlns:a="http://schemas.openxmlformats.org/drawingml/2006/main">
-          <a:srgbClr val="F5F1E8"/>
+          <a:srgbClr val="FAF9F5"/>
         </a:solidFill>
       </p:bgPr>
     </p:bg>
@@ -4959,8 +6519,8 @@
         </p:nvSpPr>
         <p:spPr>
           <a:xfrm xmlns:a="http://schemas.openxmlformats.org/drawingml/2006/main">
-            <a:off x="609600" y="552450"/>
-            <a:ext cx="781050" cy="57150"/>
+            <a:off x="609600" y="733425"/>
+            <a:ext cx="781050" cy="38100"/>
           </a:xfrm>
           <a:prstGeom xmlns:a="http://schemas.openxmlformats.org/drawingml/2006/main" prst="rect">
             <a:avLst/>
@@ -4990,34 +6550,43 @@
         </p:nvSpPr>
         <p:spPr>
           <a:xfrm xmlns:a="http://schemas.openxmlformats.org/drawingml/2006/main">
-            <a:off x="609600" y="762000"/>
-            <a:ext cx="7143750" cy="285750"/>
-          </a:xfrm>
-          <a:prstGeom xmlns:a="http://schemas.openxmlformats.org/drawingml/2006/main" prst="rect">
-            <a:avLst/>
-          </a:prstGeom>
-          <a:noFill xmlns:a="http://schemas.openxmlformats.org/drawingml/2006/main"/>
-          <a:ln xmlns:a="http://schemas.openxmlformats.org/drawingml/2006/main" w="0">
-            <a:noFill/>
-            <a:prstDash val="solid"/>
-          </a:ln>
-        </p:spPr>
-        <p:txBody>
-          <a:bodyPr xmlns:a="http://schemas.openxmlformats.org/drawingml/2006/main" lIns="0" tIns="0" rIns="0" bIns="0" anchor="ctr"/>
-          <a:lstStyle xmlns:a="http://schemas.openxmlformats.org/drawingml/2006/main"/>
-          <a:p xmlns:a="http://schemas.openxmlformats.org/drawingml/2006/main">
-            <a:pPr>
-              <a:defRPr sz="1500" b="1">
+            <a:off x="609600" y="342900"/>
+            <a:ext cx="9334500" cy="304800"/>
+          </a:xfrm>
+          <a:prstGeom xmlns:a="http://schemas.openxmlformats.org/drawingml/2006/main" prst="rect">
+            <a:avLst/>
+          </a:prstGeom>
+          <a:noFill xmlns:a="http://schemas.openxmlformats.org/drawingml/2006/main"/>
+          <a:ln xmlns:a="http://schemas.openxmlformats.org/drawingml/2006/main" w="0">
+            <a:noFill/>
+            <a:prstDash val="solid"/>
+          </a:ln>
+        </p:spPr>
+        <p:txBody>
+          <a:bodyPr xmlns:a="http://schemas.openxmlformats.org/drawingml/2006/main" lIns="0" tIns="0" rIns="0" bIns="0" anchor="ctr">
+            <a:noAutofit/>
+          </a:bodyPr>
+          <a:lstStyle xmlns:a="http://schemas.openxmlformats.org/drawingml/2006/main"/>
+          <a:p xmlns:a="http://schemas.openxmlformats.org/drawingml/2006/main">
+            <a:pPr algn="l">
+              <a:buNone/>
+              <a:defRPr sz="1350" b="1">
                 <a:solidFill>
                   <a:srgbClr val="28685E"/>
                 </a:solidFill>
-              </a:defRPr>
-            </a:pPr>
-            <a:r>
-              <a:rPr sz="1500" b="1">
+                <a:latin typeface="Calibri"/>
+                <a:ea typeface="Calibri"/>
+                <a:cs typeface="Calibri"/>
+              </a:defRPr>
+            </a:pPr>
+            <a:r>
+              <a:rPr sz="1350" b="1">
                 <a:solidFill>
                   <a:srgbClr val="28685E"/>
                 </a:solidFill>
+                <a:latin typeface="Calibri"/>
+                <a:ea typeface="Calibri"/>
+                <a:cs typeface="Calibri"/>
               </a:rPr>
               <a:t>MADE BY MATT  /  GROW SCIENCE</a:t>
             </a:r>
@@ -5040,34 +6609,43 @@
         </p:nvSpPr>
         <p:spPr>
           <a:xfrm xmlns:a="http://schemas.openxmlformats.org/drawingml/2006/main">
-            <a:off x="609600" y="1352550"/>
-            <a:ext cx="10972800" cy="952500"/>
-          </a:xfrm>
-          <a:prstGeom xmlns:a="http://schemas.openxmlformats.org/drawingml/2006/main" prst="rect">
-            <a:avLst/>
-          </a:prstGeom>
-          <a:noFill xmlns:a="http://schemas.openxmlformats.org/drawingml/2006/main"/>
-          <a:ln xmlns:a="http://schemas.openxmlformats.org/drawingml/2006/main" w="0">
-            <a:noFill/>
-            <a:prstDash val="solid"/>
-          </a:ln>
-        </p:spPr>
-        <p:txBody>
-          <a:bodyPr xmlns:a="http://schemas.openxmlformats.org/drawingml/2006/main" lIns="0" tIns="0" rIns="0" bIns="0" anchor="ctr"/>
-          <a:lstStyle xmlns:a="http://schemas.openxmlformats.org/drawingml/2006/main"/>
-          <a:p xmlns:a="http://schemas.openxmlformats.org/drawingml/2006/main">
-            <a:pPr>
-              <a:defRPr sz="3750" b="1">
+            <a:off x="609600" y="990600"/>
+            <a:ext cx="10972800" cy="1000125"/>
+          </a:xfrm>
+          <a:prstGeom xmlns:a="http://schemas.openxmlformats.org/drawingml/2006/main" prst="rect">
+            <a:avLst/>
+          </a:prstGeom>
+          <a:noFill xmlns:a="http://schemas.openxmlformats.org/drawingml/2006/main"/>
+          <a:ln xmlns:a="http://schemas.openxmlformats.org/drawingml/2006/main" w="0">
+            <a:noFill/>
+            <a:prstDash val="solid"/>
+          </a:ln>
+        </p:spPr>
+        <p:txBody>
+          <a:bodyPr xmlns:a="http://schemas.openxmlformats.org/drawingml/2006/main" lIns="0" tIns="0" rIns="0" bIns="0" anchor="ctr">
+            <a:noAutofit/>
+          </a:bodyPr>
+          <a:lstStyle xmlns:a="http://schemas.openxmlformats.org/drawingml/2006/main"/>
+          <a:p xmlns:a="http://schemas.openxmlformats.org/drawingml/2006/main">
+            <a:pPr algn="l">
+              <a:buNone/>
+              <a:defRPr sz="3675" b="1">
                 <a:solidFill>
                   <a:srgbClr val="152B3A"/>
                 </a:solidFill>
-              </a:defRPr>
-            </a:pPr>
-            <a:r>
-              <a:rPr sz="3750" b="1">
+                <a:latin typeface="Calibri"/>
+                <a:ea typeface="Calibri"/>
+                <a:cs typeface="Calibri"/>
+              </a:defRPr>
+            </a:pPr>
+            <a:r>
+              <a:rPr sz="3675" b="1">
                 <a:solidFill>
                   <a:srgbClr val="152B3A"/>
                 </a:solidFill>
+                <a:latin typeface="Calibri"/>
+                <a:ea typeface="Calibri"/>
+                <a:cs typeface="Calibri"/>
               </a:rPr>
               <a:t>Friction acts at a contact</a:t>
             </a:r>
@@ -5090,14 +6668,14 @@
         </p:nvSpPr>
         <p:spPr>
           <a:xfrm xmlns:a="http://schemas.openxmlformats.org/drawingml/2006/main">
-            <a:off x="609600" y="6219825"/>
+            <a:off x="609600" y="6191250"/>
             <a:ext cx="10972800" cy="9525"/>
           </a:xfrm>
           <a:prstGeom xmlns:a="http://schemas.openxmlformats.org/drawingml/2006/main" prst="rect">
             <a:avLst/>
           </a:prstGeom>
           <a:solidFill xmlns:a="http://schemas.openxmlformats.org/drawingml/2006/main">
-            <a:srgbClr val="DCE7DD"/>
+            <a:srgbClr val="CEDBD3"/>
           </a:solidFill>
           <a:ln xmlns:a="http://schemas.openxmlformats.org/drawingml/2006/main" w="0">
             <a:noFill/>
@@ -5121,34 +6699,43 @@
         </p:nvSpPr>
         <p:spPr>
           <a:xfrm xmlns:a="http://schemas.openxmlformats.org/drawingml/2006/main">
-            <a:off x="609600" y="6381750"/>
-            <a:ext cx="9525000" cy="228600"/>
-          </a:xfrm>
-          <a:prstGeom xmlns:a="http://schemas.openxmlformats.org/drawingml/2006/main" prst="rect">
-            <a:avLst/>
-          </a:prstGeom>
-          <a:noFill xmlns:a="http://schemas.openxmlformats.org/drawingml/2006/main"/>
-          <a:ln xmlns:a="http://schemas.openxmlformats.org/drawingml/2006/main" w="0">
-            <a:noFill/>
-            <a:prstDash val="solid"/>
-          </a:ln>
-        </p:spPr>
-        <p:txBody>
-          <a:bodyPr xmlns:a="http://schemas.openxmlformats.org/drawingml/2006/main" lIns="0" tIns="0" rIns="0" bIns="0" anchor="ctr"/>
-          <a:lstStyle xmlns:a="http://schemas.openxmlformats.org/drawingml/2006/main"/>
-          <a:p xmlns:a="http://schemas.openxmlformats.org/drawingml/2006/main">
-            <a:pPr>
-              <a:defRPr sz="1275" b="0">
+            <a:off x="609600" y="6419850"/>
+            <a:ext cx="9525000" cy="219075"/>
+          </a:xfrm>
+          <a:prstGeom xmlns:a="http://schemas.openxmlformats.org/drawingml/2006/main" prst="rect">
+            <a:avLst/>
+          </a:prstGeom>
+          <a:noFill xmlns:a="http://schemas.openxmlformats.org/drawingml/2006/main"/>
+          <a:ln xmlns:a="http://schemas.openxmlformats.org/drawingml/2006/main" w="0">
+            <a:noFill/>
+            <a:prstDash val="solid"/>
+          </a:ln>
+        </p:spPr>
+        <p:txBody>
+          <a:bodyPr xmlns:a="http://schemas.openxmlformats.org/drawingml/2006/main" lIns="0" tIns="0" rIns="0" bIns="0" anchor="ctr">
+            <a:noAutofit/>
+          </a:bodyPr>
+          <a:lstStyle xmlns:a="http://schemas.openxmlformats.org/drawingml/2006/main"/>
+          <a:p xmlns:a="http://schemas.openxmlformats.org/drawingml/2006/main">
+            <a:pPr algn="l">
+              <a:buNone/>
+              <a:defRPr sz="1200" b="0">
                 <a:solidFill>
                   <a:srgbClr val="50616B"/>
                 </a:solidFill>
-              </a:defRPr>
-            </a:pPr>
-            <a:r>
-              <a:rPr sz="1275" b="0">
+                <a:latin typeface="Calibri"/>
+                <a:ea typeface="Calibri"/>
+                <a:cs typeface="Calibri"/>
+              </a:defRPr>
+            </a:pPr>
+            <a:r>
+              <a:rPr sz="1200" b="0">
                 <a:solidFill>
                   <a:srgbClr val="50616B"/>
                 </a:solidFill>
+                <a:latin typeface="Calibri"/>
+                <a:ea typeface="Calibri"/>
+                <a:cs typeface="Calibri"/>
               </a:rPr>
               <a:t>AUTUMN 1  ·  WEEK 3  ·  LESSON A</a:t>
             </a:r>
@@ -5171,27 +6758,33 @@
         </p:nvSpPr>
         <p:spPr>
           <a:xfrm xmlns:a="http://schemas.openxmlformats.org/drawingml/2006/main">
-            <a:off x="11106150" y="6362700"/>
-            <a:ext cx="476250" cy="238125"/>
-          </a:xfrm>
-          <a:prstGeom xmlns:a="http://schemas.openxmlformats.org/drawingml/2006/main" prst="rect">
-            <a:avLst/>
-          </a:prstGeom>
-          <a:noFill xmlns:a="http://schemas.openxmlformats.org/drawingml/2006/main"/>
-          <a:ln xmlns:a="http://schemas.openxmlformats.org/drawingml/2006/main" w="0">
-            <a:noFill/>
-            <a:prstDash val="solid"/>
-          </a:ln>
-        </p:spPr>
-        <p:txBody>
-          <a:bodyPr xmlns:a="http://schemas.openxmlformats.org/drawingml/2006/main" lIns="0" tIns="0" rIns="0" bIns="0" anchor="ctr"/>
-          <a:lstStyle xmlns:a="http://schemas.openxmlformats.org/drawingml/2006/main"/>
-          <a:p xmlns:a="http://schemas.openxmlformats.org/drawingml/2006/main">
-            <a:pPr>
+            <a:off x="11106150" y="6400800"/>
+            <a:ext cx="476250" cy="247650"/>
+          </a:xfrm>
+          <a:prstGeom xmlns:a="http://schemas.openxmlformats.org/drawingml/2006/main" prst="rect">
+            <a:avLst/>
+          </a:prstGeom>
+          <a:noFill xmlns:a="http://schemas.openxmlformats.org/drawingml/2006/main"/>
+          <a:ln xmlns:a="http://schemas.openxmlformats.org/drawingml/2006/main" w="0">
+            <a:noFill/>
+            <a:prstDash val="solid"/>
+          </a:ln>
+        </p:spPr>
+        <p:txBody>
+          <a:bodyPr xmlns:a="http://schemas.openxmlformats.org/drawingml/2006/main" lIns="0" tIns="0" rIns="0" bIns="0" anchor="ctr">
+            <a:noAutofit/>
+          </a:bodyPr>
+          <a:lstStyle xmlns:a="http://schemas.openxmlformats.org/drawingml/2006/main"/>
+          <a:p xmlns:a="http://schemas.openxmlformats.org/drawingml/2006/main">
+            <a:pPr algn="l">
+              <a:buNone/>
               <a:defRPr sz="1350" b="1">
                 <a:solidFill>
                   <a:srgbClr val="28685E"/>
                 </a:solidFill>
+                <a:latin typeface="Calibri"/>
+                <a:ea typeface="Calibri"/>
+                <a:cs typeface="Calibri"/>
               </a:defRPr>
             </a:pPr>
             <a:r>
@@ -5199,6 +6792,9 @@
                 <a:solidFill>
                   <a:srgbClr val="28685E"/>
                 </a:solidFill>
+                <a:latin typeface="Calibri"/>
+                <a:ea typeface="Calibri"/>
+                <a:cs typeface="Calibri"/>
               </a:rPr>
               <a:t>04</a:t>
             </a:r>
@@ -5364,6 +6960,7 @@
           <a:lstStyle xmlns:a="http://schemas.openxmlformats.org/drawingml/2006/main"/>
           <a:p xmlns:a="http://schemas.openxmlformats.org/drawingml/2006/main">
             <a:pPr>
+              <a:buNone/>
               <a:defRPr sz="2025" b="1">
                 <a:solidFill>
                   <a:srgbClr val="152B3A"/>
@@ -5414,6 +7011,7 @@
           <a:lstStyle xmlns:a="http://schemas.openxmlformats.org/drawingml/2006/main"/>
           <a:p xmlns:a="http://schemas.openxmlformats.org/drawingml/2006/main">
             <a:pPr>
+              <a:buNone/>
               <a:defRPr sz="1950" b="1">
                 <a:solidFill>
                   <a:srgbClr val="28685E"/>
@@ -5464,6 +7062,7 @@
           <a:lstStyle xmlns:a="http://schemas.openxmlformats.org/drawingml/2006/main"/>
           <a:p xmlns:a="http://schemas.openxmlformats.org/drawingml/2006/main">
             <a:pPr>
+              <a:buNone/>
               <a:defRPr sz="1950" b="1">
                 <a:solidFill>
                   <a:srgbClr val="A65D25"/>
@@ -5497,34 +7096,43 @@
         </p:nvSpPr>
         <p:spPr>
           <a:xfrm xmlns:a="http://schemas.openxmlformats.org/drawingml/2006/main">
-            <a:off x="6667500" y="2838450"/>
-            <a:ext cx="4762500" cy="1571625"/>
-          </a:xfrm>
-          <a:prstGeom xmlns:a="http://schemas.openxmlformats.org/drawingml/2006/main" prst="rect">
-            <a:avLst/>
-          </a:prstGeom>
-          <a:noFill xmlns:a="http://schemas.openxmlformats.org/drawingml/2006/main"/>
-          <a:ln xmlns:a="http://schemas.openxmlformats.org/drawingml/2006/main" w="0">
-            <a:noFill/>
-            <a:prstDash val="solid"/>
-          </a:ln>
-        </p:spPr>
-        <p:txBody>
-          <a:bodyPr xmlns:a="http://schemas.openxmlformats.org/drawingml/2006/main" lIns="0" tIns="0" rIns="0" bIns="0" anchor="ctr"/>
-          <a:lstStyle xmlns:a="http://schemas.openxmlformats.org/drawingml/2006/main"/>
-          <a:p xmlns:a="http://schemas.openxmlformats.org/drawingml/2006/main">
-            <a:pPr>
-              <a:defRPr sz="2550" b="1">
+            <a:off x="6667500" y="2571750"/>
+            <a:ext cx="4857750" cy="1762125"/>
+          </a:xfrm>
+          <a:prstGeom xmlns:a="http://schemas.openxmlformats.org/drawingml/2006/main" prst="rect">
+            <a:avLst/>
+          </a:prstGeom>
+          <a:noFill xmlns:a="http://schemas.openxmlformats.org/drawingml/2006/main"/>
+          <a:ln xmlns:a="http://schemas.openxmlformats.org/drawingml/2006/main" w="0">
+            <a:noFill/>
+            <a:prstDash val="solid"/>
+          </a:ln>
+        </p:spPr>
+        <p:txBody>
+          <a:bodyPr xmlns:a="http://schemas.openxmlformats.org/drawingml/2006/main" lIns="0" tIns="0" rIns="0" bIns="0" anchor="ctr">
+            <a:noAutofit/>
+          </a:bodyPr>
+          <a:lstStyle xmlns:a="http://schemas.openxmlformats.org/drawingml/2006/main"/>
+          <a:p xmlns:a="http://schemas.openxmlformats.org/drawingml/2006/main">
+            <a:pPr algn="l">
+              <a:buNone/>
+              <a:defRPr sz="2700" b="1">
                 <a:solidFill>
                   <a:srgbClr val="152B3A"/>
                 </a:solidFill>
-              </a:defRPr>
-            </a:pPr>
-            <a:r>
-              <a:rPr sz="2550" b="1">
+                <a:latin typeface="Calibri"/>
+                <a:ea typeface="Calibri"/>
+                <a:cs typeface="Calibri"/>
+              </a:defRPr>
+            </a:pPr>
+            <a:r>
+              <a:rPr sz="2700" b="1">
                 <a:solidFill>
                   <a:srgbClr val="152B3A"/>
                 </a:solidFill>
+                <a:latin typeface="Calibri"/>
+                <a:ea typeface="Calibri"/>
+                <a:cs typeface="Calibri"/>
               </a:rPr>
               <a:t>A force between surfaces that slide, or try to slide, past each other.</a:t>
             </a:r>
@@ -5547,34 +7155,43 @@
         </p:nvSpPr>
         <p:spPr>
           <a:xfrm xmlns:a="http://schemas.openxmlformats.org/drawingml/2006/main">
-            <a:off x="6667500" y="4705350"/>
-            <a:ext cx="4762500" cy="857250"/>
-          </a:xfrm>
-          <a:prstGeom xmlns:a="http://schemas.openxmlformats.org/drawingml/2006/main" prst="rect">
-            <a:avLst/>
-          </a:prstGeom>
-          <a:noFill xmlns:a="http://schemas.openxmlformats.org/drawingml/2006/main"/>
-          <a:ln xmlns:a="http://schemas.openxmlformats.org/drawingml/2006/main" w="0">
-            <a:noFill/>
-            <a:prstDash val="solid"/>
-          </a:ln>
-        </p:spPr>
-        <p:txBody>
-          <a:bodyPr xmlns:a="http://schemas.openxmlformats.org/drawingml/2006/main" lIns="0" tIns="0" rIns="0" bIns="0" anchor="ctr"/>
-          <a:lstStyle xmlns:a="http://schemas.openxmlformats.org/drawingml/2006/main"/>
-          <a:p xmlns:a="http://schemas.openxmlformats.org/drawingml/2006/main">
-            <a:pPr>
+            <a:off x="6667500" y="4819650"/>
+            <a:ext cx="4857750" cy="666750"/>
+          </a:xfrm>
+          <a:prstGeom xmlns:a="http://schemas.openxmlformats.org/drawingml/2006/main" prst="rect">
+            <a:avLst/>
+          </a:prstGeom>
+          <a:noFill xmlns:a="http://schemas.openxmlformats.org/drawingml/2006/main"/>
+          <a:ln xmlns:a="http://schemas.openxmlformats.org/drawingml/2006/main" w="0">
+            <a:noFill/>
+            <a:prstDash val="solid"/>
+          </a:ln>
+        </p:spPr>
+        <p:txBody>
+          <a:bodyPr xmlns:a="http://schemas.openxmlformats.org/drawingml/2006/main" lIns="0" tIns="0" rIns="0" bIns="0" anchor="ctr">
+            <a:noAutofit/>
+          </a:bodyPr>
+          <a:lstStyle xmlns:a="http://schemas.openxmlformats.org/drawingml/2006/main"/>
+          <a:p xmlns:a="http://schemas.openxmlformats.org/drawingml/2006/main">
+            <a:pPr algn="l">
+              <a:buNone/>
               <a:defRPr sz="2250" b="0">
                 <a:solidFill>
-                  <a:srgbClr val="152B3A"/>
-                </a:solidFill>
+                  <a:srgbClr val="28685E"/>
+                </a:solidFill>
+                <a:latin typeface="Calibri"/>
+                <a:ea typeface="Calibri"/>
+                <a:cs typeface="Calibri"/>
               </a:defRPr>
             </a:pPr>
             <a:r>
               <a:rPr sz="2250" b="0">
                 <a:solidFill>
-                  <a:srgbClr val="152B3A"/>
-                </a:solidFill>
+                  <a:srgbClr val="28685E"/>
+                </a:solidFill>
+                <a:latin typeface="Calibri"/>
+                <a:ea typeface="Calibri"/>
+                <a:cs typeface="Calibri"/>
               </a:rPr>
               <a:t>Name the two touching surfaces.</a:t>
             </a:r>
@@ -5597,7 +7214,7 @@
     <p:bg>
       <p:bgPr>
         <a:solidFill xmlns:a="http://schemas.openxmlformats.org/drawingml/2006/main">
-          <a:srgbClr val="F5F1E8"/>
+          <a:srgbClr val="FAF9F5"/>
         </a:solidFill>
       </p:bgPr>
     </p:bg>
@@ -5626,8 +7243,8 @@
         </p:nvSpPr>
         <p:spPr>
           <a:xfrm xmlns:a="http://schemas.openxmlformats.org/drawingml/2006/main">
-            <a:off x="609600" y="552450"/>
-            <a:ext cx="781050" cy="57150"/>
+            <a:off x="609600" y="733425"/>
+            <a:ext cx="781050" cy="38100"/>
           </a:xfrm>
           <a:prstGeom xmlns:a="http://schemas.openxmlformats.org/drawingml/2006/main" prst="rect">
             <a:avLst/>
@@ -5657,34 +7274,43 @@
         </p:nvSpPr>
         <p:spPr>
           <a:xfrm xmlns:a="http://schemas.openxmlformats.org/drawingml/2006/main">
-            <a:off x="609600" y="762000"/>
-            <a:ext cx="7143750" cy="285750"/>
-          </a:xfrm>
-          <a:prstGeom xmlns:a="http://schemas.openxmlformats.org/drawingml/2006/main" prst="rect">
-            <a:avLst/>
-          </a:prstGeom>
-          <a:noFill xmlns:a="http://schemas.openxmlformats.org/drawingml/2006/main"/>
-          <a:ln xmlns:a="http://schemas.openxmlformats.org/drawingml/2006/main" w="0">
-            <a:noFill/>
-            <a:prstDash val="solid"/>
-          </a:ln>
-        </p:spPr>
-        <p:txBody>
-          <a:bodyPr xmlns:a="http://schemas.openxmlformats.org/drawingml/2006/main" lIns="0" tIns="0" rIns="0" bIns="0" anchor="ctr"/>
-          <a:lstStyle xmlns:a="http://schemas.openxmlformats.org/drawingml/2006/main"/>
-          <a:p xmlns:a="http://schemas.openxmlformats.org/drawingml/2006/main">
-            <a:pPr>
-              <a:defRPr sz="1500" b="1">
+            <a:off x="609600" y="342900"/>
+            <a:ext cx="9334500" cy="304800"/>
+          </a:xfrm>
+          <a:prstGeom xmlns:a="http://schemas.openxmlformats.org/drawingml/2006/main" prst="rect">
+            <a:avLst/>
+          </a:prstGeom>
+          <a:noFill xmlns:a="http://schemas.openxmlformats.org/drawingml/2006/main"/>
+          <a:ln xmlns:a="http://schemas.openxmlformats.org/drawingml/2006/main" w="0">
+            <a:noFill/>
+            <a:prstDash val="solid"/>
+          </a:ln>
+        </p:spPr>
+        <p:txBody>
+          <a:bodyPr xmlns:a="http://schemas.openxmlformats.org/drawingml/2006/main" lIns="0" tIns="0" rIns="0" bIns="0" anchor="ctr">
+            <a:noAutofit/>
+          </a:bodyPr>
+          <a:lstStyle xmlns:a="http://schemas.openxmlformats.org/drawingml/2006/main"/>
+          <a:p xmlns:a="http://schemas.openxmlformats.org/drawingml/2006/main">
+            <a:pPr algn="l">
+              <a:buNone/>
+              <a:defRPr sz="1350" b="1">
                 <a:solidFill>
                   <a:srgbClr val="28685E"/>
                 </a:solidFill>
-              </a:defRPr>
-            </a:pPr>
-            <a:r>
-              <a:rPr sz="1500" b="1">
+                <a:latin typeface="Calibri"/>
+                <a:ea typeface="Calibri"/>
+                <a:cs typeface="Calibri"/>
+              </a:defRPr>
+            </a:pPr>
+            <a:r>
+              <a:rPr sz="1350" b="1">
                 <a:solidFill>
                   <a:srgbClr val="28685E"/>
                 </a:solidFill>
+                <a:latin typeface="Calibri"/>
+                <a:ea typeface="Calibri"/>
+                <a:cs typeface="Calibri"/>
               </a:rPr>
               <a:t>MADE BY MATT  /  GROW SCIENCE</a:t>
             </a:r>
@@ -5707,34 +7333,43 @@
         </p:nvSpPr>
         <p:spPr>
           <a:xfrm xmlns:a="http://schemas.openxmlformats.org/drawingml/2006/main">
-            <a:off x="609600" y="1352550"/>
-            <a:ext cx="10972800" cy="952500"/>
-          </a:xfrm>
-          <a:prstGeom xmlns:a="http://schemas.openxmlformats.org/drawingml/2006/main" prst="rect">
-            <a:avLst/>
-          </a:prstGeom>
-          <a:noFill xmlns:a="http://schemas.openxmlformats.org/drawingml/2006/main"/>
-          <a:ln xmlns:a="http://schemas.openxmlformats.org/drawingml/2006/main" w="0">
-            <a:noFill/>
-            <a:prstDash val="solid"/>
-          </a:ln>
-        </p:spPr>
-        <p:txBody>
-          <a:bodyPr xmlns:a="http://schemas.openxmlformats.org/drawingml/2006/main" lIns="0" tIns="0" rIns="0" bIns="0" anchor="ctr"/>
-          <a:lstStyle xmlns:a="http://schemas.openxmlformats.org/drawingml/2006/main"/>
-          <a:p xmlns:a="http://schemas.openxmlformats.org/drawingml/2006/main">
-            <a:pPr>
-              <a:defRPr sz="3750" b="1">
+            <a:off x="609600" y="990600"/>
+            <a:ext cx="10972800" cy="1000125"/>
+          </a:xfrm>
+          <a:prstGeom xmlns:a="http://schemas.openxmlformats.org/drawingml/2006/main" prst="rect">
+            <a:avLst/>
+          </a:prstGeom>
+          <a:noFill xmlns:a="http://schemas.openxmlformats.org/drawingml/2006/main"/>
+          <a:ln xmlns:a="http://schemas.openxmlformats.org/drawingml/2006/main" w="0">
+            <a:noFill/>
+            <a:prstDash val="solid"/>
+          </a:ln>
+        </p:spPr>
+        <p:txBody>
+          <a:bodyPr xmlns:a="http://schemas.openxmlformats.org/drawingml/2006/main" lIns="0" tIns="0" rIns="0" bIns="0" anchor="ctr">
+            <a:noAutofit/>
+          </a:bodyPr>
+          <a:lstStyle xmlns:a="http://schemas.openxmlformats.org/drawingml/2006/main"/>
+          <a:p xmlns:a="http://schemas.openxmlformats.org/drawingml/2006/main">
+            <a:pPr algn="l">
+              <a:buNone/>
+              <a:defRPr sz="3675" b="1">
                 <a:solidFill>
                   <a:srgbClr val="152B3A"/>
                 </a:solidFill>
-              </a:defRPr>
-            </a:pPr>
-            <a:r>
-              <a:rPr sz="3750" b="1">
+                <a:latin typeface="Calibri"/>
+                <a:ea typeface="Calibri"/>
+                <a:cs typeface="Calibri"/>
+              </a:defRPr>
+            </a:pPr>
+            <a:r>
+              <a:rPr sz="3675" b="1">
                 <a:solidFill>
                   <a:srgbClr val="152B3A"/>
                 </a:solidFill>
+                <a:latin typeface="Calibri"/>
+                <a:ea typeface="Calibri"/>
+                <a:cs typeface="Calibri"/>
               </a:rPr>
               <a:t>Change one thing: the surface</a:t>
             </a:r>
@@ -5757,14 +7392,14 @@
         </p:nvSpPr>
         <p:spPr>
           <a:xfrm xmlns:a="http://schemas.openxmlformats.org/drawingml/2006/main">
-            <a:off x="609600" y="6219825"/>
+            <a:off x="609600" y="6191250"/>
             <a:ext cx="10972800" cy="9525"/>
           </a:xfrm>
           <a:prstGeom xmlns:a="http://schemas.openxmlformats.org/drawingml/2006/main" prst="rect">
             <a:avLst/>
           </a:prstGeom>
           <a:solidFill xmlns:a="http://schemas.openxmlformats.org/drawingml/2006/main">
-            <a:srgbClr val="DCE7DD"/>
+            <a:srgbClr val="CEDBD3"/>
           </a:solidFill>
           <a:ln xmlns:a="http://schemas.openxmlformats.org/drawingml/2006/main" w="0">
             <a:noFill/>
@@ -5788,34 +7423,43 @@
         </p:nvSpPr>
         <p:spPr>
           <a:xfrm xmlns:a="http://schemas.openxmlformats.org/drawingml/2006/main">
-            <a:off x="609600" y="6381750"/>
-            <a:ext cx="9525000" cy="228600"/>
-          </a:xfrm>
-          <a:prstGeom xmlns:a="http://schemas.openxmlformats.org/drawingml/2006/main" prst="rect">
-            <a:avLst/>
-          </a:prstGeom>
-          <a:noFill xmlns:a="http://schemas.openxmlformats.org/drawingml/2006/main"/>
-          <a:ln xmlns:a="http://schemas.openxmlformats.org/drawingml/2006/main" w="0">
-            <a:noFill/>
-            <a:prstDash val="solid"/>
-          </a:ln>
-        </p:spPr>
-        <p:txBody>
-          <a:bodyPr xmlns:a="http://schemas.openxmlformats.org/drawingml/2006/main" lIns="0" tIns="0" rIns="0" bIns="0" anchor="ctr"/>
-          <a:lstStyle xmlns:a="http://schemas.openxmlformats.org/drawingml/2006/main"/>
-          <a:p xmlns:a="http://schemas.openxmlformats.org/drawingml/2006/main">
-            <a:pPr>
-              <a:defRPr sz="1275" b="0">
+            <a:off x="609600" y="6419850"/>
+            <a:ext cx="9525000" cy="219075"/>
+          </a:xfrm>
+          <a:prstGeom xmlns:a="http://schemas.openxmlformats.org/drawingml/2006/main" prst="rect">
+            <a:avLst/>
+          </a:prstGeom>
+          <a:noFill xmlns:a="http://schemas.openxmlformats.org/drawingml/2006/main"/>
+          <a:ln xmlns:a="http://schemas.openxmlformats.org/drawingml/2006/main" w="0">
+            <a:noFill/>
+            <a:prstDash val="solid"/>
+          </a:ln>
+        </p:spPr>
+        <p:txBody>
+          <a:bodyPr xmlns:a="http://schemas.openxmlformats.org/drawingml/2006/main" lIns="0" tIns="0" rIns="0" bIns="0" anchor="ctr">
+            <a:noAutofit/>
+          </a:bodyPr>
+          <a:lstStyle xmlns:a="http://schemas.openxmlformats.org/drawingml/2006/main"/>
+          <a:p xmlns:a="http://schemas.openxmlformats.org/drawingml/2006/main">
+            <a:pPr algn="l">
+              <a:buNone/>
+              <a:defRPr sz="1200" b="0">
                 <a:solidFill>
                   <a:srgbClr val="50616B"/>
                 </a:solidFill>
-              </a:defRPr>
-            </a:pPr>
-            <a:r>
-              <a:rPr sz="1275" b="0">
+                <a:latin typeface="Calibri"/>
+                <a:ea typeface="Calibri"/>
+                <a:cs typeface="Calibri"/>
+              </a:defRPr>
+            </a:pPr>
+            <a:r>
+              <a:rPr sz="1200" b="0">
                 <a:solidFill>
                   <a:srgbClr val="50616B"/>
                 </a:solidFill>
+                <a:latin typeface="Calibri"/>
+                <a:ea typeface="Calibri"/>
+                <a:cs typeface="Calibri"/>
               </a:rPr>
               <a:t>AUTUMN 1  ·  WEEK 3  ·  LESSON A</a:t>
             </a:r>
@@ -5838,27 +7482,33 @@
         </p:nvSpPr>
         <p:spPr>
           <a:xfrm xmlns:a="http://schemas.openxmlformats.org/drawingml/2006/main">
-            <a:off x="11106150" y="6362700"/>
-            <a:ext cx="476250" cy="238125"/>
-          </a:xfrm>
-          <a:prstGeom xmlns:a="http://schemas.openxmlformats.org/drawingml/2006/main" prst="rect">
-            <a:avLst/>
-          </a:prstGeom>
-          <a:noFill xmlns:a="http://schemas.openxmlformats.org/drawingml/2006/main"/>
-          <a:ln xmlns:a="http://schemas.openxmlformats.org/drawingml/2006/main" w="0">
-            <a:noFill/>
-            <a:prstDash val="solid"/>
-          </a:ln>
-        </p:spPr>
-        <p:txBody>
-          <a:bodyPr xmlns:a="http://schemas.openxmlformats.org/drawingml/2006/main" lIns="0" tIns="0" rIns="0" bIns="0" anchor="ctr"/>
-          <a:lstStyle xmlns:a="http://schemas.openxmlformats.org/drawingml/2006/main"/>
-          <a:p xmlns:a="http://schemas.openxmlformats.org/drawingml/2006/main">
-            <a:pPr>
+            <a:off x="11106150" y="6400800"/>
+            <a:ext cx="476250" cy="247650"/>
+          </a:xfrm>
+          <a:prstGeom xmlns:a="http://schemas.openxmlformats.org/drawingml/2006/main" prst="rect">
+            <a:avLst/>
+          </a:prstGeom>
+          <a:noFill xmlns:a="http://schemas.openxmlformats.org/drawingml/2006/main"/>
+          <a:ln xmlns:a="http://schemas.openxmlformats.org/drawingml/2006/main" w="0">
+            <a:noFill/>
+            <a:prstDash val="solid"/>
+          </a:ln>
+        </p:spPr>
+        <p:txBody>
+          <a:bodyPr xmlns:a="http://schemas.openxmlformats.org/drawingml/2006/main" lIns="0" tIns="0" rIns="0" bIns="0" anchor="ctr">
+            <a:noAutofit/>
+          </a:bodyPr>
+          <a:lstStyle xmlns:a="http://schemas.openxmlformats.org/drawingml/2006/main"/>
+          <a:p xmlns:a="http://schemas.openxmlformats.org/drawingml/2006/main">
+            <a:pPr algn="l">
+              <a:buNone/>
               <a:defRPr sz="1350" b="1">
                 <a:solidFill>
                   <a:srgbClr val="28685E"/>
                 </a:solidFill>
+                <a:latin typeface="Calibri"/>
+                <a:ea typeface="Calibri"/>
+                <a:cs typeface="Calibri"/>
               </a:defRPr>
             </a:pPr>
             <a:r>
@@ -5866,6 +7516,9 @@
                 <a:solidFill>
                   <a:srgbClr val="28685E"/>
                 </a:solidFill>
+                <a:latin typeface="Calibri"/>
+                <a:ea typeface="Calibri"/>
+                <a:cs typeface="Calibri"/>
               </a:rPr>
               <a:t>05</a:t>
             </a:r>
@@ -5888,27 +7541,33 @@
         </p:nvSpPr>
         <p:spPr>
           <a:xfrm xmlns:a="http://schemas.openxmlformats.org/drawingml/2006/main">
-            <a:off x="609600" y="2619375"/>
-            <a:ext cx="10668000" cy="628650"/>
-          </a:xfrm>
-          <a:prstGeom xmlns:a="http://schemas.openxmlformats.org/drawingml/2006/main" prst="rect">
-            <a:avLst/>
-          </a:prstGeom>
-          <a:noFill xmlns:a="http://schemas.openxmlformats.org/drawingml/2006/main"/>
-          <a:ln xmlns:a="http://schemas.openxmlformats.org/drawingml/2006/main" w="0">
-            <a:noFill/>
-            <a:prstDash val="solid"/>
-          </a:ln>
-        </p:spPr>
-        <p:txBody>
-          <a:bodyPr xmlns:a="http://schemas.openxmlformats.org/drawingml/2006/main" lIns="0" tIns="0" rIns="0" bIns="0" anchor="ctr"/>
-          <a:lstStyle xmlns:a="http://schemas.openxmlformats.org/drawingml/2006/main"/>
-          <a:p xmlns:a="http://schemas.openxmlformats.org/drawingml/2006/main">
-            <a:pPr>
+            <a:off x="609600" y="2352675"/>
+            <a:ext cx="5429250" cy="847725"/>
+          </a:xfrm>
+          <a:prstGeom xmlns:a="http://schemas.openxmlformats.org/drawingml/2006/main" prst="rect">
+            <a:avLst/>
+          </a:prstGeom>
+          <a:noFill xmlns:a="http://schemas.openxmlformats.org/drawingml/2006/main"/>
+          <a:ln xmlns:a="http://schemas.openxmlformats.org/drawingml/2006/main" w="0">
+            <a:noFill/>
+            <a:prstDash val="solid"/>
+          </a:ln>
+        </p:spPr>
+        <p:txBody>
+          <a:bodyPr xmlns:a="http://schemas.openxmlformats.org/drawingml/2006/main" lIns="0" tIns="0" rIns="0" bIns="0" anchor="ctr">
+            <a:noAutofit/>
+          </a:bodyPr>
+          <a:lstStyle xmlns:a="http://schemas.openxmlformats.org/drawingml/2006/main"/>
+          <a:p xmlns:a="http://schemas.openxmlformats.org/drawingml/2006/main">
+            <a:pPr algn="l">
+              <a:buNone/>
               <a:defRPr sz="2400" b="0">
                 <a:solidFill>
                   <a:srgbClr val="152B3A"/>
                 </a:solidFill>
+                <a:latin typeface="Calibri"/>
+                <a:ea typeface="Calibri"/>
+                <a:cs typeface="Calibri"/>
               </a:defRPr>
             </a:pPr>
             <a:r>
@@ -5916,6 +7575,9 @@
                 <a:solidFill>
                   <a:srgbClr val="152B3A"/>
                 </a:solidFill>
+                <a:latin typeface="Calibri"/>
+                <a:ea typeface="Calibri"/>
+                <a:cs typeface="Calibri"/>
               </a:rPr>
               <a:t>Keep the block, ramp and release the same.</a:t>
             </a:r>
@@ -5938,27 +7600,33 @@
         </p:nvSpPr>
         <p:spPr>
           <a:xfrm xmlns:a="http://schemas.openxmlformats.org/drawingml/2006/main">
-            <a:off x="609600" y="3343275"/>
-            <a:ext cx="10668000" cy="628650"/>
-          </a:xfrm>
-          <a:prstGeom xmlns:a="http://schemas.openxmlformats.org/drawingml/2006/main" prst="rect">
-            <a:avLst/>
-          </a:prstGeom>
-          <a:noFill xmlns:a="http://schemas.openxmlformats.org/drawingml/2006/main"/>
-          <a:ln xmlns:a="http://schemas.openxmlformats.org/drawingml/2006/main" w="0">
-            <a:noFill/>
-            <a:prstDash val="solid"/>
-          </a:ln>
-        </p:spPr>
-        <p:txBody>
-          <a:bodyPr xmlns:a="http://schemas.openxmlformats.org/drawingml/2006/main" lIns="0" tIns="0" rIns="0" bIns="0" anchor="ctr"/>
-          <a:lstStyle xmlns:a="http://schemas.openxmlformats.org/drawingml/2006/main"/>
-          <a:p xmlns:a="http://schemas.openxmlformats.org/drawingml/2006/main">
-            <a:pPr>
+            <a:off x="609600" y="3286125"/>
+            <a:ext cx="5429250" cy="847725"/>
+          </a:xfrm>
+          <a:prstGeom xmlns:a="http://schemas.openxmlformats.org/drawingml/2006/main" prst="rect">
+            <a:avLst/>
+          </a:prstGeom>
+          <a:noFill xmlns:a="http://schemas.openxmlformats.org/drawingml/2006/main"/>
+          <a:ln xmlns:a="http://schemas.openxmlformats.org/drawingml/2006/main" w="0">
+            <a:noFill/>
+            <a:prstDash val="solid"/>
+          </a:ln>
+        </p:spPr>
+        <p:txBody>
+          <a:bodyPr xmlns:a="http://schemas.openxmlformats.org/drawingml/2006/main" lIns="0" tIns="0" rIns="0" bIns="0" anchor="ctr">
+            <a:noAutofit/>
+          </a:bodyPr>
+          <a:lstStyle xmlns:a="http://schemas.openxmlformats.org/drawingml/2006/main"/>
+          <a:p xmlns:a="http://schemas.openxmlformats.org/drawingml/2006/main">
+            <a:pPr algn="l">
+              <a:buNone/>
               <a:defRPr sz="2400" b="0">
                 <a:solidFill>
                   <a:srgbClr val="152B3A"/>
                 </a:solidFill>
+                <a:latin typeface="Calibri"/>
+                <a:ea typeface="Calibri"/>
+                <a:cs typeface="Calibri"/>
               </a:defRPr>
             </a:pPr>
             <a:r>
@@ -5966,6 +7634,9 @@
                 <a:solidFill>
                   <a:srgbClr val="152B3A"/>
                 </a:solidFill>
+                <a:latin typeface="Calibri"/>
+                <a:ea typeface="Calibri"/>
+                <a:cs typeface="Calibri"/>
               </a:rPr>
               <a:t>Change only the run-out surface.</a:t>
             </a:r>
@@ -5988,27 +7659,33 @@
         </p:nvSpPr>
         <p:spPr>
           <a:xfrm xmlns:a="http://schemas.openxmlformats.org/drawingml/2006/main">
-            <a:off x="609600" y="4067175"/>
-            <a:ext cx="10668000" cy="628650"/>
-          </a:xfrm>
-          <a:prstGeom xmlns:a="http://schemas.openxmlformats.org/drawingml/2006/main" prst="rect">
-            <a:avLst/>
-          </a:prstGeom>
-          <a:noFill xmlns:a="http://schemas.openxmlformats.org/drawingml/2006/main"/>
-          <a:ln xmlns:a="http://schemas.openxmlformats.org/drawingml/2006/main" w="0">
-            <a:noFill/>
-            <a:prstDash val="solid"/>
-          </a:ln>
-        </p:spPr>
-        <p:txBody>
-          <a:bodyPr xmlns:a="http://schemas.openxmlformats.org/drawingml/2006/main" lIns="0" tIns="0" rIns="0" bIns="0" anchor="ctr"/>
-          <a:lstStyle xmlns:a="http://schemas.openxmlformats.org/drawingml/2006/main"/>
-          <a:p xmlns:a="http://schemas.openxmlformats.org/drawingml/2006/main">
-            <a:pPr>
+            <a:off x="609600" y="4219575"/>
+            <a:ext cx="5429250" cy="847725"/>
+          </a:xfrm>
+          <a:prstGeom xmlns:a="http://schemas.openxmlformats.org/drawingml/2006/main" prst="rect">
+            <a:avLst/>
+          </a:prstGeom>
+          <a:noFill xmlns:a="http://schemas.openxmlformats.org/drawingml/2006/main"/>
+          <a:ln xmlns:a="http://schemas.openxmlformats.org/drawingml/2006/main" w="0">
+            <a:noFill/>
+            <a:prstDash val="solid"/>
+          </a:ln>
+        </p:spPr>
+        <p:txBody>
+          <a:bodyPr xmlns:a="http://schemas.openxmlformats.org/drawingml/2006/main" lIns="0" tIns="0" rIns="0" bIns="0" anchor="ctr">
+            <a:noAutofit/>
+          </a:bodyPr>
+          <a:lstStyle xmlns:a="http://schemas.openxmlformats.org/drawingml/2006/main"/>
+          <a:p xmlns:a="http://schemas.openxmlformats.org/drawingml/2006/main">
+            <a:pPr algn="l">
+              <a:buNone/>
               <a:defRPr sz="2400" b="0">
                 <a:solidFill>
                   <a:srgbClr val="152B3A"/>
                 </a:solidFill>
+                <a:latin typeface="Calibri"/>
+                <a:ea typeface="Calibri"/>
+                <a:cs typeface="Calibri"/>
               </a:defRPr>
             </a:pPr>
             <a:r>
@@ -6016,6 +7693,9 @@
                 <a:solidFill>
                   <a:srgbClr val="152B3A"/>
                 </a:solidFill>
+                <a:latin typeface="Calibri"/>
+                <a:ea typeface="Calibri"/>
+                <a:cs typeface="Calibri"/>
               </a:rPr>
               <a:t>Predict where the block will stop. Then observe.</a:t>
             </a:r>
@@ -6038,8 +7718,128 @@
         </p:nvSpPr>
         <p:spPr>
           <a:xfrm xmlns:a="http://schemas.openxmlformats.org/drawingml/2006/main">
-            <a:off x="609600" y="5105400"/>
-            <a:ext cx="10972800" cy="38100"/>
+            <a:off x="609600" y="5238750"/>
+            <a:ext cx="10972800" cy="9525"/>
+          </a:xfrm>
+          <a:prstGeom xmlns:a="http://schemas.openxmlformats.org/drawingml/2006/main" prst="rect">
+            <a:avLst/>
+          </a:prstGeom>
+          <a:solidFill xmlns:a="http://schemas.openxmlformats.org/drawingml/2006/main">
+            <a:srgbClr val="CEDBD3"/>
+          </a:solidFill>
+          <a:ln xmlns:a="http://schemas.openxmlformats.org/drawingml/2006/main" w="0">
+            <a:noFill/>
+            <a:prstDash val="solid"/>
+          </a:ln>
+        </p:spPr>
+      </p:sp>
+      <p:sp>
+        <p:nvSpPr>
+          <p:cNvPr id="11" name="comparison-prompt">
+            <a:extLst xmlns:a="http://schemas.openxmlformats.org/drawingml/2006/main">
+              <a:ext uri="{FF2B5EF4-FFF2-40B4-BE49-F238E27FC236}">
+                <a16:creationId xmlns:a16="http://schemas.microsoft.com/office/drawing/2014/main" id="{2813A675-B4BD-4ADF-8560-8121C1199D10}"/>
+              </a:ext>
+            </a:extLst>
+          </p:cNvPr>
+          <p:cNvSpPr>
+            <a:spLocks xmlns:a="http://schemas.openxmlformats.org/drawingml/2006/main" noGrp="1"/>
+          </p:cNvSpPr>
+          <p:nvPr/>
+        </p:nvSpPr>
+        <p:spPr>
+          <a:xfrm xmlns:a="http://schemas.openxmlformats.org/drawingml/2006/main">
+            <a:off x="609600" y="5381625"/>
+            <a:ext cx="10972800" cy="657225"/>
+          </a:xfrm>
+          <a:prstGeom xmlns:a="http://schemas.openxmlformats.org/drawingml/2006/main" prst="rect">
+            <a:avLst/>
+          </a:prstGeom>
+          <a:noFill xmlns:a="http://schemas.openxmlformats.org/drawingml/2006/main"/>
+          <a:ln xmlns:a="http://schemas.openxmlformats.org/drawingml/2006/main" w="0">
+            <a:noFill/>
+            <a:prstDash val="solid"/>
+          </a:ln>
+        </p:spPr>
+        <p:txBody>
+          <a:bodyPr xmlns:a="http://schemas.openxmlformats.org/drawingml/2006/main" lIns="0" tIns="0" rIns="0" bIns="0" anchor="ctr">
+            <a:noAutofit/>
+          </a:bodyPr>
+          <a:lstStyle xmlns:a="http://schemas.openxmlformats.org/drawingml/2006/main"/>
+          <a:p xmlns:a="http://schemas.openxmlformats.org/drawingml/2006/main">
+            <a:pPr algn="l">
+              <a:buNone/>
+              <a:defRPr sz="2025" b="1">
+                <a:solidFill>
+                  <a:srgbClr val="28685E"/>
+                </a:solidFill>
+                <a:latin typeface="Calibri"/>
+                <a:ea typeface="Calibri"/>
+                <a:cs typeface="Calibri"/>
+              </a:defRPr>
+            </a:pPr>
+            <a:r>
+              <a:rPr sz="2025" b="1">
+                <a:solidFill>
+                  <a:srgbClr val="28685E"/>
+                </a:solidFill>
+                <a:latin typeface="Calibri"/>
+                <a:ea typeface="Calibri"/>
+                <a:cs typeface="Calibri"/>
+              </a:rPr>
+              <a:t>What stayed the same? What changed?</a:t>
+            </a:r>
+          </a:p>
+        </p:txBody>
+      </p:sp>
+      <p:sp>
+        <p:nvSpPr>
+          <p:cNvPr id="13" name="surface">
+            <a:extLst xmlns:a="http://schemas.openxmlformats.org/drawingml/2006/main">
+              <a:ext uri="{FF2B5EF4-FFF2-40B4-BE49-F238E27FC236}">
+                <a16:creationId xmlns:a16="http://schemas.microsoft.com/office/drawing/2014/main" id="{E72A19E0-1BE7-41E0-BB4B-7A3437C559DF}"/>
+              </a:ext>
+            </a:extLst>
+          </p:cNvPr>
+          <p:cNvSpPr>
+            <a:spLocks xmlns:a="http://schemas.openxmlformats.org/drawingml/2006/main" noGrp="1"/>
+          </p:cNvSpPr>
+          <p:nvPr/>
+        </p:nvSpPr>
+        <p:spPr>
+          <a:xfrm xmlns:a="http://schemas.openxmlformats.org/drawingml/2006/main">
+            <a:off x="6762750" y="4381500"/>
+            <a:ext cx="4381500" cy="171450"/>
+          </a:xfrm>
+          <a:prstGeom xmlns:a="http://schemas.openxmlformats.org/drawingml/2006/main" prst="rect">
+            <a:avLst/>
+          </a:prstGeom>
+          <a:solidFill xmlns:a="http://schemas.openxmlformats.org/drawingml/2006/main">
+            <a:srgbClr val="CEDBD3"/>
+          </a:solidFill>
+          <a:ln xmlns:a="http://schemas.openxmlformats.org/drawingml/2006/main" w="0">
+            <a:noFill/>
+          </a:ln>
+        </p:spPr>
+      </p:sp>
+      <p:sp>
+        <p:nvSpPr>
+          <p:cNvPr id="14" name="block-contact">
+            <a:extLst xmlns:a="http://schemas.openxmlformats.org/drawingml/2006/main">
+              <a:ext uri="{FF2B5EF4-FFF2-40B4-BE49-F238E27FC236}">
+                <a16:creationId xmlns:a16="http://schemas.microsoft.com/office/drawing/2014/main" id="{32BFA360-7DEA-46CC-949E-D5AE23689A1F}"/>
+              </a:ext>
+            </a:extLst>
+          </p:cNvPr>
+          <p:cNvSpPr>
+            <a:spLocks xmlns:a="http://schemas.openxmlformats.org/drawingml/2006/main" noGrp="1"/>
+          </p:cNvSpPr>
+          <p:nvPr/>
+        </p:nvSpPr>
+        <p:spPr>
+          <a:xfrm xmlns:a="http://schemas.openxmlformats.org/drawingml/2006/main">
+            <a:off x="7858125" y="3286125"/>
+            <a:ext cx="1809750" cy="1095375"/>
           </a:xfrm>
           <a:prstGeom xmlns:a="http://schemas.openxmlformats.org/drawingml/2006/main" prst="rect">
             <a:avLst/>
@@ -6049,56 +7849,293 @@
           </a:solidFill>
           <a:ln xmlns:a="http://schemas.openxmlformats.org/drawingml/2006/main" w="0">
             <a:noFill/>
-            <a:prstDash val="solid"/>
-          </a:ln>
-        </p:spPr>
-      </p:sp>
-      <p:sp>
-        <p:nvSpPr>
-          <p:cNvPr id="11" name="comparison-prompt">
-            <a:extLst xmlns:a="http://schemas.openxmlformats.org/drawingml/2006/main">
-              <a:ext uri="{FF2B5EF4-FFF2-40B4-BE49-F238E27FC236}">
-                <a16:creationId xmlns:a16="http://schemas.microsoft.com/office/drawing/2014/main" id="{2813A675-B4BD-4ADF-8560-8121C1199D10}"/>
-              </a:ext>
-            </a:extLst>
-          </p:cNvPr>
-          <p:cNvSpPr>
-            <a:spLocks xmlns:a="http://schemas.openxmlformats.org/drawingml/2006/main" noGrp="1"/>
-          </p:cNvSpPr>
-          <p:nvPr/>
-        </p:nvSpPr>
-        <p:spPr>
-          <a:xfrm xmlns:a="http://schemas.openxmlformats.org/drawingml/2006/main">
-            <a:off x="609600" y="5353050"/>
-            <a:ext cx="10477500" cy="571500"/>
-          </a:xfrm>
-          <a:prstGeom xmlns:a="http://schemas.openxmlformats.org/drawingml/2006/main" prst="rect">
-            <a:avLst/>
-          </a:prstGeom>
-          <a:noFill xmlns:a="http://schemas.openxmlformats.org/drawingml/2006/main"/>
-          <a:ln xmlns:a="http://schemas.openxmlformats.org/drawingml/2006/main" w="0">
-            <a:noFill/>
-            <a:prstDash val="solid"/>
-          </a:ln>
-        </p:spPr>
-        <p:txBody>
-          <a:bodyPr xmlns:a="http://schemas.openxmlformats.org/drawingml/2006/main" lIns="0" tIns="0" rIns="0" bIns="0" anchor="ctr"/>
-          <a:lstStyle xmlns:a="http://schemas.openxmlformats.org/drawingml/2006/main"/>
-          <a:p xmlns:a="http://schemas.openxmlformats.org/drawingml/2006/main">
-            <a:pPr>
-              <a:defRPr sz="2775" b="1">
+          </a:ln>
+        </p:spPr>
+      </p:sp>
+      <p:sp>
+        <p:nvSpPr>
+          <p:cNvPr id="15" name="block-label-new">
+            <a:extLst xmlns:a="http://schemas.openxmlformats.org/drawingml/2006/main">
+              <a:ext uri="{FF2B5EF4-FFF2-40B4-BE49-F238E27FC236}">
+                <a16:creationId xmlns:a16="http://schemas.microsoft.com/office/drawing/2014/main" id="{6E1A299D-47B4-42CC-9E10-DC5E12A4759B}"/>
+              </a:ext>
+            </a:extLst>
+          </p:cNvPr>
+          <p:cNvSpPr>
+            <a:spLocks xmlns:a="http://schemas.openxmlformats.org/drawingml/2006/main" noGrp="1"/>
+          </p:cNvSpPr>
+          <p:nvPr/>
+        </p:nvSpPr>
+        <p:spPr>
+          <a:xfrm xmlns:a="http://schemas.openxmlformats.org/drawingml/2006/main">
+            <a:off x="7858125" y="3571875"/>
+            <a:ext cx="1809750" cy="428625"/>
+          </a:xfrm>
+          <a:prstGeom xmlns:a="http://schemas.openxmlformats.org/drawingml/2006/main" prst="rect">
+            <a:avLst/>
+          </a:prstGeom>
+          <a:noFill xmlns:a="http://schemas.openxmlformats.org/drawingml/2006/main"/>
+          <a:ln xmlns:a="http://schemas.openxmlformats.org/drawingml/2006/main" w="0">
+            <a:noFill/>
+          </a:ln>
+        </p:spPr>
+        <p:txBody>
+          <a:bodyPr xmlns:a="http://schemas.openxmlformats.org/drawingml/2006/main" lIns="0" tIns="0" rIns="0" bIns="0" anchor="ctr">
+            <a:noAutofit/>
+          </a:bodyPr>
+          <a:lstStyle xmlns:a="http://schemas.openxmlformats.org/drawingml/2006/main"/>
+          <a:p xmlns:a="http://schemas.openxmlformats.org/drawingml/2006/main">
+            <a:pPr algn="ctr">
+              <a:defRPr sz="1950" b="1">
+                <a:solidFill>
+                  <a:srgbClr val="FFFFFF"/>
+                </a:solidFill>
+                <a:latin typeface="Calibri"/>
+                <a:ea typeface="Calibri"/>
+                <a:cs typeface="Calibri"/>
+              </a:defRPr>
+            </a:pPr>
+            <a:r>
+              <a:rPr sz="1950" b="1">
+                <a:solidFill>
+                  <a:srgbClr val="FFFFFF"/>
+                </a:solidFill>
+                <a:latin typeface="Calibri"/>
+                <a:ea typeface="Calibri"/>
+                <a:cs typeface="Calibri"/>
+              </a:rPr>
+              <a:t>BLOCK</a:t>
+            </a:r>
+          </a:p>
+        </p:txBody>
+      </p:sp>
+      <p:sp>
+        <p:nvSpPr>
+          <p:cNvPr id="16" name="motion-new">
+            <a:extLst xmlns:a="http://schemas.openxmlformats.org/drawingml/2006/main">
+              <a:ext uri="{FF2B5EF4-FFF2-40B4-BE49-F238E27FC236}">
+                <a16:creationId xmlns:a16="http://schemas.microsoft.com/office/drawing/2014/main" id="{88AF429D-2A42-44C9-BB44-AC760985B0F2}"/>
+              </a:ext>
+            </a:extLst>
+          </p:cNvPr>
+          <p:cNvSpPr>
+            <a:spLocks xmlns:a="http://schemas.openxmlformats.org/drawingml/2006/main" noGrp="1"/>
+          </p:cNvSpPr>
+          <p:nvPr/>
+        </p:nvSpPr>
+        <p:spPr>
+          <a:xfrm xmlns:a="http://schemas.openxmlformats.org/drawingml/2006/main" rot="0">
+            <a:off x="9810750" y="3352800"/>
+            <a:ext cx="1000125" cy="247650"/>
+          </a:xfrm>
+          <a:prstGeom xmlns:a="http://schemas.openxmlformats.org/drawingml/2006/main" prst="rightArrow">
+            <a:avLst/>
+          </a:prstGeom>
+          <a:solidFill xmlns:a="http://schemas.openxmlformats.org/drawingml/2006/main">
+            <a:srgbClr val="50616B"/>
+          </a:solidFill>
+          <a:ln xmlns:a="http://schemas.openxmlformats.org/drawingml/2006/main" w="0">
+            <a:noFill/>
+          </a:ln>
+        </p:spPr>
+      </p:sp>
+      <p:sp>
+        <p:nvSpPr>
+          <p:cNvPr id="17" name="motion-new-label">
+            <a:extLst xmlns:a="http://schemas.openxmlformats.org/drawingml/2006/main">
+              <a:ext uri="{FF2B5EF4-FFF2-40B4-BE49-F238E27FC236}">
+                <a16:creationId xmlns:a16="http://schemas.microsoft.com/office/drawing/2014/main" id="{14B19B84-D364-4B69-999B-716D94F285A2}"/>
+              </a:ext>
+            </a:extLst>
+          </p:cNvPr>
+          <p:cNvSpPr>
+            <a:spLocks xmlns:a="http://schemas.openxmlformats.org/drawingml/2006/main" noGrp="1"/>
+          </p:cNvSpPr>
+          <p:nvPr/>
+        </p:nvSpPr>
+        <p:spPr>
+          <a:xfrm xmlns:a="http://schemas.openxmlformats.org/drawingml/2006/main">
+            <a:off x="9715500" y="2876550"/>
+            <a:ext cx="1190625" cy="400050"/>
+          </a:xfrm>
+          <a:prstGeom xmlns:a="http://schemas.openxmlformats.org/drawingml/2006/main" prst="rect">
+            <a:avLst/>
+          </a:prstGeom>
+          <a:noFill xmlns:a="http://schemas.openxmlformats.org/drawingml/2006/main"/>
+          <a:ln xmlns:a="http://schemas.openxmlformats.org/drawingml/2006/main" w="0">
+            <a:noFill/>
+          </a:ln>
+        </p:spPr>
+        <p:txBody>
+          <a:bodyPr xmlns:a="http://schemas.openxmlformats.org/drawingml/2006/main" lIns="0" tIns="0" rIns="0" bIns="0" anchor="ctr">
+            <a:noAutofit/>
+          </a:bodyPr>
+          <a:lstStyle xmlns:a="http://schemas.openxmlformats.org/drawingml/2006/main"/>
+          <a:p xmlns:a="http://schemas.openxmlformats.org/drawingml/2006/main">
+            <a:pPr algn="l">
+              <a:defRPr sz="1650" b="0">
+                <a:solidFill>
+                  <a:srgbClr val="50616B"/>
+                </a:solidFill>
+                <a:latin typeface="Calibri"/>
+                <a:ea typeface="Calibri"/>
+                <a:cs typeface="Calibri"/>
+              </a:defRPr>
+            </a:pPr>
+            <a:r>
+              <a:rPr sz="1650" b="0">
+                <a:solidFill>
+                  <a:srgbClr val="50616B"/>
+                </a:solidFill>
+                <a:latin typeface="Calibri"/>
+                <a:ea typeface="Calibri"/>
+                <a:cs typeface="Calibri"/>
+              </a:rPr>
+              <a:t>sliding</a:t>
+            </a:r>
+          </a:p>
+        </p:txBody>
+      </p:sp>
+      <p:sp>
+        <p:nvSpPr>
+          <p:cNvPr id="18" name="friction-new">
+            <a:extLst xmlns:a="http://schemas.openxmlformats.org/drawingml/2006/main">
+              <a:ext uri="{FF2B5EF4-FFF2-40B4-BE49-F238E27FC236}">
+                <a16:creationId xmlns:a16="http://schemas.microsoft.com/office/drawing/2014/main" id="{F6250E9C-7B48-402B-B02E-5AFE79B52F65}"/>
+              </a:ext>
+            </a:extLst>
+          </p:cNvPr>
+          <p:cNvSpPr>
+            <a:spLocks xmlns:a="http://schemas.openxmlformats.org/drawingml/2006/main" noGrp="1"/>
+          </p:cNvSpPr>
+          <p:nvPr/>
+        </p:nvSpPr>
+        <p:spPr>
+          <a:xfrm xmlns:a="http://schemas.openxmlformats.org/drawingml/2006/main" rot="10800000">
+            <a:off x="6877050" y="3905250"/>
+            <a:ext cx="876300" cy="266700"/>
+          </a:xfrm>
+          <a:prstGeom xmlns:a="http://schemas.openxmlformats.org/drawingml/2006/main" prst="rightArrow">
+            <a:avLst/>
+          </a:prstGeom>
+          <a:solidFill xmlns:a="http://schemas.openxmlformats.org/drawingml/2006/main">
+            <a:srgbClr val="A95D21"/>
+          </a:solidFill>
+          <a:ln xmlns:a="http://schemas.openxmlformats.org/drawingml/2006/main" w="0">
+            <a:noFill/>
+          </a:ln>
+        </p:spPr>
+      </p:sp>
+      <p:sp>
+        <p:nvSpPr>
+          <p:cNvPr id="19" name="friction-new-label">
+            <a:extLst xmlns:a="http://schemas.openxmlformats.org/drawingml/2006/main">
+              <a:ext uri="{FF2B5EF4-FFF2-40B4-BE49-F238E27FC236}">
+                <a16:creationId xmlns:a16="http://schemas.microsoft.com/office/drawing/2014/main" id="{3BADE94D-DFA8-47B5-BFE8-762F6DDA8056}"/>
+              </a:ext>
+            </a:extLst>
+          </p:cNvPr>
+          <p:cNvSpPr>
+            <a:spLocks xmlns:a="http://schemas.openxmlformats.org/drawingml/2006/main" noGrp="1"/>
+          </p:cNvSpPr>
+          <p:nvPr/>
+        </p:nvSpPr>
+        <p:spPr>
+          <a:xfrm xmlns:a="http://schemas.openxmlformats.org/drawingml/2006/main">
+            <a:off x="6762750" y="4638675"/>
+            <a:ext cx="1524000" cy="381000"/>
+          </a:xfrm>
+          <a:prstGeom xmlns:a="http://schemas.openxmlformats.org/drawingml/2006/main" prst="rect">
+            <a:avLst/>
+          </a:prstGeom>
+          <a:noFill xmlns:a="http://schemas.openxmlformats.org/drawingml/2006/main"/>
+          <a:ln xmlns:a="http://schemas.openxmlformats.org/drawingml/2006/main" w="0">
+            <a:noFill/>
+          </a:ln>
+        </p:spPr>
+        <p:txBody>
+          <a:bodyPr xmlns:a="http://schemas.openxmlformats.org/drawingml/2006/main" lIns="0" tIns="0" rIns="0" bIns="0" anchor="ctr">
+            <a:noAutofit/>
+          </a:bodyPr>
+          <a:lstStyle xmlns:a="http://schemas.openxmlformats.org/drawingml/2006/main"/>
+          <a:p xmlns:a="http://schemas.openxmlformats.org/drawingml/2006/main">
+            <a:pPr algn="l">
+              <a:defRPr sz="1875" b="1">
+                <a:solidFill>
+                  <a:srgbClr val="A95D21"/>
+                </a:solidFill>
+                <a:latin typeface="Calibri"/>
+                <a:ea typeface="Calibri"/>
+                <a:cs typeface="Calibri"/>
+              </a:defRPr>
+            </a:pPr>
+            <a:r>
+              <a:rPr sz="1875" b="1">
+                <a:solidFill>
+                  <a:srgbClr val="A95D21"/>
+                </a:solidFill>
+                <a:latin typeface="Calibri"/>
+                <a:ea typeface="Calibri"/>
+                <a:cs typeface="Calibri"/>
+              </a:rPr>
+              <a:t>friction</a:t>
+            </a:r>
+          </a:p>
+        </p:txBody>
+      </p:sp>
+      <p:sp>
+        <p:nvSpPr>
+          <p:cNvPr id="20" name="contact-new-label">
+            <a:extLst xmlns:a="http://schemas.openxmlformats.org/drawingml/2006/main">
+              <a:ext uri="{FF2B5EF4-FFF2-40B4-BE49-F238E27FC236}">
+                <a16:creationId xmlns:a16="http://schemas.microsoft.com/office/drawing/2014/main" id="{5C87FC79-46DB-465C-B05F-C66D41573FCF}"/>
+              </a:ext>
+            </a:extLst>
+          </p:cNvPr>
+          <p:cNvSpPr>
+            <a:spLocks xmlns:a="http://schemas.openxmlformats.org/drawingml/2006/main" noGrp="1"/>
+          </p:cNvSpPr>
+          <p:nvPr/>
+        </p:nvSpPr>
+        <p:spPr>
+          <a:xfrm xmlns:a="http://schemas.openxmlformats.org/drawingml/2006/main">
+            <a:off x="8763000" y="4638675"/>
+            <a:ext cx="2381250" cy="381000"/>
+          </a:xfrm>
+          <a:prstGeom xmlns:a="http://schemas.openxmlformats.org/drawingml/2006/main" prst="rect">
+            <a:avLst/>
+          </a:prstGeom>
+          <a:noFill xmlns:a="http://schemas.openxmlformats.org/drawingml/2006/main"/>
+          <a:ln xmlns:a="http://schemas.openxmlformats.org/drawingml/2006/main" w="0">
+            <a:noFill/>
+          </a:ln>
+        </p:spPr>
+        <p:txBody>
+          <a:bodyPr xmlns:a="http://schemas.openxmlformats.org/drawingml/2006/main" lIns="0" tIns="0" rIns="0" bIns="0" anchor="ctr">
+            <a:noAutofit/>
+          </a:bodyPr>
+          <a:lstStyle xmlns:a="http://schemas.openxmlformats.org/drawingml/2006/main"/>
+          <a:p xmlns:a="http://schemas.openxmlformats.org/drawingml/2006/main">
+            <a:pPr algn="l">
+              <a:defRPr sz="1875" b="1">
                 <a:solidFill>
                   <a:srgbClr val="28685E"/>
                 </a:solidFill>
-              </a:defRPr>
-            </a:pPr>
-            <a:r>
-              <a:rPr sz="2775" b="1">
+                <a:latin typeface="Calibri"/>
+                <a:ea typeface="Calibri"/>
+                <a:cs typeface="Calibri"/>
+              </a:defRPr>
+            </a:pPr>
+            <a:r>
+              <a:rPr sz="1875" b="1">
                 <a:solidFill>
                   <a:srgbClr val="28685E"/>
                 </a:solidFill>
-              </a:rPr>
-              <a:t>What stayed the same? What changed?</a:t>
+                <a:latin typeface="Calibri"/>
+                <a:ea typeface="Calibri"/>
+                <a:cs typeface="Calibri"/>
+              </a:rPr>
+              <a:t>surface contact</a:t>
             </a:r>
           </a:p>
         </p:txBody>
@@ -6119,7 +8156,7 @@
     <p:bg>
       <p:bgPr>
         <a:solidFill xmlns:a="http://schemas.openxmlformats.org/drawingml/2006/main">
-          <a:srgbClr val="F5F1E8"/>
+          <a:srgbClr val="FAF9F5"/>
         </a:solidFill>
       </p:bgPr>
     </p:bg>
@@ -6148,8 +8185,8 @@
         </p:nvSpPr>
         <p:spPr>
           <a:xfrm xmlns:a="http://schemas.openxmlformats.org/drawingml/2006/main">
-            <a:off x="609600" y="552450"/>
-            <a:ext cx="781050" cy="57150"/>
+            <a:off x="609600" y="733425"/>
+            <a:ext cx="781050" cy="38100"/>
           </a:xfrm>
           <a:prstGeom xmlns:a="http://schemas.openxmlformats.org/drawingml/2006/main" prst="rect">
             <a:avLst/>
@@ -6179,34 +8216,43 @@
         </p:nvSpPr>
         <p:spPr>
           <a:xfrm xmlns:a="http://schemas.openxmlformats.org/drawingml/2006/main">
-            <a:off x="609600" y="762000"/>
-            <a:ext cx="7143750" cy="285750"/>
-          </a:xfrm>
-          <a:prstGeom xmlns:a="http://schemas.openxmlformats.org/drawingml/2006/main" prst="rect">
-            <a:avLst/>
-          </a:prstGeom>
-          <a:noFill xmlns:a="http://schemas.openxmlformats.org/drawingml/2006/main"/>
-          <a:ln xmlns:a="http://schemas.openxmlformats.org/drawingml/2006/main" w="0">
-            <a:noFill/>
-            <a:prstDash val="solid"/>
-          </a:ln>
-        </p:spPr>
-        <p:txBody>
-          <a:bodyPr xmlns:a="http://schemas.openxmlformats.org/drawingml/2006/main" lIns="0" tIns="0" rIns="0" bIns="0" anchor="ctr"/>
-          <a:lstStyle xmlns:a="http://schemas.openxmlformats.org/drawingml/2006/main"/>
-          <a:p xmlns:a="http://schemas.openxmlformats.org/drawingml/2006/main">
-            <a:pPr>
-              <a:defRPr sz="1500" b="1">
+            <a:off x="609600" y="342900"/>
+            <a:ext cx="9334500" cy="304800"/>
+          </a:xfrm>
+          <a:prstGeom xmlns:a="http://schemas.openxmlformats.org/drawingml/2006/main" prst="rect">
+            <a:avLst/>
+          </a:prstGeom>
+          <a:noFill xmlns:a="http://schemas.openxmlformats.org/drawingml/2006/main"/>
+          <a:ln xmlns:a="http://schemas.openxmlformats.org/drawingml/2006/main" w="0">
+            <a:noFill/>
+            <a:prstDash val="solid"/>
+          </a:ln>
+        </p:spPr>
+        <p:txBody>
+          <a:bodyPr xmlns:a="http://schemas.openxmlformats.org/drawingml/2006/main" lIns="0" tIns="0" rIns="0" bIns="0" anchor="ctr">
+            <a:noAutofit/>
+          </a:bodyPr>
+          <a:lstStyle xmlns:a="http://schemas.openxmlformats.org/drawingml/2006/main"/>
+          <a:p xmlns:a="http://schemas.openxmlformats.org/drawingml/2006/main">
+            <a:pPr algn="l">
+              <a:buNone/>
+              <a:defRPr sz="1350" b="1">
                 <a:solidFill>
                   <a:srgbClr val="28685E"/>
                 </a:solidFill>
-              </a:defRPr>
-            </a:pPr>
-            <a:r>
-              <a:rPr sz="1500" b="1">
+                <a:latin typeface="Calibri"/>
+                <a:ea typeface="Calibri"/>
+                <a:cs typeface="Calibri"/>
+              </a:defRPr>
+            </a:pPr>
+            <a:r>
+              <a:rPr sz="1350" b="1">
                 <a:solidFill>
                   <a:srgbClr val="28685E"/>
                 </a:solidFill>
+                <a:latin typeface="Calibri"/>
+                <a:ea typeface="Calibri"/>
+                <a:cs typeface="Calibri"/>
               </a:rPr>
               <a:t>MADE BY MATT  /  GROW SCIENCE</a:t>
             </a:r>
@@ -6229,34 +8275,43 @@
         </p:nvSpPr>
         <p:spPr>
           <a:xfrm xmlns:a="http://schemas.openxmlformats.org/drawingml/2006/main">
-            <a:off x="609600" y="1352550"/>
-            <a:ext cx="10972800" cy="952500"/>
-          </a:xfrm>
-          <a:prstGeom xmlns:a="http://schemas.openxmlformats.org/drawingml/2006/main" prst="rect">
-            <a:avLst/>
-          </a:prstGeom>
-          <a:noFill xmlns:a="http://schemas.openxmlformats.org/drawingml/2006/main"/>
-          <a:ln xmlns:a="http://schemas.openxmlformats.org/drawingml/2006/main" w="0">
-            <a:noFill/>
-            <a:prstDash val="solid"/>
-          </a:ln>
-        </p:spPr>
-        <p:txBody>
-          <a:bodyPr xmlns:a="http://schemas.openxmlformats.org/drawingml/2006/main" lIns="0" tIns="0" rIns="0" bIns="0" anchor="ctr"/>
-          <a:lstStyle xmlns:a="http://schemas.openxmlformats.org/drawingml/2006/main"/>
-          <a:p xmlns:a="http://schemas.openxmlformats.org/drawingml/2006/main">
-            <a:pPr>
-              <a:defRPr sz="3750" b="1">
+            <a:off x="609600" y="990600"/>
+            <a:ext cx="10972800" cy="1000125"/>
+          </a:xfrm>
+          <a:prstGeom xmlns:a="http://schemas.openxmlformats.org/drawingml/2006/main" prst="rect">
+            <a:avLst/>
+          </a:prstGeom>
+          <a:noFill xmlns:a="http://schemas.openxmlformats.org/drawingml/2006/main"/>
+          <a:ln xmlns:a="http://schemas.openxmlformats.org/drawingml/2006/main" w="0">
+            <a:noFill/>
+            <a:prstDash val="solid"/>
+          </a:ln>
+        </p:spPr>
+        <p:txBody>
+          <a:bodyPr xmlns:a="http://schemas.openxmlformats.org/drawingml/2006/main" lIns="0" tIns="0" rIns="0" bIns="0" anchor="ctr">
+            <a:noAutofit/>
+          </a:bodyPr>
+          <a:lstStyle xmlns:a="http://schemas.openxmlformats.org/drawingml/2006/main"/>
+          <a:p xmlns:a="http://schemas.openxmlformats.org/drawingml/2006/main">
+            <a:pPr algn="l">
+              <a:buNone/>
+              <a:defRPr sz="3675" b="1">
                 <a:solidFill>
                   <a:srgbClr val="152B3A"/>
                 </a:solidFill>
-              </a:defRPr>
-            </a:pPr>
-            <a:r>
-              <a:rPr sz="3750" b="1">
+                <a:latin typeface="Calibri"/>
+                <a:ea typeface="Calibri"/>
+                <a:cs typeface="Calibri"/>
+              </a:defRPr>
+            </a:pPr>
+            <a:r>
+              <a:rPr sz="3675" b="1">
                 <a:solidFill>
                   <a:srgbClr val="152B3A"/>
                 </a:solidFill>
+                <a:latin typeface="Calibri"/>
+                <a:ea typeface="Calibri"/>
+                <a:cs typeface="Calibri"/>
               </a:rPr>
               <a:t>Helpful or unhelpful?</a:t>
             </a:r>
@@ -6279,14 +8334,14 @@
         </p:nvSpPr>
         <p:spPr>
           <a:xfrm xmlns:a="http://schemas.openxmlformats.org/drawingml/2006/main">
-            <a:off x="609600" y="6219825"/>
+            <a:off x="609600" y="6191250"/>
             <a:ext cx="10972800" cy="9525"/>
           </a:xfrm>
           <a:prstGeom xmlns:a="http://schemas.openxmlformats.org/drawingml/2006/main" prst="rect">
             <a:avLst/>
           </a:prstGeom>
           <a:solidFill xmlns:a="http://schemas.openxmlformats.org/drawingml/2006/main">
-            <a:srgbClr val="DCE7DD"/>
+            <a:srgbClr val="CEDBD3"/>
           </a:solidFill>
           <a:ln xmlns:a="http://schemas.openxmlformats.org/drawingml/2006/main" w="0">
             <a:noFill/>
@@ -6310,34 +8365,43 @@
         </p:nvSpPr>
         <p:spPr>
           <a:xfrm xmlns:a="http://schemas.openxmlformats.org/drawingml/2006/main">
-            <a:off x="609600" y="6381750"/>
-            <a:ext cx="9525000" cy="228600"/>
-          </a:xfrm>
-          <a:prstGeom xmlns:a="http://schemas.openxmlformats.org/drawingml/2006/main" prst="rect">
-            <a:avLst/>
-          </a:prstGeom>
-          <a:noFill xmlns:a="http://schemas.openxmlformats.org/drawingml/2006/main"/>
-          <a:ln xmlns:a="http://schemas.openxmlformats.org/drawingml/2006/main" w="0">
-            <a:noFill/>
-            <a:prstDash val="solid"/>
-          </a:ln>
-        </p:spPr>
-        <p:txBody>
-          <a:bodyPr xmlns:a="http://schemas.openxmlformats.org/drawingml/2006/main" lIns="0" tIns="0" rIns="0" bIns="0" anchor="ctr"/>
-          <a:lstStyle xmlns:a="http://schemas.openxmlformats.org/drawingml/2006/main"/>
-          <a:p xmlns:a="http://schemas.openxmlformats.org/drawingml/2006/main">
-            <a:pPr>
-              <a:defRPr sz="1275" b="0">
+            <a:off x="609600" y="6419850"/>
+            <a:ext cx="9525000" cy="219075"/>
+          </a:xfrm>
+          <a:prstGeom xmlns:a="http://schemas.openxmlformats.org/drawingml/2006/main" prst="rect">
+            <a:avLst/>
+          </a:prstGeom>
+          <a:noFill xmlns:a="http://schemas.openxmlformats.org/drawingml/2006/main"/>
+          <a:ln xmlns:a="http://schemas.openxmlformats.org/drawingml/2006/main" w="0">
+            <a:noFill/>
+            <a:prstDash val="solid"/>
+          </a:ln>
+        </p:spPr>
+        <p:txBody>
+          <a:bodyPr xmlns:a="http://schemas.openxmlformats.org/drawingml/2006/main" lIns="0" tIns="0" rIns="0" bIns="0" anchor="ctr">
+            <a:noAutofit/>
+          </a:bodyPr>
+          <a:lstStyle xmlns:a="http://schemas.openxmlformats.org/drawingml/2006/main"/>
+          <a:p xmlns:a="http://schemas.openxmlformats.org/drawingml/2006/main">
+            <a:pPr algn="l">
+              <a:buNone/>
+              <a:defRPr sz="1200" b="0">
                 <a:solidFill>
                   <a:srgbClr val="50616B"/>
                 </a:solidFill>
-              </a:defRPr>
-            </a:pPr>
-            <a:r>
-              <a:rPr sz="1275" b="0">
+                <a:latin typeface="Calibri"/>
+                <a:ea typeface="Calibri"/>
+                <a:cs typeface="Calibri"/>
+              </a:defRPr>
+            </a:pPr>
+            <a:r>
+              <a:rPr sz="1200" b="0">
                 <a:solidFill>
                   <a:srgbClr val="50616B"/>
                 </a:solidFill>
+                <a:latin typeface="Calibri"/>
+                <a:ea typeface="Calibri"/>
+                <a:cs typeface="Calibri"/>
               </a:rPr>
               <a:t>AUTUMN 1  ·  WEEK 3  ·  LESSON A</a:t>
             </a:r>
@@ -6360,27 +8424,33 @@
         </p:nvSpPr>
         <p:spPr>
           <a:xfrm xmlns:a="http://schemas.openxmlformats.org/drawingml/2006/main">
-            <a:off x="11106150" y="6362700"/>
-            <a:ext cx="476250" cy="238125"/>
-          </a:xfrm>
-          <a:prstGeom xmlns:a="http://schemas.openxmlformats.org/drawingml/2006/main" prst="rect">
-            <a:avLst/>
-          </a:prstGeom>
-          <a:noFill xmlns:a="http://schemas.openxmlformats.org/drawingml/2006/main"/>
-          <a:ln xmlns:a="http://schemas.openxmlformats.org/drawingml/2006/main" w="0">
-            <a:noFill/>
-            <a:prstDash val="solid"/>
-          </a:ln>
-        </p:spPr>
-        <p:txBody>
-          <a:bodyPr xmlns:a="http://schemas.openxmlformats.org/drawingml/2006/main" lIns="0" tIns="0" rIns="0" bIns="0" anchor="ctr"/>
-          <a:lstStyle xmlns:a="http://schemas.openxmlformats.org/drawingml/2006/main"/>
-          <a:p xmlns:a="http://schemas.openxmlformats.org/drawingml/2006/main">
-            <a:pPr>
+            <a:off x="11106150" y="6400800"/>
+            <a:ext cx="476250" cy="247650"/>
+          </a:xfrm>
+          <a:prstGeom xmlns:a="http://schemas.openxmlformats.org/drawingml/2006/main" prst="rect">
+            <a:avLst/>
+          </a:prstGeom>
+          <a:noFill xmlns:a="http://schemas.openxmlformats.org/drawingml/2006/main"/>
+          <a:ln xmlns:a="http://schemas.openxmlformats.org/drawingml/2006/main" w="0">
+            <a:noFill/>
+            <a:prstDash val="solid"/>
+          </a:ln>
+        </p:spPr>
+        <p:txBody>
+          <a:bodyPr xmlns:a="http://schemas.openxmlformats.org/drawingml/2006/main" lIns="0" tIns="0" rIns="0" bIns="0" anchor="ctr">
+            <a:noAutofit/>
+          </a:bodyPr>
+          <a:lstStyle xmlns:a="http://schemas.openxmlformats.org/drawingml/2006/main"/>
+          <a:p xmlns:a="http://schemas.openxmlformats.org/drawingml/2006/main">
+            <a:pPr algn="l">
+              <a:buNone/>
               <a:defRPr sz="1350" b="1">
                 <a:solidFill>
                   <a:srgbClr val="28685E"/>
                 </a:solidFill>
+                <a:latin typeface="Calibri"/>
+                <a:ea typeface="Calibri"/>
+                <a:cs typeface="Calibri"/>
               </a:defRPr>
             </a:pPr>
             <a:r>
@@ -6388,6 +8458,9 @@
                 <a:solidFill>
                   <a:srgbClr val="28685E"/>
                 </a:solidFill>
+                <a:latin typeface="Calibri"/>
+                <a:ea typeface="Calibri"/>
+                <a:cs typeface="Calibri"/>
               </a:rPr>
               <a:t>06</a:t>
             </a:r>
@@ -6410,34 +8483,43 @@
         </p:nvSpPr>
         <p:spPr>
           <a:xfrm xmlns:a="http://schemas.openxmlformats.org/drawingml/2006/main">
-            <a:off x="609600" y="2495550"/>
-            <a:ext cx="10668000" cy="533400"/>
-          </a:xfrm>
-          <a:prstGeom xmlns:a="http://schemas.openxmlformats.org/drawingml/2006/main" prst="rect">
-            <a:avLst/>
-          </a:prstGeom>
-          <a:noFill xmlns:a="http://schemas.openxmlformats.org/drawingml/2006/main"/>
-          <a:ln xmlns:a="http://schemas.openxmlformats.org/drawingml/2006/main" w="0">
-            <a:noFill/>
-            <a:prstDash val="solid"/>
-          </a:ln>
-        </p:spPr>
-        <p:txBody>
-          <a:bodyPr xmlns:a="http://schemas.openxmlformats.org/drawingml/2006/main" lIns="0" tIns="0" rIns="0" bIns="0" anchor="ctr"/>
-          <a:lstStyle xmlns:a="http://schemas.openxmlformats.org/drawingml/2006/main"/>
-          <a:p xmlns:a="http://schemas.openxmlformats.org/drawingml/2006/main">
-            <a:pPr>
-              <a:defRPr sz="2325" b="0">
+            <a:off x="1000125" y="2333625"/>
+            <a:ext cx="10382250" cy="575310"/>
+          </a:xfrm>
+          <a:prstGeom xmlns:a="http://schemas.openxmlformats.org/drawingml/2006/main" prst="rect">
+            <a:avLst/>
+          </a:prstGeom>
+          <a:noFill xmlns:a="http://schemas.openxmlformats.org/drawingml/2006/main"/>
+          <a:ln xmlns:a="http://schemas.openxmlformats.org/drawingml/2006/main" w="0">
+            <a:noFill/>
+            <a:prstDash val="solid"/>
+          </a:ln>
+        </p:spPr>
+        <p:txBody>
+          <a:bodyPr xmlns:a="http://schemas.openxmlformats.org/drawingml/2006/main" lIns="0" tIns="0" rIns="0" bIns="0" anchor="ctr">
+            <a:noAutofit/>
+          </a:bodyPr>
+          <a:lstStyle xmlns:a="http://schemas.openxmlformats.org/drawingml/2006/main"/>
+          <a:p xmlns:a="http://schemas.openxmlformats.org/drawingml/2006/main">
+            <a:pPr algn="l">
+              <a:buNone/>
+              <a:defRPr sz="2400" b="0">
                 <a:solidFill>
                   <a:srgbClr val="152B3A"/>
                 </a:solidFill>
-              </a:defRPr>
-            </a:pPr>
-            <a:r>
-              <a:rPr sz="2325" b="0">
+                <a:latin typeface="Calibri"/>
+                <a:ea typeface="Calibri"/>
+                <a:cs typeface="Calibri"/>
+              </a:defRPr>
+            </a:pPr>
+            <a:r>
+              <a:rPr sz="2400" b="0">
                 <a:solidFill>
                   <a:srgbClr val="152B3A"/>
                 </a:solidFill>
+                <a:latin typeface="Calibri"/>
+                <a:ea typeface="Calibri"/>
+                <a:cs typeface="Calibri"/>
               </a:rPr>
               <a:t>Bike brakes</a:t>
             </a:r>
@@ -6460,34 +8542,43 @@
         </p:nvSpPr>
         <p:spPr>
           <a:xfrm xmlns:a="http://schemas.openxmlformats.org/drawingml/2006/main">
-            <a:off x="609600" y="3124200"/>
-            <a:ext cx="10668000" cy="533400"/>
-          </a:xfrm>
-          <a:prstGeom xmlns:a="http://schemas.openxmlformats.org/drawingml/2006/main" prst="rect">
-            <a:avLst/>
-          </a:prstGeom>
-          <a:noFill xmlns:a="http://schemas.openxmlformats.org/drawingml/2006/main"/>
-          <a:ln xmlns:a="http://schemas.openxmlformats.org/drawingml/2006/main" w="0">
-            <a:noFill/>
-            <a:prstDash val="solid"/>
-          </a:ln>
-        </p:spPr>
-        <p:txBody>
-          <a:bodyPr xmlns:a="http://schemas.openxmlformats.org/drawingml/2006/main" lIns="0" tIns="0" rIns="0" bIns="0" anchor="ctr"/>
-          <a:lstStyle xmlns:a="http://schemas.openxmlformats.org/drawingml/2006/main"/>
-          <a:p xmlns:a="http://schemas.openxmlformats.org/drawingml/2006/main">
-            <a:pPr>
-              <a:defRPr sz="2325" b="0">
+            <a:off x="1000125" y="2966085"/>
+            <a:ext cx="10382250" cy="575310"/>
+          </a:xfrm>
+          <a:prstGeom xmlns:a="http://schemas.openxmlformats.org/drawingml/2006/main" prst="rect">
+            <a:avLst/>
+          </a:prstGeom>
+          <a:noFill xmlns:a="http://schemas.openxmlformats.org/drawingml/2006/main"/>
+          <a:ln xmlns:a="http://schemas.openxmlformats.org/drawingml/2006/main" w="0">
+            <a:noFill/>
+            <a:prstDash val="solid"/>
+          </a:ln>
+        </p:spPr>
+        <p:txBody>
+          <a:bodyPr xmlns:a="http://schemas.openxmlformats.org/drawingml/2006/main" lIns="0" tIns="0" rIns="0" bIns="0" anchor="ctr">
+            <a:noAutofit/>
+          </a:bodyPr>
+          <a:lstStyle xmlns:a="http://schemas.openxmlformats.org/drawingml/2006/main"/>
+          <a:p xmlns:a="http://schemas.openxmlformats.org/drawingml/2006/main">
+            <a:pPr algn="l">
+              <a:buNone/>
+              <a:defRPr sz="2400" b="0">
                 <a:solidFill>
                   <a:srgbClr val="152B3A"/>
                 </a:solidFill>
-              </a:defRPr>
-            </a:pPr>
-            <a:r>
-              <a:rPr sz="2325" b="0">
+                <a:latin typeface="Calibri"/>
+                <a:ea typeface="Calibri"/>
+                <a:cs typeface="Calibri"/>
+              </a:defRPr>
+            </a:pPr>
+            <a:r>
+              <a:rPr sz="2400" b="0">
                 <a:solidFill>
                   <a:srgbClr val="152B3A"/>
                 </a:solidFill>
+                <a:latin typeface="Calibri"/>
+                <a:ea typeface="Calibri"/>
+                <a:cs typeface="Calibri"/>
               </a:rPr>
               <a:t>Trainers on a wet floor</a:t>
             </a:r>
@@ -6510,34 +8601,43 @@
         </p:nvSpPr>
         <p:spPr>
           <a:xfrm xmlns:a="http://schemas.openxmlformats.org/drawingml/2006/main">
-            <a:off x="609600" y="3752850"/>
-            <a:ext cx="10668000" cy="533400"/>
-          </a:xfrm>
-          <a:prstGeom xmlns:a="http://schemas.openxmlformats.org/drawingml/2006/main" prst="rect">
-            <a:avLst/>
-          </a:prstGeom>
-          <a:noFill xmlns:a="http://schemas.openxmlformats.org/drawingml/2006/main"/>
-          <a:ln xmlns:a="http://schemas.openxmlformats.org/drawingml/2006/main" w="0">
-            <a:noFill/>
-            <a:prstDash val="solid"/>
-          </a:ln>
-        </p:spPr>
-        <p:txBody>
-          <a:bodyPr xmlns:a="http://schemas.openxmlformats.org/drawingml/2006/main" lIns="0" tIns="0" rIns="0" bIns="0" anchor="ctr"/>
-          <a:lstStyle xmlns:a="http://schemas.openxmlformats.org/drawingml/2006/main"/>
-          <a:p xmlns:a="http://schemas.openxmlformats.org/drawingml/2006/main">
-            <a:pPr>
-              <a:defRPr sz="2325" b="0">
+            <a:off x="1000125" y="3598545"/>
+            <a:ext cx="10382250" cy="575310"/>
+          </a:xfrm>
+          <a:prstGeom xmlns:a="http://schemas.openxmlformats.org/drawingml/2006/main" prst="rect">
+            <a:avLst/>
+          </a:prstGeom>
+          <a:noFill xmlns:a="http://schemas.openxmlformats.org/drawingml/2006/main"/>
+          <a:ln xmlns:a="http://schemas.openxmlformats.org/drawingml/2006/main" w="0">
+            <a:noFill/>
+            <a:prstDash val="solid"/>
+          </a:ln>
+        </p:spPr>
+        <p:txBody>
+          <a:bodyPr xmlns:a="http://schemas.openxmlformats.org/drawingml/2006/main" lIns="0" tIns="0" rIns="0" bIns="0" anchor="ctr">
+            <a:noAutofit/>
+          </a:bodyPr>
+          <a:lstStyle xmlns:a="http://schemas.openxmlformats.org/drawingml/2006/main"/>
+          <a:p xmlns:a="http://schemas.openxmlformats.org/drawingml/2006/main">
+            <a:pPr algn="l">
+              <a:buNone/>
+              <a:defRPr sz="2400" b="0">
                 <a:solidFill>
                   <a:srgbClr val="152B3A"/>
                 </a:solidFill>
-              </a:defRPr>
-            </a:pPr>
-            <a:r>
-              <a:rPr sz="2325" b="0">
+                <a:latin typeface="Calibri"/>
+                <a:ea typeface="Calibri"/>
+                <a:cs typeface="Calibri"/>
+              </a:defRPr>
+            </a:pPr>
+            <a:r>
+              <a:rPr sz="2400" b="0">
                 <a:solidFill>
                   <a:srgbClr val="152B3A"/>
                 </a:solidFill>
+                <a:latin typeface="Calibri"/>
+                <a:ea typeface="Calibri"/>
+                <a:cs typeface="Calibri"/>
               </a:rPr>
               <a:t>Moving engine parts rubbing</a:t>
             </a:r>
@@ -6560,34 +8660,43 @@
         </p:nvSpPr>
         <p:spPr>
           <a:xfrm xmlns:a="http://schemas.openxmlformats.org/drawingml/2006/main">
-            <a:off x="609600" y="4381500"/>
-            <a:ext cx="10668000" cy="533400"/>
-          </a:xfrm>
-          <a:prstGeom xmlns:a="http://schemas.openxmlformats.org/drawingml/2006/main" prst="rect">
-            <a:avLst/>
-          </a:prstGeom>
-          <a:noFill xmlns:a="http://schemas.openxmlformats.org/drawingml/2006/main"/>
-          <a:ln xmlns:a="http://schemas.openxmlformats.org/drawingml/2006/main" w="0">
-            <a:noFill/>
-            <a:prstDash val="solid"/>
-          </a:ln>
-        </p:spPr>
-        <p:txBody>
-          <a:bodyPr xmlns:a="http://schemas.openxmlformats.org/drawingml/2006/main" lIns="0" tIns="0" rIns="0" bIns="0" anchor="ctr"/>
-          <a:lstStyle xmlns:a="http://schemas.openxmlformats.org/drawingml/2006/main"/>
-          <a:p xmlns:a="http://schemas.openxmlformats.org/drawingml/2006/main">
-            <a:pPr>
-              <a:defRPr sz="2325" b="0">
+            <a:off x="1000125" y="4231005"/>
+            <a:ext cx="10382250" cy="575310"/>
+          </a:xfrm>
+          <a:prstGeom xmlns:a="http://schemas.openxmlformats.org/drawingml/2006/main" prst="rect">
+            <a:avLst/>
+          </a:prstGeom>
+          <a:noFill xmlns:a="http://schemas.openxmlformats.org/drawingml/2006/main"/>
+          <a:ln xmlns:a="http://schemas.openxmlformats.org/drawingml/2006/main" w="0">
+            <a:noFill/>
+            <a:prstDash val="solid"/>
+          </a:ln>
+        </p:spPr>
+        <p:txBody>
+          <a:bodyPr xmlns:a="http://schemas.openxmlformats.org/drawingml/2006/main" lIns="0" tIns="0" rIns="0" bIns="0" anchor="ctr">
+            <a:noAutofit/>
+          </a:bodyPr>
+          <a:lstStyle xmlns:a="http://schemas.openxmlformats.org/drawingml/2006/main"/>
+          <a:p xmlns:a="http://schemas.openxmlformats.org/drawingml/2006/main">
+            <a:pPr algn="l">
+              <a:buNone/>
+              <a:defRPr sz="2400" b="0">
                 <a:solidFill>
                   <a:srgbClr val="152B3A"/>
                 </a:solidFill>
-              </a:defRPr>
-            </a:pPr>
-            <a:r>
-              <a:rPr sz="2325" b="0">
+                <a:latin typeface="Calibri"/>
+                <a:ea typeface="Calibri"/>
+                <a:cs typeface="Calibri"/>
+              </a:defRPr>
+            </a:pPr>
+            <a:r>
+              <a:rPr sz="2400" b="0">
                 <a:solidFill>
                   <a:srgbClr val="152B3A"/>
                 </a:solidFill>
+                <a:latin typeface="Calibri"/>
+                <a:ea typeface="Calibri"/>
+                <a:cs typeface="Calibri"/>
               </a:rPr>
               <a:t>Pushing a heavy box across carpet</a:t>
             </a:r>
@@ -6610,34 +8719,43 @@
         </p:nvSpPr>
         <p:spPr>
           <a:xfrm xmlns:a="http://schemas.openxmlformats.org/drawingml/2006/main">
-            <a:off x="609600" y="5010150"/>
-            <a:ext cx="10668000" cy="533400"/>
-          </a:xfrm>
-          <a:prstGeom xmlns:a="http://schemas.openxmlformats.org/drawingml/2006/main" prst="rect">
-            <a:avLst/>
-          </a:prstGeom>
-          <a:noFill xmlns:a="http://schemas.openxmlformats.org/drawingml/2006/main"/>
-          <a:ln xmlns:a="http://schemas.openxmlformats.org/drawingml/2006/main" w="0">
-            <a:noFill/>
-            <a:prstDash val="solid"/>
-          </a:ln>
-        </p:spPr>
-        <p:txBody>
-          <a:bodyPr xmlns:a="http://schemas.openxmlformats.org/drawingml/2006/main" lIns="0" tIns="0" rIns="0" bIns="0" anchor="ctr"/>
-          <a:lstStyle xmlns:a="http://schemas.openxmlformats.org/drawingml/2006/main"/>
-          <a:p xmlns:a="http://schemas.openxmlformats.org/drawingml/2006/main">
-            <a:pPr>
-              <a:defRPr sz="2325" b="0">
+            <a:off x="1000125" y="4863465"/>
+            <a:ext cx="10382250" cy="575310"/>
+          </a:xfrm>
+          <a:prstGeom xmlns:a="http://schemas.openxmlformats.org/drawingml/2006/main" prst="rect">
+            <a:avLst/>
+          </a:prstGeom>
+          <a:noFill xmlns:a="http://schemas.openxmlformats.org/drawingml/2006/main"/>
+          <a:ln xmlns:a="http://schemas.openxmlformats.org/drawingml/2006/main" w="0">
+            <a:noFill/>
+            <a:prstDash val="solid"/>
+          </a:ln>
+        </p:spPr>
+        <p:txBody>
+          <a:bodyPr xmlns:a="http://schemas.openxmlformats.org/drawingml/2006/main" lIns="0" tIns="0" rIns="0" bIns="0" anchor="ctr">
+            <a:noAutofit/>
+          </a:bodyPr>
+          <a:lstStyle xmlns:a="http://schemas.openxmlformats.org/drawingml/2006/main"/>
+          <a:p xmlns:a="http://schemas.openxmlformats.org/drawingml/2006/main">
+            <a:pPr algn="l">
+              <a:buNone/>
+              <a:defRPr sz="2400" b="0">
                 <a:solidFill>
                   <a:srgbClr val="152B3A"/>
                 </a:solidFill>
-              </a:defRPr>
-            </a:pPr>
-            <a:r>
-              <a:rPr sz="2325" b="0">
+                <a:latin typeface="Calibri"/>
+                <a:ea typeface="Calibri"/>
+                <a:cs typeface="Calibri"/>
+              </a:defRPr>
+            </a:pPr>
+            <a:r>
+              <a:rPr sz="2400" b="0">
                 <a:solidFill>
                   <a:srgbClr val="152B3A"/>
                 </a:solidFill>
+                <a:latin typeface="Calibri"/>
+                <a:ea typeface="Calibri"/>
+                <a:cs typeface="Calibri"/>
               </a:rPr>
               <a:t>A door handle</a:t>
             </a:r>
@@ -6660,36 +8778,450 @@
         </p:nvSpPr>
         <p:spPr>
           <a:xfrm xmlns:a="http://schemas.openxmlformats.org/drawingml/2006/main">
-            <a:off x="6286500" y="2905125"/>
-            <a:ext cx="4810125" cy="1714500"/>
-          </a:xfrm>
-          <a:prstGeom xmlns:a="http://schemas.openxmlformats.org/drawingml/2006/main" prst="rect">
-            <a:avLst/>
-          </a:prstGeom>
-          <a:noFill xmlns:a="http://schemas.openxmlformats.org/drawingml/2006/main"/>
-          <a:ln xmlns:a="http://schemas.openxmlformats.org/drawingml/2006/main" w="0">
-            <a:noFill/>
-            <a:prstDash val="solid"/>
-          </a:ln>
-        </p:spPr>
-        <p:txBody>
-          <a:bodyPr xmlns:a="http://schemas.openxmlformats.org/drawingml/2006/main" lIns="0" tIns="0" rIns="0" bIns="0" anchor="ctr"/>
-          <a:lstStyle xmlns:a="http://schemas.openxmlformats.org/drawingml/2006/main"/>
-          <a:p xmlns:a="http://schemas.openxmlformats.org/drawingml/2006/main">
-            <a:pPr>
-              <a:defRPr sz="3150" b="1">
+            <a:off x="609600" y="5667375"/>
+            <a:ext cx="10972800" cy="381000"/>
+          </a:xfrm>
+          <a:prstGeom xmlns:a="http://schemas.openxmlformats.org/drawingml/2006/main" prst="rect">
+            <a:avLst/>
+          </a:prstGeom>
+          <a:noFill xmlns:a="http://schemas.openxmlformats.org/drawingml/2006/main"/>
+          <a:ln xmlns:a="http://schemas.openxmlformats.org/drawingml/2006/main" w="0">
+            <a:noFill/>
+            <a:prstDash val="solid"/>
+          </a:ln>
+        </p:spPr>
+        <p:txBody>
+          <a:bodyPr xmlns:a="http://schemas.openxmlformats.org/drawingml/2006/main" lIns="0" tIns="0" rIns="0" bIns="0" anchor="ctr">
+            <a:noAutofit/>
+          </a:bodyPr>
+          <a:lstStyle xmlns:a="http://schemas.openxmlformats.org/drawingml/2006/main"/>
+          <a:p xmlns:a="http://schemas.openxmlformats.org/drawingml/2006/main">
+            <a:pPr algn="l">
+              <a:buNone/>
+              <a:defRPr sz="1875" b="1">
                 <a:solidFill>
                   <a:srgbClr val="28685E"/>
                 </a:solidFill>
-              </a:defRPr>
-            </a:pPr>
-            <a:r>
-              <a:rPr sz="3150" b="1">
+                <a:latin typeface="Calibri"/>
+                <a:ea typeface="Calibri"/>
+                <a:cs typeface="Calibri"/>
+              </a:defRPr>
+            </a:pPr>
+            <a:r>
+              <a:rPr sz="1875" b="1">
                 <a:solidFill>
                   <a:srgbClr val="28685E"/>
                 </a:solidFill>
+                <a:latin typeface="Calibri"/>
+                <a:ea typeface="Calibri"/>
+                <a:cs typeface="Calibri"/>
               </a:rPr>
               <a:t>Name the surfaces. Explain the job.</a:t>
+            </a:r>
+          </a:p>
+        </p:txBody>
+      </p:sp>
+      <p:sp>
+        <p:nvSpPr>
+          <p:cNvPr id="14" name="cue-0">
+            <a:extLst xmlns:a="http://schemas.openxmlformats.org/drawingml/2006/main">
+              <a:ext uri="{FF2B5EF4-FFF2-40B4-BE49-F238E27FC236}">
+                <a16:creationId xmlns:a16="http://schemas.microsoft.com/office/drawing/2014/main" id="{9BE3E94F-E041-46AD-8EC6-0F8F15695617}"/>
+              </a:ext>
+            </a:extLst>
+          </p:cNvPr>
+          <p:cNvSpPr>
+            <a:spLocks xmlns:a="http://schemas.openxmlformats.org/drawingml/2006/main" noGrp="1"/>
+          </p:cNvSpPr>
+          <p:nvPr/>
+        </p:nvSpPr>
+        <p:spPr>
+          <a:xfrm xmlns:a="http://schemas.openxmlformats.org/drawingml/2006/main">
+            <a:off x="609600" y="2362200"/>
+            <a:ext cx="323850" cy="323850"/>
+          </a:xfrm>
+          <a:prstGeom xmlns:a="http://schemas.openxmlformats.org/drawingml/2006/main" prst="rect">
+            <a:avLst/>
+          </a:prstGeom>
+          <a:noFill xmlns:a="http://schemas.openxmlformats.org/drawingml/2006/main"/>
+          <a:ln xmlns:a="http://schemas.openxmlformats.org/drawingml/2006/main" w="0">
+            <a:noFill/>
+          </a:ln>
+        </p:spPr>
+        <p:txBody>
+          <a:bodyPr xmlns:a="http://schemas.openxmlformats.org/drawingml/2006/main" lIns="0" tIns="0" rIns="0" bIns="0" anchor="ctr">
+            <a:noAutofit/>
+          </a:bodyPr>
+          <a:lstStyle xmlns:a="http://schemas.openxmlformats.org/drawingml/2006/main"/>
+          <a:p xmlns:a="http://schemas.openxmlformats.org/drawingml/2006/main">
+            <a:pPr algn="l">
+              <a:defRPr sz="1350" b="1">
+                <a:solidFill>
+                  <a:srgbClr val="28685E"/>
+                </a:solidFill>
+                <a:latin typeface="Calibri"/>
+                <a:ea typeface="Calibri"/>
+                <a:cs typeface="Calibri"/>
+              </a:defRPr>
+            </a:pPr>
+            <a:r>
+              <a:rPr sz="1350" b="1">
+                <a:solidFill>
+                  <a:srgbClr val="28685E"/>
+                </a:solidFill>
+                <a:latin typeface="Calibri"/>
+                <a:ea typeface="Calibri"/>
+                <a:cs typeface="Calibri"/>
+              </a:rPr>
+              <a:t>01</a:t>
+            </a:r>
+          </a:p>
+        </p:txBody>
+      </p:sp>
+      <p:sp>
+        <p:nvSpPr>
+          <p:cNvPr id="15" name="row-rule-0">
+            <a:extLst xmlns:a="http://schemas.openxmlformats.org/drawingml/2006/main">
+              <a:ext uri="{FF2B5EF4-FFF2-40B4-BE49-F238E27FC236}">
+                <a16:creationId xmlns:a16="http://schemas.microsoft.com/office/drawing/2014/main" id="{26150E04-2C26-45C9-96B7-AFAF230F0D1E}"/>
+              </a:ext>
+            </a:extLst>
+          </p:cNvPr>
+          <p:cNvSpPr>
+            <a:spLocks xmlns:a="http://schemas.openxmlformats.org/drawingml/2006/main" noGrp="1"/>
+          </p:cNvSpPr>
+          <p:nvPr/>
+        </p:nvSpPr>
+        <p:spPr>
+          <a:xfrm xmlns:a="http://schemas.openxmlformats.org/drawingml/2006/main">
+            <a:off x="1000125" y="2918460"/>
+            <a:ext cx="10334625" cy="0"/>
+          </a:xfrm>
+          <a:prstGeom xmlns:a="http://schemas.openxmlformats.org/drawingml/2006/main" prst="line">
+            <a:avLst/>
+          </a:prstGeom>
+          <a:noFill xmlns:a="http://schemas.openxmlformats.org/drawingml/2006/main"/>
+          <a:ln xmlns:a="http://schemas.openxmlformats.org/drawingml/2006/main" w="9525">
+            <a:solidFill>
+              <a:srgbClr val="CEDBD3"/>
+            </a:solidFill>
+          </a:ln>
+        </p:spPr>
+      </p:sp>
+      <p:sp>
+        <p:nvSpPr>
+          <p:cNvPr id="16" name="cue-1">
+            <a:extLst xmlns:a="http://schemas.openxmlformats.org/drawingml/2006/main">
+              <a:ext uri="{FF2B5EF4-FFF2-40B4-BE49-F238E27FC236}">
+                <a16:creationId xmlns:a16="http://schemas.microsoft.com/office/drawing/2014/main" id="{6280A731-C445-49FD-9588-5ACCD211CF9F}"/>
+              </a:ext>
+            </a:extLst>
+          </p:cNvPr>
+          <p:cNvSpPr>
+            <a:spLocks xmlns:a="http://schemas.openxmlformats.org/drawingml/2006/main" noGrp="1"/>
+          </p:cNvSpPr>
+          <p:nvPr/>
+        </p:nvSpPr>
+        <p:spPr>
+          <a:xfrm xmlns:a="http://schemas.openxmlformats.org/drawingml/2006/main">
+            <a:off x="609600" y="2994660"/>
+            <a:ext cx="323850" cy="323850"/>
+          </a:xfrm>
+          <a:prstGeom xmlns:a="http://schemas.openxmlformats.org/drawingml/2006/main" prst="rect">
+            <a:avLst/>
+          </a:prstGeom>
+          <a:noFill xmlns:a="http://schemas.openxmlformats.org/drawingml/2006/main"/>
+          <a:ln xmlns:a="http://schemas.openxmlformats.org/drawingml/2006/main" w="0">
+            <a:noFill/>
+          </a:ln>
+        </p:spPr>
+        <p:txBody>
+          <a:bodyPr xmlns:a="http://schemas.openxmlformats.org/drawingml/2006/main" lIns="0" tIns="0" rIns="0" bIns="0" anchor="ctr">
+            <a:noAutofit/>
+          </a:bodyPr>
+          <a:lstStyle xmlns:a="http://schemas.openxmlformats.org/drawingml/2006/main"/>
+          <a:p xmlns:a="http://schemas.openxmlformats.org/drawingml/2006/main">
+            <a:pPr algn="l">
+              <a:defRPr sz="1350" b="1">
+                <a:solidFill>
+                  <a:srgbClr val="28685E"/>
+                </a:solidFill>
+                <a:latin typeface="Calibri"/>
+                <a:ea typeface="Calibri"/>
+                <a:cs typeface="Calibri"/>
+              </a:defRPr>
+            </a:pPr>
+            <a:r>
+              <a:rPr sz="1350" b="1">
+                <a:solidFill>
+                  <a:srgbClr val="28685E"/>
+                </a:solidFill>
+                <a:latin typeface="Calibri"/>
+                <a:ea typeface="Calibri"/>
+                <a:cs typeface="Calibri"/>
+              </a:rPr>
+              <a:t>02</a:t>
+            </a:r>
+          </a:p>
+        </p:txBody>
+      </p:sp>
+      <p:sp>
+        <p:nvSpPr>
+          <p:cNvPr id="17" name="row-rule-1">
+            <a:extLst xmlns:a="http://schemas.openxmlformats.org/drawingml/2006/main">
+              <a:ext uri="{FF2B5EF4-FFF2-40B4-BE49-F238E27FC236}">
+                <a16:creationId xmlns:a16="http://schemas.microsoft.com/office/drawing/2014/main" id="{2EE45385-4D90-42FB-BC18-E8FC2E4F680E}"/>
+              </a:ext>
+            </a:extLst>
+          </p:cNvPr>
+          <p:cNvSpPr>
+            <a:spLocks xmlns:a="http://schemas.openxmlformats.org/drawingml/2006/main" noGrp="1"/>
+          </p:cNvSpPr>
+          <p:nvPr/>
+        </p:nvSpPr>
+        <p:spPr>
+          <a:xfrm xmlns:a="http://schemas.openxmlformats.org/drawingml/2006/main">
+            <a:off x="1000125" y="3550920"/>
+            <a:ext cx="10334625" cy="0"/>
+          </a:xfrm>
+          <a:prstGeom xmlns:a="http://schemas.openxmlformats.org/drawingml/2006/main" prst="line">
+            <a:avLst/>
+          </a:prstGeom>
+          <a:noFill xmlns:a="http://schemas.openxmlformats.org/drawingml/2006/main"/>
+          <a:ln xmlns:a="http://schemas.openxmlformats.org/drawingml/2006/main" w="9525">
+            <a:solidFill>
+              <a:srgbClr val="CEDBD3"/>
+            </a:solidFill>
+          </a:ln>
+        </p:spPr>
+      </p:sp>
+      <p:sp>
+        <p:nvSpPr>
+          <p:cNvPr id="18" name="cue-2">
+            <a:extLst xmlns:a="http://schemas.openxmlformats.org/drawingml/2006/main">
+              <a:ext uri="{FF2B5EF4-FFF2-40B4-BE49-F238E27FC236}">
+                <a16:creationId xmlns:a16="http://schemas.microsoft.com/office/drawing/2014/main" id="{45BF1718-C828-42A1-9AED-D6E447DA2731}"/>
+              </a:ext>
+            </a:extLst>
+          </p:cNvPr>
+          <p:cNvSpPr>
+            <a:spLocks xmlns:a="http://schemas.openxmlformats.org/drawingml/2006/main" noGrp="1"/>
+          </p:cNvSpPr>
+          <p:nvPr/>
+        </p:nvSpPr>
+        <p:spPr>
+          <a:xfrm xmlns:a="http://schemas.openxmlformats.org/drawingml/2006/main">
+            <a:off x="609600" y="3627120"/>
+            <a:ext cx="323850" cy="323850"/>
+          </a:xfrm>
+          <a:prstGeom xmlns:a="http://schemas.openxmlformats.org/drawingml/2006/main" prst="rect">
+            <a:avLst/>
+          </a:prstGeom>
+          <a:noFill xmlns:a="http://schemas.openxmlformats.org/drawingml/2006/main"/>
+          <a:ln xmlns:a="http://schemas.openxmlformats.org/drawingml/2006/main" w="0">
+            <a:noFill/>
+          </a:ln>
+        </p:spPr>
+        <p:txBody>
+          <a:bodyPr xmlns:a="http://schemas.openxmlformats.org/drawingml/2006/main" lIns="0" tIns="0" rIns="0" bIns="0" anchor="ctr">
+            <a:noAutofit/>
+          </a:bodyPr>
+          <a:lstStyle xmlns:a="http://schemas.openxmlformats.org/drawingml/2006/main"/>
+          <a:p xmlns:a="http://schemas.openxmlformats.org/drawingml/2006/main">
+            <a:pPr algn="l">
+              <a:defRPr sz="1350" b="1">
+                <a:solidFill>
+                  <a:srgbClr val="28685E"/>
+                </a:solidFill>
+                <a:latin typeface="Calibri"/>
+                <a:ea typeface="Calibri"/>
+                <a:cs typeface="Calibri"/>
+              </a:defRPr>
+            </a:pPr>
+            <a:r>
+              <a:rPr sz="1350" b="1">
+                <a:solidFill>
+                  <a:srgbClr val="28685E"/>
+                </a:solidFill>
+                <a:latin typeface="Calibri"/>
+                <a:ea typeface="Calibri"/>
+                <a:cs typeface="Calibri"/>
+              </a:rPr>
+              <a:t>03</a:t>
+            </a:r>
+          </a:p>
+        </p:txBody>
+      </p:sp>
+      <p:sp>
+        <p:nvSpPr>
+          <p:cNvPr id="19" name="row-rule-2">
+            <a:extLst xmlns:a="http://schemas.openxmlformats.org/drawingml/2006/main">
+              <a:ext uri="{FF2B5EF4-FFF2-40B4-BE49-F238E27FC236}">
+                <a16:creationId xmlns:a16="http://schemas.microsoft.com/office/drawing/2014/main" id="{F370DFFC-0B85-44A7-9D9E-AFB0FBF098A1}"/>
+              </a:ext>
+            </a:extLst>
+          </p:cNvPr>
+          <p:cNvSpPr>
+            <a:spLocks xmlns:a="http://schemas.openxmlformats.org/drawingml/2006/main" noGrp="1"/>
+          </p:cNvSpPr>
+          <p:nvPr/>
+        </p:nvSpPr>
+        <p:spPr>
+          <a:xfrm xmlns:a="http://schemas.openxmlformats.org/drawingml/2006/main">
+            <a:off x="1000125" y="4183380"/>
+            <a:ext cx="10334625" cy="0"/>
+          </a:xfrm>
+          <a:prstGeom xmlns:a="http://schemas.openxmlformats.org/drawingml/2006/main" prst="line">
+            <a:avLst/>
+          </a:prstGeom>
+          <a:noFill xmlns:a="http://schemas.openxmlformats.org/drawingml/2006/main"/>
+          <a:ln xmlns:a="http://schemas.openxmlformats.org/drawingml/2006/main" w="9525">
+            <a:solidFill>
+              <a:srgbClr val="CEDBD3"/>
+            </a:solidFill>
+          </a:ln>
+        </p:spPr>
+      </p:sp>
+      <p:sp>
+        <p:nvSpPr>
+          <p:cNvPr id="20" name="cue-3">
+            <a:extLst xmlns:a="http://schemas.openxmlformats.org/drawingml/2006/main">
+              <a:ext uri="{FF2B5EF4-FFF2-40B4-BE49-F238E27FC236}">
+                <a16:creationId xmlns:a16="http://schemas.microsoft.com/office/drawing/2014/main" id="{0E52603B-FD73-442D-B8E8-C8FF2A072690}"/>
+              </a:ext>
+            </a:extLst>
+          </p:cNvPr>
+          <p:cNvSpPr>
+            <a:spLocks xmlns:a="http://schemas.openxmlformats.org/drawingml/2006/main" noGrp="1"/>
+          </p:cNvSpPr>
+          <p:nvPr/>
+        </p:nvSpPr>
+        <p:spPr>
+          <a:xfrm xmlns:a="http://schemas.openxmlformats.org/drawingml/2006/main">
+            <a:off x="609600" y="4259580"/>
+            <a:ext cx="323850" cy="323850"/>
+          </a:xfrm>
+          <a:prstGeom xmlns:a="http://schemas.openxmlformats.org/drawingml/2006/main" prst="rect">
+            <a:avLst/>
+          </a:prstGeom>
+          <a:noFill xmlns:a="http://schemas.openxmlformats.org/drawingml/2006/main"/>
+          <a:ln xmlns:a="http://schemas.openxmlformats.org/drawingml/2006/main" w="0">
+            <a:noFill/>
+          </a:ln>
+        </p:spPr>
+        <p:txBody>
+          <a:bodyPr xmlns:a="http://schemas.openxmlformats.org/drawingml/2006/main" lIns="0" tIns="0" rIns="0" bIns="0" anchor="ctr">
+            <a:noAutofit/>
+          </a:bodyPr>
+          <a:lstStyle xmlns:a="http://schemas.openxmlformats.org/drawingml/2006/main"/>
+          <a:p xmlns:a="http://schemas.openxmlformats.org/drawingml/2006/main">
+            <a:pPr algn="l">
+              <a:defRPr sz="1350" b="1">
+                <a:solidFill>
+                  <a:srgbClr val="28685E"/>
+                </a:solidFill>
+                <a:latin typeface="Calibri"/>
+                <a:ea typeface="Calibri"/>
+                <a:cs typeface="Calibri"/>
+              </a:defRPr>
+            </a:pPr>
+            <a:r>
+              <a:rPr sz="1350" b="1">
+                <a:solidFill>
+                  <a:srgbClr val="28685E"/>
+                </a:solidFill>
+                <a:latin typeface="Calibri"/>
+                <a:ea typeface="Calibri"/>
+                <a:cs typeface="Calibri"/>
+              </a:rPr>
+              <a:t>04</a:t>
+            </a:r>
+          </a:p>
+        </p:txBody>
+      </p:sp>
+      <p:sp>
+        <p:nvSpPr>
+          <p:cNvPr id="21" name="row-rule-3">
+            <a:extLst xmlns:a="http://schemas.openxmlformats.org/drawingml/2006/main">
+              <a:ext uri="{FF2B5EF4-FFF2-40B4-BE49-F238E27FC236}">
+                <a16:creationId xmlns:a16="http://schemas.microsoft.com/office/drawing/2014/main" id="{19713DD9-A4D5-415A-B1BF-027F4296F08E}"/>
+              </a:ext>
+            </a:extLst>
+          </p:cNvPr>
+          <p:cNvSpPr>
+            <a:spLocks xmlns:a="http://schemas.openxmlformats.org/drawingml/2006/main" noGrp="1"/>
+          </p:cNvSpPr>
+          <p:nvPr/>
+        </p:nvSpPr>
+        <p:spPr>
+          <a:xfrm xmlns:a="http://schemas.openxmlformats.org/drawingml/2006/main">
+            <a:off x="1000125" y="4815840"/>
+            <a:ext cx="10334625" cy="0"/>
+          </a:xfrm>
+          <a:prstGeom xmlns:a="http://schemas.openxmlformats.org/drawingml/2006/main" prst="line">
+            <a:avLst/>
+          </a:prstGeom>
+          <a:noFill xmlns:a="http://schemas.openxmlformats.org/drawingml/2006/main"/>
+          <a:ln xmlns:a="http://schemas.openxmlformats.org/drawingml/2006/main" w="9525">
+            <a:solidFill>
+              <a:srgbClr val="CEDBD3"/>
+            </a:solidFill>
+          </a:ln>
+        </p:spPr>
+      </p:sp>
+      <p:sp>
+        <p:nvSpPr>
+          <p:cNvPr id="22" name="cue-4">
+            <a:extLst xmlns:a="http://schemas.openxmlformats.org/drawingml/2006/main">
+              <a:ext uri="{FF2B5EF4-FFF2-40B4-BE49-F238E27FC236}">
+                <a16:creationId xmlns:a16="http://schemas.microsoft.com/office/drawing/2014/main" id="{D83C760E-2190-4705-AF76-D0218757DD1A}"/>
+              </a:ext>
+            </a:extLst>
+          </p:cNvPr>
+          <p:cNvSpPr>
+            <a:spLocks xmlns:a="http://schemas.openxmlformats.org/drawingml/2006/main" noGrp="1"/>
+          </p:cNvSpPr>
+          <p:nvPr/>
+        </p:nvSpPr>
+        <p:spPr>
+          <a:xfrm xmlns:a="http://schemas.openxmlformats.org/drawingml/2006/main">
+            <a:off x="609600" y="4892040"/>
+            <a:ext cx="323850" cy="323850"/>
+          </a:xfrm>
+          <a:prstGeom xmlns:a="http://schemas.openxmlformats.org/drawingml/2006/main" prst="rect">
+            <a:avLst/>
+          </a:prstGeom>
+          <a:noFill xmlns:a="http://schemas.openxmlformats.org/drawingml/2006/main"/>
+          <a:ln xmlns:a="http://schemas.openxmlformats.org/drawingml/2006/main" w="0">
+            <a:noFill/>
+          </a:ln>
+        </p:spPr>
+        <p:txBody>
+          <a:bodyPr xmlns:a="http://schemas.openxmlformats.org/drawingml/2006/main" lIns="0" tIns="0" rIns="0" bIns="0" anchor="ctr">
+            <a:noAutofit/>
+          </a:bodyPr>
+          <a:lstStyle xmlns:a="http://schemas.openxmlformats.org/drawingml/2006/main"/>
+          <a:p xmlns:a="http://schemas.openxmlformats.org/drawingml/2006/main">
+            <a:pPr algn="l">
+              <a:defRPr sz="1350" b="1">
+                <a:solidFill>
+                  <a:srgbClr val="28685E"/>
+                </a:solidFill>
+                <a:latin typeface="Calibri"/>
+                <a:ea typeface="Calibri"/>
+                <a:cs typeface="Calibri"/>
+              </a:defRPr>
+            </a:pPr>
+            <a:r>
+              <a:rPr sz="1350" b="1">
+                <a:solidFill>
+                  <a:srgbClr val="28685E"/>
+                </a:solidFill>
+                <a:latin typeface="Calibri"/>
+                <a:ea typeface="Calibri"/>
+                <a:cs typeface="Calibri"/>
+              </a:rPr>
+              <a:t>05</a:t>
             </a:r>
           </a:p>
         </p:txBody>
@@ -6710,7 +9242,7 @@
     <p:bg>
       <p:bgPr>
         <a:solidFill xmlns:a="http://schemas.openxmlformats.org/drawingml/2006/main">
-          <a:srgbClr val="F5F1E8"/>
+          <a:srgbClr val="FAF9F5"/>
         </a:solidFill>
       </p:bgPr>
     </p:bg>
@@ -6739,8 +9271,8 @@
         </p:nvSpPr>
         <p:spPr>
           <a:xfrm xmlns:a="http://schemas.openxmlformats.org/drawingml/2006/main">
-            <a:off x="609600" y="552450"/>
-            <a:ext cx="781050" cy="57150"/>
+            <a:off x="609600" y="733425"/>
+            <a:ext cx="781050" cy="38100"/>
           </a:xfrm>
           <a:prstGeom xmlns:a="http://schemas.openxmlformats.org/drawingml/2006/main" prst="rect">
             <a:avLst/>
@@ -6770,34 +9302,43 @@
         </p:nvSpPr>
         <p:spPr>
           <a:xfrm xmlns:a="http://schemas.openxmlformats.org/drawingml/2006/main">
-            <a:off x="609600" y="762000"/>
-            <a:ext cx="7143750" cy="285750"/>
-          </a:xfrm>
-          <a:prstGeom xmlns:a="http://schemas.openxmlformats.org/drawingml/2006/main" prst="rect">
-            <a:avLst/>
-          </a:prstGeom>
-          <a:noFill xmlns:a="http://schemas.openxmlformats.org/drawingml/2006/main"/>
-          <a:ln xmlns:a="http://schemas.openxmlformats.org/drawingml/2006/main" w="0">
-            <a:noFill/>
-            <a:prstDash val="solid"/>
-          </a:ln>
-        </p:spPr>
-        <p:txBody>
-          <a:bodyPr xmlns:a="http://schemas.openxmlformats.org/drawingml/2006/main" lIns="0" tIns="0" rIns="0" bIns="0" anchor="ctr"/>
-          <a:lstStyle xmlns:a="http://schemas.openxmlformats.org/drawingml/2006/main"/>
-          <a:p xmlns:a="http://schemas.openxmlformats.org/drawingml/2006/main">
-            <a:pPr>
-              <a:defRPr sz="1500" b="1">
+            <a:off x="609600" y="342900"/>
+            <a:ext cx="9334500" cy="304800"/>
+          </a:xfrm>
+          <a:prstGeom xmlns:a="http://schemas.openxmlformats.org/drawingml/2006/main" prst="rect">
+            <a:avLst/>
+          </a:prstGeom>
+          <a:noFill xmlns:a="http://schemas.openxmlformats.org/drawingml/2006/main"/>
+          <a:ln xmlns:a="http://schemas.openxmlformats.org/drawingml/2006/main" w="0">
+            <a:noFill/>
+            <a:prstDash val="solid"/>
+          </a:ln>
+        </p:spPr>
+        <p:txBody>
+          <a:bodyPr xmlns:a="http://schemas.openxmlformats.org/drawingml/2006/main" lIns="0" tIns="0" rIns="0" bIns="0" anchor="ctr">
+            <a:noAutofit/>
+          </a:bodyPr>
+          <a:lstStyle xmlns:a="http://schemas.openxmlformats.org/drawingml/2006/main"/>
+          <a:p xmlns:a="http://schemas.openxmlformats.org/drawingml/2006/main">
+            <a:pPr algn="l">
+              <a:buNone/>
+              <a:defRPr sz="1350" b="1">
                 <a:solidFill>
                   <a:srgbClr val="28685E"/>
                 </a:solidFill>
-              </a:defRPr>
-            </a:pPr>
-            <a:r>
-              <a:rPr sz="1500" b="1">
+                <a:latin typeface="Calibri"/>
+                <a:ea typeface="Calibri"/>
+                <a:cs typeface="Calibri"/>
+              </a:defRPr>
+            </a:pPr>
+            <a:r>
+              <a:rPr sz="1350" b="1">
                 <a:solidFill>
                   <a:srgbClr val="28685E"/>
                 </a:solidFill>
+                <a:latin typeface="Calibri"/>
+                <a:ea typeface="Calibri"/>
+                <a:cs typeface="Calibri"/>
               </a:rPr>
               <a:t>MADE BY MATT  /  GROW SCIENCE</a:t>
             </a:r>
@@ -6820,34 +9361,43 @@
         </p:nvSpPr>
         <p:spPr>
           <a:xfrm xmlns:a="http://schemas.openxmlformats.org/drawingml/2006/main">
-            <a:off x="609600" y="1352550"/>
-            <a:ext cx="10972800" cy="952500"/>
-          </a:xfrm>
-          <a:prstGeom xmlns:a="http://schemas.openxmlformats.org/drawingml/2006/main" prst="rect">
-            <a:avLst/>
-          </a:prstGeom>
-          <a:noFill xmlns:a="http://schemas.openxmlformats.org/drawingml/2006/main"/>
-          <a:ln xmlns:a="http://schemas.openxmlformats.org/drawingml/2006/main" w="0">
-            <a:noFill/>
-            <a:prstDash val="solid"/>
-          </a:ln>
-        </p:spPr>
-        <p:txBody>
-          <a:bodyPr xmlns:a="http://schemas.openxmlformats.org/drawingml/2006/main" lIns="0" tIns="0" rIns="0" bIns="0" anchor="ctr"/>
-          <a:lstStyle xmlns:a="http://schemas.openxmlformats.org/drawingml/2006/main"/>
-          <a:p xmlns:a="http://schemas.openxmlformats.org/drawingml/2006/main">
-            <a:pPr>
-              <a:defRPr sz="3750" b="1">
+            <a:off x="609600" y="990600"/>
+            <a:ext cx="10972800" cy="1000125"/>
+          </a:xfrm>
+          <a:prstGeom xmlns:a="http://schemas.openxmlformats.org/drawingml/2006/main" prst="rect">
+            <a:avLst/>
+          </a:prstGeom>
+          <a:noFill xmlns:a="http://schemas.openxmlformats.org/drawingml/2006/main"/>
+          <a:ln xmlns:a="http://schemas.openxmlformats.org/drawingml/2006/main" w="0">
+            <a:noFill/>
+            <a:prstDash val="solid"/>
+          </a:ln>
+        </p:spPr>
+        <p:txBody>
+          <a:bodyPr xmlns:a="http://schemas.openxmlformats.org/drawingml/2006/main" lIns="0" tIns="0" rIns="0" bIns="0" anchor="ctr">
+            <a:noAutofit/>
+          </a:bodyPr>
+          <a:lstStyle xmlns:a="http://schemas.openxmlformats.org/drawingml/2006/main"/>
+          <a:p xmlns:a="http://schemas.openxmlformats.org/drawingml/2006/main">
+            <a:pPr algn="l">
+              <a:buNone/>
+              <a:defRPr sz="3675" b="1">
                 <a:solidFill>
                   <a:srgbClr val="152B3A"/>
                 </a:solidFill>
-              </a:defRPr>
-            </a:pPr>
-            <a:r>
-              <a:rPr sz="3750" b="1">
+                <a:latin typeface="Calibri"/>
+                <a:ea typeface="Calibri"/>
+                <a:cs typeface="Calibri"/>
+              </a:defRPr>
+            </a:pPr>
+            <a:r>
+              <a:rPr sz="3675" b="1">
                 <a:solidFill>
                   <a:srgbClr val="152B3A"/>
                 </a:solidFill>
+                <a:latin typeface="Calibri"/>
+                <a:ea typeface="Calibri"/>
+                <a:cs typeface="Calibri"/>
               </a:rPr>
               <a:t>The job changes the answer</a:t>
             </a:r>
@@ -6870,14 +9420,14 @@
         </p:nvSpPr>
         <p:spPr>
           <a:xfrm xmlns:a="http://schemas.openxmlformats.org/drawingml/2006/main">
-            <a:off x="609600" y="6219825"/>
+            <a:off x="609600" y="6191250"/>
             <a:ext cx="10972800" cy="9525"/>
           </a:xfrm>
           <a:prstGeom xmlns:a="http://schemas.openxmlformats.org/drawingml/2006/main" prst="rect">
             <a:avLst/>
           </a:prstGeom>
           <a:solidFill xmlns:a="http://schemas.openxmlformats.org/drawingml/2006/main">
-            <a:srgbClr val="DCE7DD"/>
+            <a:srgbClr val="CEDBD3"/>
           </a:solidFill>
           <a:ln xmlns:a="http://schemas.openxmlformats.org/drawingml/2006/main" w="0">
             <a:noFill/>
@@ -6901,34 +9451,43 @@
         </p:nvSpPr>
         <p:spPr>
           <a:xfrm xmlns:a="http://schemas.openxmlformats.org/drawingml/2006/main">
-            <a:off x="609600" y="6381750"/>
-            <a:ext cx="9525000" cy="228600"/>
-          </a:xfrm>
-          <a:prstGeom xmlns:a="http://schemas.openxmlformats.org/drawingml/2006/main" prst="rect">
-            <a:avLst/>
-          </a:prstGeom>
-          <a:noFill xmlns:a="http://schemas.openxmlformats.org/drawingml/2006/main"/>
-          <a:ln xmlns:a="http://schemas.openxmlformats.org/drawingml/2006/main" w="0">
-            <a:noFill/>
-            <a:prstDash val="solid"/>
-          </a:ln>
-        </p:spPr>
-        <p:txBody>
-          <a:bodyPr xmlns:a="http://schemas.openxmlformats.org/drawingml/2006/main" lIns="0" tIns="0" rIns="0" bIns="0" anchor="ctr"/>
-          <a:lstStyle xmlns:a="http://schemas.openxmlformats.org/drawingml/2006/main"/>
-          <a:p xmlns:a="http://schemas.openxmlformats.org/drawingml/2006/main">
-            <a:pPr>
-              <a:defRPr sz="1275" b="0">
+            <a:off x="609600" y="6419850"/>
+            <a:ext cx="9525000" cy="219075"/>
+          </a:xfrm>
+          <a:prstGeom xmlns:a="http://schemas.openxmlformats.org/drawingml/2006/main" prst="rect">
+            <a:avLst/>
+          </a:prstGeom>
+          <a:noFill xmlns:a="http://schemas.openxmlformats.org/drawingml/2006/main"/>
+          <a:ln xmlns:a="http://schemas.openxmlformats.org/drawingml/2006/main" w="0">
+            <a:noFill/>
+            <a:prstDash val="solid"/>
+          </a:ln>
+        </p:spPr>
+        <p:txBody>
+          <a:bodyPr xmlns:a="http://schemas.openxmlformats.org/drawingml/2006/main" lIns="0" tIns="0" rIns="0" bIns="0" anchor="ctr">
+            <a:noAutofit/>
+          </a:bodyPr>
+          <a:lstStyle xmlns:a="http://schemas.openxmlformats.org/drawingml/2006/main"/>
+          <a:p xmlns:a="http://schemas.openxmlformats.org/drawingml/2006/main">
+            <a:pPr algn="l">
+              <a:buNone/>
+              <a:defRPr sz="1200" b="0">
                 <a:solidFill>
                   <a:srgbClr val="50616B"/>
                 </a:solidFill>
-              </a:defRPr>
-            </a:pPr>
-            <a:r>
-              <a:rPr sz="1275" b="0">
+                <a:latin typeface="Calibri"/>
+                <a:ea typeface="Calibri"/>
+                <a:cs typeface="Calibri"/>
+              </a:defRPr>
+            </a:pPr>
+            <a:r>
+              <a:rPr sz="1200" b="0">
                 <a:solidFill>
                   <a:srgbClr val="50616B"/>
                 </a:solidFill>
+                <a:latin typeface="Calibri"/>
+                <a:ea typeface="Calibri"/>
+                <a:cs typeface="Calibri"/>
               </a:rPr>
               <a:t>AUTUMN 1  ·  WEEK 3  ·  LESSON A</a:t>
             </a:r>
@@ -6951,27 +9510,33 @@
         </p:nvSpPr>
         <p:spPr>
           <a:xfrm xmlns:a="http://schemas.openxmlformats.org/drawingml/2006/main">
-            <a:off x="11106150" y="6362700"/>
-            <a:ext cx="476250" cy="238125"/>
-          </a:xfrm>
-          <a:prstGeom xmlns:a="http://schemas.openxmlformats.org/drawingml/2006/main" prst="rect">
-            <a:avLst/>
-          </a:prstGeom>
-          <a:noFill xmlns:a="http://schemas.openxmlformats.org/drawingml/2006/main"/>
-          <a:ln xmlns:a="http://schemas.openxmlformats.org/drawingml/2006/main" w="0">
-            <a:noFill/>
-            <a:prstDash val="solid"/>
-          </a:ln>
-        </p:spPr>
-        <p:txBody>
-          <a:bodyPr xmlns:a="http://schemas.openxmlformats.org/drawingml/2006/main" lIns="0" tIns="0" rIns="0" bIns="0" anchor="ctr"/>
-          <a:lstStyle xmlns:a="http://schemas.openxmlformats.org/drawingml/2006/main"/>
-          <a:p xmlns:a="http://schemas.openxmlformats.org/drawingml/2006/main">
-            <a:pPr>
+            <a:off x="11106150" y="6400800"/>
+            <a:ext cx="476250" cy="247650"/>
+          </a:xfrm>
+          <a:prstGeom xmlns:a="http://schemas.openxmlformats.org/drawingml/2006/main" prst="rect">
+            <a:avLst/>
+          </a:prstGeom>
+          <a:noFill xmlns:a="http://schemas.openxmlformats.org/drawingml/2006/main"/>
+          <a:ln xmlns:a="http://schemas.openxmlformats.org/drawingml/2006/main" w="0">
+            <a:noFill/>
+            <a:prstDash val="solid"/>
+          </a:ln>
+        </p:spPr>
+        <p:txBody>
+          <a:bodyPr xmlns:a="http://schemas.openxmlformats.org/drawingml/2006/main" lIns="0" tIns="0" rIns="0" bIns="0" anchor="ctr">
+            <a:noAutofit/>
+          </a:bodyPr>
+          <a:lstStyle xmlns:a="http://schemas.openxmlformats.org/drawingml/2006/main"/>
+          <a:p xmlns:a="http://schemas.openxmlformats.org/drawingml/2006/main">
+            <a:pPr algn="l">
+              <a:buNone/>
               <a:defRPr sz="1350" b="1">
                 <a:solidFill>
                   <a:srgbClr val="28685E"/>
                 </a:solidFill>
+                <a:latin typeface="Calibri"/>
+                <a:ea typeface="Calibri"/>
+                <a:cs typeface="Calibri"/>
               </a:defRPr>
             </a:pPr>
             <a:r>
@@ -6979,6 +9544,9 @@
                 <a:solidFill>
                   <a:srgbClr val="28685E"/>
                 </a:solidFill>
+                <a:latin typeface="Calibri"/>
+                <a:ea typeface="Calibri"/>
+                <a:cs typeface="Calibri"/>
               </a:rPr>
               <a:t>07</a:t>
             </a:r>
@@ -7001,34 +9569,45 @@
         </p:nvSpPr>
         <p:spPr>
           <a:xfrm xmlns:a="http://schemas.openxmlformats.org/drawingml/2006/main">
-            <a:off x="609600" y="2705100"/>
-            <a:ext cx="4953000" cy="381000"/>
-          </a:xfrm>
-          <a:prstGeom xmlns:a="http://schemas.openxmlformats.org/drawingml/2006/main" prst="rect">
-            <a:avLst/>
-          </a:prstGeom>
-          <a:noFill xmlns:a="http://schemas.openxmlformats.org/drawingml/2006/main"/>
-          <a:ln xmlns:a="http://schemas.openxmlformats.org/drawingml/2006/main" w="0">
-            <a:noFill/>
-            <a:prstDash val="solid"/>
-          </a:ln>
-        </p:spPr>
-        <p:txBody>
-          <a:bodyPr xmlns:a="http://schemas.openxmlformats.org/drawingml/2006/main" lIns="0" tIns="0" rIns="0" bIns="0" anchor="ctr"/>
-          <a:lstStyle xmlns:a="http://schemas.openxmlformats.org/drawingml/2006/main"/>
-          <a:p xmlns:a="http://schemas.openxmlformats.org/drawingml/2006/main">
-            <a:pPr>
-              <a:defRPr sz="2025" b="1">
+            <a:off x="609600" y="2219325"/>
+            <a:ext cx="5257800" cy="762000"/>
+          </a:xfrm>
+          <a:prstGeom xmlns:a="http://schemas.openxmlformats.org/drawingml/2006/main" prst="rect">
+            <a:avLst/>
+          </a:prstGeom>
+          <a:solidFill xmlns:a="http://schemas.openxmlformats.org/drawingml/2006/main">
+            <a:srgbClr val="E7EFE9"/>
+          </a:solidFill>
+          <a:ln xmlns:a="http://schemas.openxmlformats.org/drawingml/2006/main" w="0">
+            <a:noFill/>
+            <a:prstDash val="solid"/>
+          </a:ln>
+        </p:spPr>
+        <p:txBody>
+          <a:bodyPr xmlns:a="http://schemas.openxmlformats.org/drawingml/2006/main" lIns="228600" tIns="114300" rIns="228600" bIns="114300" anchor="ctr">
+            <a:noAutofit/>
+          </a:bodyPr>
+          <a:lstStyle xmlns:a="http://schemas.openxmlformats.org/drawingml/2006/main"/>
+          <a:p xmlns:a="http://schemas.openxmlformats.org/drawingml/2006/main">
+            <a:pPr algn="l">
+              <a:buNone/>
+              <a:defRPr sz="2100" b="1">
                 <a:solidFill>
                   <a:srgbClr val="28685E"/>
                 </a:solidFill>
-              </a:defRPr>
-            </a:pPr>
-            <a:r>
-              <a:rPr sz="2025" b="1">
+                <a:latin typeface="Calibri"/>
+                <a:ea typeface="Calibri"/>
+                <a:cs typeface="Calibri"/>
+              </a:defRPr>
+            </a:pPr>
+            <a:r>
+              <a:rPr sz="2100" b="1">
                 <a:solidFill>
                   <a:srgbClr val="28685E"/>
                 </a:solidFill>
+                <a:latin typeface="Calibri"/>
+                <a:ea typeface="Calibri"/>
+                <a:cs typeface="Calibri"/>
               </a:rPr>
               <a:t>HELPS THE JOB</a:t>
             </a:r>
@@ -7051,34 +9630,45 @@
         </p:nvSpPr>
         <p:spPr>
           <a:xfrm xmlns:a="http://schemas.openxmlformats.org/drawingml/2006/main">
-            <a:off x="6572250" y="2705100"/>
-            <a:ext cx="4953000" cy="381000"/>
-          </a:xfrm>
-          <a:prstGeom xmlns:a="http://schemas.openxmlformats.org/drawingml/2006/main" prst="rect">
-            <a:avLst/>
-          </a:prstGeom>
-          <a:noFill xmlns:a="http://schemas.openxmlformats.org/drawingml/2006/main"/>
-          <a:ln xmlns:a="http://schemas.openxmlformats.org/drawingml/2006/main" w="0">
-            <a:noFill/>
-            <a:prstDash val="solid"/>
-          </a:ln>
-        </p:spPr>
-        <p:txBody>
-          <a:bodyPr xmlns:a="http://schemas.openxmlformats.org/drawingml/2006/main" lIns="0" tIns="0" rIns="0" bIns="0" anchor="ctr"/>
-          <a:lstStyle xmlns:a="http://schemas.openxmlformats.org/drawingml/2006/main"/>
-          <a:p xmlns:a="http://schemas.openxmlformats.org/drawingml/2006/main">
-            <a:pPr>
-              <a:defRPr sz="2025" b="1">
-                <a:solidFill>
-                  <a:srgbClr val="A65D25"/>
-                </a:solidFill>
-              </a:defRPr>
-            </a:pPr>
-            <a:r>
-              <a:rPr sz="2025" b="1">
-                <a:solidFill>
-                  <a:srgbClr val="A65D25"/>
-                </a:solidFill>
+            <a:off x="6381750" y="2219325"/>
+            <a:ext cx="5200650" cy="762000"/>
+          </a:xfrm>
+          <a:prstGeom xmlns:a="http://schemas.openxmlformats.org/drawingml/2006/main" prst="rect">
+            <a:avLst/>
+          </a:prstGeom>
+          <a:solidFill xmlns:a="http://schemas.openxmlformats.org/drawingml/2006/main">
+            <a:srgbClr val="F0EBE3"/>
+          </a:solidFill>
+          <a:ln xmlns:a="http://schemas.openxmlformats.org/drawingml/2006/main" w="0">
+            <a:noFill/>
+            <a:prstDash val="solid"/>
+          </a:ln>
+        </p:spPr>
+        <p:txBody>
+          <a:bodyPr xmlns:a="http://schemas.openxmlformats.org/drawingml/2006/main" lIns="228600" tIns="114300" rIns="228600" bIns="114300" anchor="ctr">
+            <a:noAutofit/>
+          </a:bodyPr>
+          <a:lstStyle xmlns:a="http://schemas.openxmlformats.org/drawingml/2006/main"/>
+          <a:p xmlns:a="http://schemas.openxmlformats.org/drawingml/2006/main">
+            <a:pPr algn="l">
+              <a:buNone/>
+              <a:defRPr sz="2100" b="1">
+                <a:solidFill>
+                  <a:srgbClr val="A95D21"/>
+                </a:solidFill>
+                <a:latin typeface="Calibri"/>
+                <a:ea typeface="Calibri"/>
+                <a:cs typeface="Calibri"/>
+              </a:defRPr>
+            </a:pPr>
+            <a:r>
+              <a:rPr sz="2100" b="1">
+                <a:solidFill>
+                  <a:srgbClr val="A95D21"/>
+                </a:solidFill>
+                <a:latin typeface="Calibri"/>
+                <a:ea typeface="Calibri"/>
+                <a:cs typeface="Calibri"/>
               </a:rPr>
               <a:t>HINDERS THE JOB</a:t>
             </a:r>
@@ -7101,68 +9691,93 @@
         </p:nvSpPr>
         <p:spPr>
           <a:xfrm xmlns:a="http://schemas.openxmlformats.org/drawingml/2006/main">
-            <a:off x="609600" y="3371850"/>
-            <a:ext cx="5000625" cy="1952625"/>
-          </a:xfrm>
-          <a:prstGeom xmlns:a="http://schemas.openxmlformats.org/drawingml/2006/main" prst="rect">
-            <a:avLst/>
-          </a:prstGeom>
-          <a:noFill xmlns:a="http://schemas.openxmlformats.org/drawingml/2006/main"/>
-          <a:ln xmlns:a="http://schemas.openxmlformats.org/drawingml/2006/main" w="0">
-            <a:noFill/>
-            <a:prstDash val="solid"/>
-          </a:ln>
-        </p:spPr>
-        <p:txBody>
-          <a:bodyPr xmlns:a="http://schemas.openxmlformats.org/drawingml/2006/main" lIns="0" tIns="0" rIns="0" bIns="0" anchor="ctr"/>
-          <a:lstStyle xmlns:a="http://schemas.openxmlformats.org/drawingml/2006/main"/>
-          <a:p xmlns:a="http://schemas.openxmlformats.org/drawingml/2006/main">
-            <a:pPr>
-              <a:defRPr sz="2550" b="0">
+            <a:off x="609600" y="2981325"/>
+            <a:ext cx="5257800" cy="2714625"/>
+          </a:xfrm>
+          <a:prstGeom xmlns:a="http://schemas.openxmlformats.org/drawingml/2006/main" prst="rect">
+            <a:avLst/>
+          </a:prstGeom>
+          <a:solidFill xmlns:a="http://schemas.openxmlformats.org/drawingml/2006/main">
+            <a:srgbClr val="E7EFE9"/>
+          </a:solidFill>
+          <a:ln xmlns:a="http://schemas.openxmlformats.org/drawingml/2006/main" w="0">
+            <a:noFill/>
+            <a:prstDash val="solid"/>
+          </a:ln>
+        </p:spPr>
+        <p:txBody>
+          <a:bodyPr xmlns:a="http://schemas.openxmlformats.org/drawingml/2006/main" lIns="228600" tIns="114300" rIns="228600" bIns="114300" anchor="ctr">
+            <a:noAutofit/>
+          </a:bodyPr>
+          <a:lstStyle xmlns:a="http://schemas.openxmlformats.org/drawingml/2006/main"/>
+          <a:p xmlns:a="http://schemas.openxmlformats.org/drawingml/2006/main">
+            <a:pPr algn="l">
+              <a:buNone/>
+              <a:defRPr sz="2625" b="0">
                 <a:solidFill>
                   <a:srgbClr val="152B3A"/>
                 </a:solidFill>
-              </a:defRPr>
-            </a:pPr>
-            <a:r>
-              <a:rPr sz="2550" b="0">
+                <a:latin typeface="Calibri"/>
+                <a:ea typeface="Calibri"/>
+                <a:cs typeface="Calibri"/>
+              </a:defRPr>
+            </a:pPr>
+            <a:r>
+              <a:rPr sz="2625" b="0">
                 <a:solidFill>
                   <a:srgbClr val="152B3A"/>
                 </a:solidFill>
+                <a:latin typeface="Calibri"/>
+                <a:ea typeface="Calibri"/>
+                <a:cs typeface="Calibri"/>
               </a:rPr>
               <a:t>Braking a wheel</a:t>
             </a:r>
           </a:p>
           <a:p xmlns:a="http://schemas.openxmlformats.org/drawingml/2006/main">
-            <a:pPr>
-              <a:defRPr sz="2550" b="0">
+            <a:pPr algn="l">
+              <a:buNone/>
+              <a:defRPr sz="2625" b="0">
                 <a:solidFill>
                   <a:srgbClr val="152B3A"/>
                 </a:solidFill>
-              </a:defRPr>
-            </a:pPr>
-            <a:r>
-              <a:rPr sz="2550" b="0">
+                <a:latin typeface="Calibri"/>
+                <a:ea typeface="Calibri"/>
+                <a:cs typeface="Calibri"/>
+              </a:defRPr>
+            </a:pPr>
+            <a:r>
+              <a:rPr sz="2625" b="0">
                 <a:solidFill>
                   <a:srgbClr val="152B3A"/>
                 </a:solidFill>
+                <a:latin typeface="Calibri"/>
+                <a:ea typeface="Calibri"/>
+                <a:cs typeface="Calibri"/>
               </a:rPr>
               <a:t>Gripping the floor</a:t>
             </a:r>
           </a:p>
           <a:p xmlns:a="http://schemas.openxmlformats.org/drawingml/2006/main">
-            <a:pPr>
-              <a:defRPr sz="2550" b="0">
+            <a:pPr algn="l">
+              <a:buNone/>
+              <a:defRPr sz="2625" b="0">
                 <a:solidFill>
                   <a:srgbClr val="152B3A"/>
                 </a:solidFill>
-              </a:defRPr>
-            </a:pPr>
-            <a:r>
-              <a:rPr sz="2550" b="0">
+                <a:latin typeface="Calibri"/>
+                <a:ea typeface="Calibri"/>
+                <a:cs typeface="Calibri"/>
+              </a:defRPr>
+            </a:pPr>
+            <a:r>
+              <a:rPr sz="2625" b="0">
                 <a:solidFill>
                   <a:srgbClr val="152B3A"/>
                 </a:solidFill>
+                <a:latin typeface="Calibri"/>
+                <a:ea typeface="Calibri"/>
+                <a:cs typeface="Calibri"/>
               </a:rPr>
               <a:t>Holding a handle</a:t>
             </a:r>
@@ -7185,51 +9800,69 @@
         </p:nvSpPr>
         <p:spPr>
           <a:xfrm xmlns:a="http://schemas.openxmlformats.org/drawingml/2006/main">
-            <a:off x="6572250" y="3371850"/>
-            <a:ext cx="4810125" cy="2190750"/>
-          </a:xfrm>
-          <a:prstGeom xmlns:a="http://schemas.openxmlformats.org/drawingml/2006/main" prst="rect">
-            <a:avLst/>
-          </a:prstGeom>
-          <a:noFill xmlns:a="http://schemas.openxmlformats.org/drawingml/2006/main"/>
-          <a:ln xmlns:a="http://schemas.openxmlformats.org/drawingml/2006/main" w="0">
-            <a:noFill/>
-            <a:prstDash val="solid"/>
-          </a:ln>
-        </p:spPr>
-        <p:txBody>
-          <a:bodyPr xmlns:a="http://schemas.openxmlformats.org/drawingml/2006/main" lIns="0" tIns="0" rIns="0" bIns="0" anchor="ctr"/>
-          <a:lstStyle xmlns:a="http://schemas.openxmlformats.org/drawingml/2006/main"/>
-          <a:p xmlns:a="http://schemas.openxmlformats.org/drawingml/2006/main">
-            <a:pPr>
-              <a:defRPr sz="2550" b="0">
+            <a:off x="6381750" y="2981325"/>
+            <a:ext cx="5200650" cy="2714625"/>
+          </a:xfrm>
+          <a:prstGeom xmlns:a="http://schemas.openxmlformats.org/drawingml/2006/main" prst="rect">
+            <a:avLst/>
+          </a:prstGeom>
+          <a:solidFill xmlns:a="http://schemas.openxmlformats.org/drawingml/2006/main">
+            <a:srgbClr val="F0EBE3"/>
+          </a:solidFill>
+          <a:ln xmlns:a="http://schemas.openxmlformats.org/drawingml/2006/main" w="0">
+            <a:noFill/>
+            <a:prstDash val="solid"/>
+          </a:ln>
+        </p:spPr>
+        <p:txBody>
+          <a:bodyPr xmlns:a="http://schemas.openxmlformats.org/drawingml/2006/main" lIns="228600" tIns="114300" rIns="228600" bIns="114300" anchor="ctr">
+            <a:noAutofit/>
+          </a:bodyPr>
+          <a:lstStyle xmlns:a="http://schemas.openxmlformats.org/drawingml/2006/main"/>
+          <a:p xmlns:a="http://schemas.openxmlformats.org/drawingml/2006/main">
+            <a:pPr algn="l">
+              <a:buNone/>
+              <a:defRPr sz="2625" b="0">
                 <a:solidFill>
                   <a:srgbClr val="152B3A"/>
                 </a:solidFill>
-              </a:defRPr>
-            </a:pPr>
-            <a:r>
-              <a:rPr sz="2550" b="0">
+                <a:latin typeface="Calibri"/>
+                <a:ea typeface="Calibri"/>
+                <a:cs typeface="Calibri"/>
+              </a:defRPr>
+            </a:pPr>
+            <a:r>
+              <a:rPr sz="2625" b="0">
                 <a:solidFill>
                   <a:srgbClr val="152B3A"/>
                 </a:solidFill>
+                <a:latin typeface="Calibri"/>
+                <a:ea typeface="Calibri"/>
+                <a:cs typeface="Calibri"/>
               </a:rPr>
               <a:t>Moving parts heating and wearing</a:t>
             </a:r>
           </a:p>
           <a:p xmlns:a="http://schemas.openxmlformats.org/drawingml/2006/main">
-            <a:pPr>
-              <a:defRPr sz="2550" b="0">
+            <a:pPr algn="l">
+              <a:buNone/>
+              <a:defRPr sz="2625" b="0">
                 <a:solidFill>
                   <a:srgbClr val="152B3A"/>
                 </a:solidFill>
-              </a:defRPr>
-            </a:pPr>
-            <a:r>
-              <a:rPr sz="2550" b="0">
+                <a:latin typeface="Calibri"/>
+                <a:ea typeface="Calibri"/>
+                <a:cs typeface="Calibri"/>
+              </a:defRPr>
+            </a:pPr>
+            <a:r>
+              <a:rPr sz="2625" b="0">
                 <a:solidFill>
                   <a:srgbClr val="152B3A"/>
                 </a:solidFill>
+                <a:latin typeface="Calibri"/>
+                <a:ea typeface="Calibri"/>
+                <a:cs typeface="Calibri"/>
               </a:rPr>
               <a:t>Sliding a box across carpet</a:t>
             </a:r>
@@ -7252,7 +9885,7 @@
     <p:bg>
       <p:bgPr>
         <a:solidFill xmlns:a="http://schemas.openxmlformats.org/drawingml/2006/main">
-          <a:srgbClr val="F5F1E8"/>
+          <a:srgbClr val="FAF9F5"/>
         </a:solidFill>
       </p:bgPr>
     </p:bg>
@@ -7281,8 +9914,8 @@
         </p:nvSpPr>
         <p:spPr>
           <a:xfrm xmlns:a="http://schemas.openxmlformats.org/drawingml/2006/main">
-            <a:off x="609600" y="552450"/>
-            <a:ext cx="781050" cy="57150"/>
+            <a:off x="609600" y="733425"/>
+            <a:ext cx="781050" cy="38100"/>
           </a:xfrm>
           <a:prstGeom xmlns:a="http://schemas.openxmlformats.org/drawingml/2006/main" prst="rect">
             <a:avLst/>
@@ -7312,34 +9945,43 @@
         </p:nvSpPr>
         <p:spPr>
           <a:xfrm xmlns:a="http://schemas.openxmlformats.org/drawingml/2006/main">
-            <a:off x="609600" y="762000"/>
-            <a:ext cx="7143750" cy="285750"/>
-          </a:xfrm>
-          <a:prstGeom xmlns:a="http://schemas.openxmlformats.org/drawingml/2006/main" prst="rect">
-            <a:avLst/>
-          </a:prstGeom>
-          <a:noFill xmlns:a="http://schemas.openxmlformats.org/drawingml/2006/main"/>
-          <a:ln xmlns:a="http://schemas.openxmlformats.org/drawingml/2006/main" w="0">
-            <a:noFill/>
-            <a:prstDash val="solid"/>
-          </a:ln>
-        </p:spPr>
-        <p:txBody>
-          <a:bodyPr xmlns:a="http://schemas.openxmlformats.org/drawingml/2006/main" lIns="0" tIns="0" rIns="0" bIns="0" anchor="ctr"/>
-          <a:lstStyle xmlns:a="http://schemas.openxmlformats.org/drawingml/2006/main"/>
-          <a:p xmlns:a="http://schemas.openxmlformats.org/drawingml/2006/main">
-            <a:pPr>
-              <a:defRPr sz="1500" b="1">
+            <a:off x="609600" y="342900"/>
+            <a:ext cx="9334500" cy="304800"/>
+          </a:xfrm>
+          <a:prstGeom xmlns:a="http://schemas.openxmlformats.org/drawingml/2006/main" prst="rect">
+            <a:avLst/>
+          </a:prstGeom>
+          <a:noFill xmlns:a="http://schemas.openxmlformats.org/drawingml/2006/main"/>
+          <a:ln xmlns:a="http://schemas.openxmlformats.org/drawingml/2006/main" w="0">
+            <a:noFill/>
+            <a:prstDash val="solid"/>
+          </a:ln>
+        </p:spPr>
+        <p:txBody>
+          <a:bodyPr xmlns:a="http://schemas.openxmlformats.org/drawingml/2006/main" lIns="0" tIns="0" rIns="0" bIns="0" anchor="ctr">
+            <a:noAutofit/>
+          </a:bodyPr>
+          <a:lstStyle xmlns:a="http://schemas.openxmlformats.org/drawingml/2006/main"/>
+          <a:p xmlns:a="http://schemas.openxmlformats.org/drawingml/2006/main">
+            <a:pPr algn="l">
+              <a:buNone/>
+              <a:defRPr sz="1350" b="1">
                 <a:solidFill>
                   <a:srgbClr val="28685E"/>
                 </a:solidFill>
-              </a:defRPr>
-            </a:pPr>
-            <a:r>
-              <a:rPr sz="1500" b="1">
+                <a:latin typeface="Calibri"/>
+                <a:ea typeface="Calibri"/>
+                <a:cs typeface="Calibri"/>
+              </a:defRPr>
+            </a:pPr>
+            <a:r>
+              <a:rPr sz="1350" b="1">
                 <a:solidFill>
                   <a:srgbClr val="28685E"/>
                 </a:solidFill>
+                <a:latin typeface="Calibri"/>
+                <a:ea typeface="Calibri"/>
+                <a:cs typeface="Calibri"/>
               </a:rPr>
               <a:t>MADE BY MATT  /  GROW SCIENCE</a:t>
             </a:r>
@@ -7362,34 +10004,43 @@
         </p:nvSpPr>
         <p:spPr>
           <a:xfrm xmlns:a="http://schemas.openxmlformats.org/drawingml/2006/main">
-            <a:off x="609600" y="1352550"/>
-            <a:ext cx="10972800" cy="952500"/>
-          </a:xfrm>
-          <a:prstGeom xmlns:a="http://schemas.openxmlformats.org/drawingml/2006/main" prst="rect">
-            <a:avLst/>
-          </a:prstGeom>
-          <a:noFill xmlns:a="http://schemas.openxmlformats.org/drawingml/2006/main"/>
-          <a:ln xmlns:a="http://schemas.openxmlformats.org/drawingml/2006/main" w="0">
-            <a:noFill/>
-            <a:prstDash val="solid"/>
-          </a:ln>
-        </p:spPr>
-        <p:txBody>
-          <a:bodyPr xmlns:a="http://schemas.openxmlformats.org/drawingml/2006/main" lIns="0" tIns="0" rIns="0" bIns="0" anchor="ctr"/>
-          <a:lstStyle xmlns:a="http://schemas.openxmlformats.org/drawingml/2006/main"/>
-          <a:p xmlns:a="http://schemas.openxmlformats.org/drawingml/2006/main">
-            <a:pPr>
-              <a:defRPr sz="3750" b="1">
+            <a:off x="609600" y="990600"/>
+            <a:ext cx="10972800" cy="1000125"/>
+          </a:xfrm>
+          <a:prstGeom xmlns:a="http://schemas.openxmlformats.org/drawingml/2006/main" prst="rect">
+            <a:avLst/>
+          </a:prstGeom>
+          <a:noFill xmlns:a="http://schemas.openxmlformats.org/drawingml/2006/main"/>
+          <a:ln xmlns:a="http://schemas.openxmlformats.org/drawingml/2006/main" w="0">
+            <a:noFill/>
+            <a:prstDash val="solid"/>
+          </a:ln>
+        </p:spPr>
+        <p:txBody>
+          <a:bodyPr xmlns:a="http://schemas.openxmlformats.org/drawingml/2006/main" lIns="0" tIns="0" rIns="0" bIns="0" anchor="ctr">
+            <a:noAutofit/>
+          </a:bodyPr>
+          <a:lstStyle xmlns:a="http://schemas.openxmlformats.org/drawingml/2006/main"/>
+          <a:p xmlns:a="http://schemas.openxmlformats.org/drawingml/2006/main">
+            <a:pPr algn="l">
+              <a:buNone/>
+              <a:defRPr sz="3675" b="1">
                 <a:solidFill>
                   <a:srgbClr val="152B3A"/>
                 </a:solidFill>
-              </a:defRPr>
-            </a:pPr>
-            <a:r>
-              <a:rPr sz="3750" b="1">
+                <a:latin typeface="Calibri"/>
+                <a:ea typeface="Calibri"/>
+                <a:cs typeface="Calibri"/>
+              </a:defRPr>
+            </a:pPr>
+            <a:r>
+              <a:rPr sz="3675" b="1">
                 <a:solidFill>
                   <a:srgbClr val="152B3A"/>
                 </a:solidFill>
+                <a:latin typeface="Calibri"/>
+                <a:ea typeface="Calibri"/>
+                <a:cs typeface="Calibri"/>
               </a:rPr>
               <a:t>Explain both sides</a:t>
             </a:r>
@@ -7412,14 +10063,14 @@
         </p:nvSpPr>
         <p:spPr>
           <a:xfrm xmlns:a="http://schemas.openxmlformats.org/drawingml/2006/main">
-            <a:off x="609600" y="6219825"/>
+            <a:off x="609600" y="6191250"/>
             <a:ext cx="10972800" cy="9525"/>
           </a:xfrm>
           <a:prstGeom xmlns:a="http://schemas.openxmlformats.org/drawingml/2006/main" prst="rect">
             <a:avLst/>
           </a:prstGeom>
           <a:solidFill xmlns:a="http://schemas.openxmlformats.org/drawingml/2006/main">
-            <a:srgbClr val="DCE7DD"/>
+            <a:srgbClr val="CEDBD3"/>
           </a:solidFill>
           <a:ln xmlns:a="http://schemas.openxmlformats.org/drawingml/2006/main" w="0">
             <a:noFill/>
@@ -7443,34 +10094,43 @@
         </p:nvSpPr>
         <p:spPr>
           <a:xfrm xmlns:a="http://schemas.openxmlformats.org/drawingml/2006/main">
-            <a:off x="609600" y="6381750"/>
-            <a:ext cx="9525000" cy="228600"/>
-          </a:xfrm>
-          <a:prstGeom xmlns:a="http://schemas.openxmlformats.org/drawingml/2006/main" prst="rect">
-            <a:avLst/>
-          </a:prstGeom>
-          <a:noFill xmlns:a="http://schemas.openxmlformats.org/drawingml/2006/main"/>
-          <a:ln xmlns:a="http://schemas.openxmlformats.org/drawingml/2006/main" w="0">
-            <a:noFill/>
-            <a:prstDash val="solid"/>
-          </a:ln>
-        </p:spPr>
-        <p:txBody>
-          <a:bodyPr xmlns:a="http://schemas.openxmlformats.org/drawingml/2006/main" lIns="0" tIns="0" rIns="0" bIns="0" anchor="ctr"/>
-          <a:lstStyle xmlns:a="http://schemas.openxmlformats.org/drawingml/2006/main"/>
-          <a:p xmlns:a="http://schemas.openxmlformats.org/drawingml/2006/main">
-            <a:pPr>
-              <a:defRPr sz="1275" b="0">
+            <a:off x="609600" y="6419850"/>
+            <a:ext cx="9525000" cy="219075"/>
+          </a:xfrm>
+          <a:prstGeom xmlns:a="http://schemas.openxmlformats.org/drawingml/2006/main" prst="rect">
+            <a:avLst/>
+          </a:prstGeom>
+          <a:noFill xmlns:a="http://schemas.openxmlformats.org/drawingml/2006/main"/>
+          <a:ln xmlns:a="http://schemas.openxmlformats.org/drawingml/2006/main" w="0">
+            <a:noFill/>
+            <a:prstDash val="solid"/>
+          </a:ln>
+        </p:spPr>
+        <p:txBody>
+          <a:bodyPr xmlns:a="http://schemas.openxmlformats.org/drawingml/2006/main" lIns="0" tIns="0" rIns="0" bIns="0" anchor="ctr">
+            <a:noAutofit/>
+          </a:bodyPr>
+          <a:lstStyle xmlns:a="http://schemas.openxmlformats.org/drawingml/2006/main"/>
+          <a:p xmlns:a="http://schemas.openxmlformats.org/drawingml/2006/main">
+            <a:pPr algn="l">
+              <a:buNone/>
+              <a:defRPr sz="1200" b="0">
                 <a:solidFill>
                   <a:srgbClr val="50616B"/>
                 </a:solidFill>
-              </a:defRPr>
-            </a:pPr>
-            <a:r>
-              <a:rPr sz="1275" b="0">
+                <a:latin typeface="Calibri"/>
+                <a:ea typeface="Calibri"/>
+                <a:cs typeface="Calibri"/>
+              </a:defRPr>
+            </a:pPr>
+            <a:r>
+              <a:rPr sz="1200" b="0">
                 <a:solidFill>
                   <a:srgbClr val="50616B"/>
                 </a:solidFill>
+                <a:latin typeface="Calibri"/>
+                <a:ea typeface="Calibri"/>
+                <a:cs typeface="Calibri"/>
               </a:rPr>
               <a:t>AUTUMN 1  ·  WEEK 3  ·  LESSON A</a:t>
             </a:r>
@@ -7493,27 +10153,33 @@
         </p:nvSpPr>
         <p:spPr>
           <a:xfrm xmlns:a="http://schemas.openxmlformats.org/drawingml/2006/main">
-            <a:off x="11106150" y="6362700"/>
-            <a:ext cx="476250" cy="238125"/>
-          </a:xfrm>
-          <a:prstGeom xmlns:a="http://schemas.openxmlformats.org/drawingml/2006/main" prst="rect">
-            <a:avLst/>
-          </a:prstGeom>
-          <a:noFill xmlns:a="http://schemas.openxmlformats.org/drawingml/2006/main"/>
-          <a:ln xmlns:a="http://schemas.openxmlformats.org/drawingml/2006/main" w="0">
-            <a:noFill/>
-            <a:prstDash val="solid"/>
-          </a:ln>
-        </p:spPr>
-        <p:txBody>
-          <a:bodyPr xmlns:a="http://schemas.openxmlformats.org/drawingml/2006/main" lIns="0" tIns="0" rIns="0" bIns="0" anchor="ctr"/>
-          <a:lstStyle xmlns:a="http://schemas.openxmlformats.org/drawingml/2006/main"/>
-          <a:p xmlns:a="http://schemas.openxmlformats.org/drawingml/2006/main">
-            <a:pPr>
+            <a:off x="11106150" y="6400800"/>
+            <a:ext cx="476250" cy="247650"/>
+          </a:xfrm>
+          <a:prstGeom xmlns:a="http://schemas.openxmlformats.org/drawingml/2006/main" prst="rect">
+            <a:avLst/>
+          </a:prstGeom>
+          <a:noFill xmlns:a="http://schemas.openxmlformats.org/drawingml/2006/main"/>
+          <a:ln xmlns:a="http://schemas.openxmlformats.org/drawingml/2006/main" w="0">
+            <a:noFill/>
+            <a:prstDash val="solid"/>
+          </a:ln>
+        </p:spPr>
+        <p:txBody>
+          <a:bodyPr xmlns:a="http://schemas.openxmlformats.org/drawingml/2006/main" lIns="0" tIns="0" rIns="0" bIns="0" anchor="ctr">
+            <a:noAutofit/>
+          </a:bodyPr>
+          <a:lstStyle xmlns:a="http://schemas.openxmlformats.org/drawingml/2006/main"/>
+          <a:p xmlns:a="http://schemas.openxmlformats.org/drawingml/2006/main">
+            <a:pPr algn="l">
+              <a:buNone/>
               <a:defRPr sz="1350" b="1">
                 <a:solidFill>
                   <a:srgbClr val="28685E"/>
                 </a:solidFill>
+                <a:latin typeface="Calibri"/>
+                <a:ea typeface="Calibri"/>
+                <a:cs typeface="Calibri"/>
               </a:defRPr>
             </a:pPr>
             <a:r>
@@ -7521,6 +10187,9 @@
                 <a:solidFill>
                   <a:srgbClr val="28685E"/>
                 </a:solidFill>
+                <a:latin typeface="Calibri"/>
+                <a:ea typeface="Calibri"/>
+                <a:cs typeface="Calibri"/>
               </a:rPr>
               <a:t>08</a:t>
             </a:r>
@@ -7543,34 +10212,45 @@
         </p:nvSpPr>
         <p:spPr>
           <a:xfrm xmlns:a="http://schemas.openxmlformats.org/drawingml/2006/main">
-            <a:off x="609600" y="2781300"/>
-            <a:ext cx="10572750" cy="857250"/>
-          </a:xfrm>
-          <a:prstGeom xmlns:a="http://schemas.openxmlformats.org/drawingml/2006/main" prst="rect">
-            <a:avLst/>
-          </a:prstGeom>
-          <a:noFill xmlns:a="http://schemas.openxmlformats.org/drawingml/2006/main"/>
-          <a:ln xmlns:a="http://schemas.openxmlformats.org/drawingml/2006/main" w="0">
-            <a:noFill/>
-            <a:prstDash val="solid"/>
-          </a:ln>
-        </p:spPr>
-        <p:txBody>
-          <a:bodyPr xmlns:a="http://schemas.openxmlformats.org/drawingml/2006/main" lIns="0" tIns="0" rIns="0" bIns="0" anchor="ctr"/>
-          <a:lstStyle xmlns:a="http://schemas.openxmlformats.org/drawingml/2006/main"/>
-          <a:p xmlns:a="http://schemas.openxmlformats.org/drawingml/2006/main">
-            <a:pPr>
-              <a:defRPr sz="3450" b="1">
+            <a:off x="609600" y="2305050"/>
+            <a:ext cx="10972800" cy="1247775"/>
+          </a:xfrm>
+          <a:prstGeom xmlns:a="http://schemas.openxmlformats.org/drawingml/2006/main" prst="rect">
+            <a:avLst/>
+          </a:prstGeom>
+          <a:solidFill xmlns:a="http://schemas.openxmlformats.org/drawingml/2006/main">
+            <a:srgbClr val="E7EFE9"/>
+          </a:solidFill>
+          <a:ln xmlns:a="http://schemas.openxmlformats.org/drawingml/2006/main" w="0">
+            <a:noFill/>
+            <a:prstDash val="solid"/>
+          </a:ln>
+        </p:spPr>
+        <p:txBody>
+          <a:bodyPr xmlns:a="http://schemas.openxmlformats.org/drawingml/2006/main" lIns="228600" tIns="114300" rIns="228600" bIns="114300" anchor="ctr">
+            <a:noAutofit/>
+          </a:bodyPr>
+          <a:lstStyle xmlns:a="http://schemas.openxmlformats.org/drawingml/2006/main"/>
+          <a:p xmlns:a="http://schemas.openxmlformats.org/drawingml/2006/main">
+            <a:pPr algn="l">
+              <a:buNone/>
+              <a:defRPr sz="3000" b="1">
                 <a:solidFill>
                   <a:srgbClr val="28685E"/>
                 </a:solidFill>
-              </a:defRPr>
-            </a:pPr>
-            <a:r>
-              <a:rPr sz="3450" b="1">
+                <a:latin typeface="Calibri"/>
+                <a:ea typeface="Calibri"/>
+                <a:cs typeface="Calibri"/>
+              </a:defRPr>
+            </a:pPr>
+            <a:r>
+              <a:rPr sz="3000" b="1">
                 <a:solidFill>
                   <a:srgbClr val="28685E"/>
                 </a:solidFill>
+                <a:latin typeface="Calibri"/>
+                <a:ea typeface="Calibri"/>
+                <a:cs typeface="Calibri"/>
               </a:rPr>
               <a:t>Friction is helpful here because…</a:t>
             </a:r>
@@ -7593,84 +10273,104 @@
         </p:nvSpPr>
         <p:spPr>
           <a:xfrm xmlns:a="http://schemas.openxmlformats.org/drawingml/2006/main">
-            <a:off x="609600" y="4057650"/>
-            <a:ext cx="10572750" cy="857250"/>
-          </a:xfrm>
-          <a:prstGeom xmlns:a="http://schemas.openxmlformats.org/drawingml/2006/main" prst="rect">
-            <a:avLst/>
-          </a:prstGeom>
-          <a:noFill xmlns:a="http://schemas.openxmlformats.org/drawingml/2006/main"/>
-          <a:ln xmlns:a="http://schemas.openxmlformats.org/drawingml/2006/main" w="0">
-            <a:noFill/>
-            <a:prstDash val="solid"/>
-          </a:ln>
-        </p:spPr>
-        <p:txBody>
-          <a:bodyPr xmlns:a="http://schemas.openxmlformats.org/drawingml/2006/main" lIns="0" tIns="0" rIns="0" bIns="0" anchor="ctr"/>
-          <a:lstStyle xmlns:a="http://schemas.openxmlformats.org/drawingml/2006/main"/>
-          <a:p xmlns:a="http://schemas.openxmlformats.org/drawingml/2006/main">
-            <a:pPr>
-              <a:defRPr sz="3450" b="1">
+            <a:off x="609600" y="3552825"/>
+            <a:ext cx="10972800" cy="1247775"/>
+          </a:xfrm>
+          <a:prstGeom xmlns:a="http://schemas.openxmlformats.org/drawingml/2006/main" prst="rect">
+            <a:avLst/>
+          </a:prstGeom>
+          <a:solidFill xmlns:a="http://schemas.openxmlformats.org/drawingml/2006/main">
+            <a:srgbClr val="E7EFE9"/>
+          </a:solidFill>
+          <a:ln xmlns:a="http://schemas.openxmlformats.org/drawingml/2006/main" w="0">
+            <a:noFill/>
+            <a:prstDash val="solid"/>
+          </a:ln>
+        </p:spPr>
+        <p:txBody>
+          <a:bodyPr xmlns:a="http://schemas.openxmlformats.org/drawingml/2006/main" lIns="228600" tIns="114300" rIns="228600" bIns="114300" anchor="ctr">
+            <a:noAutofit/>
+          </a:bodyPr>
+          <a:lstStyle xmlns:a="http://schemas.openxmlformats.org/drawingml/2006/main"/>
+          <a:p xmlns:a="http://schemas.openxmlformats.org/drawingml/2006/main">
+            <a:pPr algn="l">
+              <a:buNone/>
+              <a:defRPr sz="3000" b="1">
+                <a:solidFill>
+                  <a:srgbClr val="28685E"/>
+                </a:solidFill>
+                <a:latin typeface="Calibri"/>
+                <a:ea typeface="Calibri"/>
+                <a:cs typeface="Calibri"/>
+              </a:defRPr>
+            </a:pPr>
+            <a:r>
+              <a:rPr sz="3000" b="1">
+                <a:solidFill>
+                  <a:srgbClr val="28685E"/>
+                </a:solidFill>
+                <a:latin typeface="Calibri"/>
+                <a:ea typeface="Calibri"/>
+                <a:cs typeface="Calibri"/>
+              </a:rPr>
+              <a:t>…but it is unhelpful here because…</a:t>
+            </a:r>
+          </a:p>
+        </p:txBody>
+      </p:sp>
+      <p:sp>
+        <p:nvSpPr>
+          <p:cNvPr id="9" name="stem-prompt">
+            <a:extLst xmlns:a="http://schemas.openxmlformats.org/drawingml/2006/main">
+              <a:ext uri="{FF2B5EF4-FFF2-40B4-BE49-F238E27FC236}">
+                <a16:creationId xmlns:a16="http://schemas.microsoft.com/office/drawing/2014/main" id="{77CDD272-37E7-4B0D-A29B-666BDC8357AE}"/>
+              </a:ext>
+            </a:extLst>
+          </p:cNvPr>
+          <p:cNvSpPr>
+            <a:spLocks xmlns:a="http://schemas.openxmlformats.org/drawingml/2006/main" noGrp="1"/>
+          </p:cNvSpPr>
+          <p:nvPr/>
+        </p:nvSpPr>
+        <p:spPr>
+          <a:xfrm xmlns:a="http://schemas.openxmlformats.org/drawingml/2006/main">
+            <a:off x="609600" y="5219700"/>
+            <a:ext cx="10972800" cy="619125"/>
+          </a:xfrm>
+          <a:prstGeom xmlns:a="http://schemas.openxmlformats.org/drawingml/2006/main" prst="rect">
+            <a:avLst/>
+          </a:prstGeom>
+          <a:noFill xmlns:a="http://schemas.openxmlformats.org/drawingml/2006/main"/>
+          <a:ln xmlns:a="http://schemas.openxmlformats.org/drawingml/2006/main" w="0">
+            <a:noFill/>
+            <a:prstDash val="solid"/>
+          </a:ln>
+        </p:spPr>
+        <p:txBody>
+          <a:bodyPr xmlns:a="http://schemas.openxmlformats.org/drawingml/2006/main" lIns="0" tIns="0" rIns="0" bIns="0" anchor="ctr">
+            <a:noAutofit/>
+          </a:bodyPr>
+          <a:lstStyle xmlns:a="http://schemas.openxmlformats.org/drawingml/2006/main"/>
+          <a:p xmlns:a="http://schemas.openxmlformats.org/drawingml/2006/main">
+            <a:pPr algn="l">
+              <a:buNone/>
+              <a:defRPr sz="2250" b="0">
                 <a:solidFill>
                   <a:srgbClr val="152B3A"/>
                 </a:solidFill>
-              </a:defRPr>
-            </a:pPr>
-            <a:r>
-              <a:rPr sz="3450" b="1">
+                <a:latin typeface="Calibri"/>
+                <a:ea typeface="Calibri"/>
+                <a:cs typeface="Calibri"/>
+              </a:defRPr>
+            </a:pPr>
+            <a:r>
+              <a:rPr sz="2250" b="0">
                 <a:solidFill>
                   <a:srgbClr val="152B3A"/>
                 </a:solidFill>
-              </a:rPr>
-              <a:t>…but it is unhelpful here because…</a:t>
-            </a:r>
-          </a:p>
-        </p:txBody>
-      </p:sp>
-      <p:sp>
-        <p:nvSpPr>
-          <p:cNvPr id="9" name="stem-prompt">
-            <a:extLst xmlns:a="http://schemas.openxmlformats.org/drawingml/2006/main">
-              <a:ext uri="{FF2B5EF4-FFF2-40B4-BE49-F238E27FC236}">
-                <a16:creationId xmlns:a16="http://schemas.microsoft.com/office/drawing/2014/main" id="{77CDD272-37E7-4B0D-A29B-666BDC8357AE}"/>
-              </a:ext>
-            </a:extLst>
-          </p:cNvPr>
-          <p:cNvSpPr>
-            <a:spLocks xmlns:a="http://schemas.openxmlformats.org/drawingml/2006/main" noGrp="1"/>
-          </p:cNvSpPr>
-          <p:nvPr/>
-        </p:nvSpPr>
-        <p:spPr>
-          <a:xfrm xmlns:a="http://schemas.openxmlformats.org/drawingml/2006/main">
-            <a:off x="609600" y="5343525"/>
-            <a:ext cx="10668000" cy="619125"/>
-          </a:xfrm>
-          <a:prstGeom xmlns:a="http://schemas.openxmlformats.org/drawingml/2006/main" prst="rect">
-            <a:avLst/>
-          </a:prstGeom>
-          <a:noFill xmlns:a="http://schemas.openxmlformats.org/drawingml/2006/main"/>
-          <a:ln xmlns:a="http://schemas.openxmlformats.org/drawingml/2006/main" w="0">
-            <a:noFill/>
-            <a:prstDash val="solid"/>
-          </a:ln>
-        </p:spPr>
-        <p:txBody>
-          <a:bodyPr xmlns:a="http://schemas.openxmlformats.org/drawingml/2006/main" lIns="0" tIns="0" rIns="0" bIns="0" anchor="ctr"/>
-          <a:lstStyle xmlns:a="http://schemas.openxmlformats.org/drawingml/2006/main"/>
-          <a:p xmlns:a="http://schemas.openxmlformats.org/drawingml/2006/main">
-            <a:pPr>
-              <a:defRPr sz="2175" b="0">
-                <a:solidFill>
-                  <a:srgbClr val="152B3A"/>
-                </a:solidFill>
-              </a:defRPr>
-            </a:pPr>
-            <a:r>
-              <a:rPr sz="2175" b="0">
-                <a:solidFill>
-                  <a:srgbClr val="152B3A"/>
-                </a:solidFill>
+                <a:latin typeface="Calibri"/>
+                <a:ea typeface="Calibri"/>
+                <a:cs typeface="Calibri"/>
               </a:rPr>
               <a:t>Use the touching surfaces and the job in your explanation.</a:t>
             </a:r>
@@ -7693,7 +10393,7 @@
     <p:bg>
       <p:bgPr>
         <a:solidFill xmlns:a="http://schemas.openxmlformats.org/drawingml/2006/main">
-          <a:srgbClr val="F5F1E8"/>
+          <a:srgbClr val="FAF9F5"/>
         </a:solidFill>
       </p:bgPr>
     </p:bg>
@@ -7722,8 +10422,8 @@
         </p:nvSpPr>
         <p:spPr>
           <a:xfrm xmlns:a="http://schemas.openxmlformats.org/drawingml/2006/main">
-            <a:off x="609600" y="552450"/>
-            <a:ext cx="781050" cy="57150"/>
+            <a:off x="609600" y="733425"/>
+            <a:ext cx="781050" cy="38100"/>
           </a:xfrm>
           <a:prstGeom xmlns:a="http://schemas.openxmlformats.org/drawingml/2006/main" prst="rect">
             <a:avLst/>
@@ -7753,34 +10453,43 @@
         </p:nvSpPr>
         <p:spPr>
           <a:xfrm xmlns:a="http://schemas.openxmlformats.org/drawingml/2006/main">
-            <a:off x="609600" y="762000"/>
-            <a:ext cx="7143750" cy="285750"/>
-          </a:xfrm>
-          <a:prstGeom xmlns:a="http://schemas.openxmlformats.org/drawingml/2006/main" prst="rect">
-            <a:avLst/>
-          </a:prstGeom>
-          <a:noFill xmlns:a="http://schemas.openxmlformats.org/drawingml/2006/main"/>
-          <a:ln xmlns:a="http://schemas.openxmlformats.org/drawingml/2006/main" w="0">
-            <a:noFill/>
-            <a:prstDash val="solid"/>
-          </a:ln>
-        </p:spPr>
-        <p:txBody>
-          <a:bodyPr xmlns:a="http://schemas.openxmlformats.org/drawingml/2006/main" lIns="0" tIns="0" rIns="0" bIns="0" anchor="ctr"/>
-          <a:lstStyle xmlns:a="http://schemas.openxmlformats.org/drawingml/2006/main"/>
-          <a:p xmlns:a="http://schemas.openxmlformats.org/drawingml/2006/main">
-            <a:pPr>
-              <a:defRPr sz="1500" b="1">
+            <a:off x="609600" y="342900"/>
+            <a:ext cx="9334500" cy="304800"/>
+          </a:xfrm>
+          <a:prstGeom xmlns:a="http://schemas.openxmlformats.org/drawingml/2006/main" prst="rect">
+            <a:avLst/>
+          </a:prstGeom>
+          <a:noFill xmlns:a="http://schemas.openxmlformats.org/drawingml/2006/main"/>
+          <a:ln xmlns:a="http://schemas.openxmlformats.org/drawingml/2006/main" w="0">
+            <a:noFill/>
+            <a:prstDash val="solid"/>
+          </a:ln>
+        </p:spPr>
+        <p:txBody>
+          <a:bodyPr xmlns:a="http://schemas.openxmlformats.org/drawingml/2006/main" lIns="0" tIns="0" rIns="0" bIns="0" anchor="ctr">
+            <a:noAutofit/>
+          </a:bodyPr>
+          <a:lstStyle xmlns:a="http://schemas.openxmlformats.org/drawingml/2006/main"/>
+          <a:p xmlns:a="http://schemas.openxmlformats.org/drawingml/2006/main">
+            <a:pPr algn="l">
+              <a:buNone/>
+              <a:defRPr sz="1350" b="1">
                 <a:solidFill>
                   <a:srgbClr val="28685E"/>
                 </a:solidFill>
-              </a:defRPr>
-            </a:pPr>
-            <a:r>
-              <a:rPr sz="1500" b="1">
+                <a:latin typeface="Calibri"/>
+                <a:ea typeface="Calibri"/>
+                <a:cs typeface="Calibri"/>
+              </a:defRPr>
+            </a:pPr>
+            <a:r>
+              <a:rPr sz="1350" b="1">
                 <a:solidFill>
                   <a:srgbClr val="28685E"/>
                 </a:solidFill>
+                <a:latin typeface="Calibri"/>
+                <a:ea typeface="Calibri"/>
+                <a:cs typeface="Calibri"/>
               </a:rPr>
               <a:t>MADE BY MATT  /  GROW SCIENCE</a:t>
             </a:r>
@@ -7803,34 +10512,43 @@
         </p:nvSpPr>
         <p:spPr>
           <a:xfrm xmlns:a="http://schemas.openxmlformats.org/drawingml/2006/main">
-            <a:off x="609600" y="1352550"/>
-            <a:ext cx="10972800" cy="952500"/>
-          </a:xfrm>
-          <a:prstGeom xmlns:a="http://schemas.openxmlformats.org/drawingml/2006/main" prst="rect">
-            <a:avLst/>
-          </a:prstGeom>
-          <a:noFill xmlns:a="http://schemas.openxmlformats.org/drawingml/2006/main"/>
-          <a:ln xmlns:a="http://schemas.openxmlformats.org/drawingml/2006/main" w="0">
-            <a:noFill/>
-            <a:prstDash val="solid"/>
-          </a:ln>
-        </p:spPr>
-        <p:txBody>
-          <a:bodyPr xmlns:a="http://schemas.openxmlformats.org/drawingml/2006/main" lIns="0" tIns="0" rIns="0" bIns="0" anchor="ctr"/>
-          <a:lstStyle xmlns:a="http://schemas.openxmlformats.org/drawingml/2006/main"/>
-          <a:p xmlns:a="http://schemas.openxmlformats.org/drawingml/2006/main">
-            <a:pPr>
-              <a:defRPr sz="3750" b="1">
+            <a:off x="609600" y="990600"/>
+            <a:ext cx="10972800" cy="1000125"/>
+          </a:xfrm>
+          <a:prstGeom xmlns:a="http://schemas.openxmlformats.org/drawingml/2006/main" prst="rect">
+            <a:avLst/>
+          </a:prstGeom>
+          <a:noFill xmlns:a="http://schemas.openxmlformats.org/drawingml/2006/main"/>
+          <a:ln xmlns:a="http://schemas.openxmlformats.org/drawingml/2006/main" w="0">
+            <a:noFill/>
+            <a:prstDash val="solid"/>
+          </a:ln>
+        </p:spPr>
+        <p:txBody>
+          <a:bodyPr xmlns:a="http://schemas.openxmlformats.org/drawingml/2006/main" lIns="0" tIns="0" rIns="0" bIns="0" anchor="ctr">
+            <a:noAutofit/>
+          </a:bodyPr>
+          <a:lstStyle xmlns:a="http://schemas.openxmlformats.org/drawingml/2006/main"/>
+          <a:p xmlns:a="http://schemas.openxmlformats.org/drawingml/2006/main">
+            <a:pPr algn="l">
+              <a:buNone/>
+              <a:defRPr sz="3675" b="1">
                 <a:solidFill>
                   <a:srgbClr val="152B3A"/>
                 </a:solidFill>
-              </a:defRPr>
-            </a:pPr>
-            <a:r>
-              <a:rPr sz="3750" b="1">
+                <a:latin typeface="Calibri"/>
+                <a:ea typeface="Calibri"/>
+                <a:cs typeface="Calibri"/>
+              </a:defRPr>
+            </a:pPr>
+            <a:r>
+              <a:rPr sz="3675" b="1">
                 <a:solidFill>
                   <a:srgbClr val="152B3A"/>
                 </a:solidFill>
+                <a:latin typeface="Calibri"/>
+                <a:ea typeface="Calibri"/>
+                <a:cs typeface="Calibri"/>
               </a:rPr>
               <a:t>Sort the claims</a:t>
             </a:r>
@@ -7853,14 +10571,14 @@
         </p:nvSpPr>
         <p:spPr>
           <a:xfrm xmlns:a="http://schemas.openxmlformats.org/drawingml/2006/main">
-            <a:off x="609600" y="6219825"/>
+            <a:off x="609600" y="6191250"/>
             <a:ext cx="10972800" cy="9525"/>
           </a:xfrm>
           <a:prstGeom xmlns:a="http://schemas.openxmlformats.org/drawingml/2006/main" prst="rect">
             <a:avLst/>
           </a:prstGeom>
           <a:solidFill xmlns:a="http://schemas.openxmlformats.org/drawingml/2006/main">
-            <a:srgbClr val="DCE7DD"/>
+            <a:srgbClr val="CEDBD3"/>
           </a:solidFill>
           <a:ln xmlns:a="http://schemas.openxmlformats.org/drawingml/2006/main" w="0">
             <a:noFill/>
@@ -7884,34 +10602,43 @@
         </p:nvSpPr>
         <p:spPr>
           <a:xfrm xmlns:a="http://schemas.openxmlformats.org/drawingml/2006/main">
-            <a:off x="609600" y="6381750"/>
-            <a:ext cx="9525000" cy="228600"/>
-          </a:xfrm>
-          <a:prstGeom xmlns:a="http://schemas.openxmlformats.org/drawingml/2006/main" prst="rect">
-            <a:avLst/>
-          </a:prstGeom>
-          <a:noFill xmlns:a="http://schemas.openxmlformats.org/drawingml/2006/main"/>
-          <a:ln xmlns:a="http://schemas.openxmlformats.org/drawingml/2006/main" w="0">
-            <a:noFill/>
-            <a:prstDash val="solid"/>
-          </a:ln>
-        </p:spPr>
-        <p:txBody>
-          <a:bodyPr xmlns:a="http://schemas.openxmlformats.org/drawingml/2006/main" lIns="0" tIns="0" rIns="0" bIns="0" anchor="ctr"/>
-          <a:lstStyle xmlns:a="http://schemas.openxmlformats.org/drawingml/2006/main"/>
-          <a:p xmlns:a="http://schemas.openxmlformats.org/drawingml/2006/main">
-            <a:pPr>
-              <a:defRPr sz="1275" b="0">
+            <a:off x="609600" y="6419850"/>
+            <a:ext cx="9525000" cy="219075"/>
+          </a:xfrm>
+          <a:prstGeom xmlns:a="http://schemas.openxmlformats.org/drawingml/2006/main" prst="rect">
+            <a:avLst/>
+          </a:prstGeom>
+          <a:noFill xmlns:a="http://schemas.openxmlformats.org/drawingml/2006/main"/>
+          <a:ln xmlns:a="http://schemas.openxmlformats.org/drawingml/2006/main" w="0">
+            <a:noFill/>
+            <a:prstDash val="solid"/>
+          </a:ln>
+        </p:spPr>
+        <p:txBody>
+          <a:bodyPr xmlns:a="http://schemas.openxmlformats.org/drawingml/2006/main" lIns="0" tIns="0" rIns="0" bIns="0" anchor="ctr">
+            <a:noAutofit/>
+          </a:bodyPr>
+          <a:lstStyle xmlns:a="http://schemas.openxmlformats.org/drawingml/2006/main"/>
+          <a:p xmlns:a="http://schemas.openxmlformats.org/drawingml/2006/main">
+            <a:pPr algn="l">
+              <a:buNone/>
+              <a:defRPr sz="1200" b="0">
                 <a:solidFill>
                   <a:srgbClr val="50616B"/>
                 </a:solidFill>
-              </a:defRPr>
-            </a:pPr>
-            <a:r>
-              <a:rPr sz="1275" b="0">
+                <a:latin typeface="Calibri"/>
+                <a:ea typeface="Calibri"/>
+                <a:cs typeface="Calibri"/>
+              </a:defRPr>
+            </a:pPr>
+            <a:r>
+              <a:rPr sz="1200" b="0">
                 <a:solidFill>
                   <a:srgbClr val="50616B"/>
                 </a:solidFill>
+                <a:latin typeface="Calibri"/>
+                <a:ea typeface="Calibri"/>
+                <a:cs typeface="Calibri"/>
               </a:rPr>
               <a:t>AUTUMN 1  ·  WEEK 3  ·  LESSON A</a:t>
             </a:r>
@@ -7934,27 +10661,33 @@
         </p:nvSpPr>
         <p:spPr>
           <a:xfrm xmlns:a="http://schemas.openxmlformats.org/drawingml/2006/main">
-            <a:off x="11106150" y="6362700"/>
-            <a:ext cx="476250" cy="238125"/>
-          </a:xfrm>
-          <a:prstGeom xmlns:a="http://schemas.openxmlformats.org/drawingml/2006/main" prst="rect">
-            <a:avLst/>
-          </a:prstGeom>
-          <a:noFill xmlns:a="http://schemas.openxmlformats.org/drawingml/2006/main"/>
-          <a:ln xmlns:a="http://schemas.openxmlformats.org/drawingml/2006/main" w="0">
-            <a:noFill/>
-            <a:prstDash val="solid"/>
-          </a:ln>
-        </p:spPr>
-        <p:txBody>
-          <a:bodyPr xmlns:a="http://schemas.openxmlformats.org/drawingml/2006/main" lIns="0" tIns="0" rIns="0" bIns="0" anchor="ctr"/>
-          <a:lstStyle xmlns:a="http://schemas.openxmlformats.org/drawingml/2006/main"/>
-          <a:p xmlns:a="http://schemas.openxmlformats.org/drawingml/2006/main">
-            <a:pPr>
+            <a:off x="11106150" y="6400800"/>
+            <a:ext cx="476250" cy="247650"/>
+          </a:xfrm>
+          <a:prstGeom xmlns:a="http://schemas.openxmlformats.org/drawingml/2006/main" prst="rect">
+            <a:avLst/>
+          </a:prstGeom>
+          <a:noFill xmlns:a="http://schemas.openxmlformats.org/drawingml/2006/main"/>
+          <a:ln xmlns:a="http://schemas.openxmlformats.org/drawingml/2006/main" w="0">
+            <a:noFill/>
+            <a:prstDash val="solid"/>
+          </a:ln>
+        </p:spPr>
+        <p:txBody>
+          <a:bodyPr xmlns:a="http://schemas.openxmlformats.org/drawingml/2006/main" lIns="0" tIns="0" rIns="0" bIns="0" anchor="ctr">
+            <a:noAutofit/>
+          </a:bodyPr>
+          <a:lstStyle xmlns:a="http://schemas.openxmlformats.org/drawingml/2006/main"/>
+          <a:p xmlns:a="http://schemas.openxmlformats.org/drawingml/2006/main">
+            <a:pPr algn="l">
+              <a:buNone/>
               <a:defRPr sz="1350" b="1">
                 <a:solidFill>
                   <a:srgbClr val="28685E"/>
                 </a:solidFill>
+                <a:latin typeface="Calibri"/>
+                <a:ea typeface="Calibri"/>
+                <a:cs typeface="Calibri"/>
               </a:defRPr>
             </a:pPr>
             <a:r>
@@ -7962,6 +10695,9 @@
                 <a:solidFill>
                   <a:srgbClr val="28685E"/>
                 </a:solidFill>
+                <a:latin typeface="Calibri"/>
+                <a:ea typeface="Calibri"/>
+                <a:cs typeface="Calibri"/>
               </a:rPr>
               <a:t>09</a:t>
             </a:r>
@@ -7984,34 +10720,43 @@
         </p:nvSpPr>
         <p:spPr>
           <a:xfrm xmlns:a="http://schemas.openxmlformats.org/drawingml/2006/main">
-            <a:off x="609600" y="2447925"/>
-            <a:ext cx="10953750" cy="400050"/>
-          </a:xfrm>
-          <a:prstGeom xmlns:a="http://schemas.openxmlformats.org/drawingml/2006/main" prst="rect">
-            <a:avLst/>
-          </a:prstGeom>
-          <a:noFill xmlns:a="http://schemas.openxmlformats.org/drawingml/2006/main"/>
-          <a:ln xmlns:a="http://schemas.openxmlformats.org/drawingml/2006/main" w="0">
-            <a:noFill/>
-            <a:prstDash val="solid"/>
-          </a:ln>
-        </p:spPr>
-        <p:txBody>
-          <a:bodyPr xmlns:a="http://schemas.openxmlformats.org/drawingml/2006/main" lIns="0" tIns="0" rIns="0" bIns="0" anchor="ctr"/>
-          <a:lstStyle xmlns:a="http://schemas.openxmlformats.org/drawingml/2006/main"/>
-          <a:p xmlns:a="http://schemas.openxmlformats.org/drawingml/2006/main">
-            <a:pPr>
-              <a:defRPr sz="1875" b="1">
+            <a:off x="609600" y="2238375"/>
+            <a:ext cx="10972800" cy="361950"/>
+          </a:xfrm>
+          <a:prstGeom xmlns:a="http://schemas.openxmlformats.org/drawingml/2006/main" prst="rect">
+            <a:avLst/>
+          </a:prstGeom>
+          <a:noFill xmlns:a="http://schemas.openxmlformats.org/drawingml/2006/main"/>
+          <a:ln xmlns:a="http://schemas.openxmlformats.org/drawingml/2006/main" w="0">
+            <a:noFill/>
+            <a:prstDash val="solid"/>
+          </a:ln>
+        </p:spPr>
+        <p:txBody>
+          <a:bodyPr xmlns:a="http://schemas.openxmlformats.org/drawingml/2006/main" lIns="0" tIns="0" rIns="0" bIns="0" anchor="ctr">
+            <a:noAutofit/>
+          </a:bodyPr>
+          <a:lstStyle xmlns:a="http://schemas.openxmlformats.org/drawingml/2006/main"/>
+          <a:p xmlns:a="http://schemas.openxmlformats.org/drawingml/2006/main">
+            <a:pPr algn="l">
+              <a:buNone/>
+              <a:defRPr sz="1800" b="1">
                 <a:solidFill>
                   <a:srgbClr val="28685E"/>
                 </a:solidFill>
-              </a:defRPr>
-            </a:pPr>
-            <a:r>
-              <a:rPr sz="1875" b="1">
+                <a:latin typeface="Calibri"/>
+                <a:ea typeface="Calibri"/>
+                <a:cs typeface="Calibri"/>
+              </a:defRPr>
+            </a:pPr>
+            <a:r>
+              <a:rPr sz="1800" b="1">
                 <a:solidFill>
                   <a:srgbClr val="28685E"/>
                 </a:solidFill>
+                <a:latin typeface="Calibri"/>
+                <a:ea typeface="Calibri"/>
+                <a:cs typeface="Calibri"/>
               </a:rPr>
               <a:t>TRUE     /     FALSE     /     NOT A SCIENTIFIC CLAIM</a:t>
             </a:r>
@@ -8034,34 +10779,43 @@
         </p:nvSpPr>
         <p:spPr>
           <a:xfrm xmlns:a="http://schemas.openxmlformats.org/drawingml/2006/main">
-            <a:off x="609600" y="3095625"/>
-            <a:ext cx="10668000" cy="447675"/>
-          </a:xfrm>
-          <a:prstGeom xmlns:a="http://schemas.openxmlformats.org/drawingml/2006/main" prst="rect">
-            <a:avLst/>
-          </a:prstGeom>
-          <a:noFill xmlns:a="http://schemas.openxmlformats.org/drawingml/2006/main"/>
-          <a:ln xmlns:a="http://schemas.openxmlformats.org/drawingml/2006/main" w="0">
-            <a:noFill/>
-            <a:prstDash val="solid"/>
-          </a:ln>
-        </p:spPr>
-        <p:txBody>
-          <a:bodyPr xmlns:a="http://schemas.openxmlformats.org/drawingml/2006/main" lIns="0" tIns="0" rIns="0" bIns="0" anchor="ctr"/>
-          <a:lstStyle xmlns:a="http://schemas.openxmlformats.org/drawingml/2006/main"/>
-          <a:p xmlns:a="http://schemas.openxmlformats.org/drawingml/2006/main">
-            <a:pPr>
-              <a:defRPr sz="2100" b="0">
+            <a:off x="1000125" y="2743200"/>
+            <a:ext cx="10382250" cy="493395"/>
+          </a:xfrm>
+          <a:prstGeom xmlns:a="http://schemas.openxmlformats.org/drawingml/2006/main" prst="rect">
+            <a:avLst/>
+          </a:prstGeom>
+          <a:noFill xmlns:a="http://schemas.openxmlformats.org/drawingml/2006/main"/>
+          <a:ln xmlns:a="http://schemas.openxmlformats.org/drawingml/2006/main" w="0">
+            <a:noFill/>
+            <a:prstDash val="solid"/>
+          </a:ln>
+        </p:spPr>
+        <p:txBody>
+          <a:bodyPr xmlns:a="http://schemas.openxmlformats.org/drawingml/2006/main" lIns="0" tIns="0" rIns="0" bIns="0" anchor="ctr">
+            <a:noAutofit/>
+          </a:bodyPr>
+          <a:lstStyle xmlns:a="http://schemas.openxmlformats.org/drawingml/2006/main"/>
+          <a:p xmlns:a="http://schemas.openxmlformats.org/drawingml/2006/main">
+            <a:pPr algn="l">
+              <a:buNone/>
+              <a:defRPr sz="2400" b="0">
                 <a:solidFill>
                   <a:srgbClr val="152B3A"/>
                 </a:solidFill>
-              </a:defRPr>
-            </a:pPr>
-            <a:r>
-              <a:rPr sz="2100" b="0">
+                <a:latin typeface="Calibri"/>
+                <a:ea typeface="Calibri"/>
+                <a:cs typeface="Calibri"/>
+              </a:defRPr>
+            </a:pPr>
+            <a:r>
+              <a:rPr sz="2400" b="0">
                 <a:solidFill>
                   <a:srgbClr val="152B3A"/>
                 </a:solidFill>
+                <a:latin typeface="Calibri"/>
+                <a:ea typeface="Calibri"/>
+                <a:cs typeface="Calibri"/>
               </a:rPr>
               <a:t>Sliding friction opposes sliding at the contact.</a:t>
             </a:r>
@@ -8084,34 +10838,43 @@
         </p:nvSpPr>
         <p:spPr>
           <a:xfrm xmlns:a="http://schemas.openxmlformats.org/drawingml/2006/main">
-            <a:off x="609600" y="3638550"/>
-            <a:ext cx="10668000" cy="447675"/>
-          </a:xfrm>
-          <a:prstGeom xmlns:a="http://schemas.openxmlformats.org/drawingml/2006/main" prst="rect">
-            <a:avLst/>
-          </a:prstGeom>
-          <a:noFill xmlns:a="http://schemas.openxmlformats.org/drawingml/2006/main"/>
-          <a:ln xmlns:a="http://schemas.openxmlformats.org/drawingml/2006/main" w="0">
-            <a:noFill/>
-            <a:prstDash val="solid"/>
-          </a:ln>
-        </p:spPr>
-        <p:txBody>
-          <a:bodyPr xmlns:a="http://schemas.openxmlformats.org/drawingml/2006/main" lIns="0" tIns="0" rIns="0" bIns="0" anchor="ctr"/>
-          <a:lstStyle xmlns:a="http://schemas.openxmlformats.org/drawingml/2006/main"/>
-          <a:p xmlns:a="http://schemas.openxmlformats.org/drawingml/2006/main">
-            <a:pPr>
-              <a:defRPr sz="2100" b="0">
+            <a:off x="1000125" y="3293745"/>
+            <a:ext cx="10382250" cy="493395"/>
+          </a:xfrm>
+          <a:prstGeom xmlns:a="http://schemas.openxmlformats.org/drawingml/2006/main" prst="rect">
+            <a:avLst/>
+          </a:prstGeom>
+          <a:noFill xmlns:a="http://schemas.openxmlformats.org/drawingml/2006/main"/>
+          <a:ln xmlns:a="http://schemas.openxmlformats.org/drawingml/2006/main" w="0">
+            <a:noFill/>
+            <a:prstDash val="solid"/>
+          </a:ln>
+        </p:spPr>
+        <p:txBody>
+          <a:bodyPr xmlns:a="http://schemas.openxmlformats.org/drawingml/2006/main" lIns="0" tIns="0" rIns="0" bIns="0" anchor="ctr">
+            <a:noAutofit/>
+          </a:bodyPr>
+          <a:lstStyle xmlns:a="http://schemas.openxmlformats.org/drawingml/2006/main"/>
+          <a:p xmlns:a="http://schemas.openxmlformats.org/drawingml/2006/main">
+            <a:pPr algn="l">
+              <a:buNone/>
+              <a:defRPr sz="2400" b="0">
                 <a:solidFill>
                   <a:srgbClr val="152B3A"/>
                 </a:solidFill>
-              </a:defRPr>
-            </a:pPr>
-            <a:r>
-              <a:rPr sz="2100" b="0">
+                <a:latin typeface="Calibri"/>
+                <a:ea typeface="Calibri"/>
+                <a:cs typeface="Calibri"/>
+              </a:defRPr>
+            </a:pPr>
+            <a:r>
+              <a:rPr sz="2400" b="0">
                 <a:solidFill>
                   <a:srgbClr val="152B3A"/>
                 </a:solidFill>
+                <a:latin typeface="Calibri"/>
+                <a:ea typeface="Calibri"/>
+                <a:cs typeface="Calibri"/>
               </a:rPr>
               <a:t>Friction only happens with rough surfaces.</a:t>
             </a:r>
@@ -8134,34 +10897,43 @@
         </p:nvSpPr>
         <p:spPr>
           <a:xfrm xmlns:a="http://schemas.openxmlformats.org/drawingml/2006/main">
-            <a:off x="609600" y="4181475"/>
-            <a:ext cx="10668000" cy="447675"/>
-          </a:xfrm>
-          <a:prstGeom xmlns:a="http://schemas.openxmlformats.org/drawingml/2006/main" prst="rect">
-            <a:avLst/>
-          </a:prstGeom>
-          <a:noFill xmlns:a="http://schemas.openxmlformats.org/drawingml/2006/main"/>
-          <a:ln xmlns:a="http://schemas.openxmlformats.org/drawingml/2006/main" w="0">
-            <a:noFill/>
-            <a:prstDash val="solid"/>
-          </a:ln>
-        </p:spPr>
-        <p:txBody>
-          <a:bodyPr xmlns:a="http://schemas.openxmlformats.org/drawingml/2006/main" lIns="0" tIns="0" rIns="0" bIns="0" anchor="ctr"/>
-          <a:lstStyle xmlns:a="http://schemas.openxmlformats.org/drawingml/2006/main"/>
-          <a:p xmlns:a="http://schemas.openxmlformats.org/drawingml/2006/main">
-            <a:pPr>
-              <a:defRPr sz="2100" b="0">
+            <a:off x="1000125" y="3844290"/>
+            <a:ext cx="10382250" cy="493395"/>
+          </a:xfrm>
+          <a:prstGeom xmlns:a="http://schemas.openxmlformats.org/drawingml/2006/main" prst="rect">
+            <a:avLst/>
+          </a:prstGeom>
+          <a:noFill xmlns:a="http://schemas.openxmlformats.org/drawingml/2006/main"/>
+          <a:ln xmlns:a="http://schemas.openxmlformats.org/drawingml/2006/main" w="0">
+            <a:noFill/>
+            <a:prstDash val="solid"/>
+          </a:ln>
+        </p:spPr>
+        <p:txBody>
+          <a:bodyPr xmlns:a="http://schemas.openxmlformats.org/drawingml/2006/main" lIns="0" tIns="0" rIns="0" bIns="0" anchor="ctr">
+            <a:noAutofit/>
+          </a:bodyPr>
+          <a:lstStyle xmlns:a="http://schemas.openxmlformats.org/drawingml/2006/main"/>
+          <a:p xmlns:a="http://schemas.openxmlformats.org/drawingml/2006/main">
+            <a:pPr algn="l">
+              <a:buNone/>
+              <a:defRPr sz="2400" b="0">
                 <a:solidFill>
                   <a:srgbClr val="152B3A"/>
                 </a:solidFill>
-              </a:defRPr>
-            </a:pPr>
-            <a:r>
-              <a:rPr sz="2100" b="0">
+                <a:latin typeface="Calibri"/>
+                <a:ea typeface="Calibri"/>
+                <a:cs typeface="Calibri"/>
+              </a:defRPr>
+            </a:pPr>
+            <a:r>
+              <a:rPr sz="2400" b="0">
                 <a:solidFill>
                   <a:srgbClr val="152B3A"/>
                 </a:solidFill>
+                <a:latin typeface="Calibri"/>
+                <a:ea typeface="Calibri"/>
+                <a:cs typeface="Calibri"/>
               </a:rPr>
               <a:t>Oil can reduce friction in suitable lubricated contacts.</a:t>
             </a:r>
@@ -8184,34 +10956,43 @@
         </p:nvSpPr>
         <p:spPr>
           <a:xfrm xmlns:a="http://schemas.openxmlformats.org/drawingml/2006/main">
-            <a:off x="609600" y="4724400"/>
-            <a:ext cx="10668000" cy="447675"/>
-          </a:xfrm>
-          <a:prstGeom xmlns:a="http://schemas.openxmlformats.org/drawingml/2006/main" prst="rect">
-            <a:avLst/>
-          </a:prstGeom>
-          <a:noFill xmlns:a="http://schemas.openxmlformats.org/drawingml/2006/main"/>
-          <a:ln xmlns:a="http://schemas.openxmlformats.org/drawingml/2006/main" w="0">
-            <a:noFill/>
-            <a:prstDash val="solid"/>
-          </a:ln>
-        </p:spPr>
-        <p:txBody>
-          <a:bodyPr xmlns:a="http://schemas.openxmlformats.org/drawingml/2006/main" lIns="0" tIns="0" rIns="0" bIns="0" anchor="ctr"/>
-          <a:lstStyle xmlns:a="http://schemas.openxmlformats.org/drawingml/2006/main"/>
-          <a:p xmlns:a="http://schemas.openxmlformats.org/drawingml/2006/main">
-            <a:pPr>
-              <a:defRPr sz="2100" b="0">
+            <a:off x="1000125" y="4394835"/>
+            <a:ext cx="10382250" cy="493395"/>
+          </a:xfrm>
+          <a:prstGeom xmlns:a="http://schemas.openxmlformats.org/drawingml/2006/main" prst="rect">
+            <a:avLst/>
+          </a:prstGeom>
+          <a:noFill xmlns:a="http://schemas.openxmlformats.org/drawingml/2006/main"/>
+          <a:ln xmlns:a="http://schemas.openxmlformats.org/drawingml/2006/main" w="0">
+            <a:noFill/>
+            <a:prstDash val="solid"/>
+          </a:ln>
+        </p:spPr>
+        <p:txBody>
+          <a:bodyPr xmlns:a="http://schemas.openxmlformats.org/drawingml/2006/main" lIns="0" tIns="0" rIns="0" bIns="0" anchor="ctr">
+            <a:noAutofit/>
+          </a:bodyPr>
+          <a:lstStyle xmlns:a="http://schemas.openxmlformats.org/drawingml/2006/main"/>
+          <a:p xmlns:a="http://schemas.openxmlformats.org/drawingml/2006/main">
+            <a:pPr algn="l">
+              <a:buNone/>
+              <a:defRPr sz="2400" b="0">
                 <a:solidFill>
                   <a:srgbClr val="152B3A"/>
                 </a:solidFill>
-              </a:defRPr>
-            </a:pPr>
-            <a:r>
-              <a:rPr sz="2100" b="0">
+                <a:latin typeface="Calibri"/>
+                <a:ea typeface="Calibri"/>
+                <a:cs typeface="Calibri"/>
+              </a:defRPr>
+            </a:pPr>
+            <a:r>
+              <a:rPr sz="2400" b="0">
                 <a:solidFill>
                   <a:srgbClr val="152B3A"/>
                 </a:solidFill>
+                <a:latin typeface="Calibri"/>
+                <a:ea typeface="Calibri"/>
+                <a:cs typeface="Calibri"/>
               </a:rPr>
               <a:t>Without friction we could not walk normally.</a:t>
             </a:r>
@@ -8234,36 +11015,450 @@
         </p:nvSpPr>
         <p:spPr>
           <a:xfrm xmlns:a="http://schemas.openxmlformats.org/drawingml/2006/main">
-            <a:off x="609600" y="5267325"/>
-            <a:ext cx="10668000" cy="447675"/>
-          </a:xfrm>
-          <a:prstGeom xmlns:a="http://schemas.openxmlformats.org/drawingml/2006/main" prst="rect">
-            <a:avLst/>
-          </a:prstGeom>
-          <a:noFill xmlns:a="http://schemas.openxmlformats.org/drawingml/2006/main"/>
-          <a:ln xmlns:a="http://schemas.openxmlformats.org/drawingml/2006/main" w="0">
-            <a:noFill/>
-            <a:prstDash val="solid"/>
-          </a:ln>
-        </p:spPr>
-        <p:txBody>
-          <a:bodyPr xmlns:a="http://schemas.openxmlformats.org/drawingml/2006/main" lIns="0" tIns="0" rIns="0" bIns="0" anchor="ctr"/>
-          <a:lstStyle xmlns:a="http://schemas.openxmlformats.org/drawingml/2006/main"/>
-          <a:p xmlns:a="http://schemas.openxmlformats.org/drawingml/2006/main">
-            <a:pPr>
-              <a:defRPr sz="2100" b="0">
+            <a:off x="1000125" y="4945380"/>
+            <a:ext cx="10382250" cy="493395"/>
+          </a:xfrm>
+          <a:prstGeom xmlns:a="http://schemas.openxmlformats.org/drawingml/2006/main" prst="rect">
+            <a:avLst/>
+          </a:prstGeom>
+          <a:noFill xmlns:a="http://schemas.openxmlformats.org/drawingml/2006/main"/>
+          <a:ln xmlns:a="http://schemas.openxmlformats.org/drawingml/2006/main" w="0">
+            <a:noFill/>
+            <a:prstDash val="solid"/>
+          </a:ln>
+        </p:spPr>
+        <p:txBody>
+          <a:bodyPr xmlns:a="http://schemas.openxmlformats.org/drawingml/2006/main" lIns="0" tIns="0" rIns="0" bIns="0" anchor="ctr">
+            <a:noAutofit/>
+          </a:bodyPr>
+          <a:lstStyle xmlns:a="http://schemas.openxmlformats.org/drawingml/2006/main"/>
+          <a:p xmlns:a="http://schemas.openxmlformats.org/drawingml/2006/main">
+            <a:pPr algn="l">
+              <a:buNone/>
+              <a:defRPr sz="2400" b="0">
                 <a:solidFill>
                   <a:srgbClr val="152B3A"/>
                 </a:solidFill>
-              </a:defRPr>
-            </a:pPr>
-            <a:r>
-              <a:rPr sz="2100" b="0">
+                <a:latin typeface="Calibri"/>
+                <a:ea typeface="Calibri"/>
+                <a:cs typeface="Calibri"/>
+              </a:defRPr>
+            </a:pPr>
+            <a:r>
+              <a:rPr sz="2400" b="0">
                 <a:solidFill>
                   <a:srgbClr val="152B3A"/>
                 </a:solidFill>
+                <a:latin typeface="Calibri"/>
+                <a:ea typeface="Calibri"/>
+                <a:cs typeface="Calibri"/>
               </a:rPr>
               <a:t>Friction is a bad force.</a:t>
+            </a:r>
+          </a:p>
+        </p:txBody>
+      </p:sp>
+      <p:sp>
+        <p:nvSpPr>
+          <p:cNvPr id="14" name="cue-0">
+            <a:extLst xmlns:a="http://schemas.openxmlformats.org/drawingml/2006/main">
+              <a:ext uri="{FF2B5EF4-FFF2-40B4-BE49-F238E27FC236}">
+                <a16:creationId xmlns:a16="http://schemas.microsoft.com/office/drawing/2014/main" id="{EDE5C153-491F-4C08-A9A5-48BEF055031D}"/>
+              </a:ext>
+            </a:extLst>
+          </p:cNvPr>
+          <p:cNvSpPr>
+            <a:spLocks xmlns:a="http://schemas.openxmlformats.org/drawingml/2006/main" noGrp="1"/>
+          </p:cNvSpPr>
+          <p:nvPr/>
+        </p:nvSpPr>
+        <p:spPr>
+          <a:xfrm xmlns:a="http://schemas.openxmlformats.org/drawingml/2006/main">
+            <a:off x="609600" y="2771775"/>
+            <a:ext cx="323850" cy="323850"/>
+          </a:xfrm>
+          <a:prstGeom xmlns:a="http://schemas.openxmlformats.org/drawingml/2006/main" prst="rect">
+            <a:avLst/>
+          </a:prstGeom>
+          <a:noFill xmlns:a="http://schemas.openxmlformats.org/drawingml/2006/main"/>
+          <a:ln xmlns:a="http://schemas.openxmlformats.org/drawingml/2006/main" w="0">
+            <a:noFill/>
+          </a:ln>
+        </p:spPr>
+        <p:txBody>
+          <a:bodyPr xmlns:a="http://schemas.openxmlformats.org/drawingml/2006/main" lIns="0" tIns="0" rIns="0" bIns="0" anchor="ctr">
+            <a:noAutofit/>
+          </a:bodyPr>
+          <a:lstStyle xmlns:a="http://schemas.openxmlformats.org/drawingml/2006/main"/>
+          <a:p xmlns:a="http://schemas.openxmlformats.org/drawingml/2006/main">
+            <a:pPr algn="l">
+              <a:defRPr sz="1350" b="1">
+                <a:solidFill>
+                  <a:srgbClr val="28685E"/>
+                </a:solidFill>
+                <a:latin typeface="Calibri"/>
+                <a:ea typeface="Calibri"/>
+                <a:cs typeface="Calibri"/>
+              </a:defRPr>
+            </a:pPr>
+            <a:r>
+              <a:rPr sz="1350" b="1">
+                <a:solidFill>
+                  <a:srgbClr val="28685E"/>
+                </a:solidFill>
+                <a:latin typeface="Calibri"/>
+                <a:ea typeface="Calibri"/>
+                <a:cs typeface="Calibri"/>
+              </a:rPr>
+              <a:t>01</a:t>
+            </a:r>
+          </a:p>
+        </p:txBody>
+      </p:sp>
+      <p:sp>
+        <p:nvSpPr>
+          <p:cNvPr id="15" name="row-rule-0">
+            <a:extLst xmlns:a="http://schemas.openxmlformats.org/drawingml/2006/main">
+              <a:ext uri="{FF2B5EF4-FFF2-40B4-BE49-F238E27FC236}">
+                <a16:creationId xmlns:a16="http://schemas.microsoft.com/office/drawing/2014/main" id="{2989458C-D24D-4F4A-A90B-C8C5BFD249E1}"/>
+              </a:ext>
+            </a:extLst>
+          </p:cNvPr>
+          <p:cNvSpPr>
+            <a:spLocks xmlns:a="http://schemas.openxmlformats.org/drawingml/2006/main" noGrp="1"/>
+          </p:cNvSpPr>
+          <p:nvPr/>
+        </p:nvSpPr>
+        <p:spPr>
+          <a:xfrm xmlns:a="http://schemas.openxmlformats.org/drawingml/2006/main">
+            <a:off x="1000125" y="3246120"/>
+            <a:ext cx="10334625" cy="0"/>
+          </a:xfrm>
+          <a:prstGeom xmlns:a="http://schemas.openxmlformats.org/drawingml/2006/main" prst="line">
+            <a:avLst/>
+          </a:prstGeom>
+          <a:noFill xmlns:a="http://schemas.openxmlformats.org/drawingml/2006/main"/>
+          <a:ln xmlns:a="http://schemas.openxmlformats.org/drawingml/2006/main" w="9525">
+            <a:solidFill>
+              <a:srgbClr val="CEDBD3"/>
+            </a:solidFill>
+          </a:ln>
+        </p:spPr>
+      </p:sp>
+      <p:sp>
+        <p:nvSpPr>
+          <p:cNvPr id="16" name="cue-1">
+            <a:extLst xmlns:a="http://schemas.openxmlformats.org/drawingml/2006/main">
+              <a:ext uri="{FF2B5EF4-FFF2-40B4-BE49-F238E27FC236}">
+                <a16:creationId xmlns:a16="http://schemas.microsoft.com/office/drawing/2014/main" id="{36A2308F-3E2B-4ECE-8D55-D31F9F397259}"/>
+              </a:ext>
+            </a:extLst>
+          </p:cNvPr>
+          <p:cNvSpPr>
+            <a:spLocks xmlns:a="http://schemas.openxmlformats.org/drawingml/2006/main" noGrp="1"/>
+          </p:cNvSpPr>
+          <p:nvPr/>
+        </p:nvSpPr>
+        <p:spPr>
+          <a:xfrm xmlns:a="http://schemas.openxmlformats.org/drawingml/2006/main">
+            <a:off x="609600" y="3322320"/>
+            <a:ext cx="323850" cy="323850"/>
+          </a:xfrm>
+          <a:prstGeom xmlns:a="http://schemas.openxmlformats.org/drawingml/2006/main" prst="rect">
+            <a:avLst/>
+          </a:prstGeom>
+          <a:noFill xmlns:a="http://schemas.openxmlformats.org/drawingml/2006/main"/>
+          <a:ln xmlns:a="http://schemas.openxmlformats.org/drawingml/2006/main" w="0">
+            <a:noFill/>
+          </a:ln>
+        </p:spPr>
+        <p:txBody>
+          <a:bodyPr xmlns:a="http://schemas.openxmlformats.org/drawingml/2006/main" lIns="0" tIns="0" rIns="0" bIns="0" anchor="ctr">
+            <a:noAutofit/>
+          </a:bodyPr>
+          <a:lstStyle xmlns:a="http://schemas.openxmlformats.org/drawingml/2006/main"/>
+          <a:p xmlns:a="http://schemas.openxmlformats.org/drawingml/2006/main">
+            <a:pPr algn="l">
+              <a:defRPr sz="1350" b="1">
+                <a:solidFill>
+                  <a:srgbClr val="28685E"/>
+                </a:solidFill>
+                <a:latin typeface="Calibri"/>
+                <a:ea typeface="Calibri"/>
+                <a:cs typeface="Calibri"/>
+              </a:defRPr>
+            </a:pPr>
+            <a:r>
+              <a:rPr sz="1350" b="1">
+                <a:solidFill>
+                  <a:srgbClr val="28685E"/>
+                </a:solidFill>
+                <a:latin typeface="Calibri"/>
+                <a:ea typeface="Calibri"/>
+                <a:cs typeface="Calibri"/>
+              </a:rPr>
+              <a:t>02</a:t>
+            </a:r>
+          </a:p>
+        </p:txBody>
+      </p:sp>
+      <p:sp>
+        <p:nvSpPr>
+          <p:cNvPr id="17" name="row-rule-1">
+            <a:extLst xmlns:a="http://schemas.openxmlformats.org/drawingml/2006/main">
+              <a:ext uri="{FF2B5EF4-FFF2-40B4-BE49-F238E27FC236}">
+                <a16:creationId xmlns:a16="http://schemas.microsoft.com/office/drawing/2014/main" id="{FA6B44D7-A5BE-456F-B19F-C9B41E382F33}"/>
+              </a:ext>
+            </a:extLst>
+          </p:cNvPr>
+          <p:cNvSpPr>
+            <a:spLocks xmlns:a="http://schemas.openxmlformats.org/drawingml/2006/main" noGrp="1"/>
+          </p:cNvSpPr>
+          <p:nvPr/>
+        </p:nvSpPr>
+        <p:spPr>
+          <a:xfrm xmlns:a="http://schemas.openxmlformats.org/drawingml/2006/main">
+            <a:off x="1000125" y="3796665"/>
+            <a:ext cx="10334625" cy="0"/>
+          </a:xfrm>
+          <a:prstGeom xmlns:a="http://schemas.openxmlformats.org/drawingml/2006/main" prst="line">
+            <a:avLst/>
+          </a:prstGeom>
+          <a:noFill xmlns:a="http://schemas.openxmlformats.org/drawingml/2006/main"/>
+          <a:ln xmlns:a="http://schemas.openxmlformats.org/drawingml/2006/main" w="9525">
+            <a:solidFill>
+              <a:srgbClr val="CEDBD3"/>
+            </a:solidFill>
+          </a:ln>
+        </p:spPr>
+      </p:sp>
+      <p:sp>
+        <p:nvSpPr>
+          <p:cNvPr id="18" name="cue-2">
+            <a:extLst xmlns:a="http://schemas.openxmlformats.org/drawingml/2006/main">
+              <a:ext uri="{FF2B5EF4-FFF2-40B4-BE49-F238E27FC236}">
+                <a16:creationId xmlns:a16="http://schemas.microsoft.com/office/drawing/2014/main" id="{D104A33C-D7DB-4593-8940-95B39D325944}"/>
+              </a:ext>
+            </a:extLst>
+          </p:cNvPr>
+          <p:cNvSpPr>
+            <a:spLocks xmlns:a="http://schemas.openxmlformats.org/drawingml/2006/main" noGrp="1"/>
+          </p:cNvSpPr>
+          <p:nvPr/>
+        </p:nvSpPr>
+        <p:spPr>
+          <a:xfrm xmlns:a="http://schemas.openxmlformats.org/drawingml/2006/main">
+            <a:off x="609600" y="3872865"/>
+            <a:ext cx="323850" cy="323850"/>
+          </a:xfrm>
+          <a:prstGeom xmlns:a="http://schemas.openxmlformats.org/drawingml/2006/main" prst="rect">
+            <a:avLst/>
+          </a:prstGeom>
+          <a:noFill xmlns:a="http://schemas.openxmlformats.org/drawingml/2006/main"/>
+          <a:ln xmlns:a="http://schemas.openxmlformats.org/drawingml/2006/main" w="0">
+            <a:noFill/>
+          </a:ln>
+        </p:spPr>
+        <p:txBody>
+          <a:bodyPr xmlns:a="http://schemas.openxmlformats.org/drawingml/2006/main" lIns="0" tIns="0" rIns="0" bIns="0" anchor="ctr">
+            <a:noAutofit/>
+          </a:bodyPr>
+          <a:lstStyle xmlns:a="http://schemas.openxmlformats.org/drawingml/2006/main"/>
+          <a:p xmlns:a="http://schemas.openxmlformats.org/drawingml/2006/main">
+            <a:pPr algn="l">
+              <a:defRPr sz="1350" b="1">
+                <a:solidFill>
+                  <a:srgbClr val="28685E"/>
+                </a:solidFill>
+                <a:latin typeface="Calibri"/>
+                <a:ea typeface="Calibri"/>
+                <a:cs typeface="Calibri"/>
+              </a:defRPr>
+            </a:pPr>
+            <a:r>
+              <a:rPr sz="1350" b="1">
+                <a:solidFill>
+                  <a:srgbClr val="28685E"/>
+                </a:solidFill>
+                <a:latin typeface="Calibri"/>
+                <a:ea typeface="Calibri"/>
+                <a:cs typeface="Calibri"/>
+              </a:rPr>
+              <a:t>03</a:t>
+            </a:r>
+          </a:p>
+        </p:txBody>
+      </p:sp>
+      <p:sp>
+        <p:nvSpPr>
+          <p:cNvPr id="19" name="row-rule-2">
+            <a:extLst xmlns:a="http://schemas.openxmlformats.org/drawingml/2006/main">
+              <a:ext uri="{FF2B5EF4-FFF2-40B4-BE49-F238E27FC236}">
+                <a16:creationId xmlns:a16="http://schemas.microsoft.com/office/drawing/2014/main" id="{321C09D1-97E2-48F3-803F-753B56C5B0FE}"/>
+              </a:ext>
+            </a:extLst>
+          </p:cNvPr>
+          <p:cNvSpPr>
+            <a:spLocks xmlns:a="http://schemas.openxmlformats.org/drawingml/2006/main" noGrp="1"/>
+          </p:cNvSpPr>
+          <p:nvPr/>
+        </p:nvSpPr>
+        <p:spPr>
+          <a:xfrm xmlns:a="http://schemas.openxmlformats.org/drawingml/2006/main">
+            <a:off x="1000125" y="4347210"/>
+            <a:ext cx="10334625" cy="0"/>
+          </a:xfrm>
+          <a:prstGeom xmlns:a="http://schemas.openxmlformats.org/drawingml/2006/main" prst="line">
+            <a:avLst/>
+          </a:prstGeom>
+          <a:noFill xmlns:a="http://schemas.openxmlformats.org/drawingml/2006/main"/>
+          <a:ln xmlns:a="http://schemas.openxmlformats.org/drawingml/2006/main" w="9525">
+            <a:solidFill>
+              <a:srgbClr val="CEDBD3"/>
+            </a:solidFill>
+          </a:ln>
+        </p:spPr>
+      </p:sp>
+      <p:sp>
+        <p:nvSpPr>
+          <p:cNvPr id="20" name="cue-3">
+            <a:extLst xmlns:a="http://schemas.openxmlformats.org/drawingml/2006/main">
+              <a:ext uri="{FF2B5EF4-FFF2-40B4-BE49-F238E27FC236}">
+                <a16:creationId xmlns:a16="http://schemas.microsoft.com/office/drawing/2014/main" id="{613E3095-4901-4E68-BFFE-155E467498B3}"/>
+              </a:ext>
+            </a:extLst>
+          </p:cNvPr>
+          <p:cNvSpPr>
+            <a:spLocks xmlns:a="http://schemas.openxmlformats.org/drawingml/2006/main" noGrp="1"/>
+          </p:cNvSpPr>
+          <p:nvPr/>
+        </p:nvSpPr>
+        <p:spPr>
+          <a:xfrm xmlns:a="http://schemas.openxmlformats.org/drawingml/2006/main">
+            <a:off x="609600" y="4423410"/>
+            <a:ext cx="323850" cy="323850"/>
+          </a:xfrm>
+          <a:prstGeom xmlns:a="http://schemas.openxmlformats.org/drawingml/2006/main" prst="rect">
+            <a:avLst/>
+          </a:prstGeom>
+          <a:noFill xmlns:a="http://schemas.openxmlformats.org/drawingml/2006/main"/>
+          <a:ln xmlns:a="http://schemas.openxmlformats.org/drawingml/2006/main" w="0">
+            <a:noFill/>
+          </a:ln>
+        </p:spPr>
+        <p:txBody>
+          <a:bodyPr xmlns:a="http://schemas.openxmlformats.org/drawingml/2006/main" lIns="0" tIns="0" rIns="0" bIns="0" anchor="ctr">
+            <a:noAutofit/>
+          </a:bodyPr>
+          <a:lstStyle xmlns:a="http://schemas.openxmlformats.org/drawingml/2006/main"/>
+          <a:p xmlns:a="http://schemas.openxmlformats.org/drawingml/2006/main">
+            <a:pPr algn="l">
+              <a:defRPr sz="1350" b="1">
+                <a:solidFill>
+                  <a:srgbClr val="28685E"/>
+                </a:solidFill>
+                <a:latin typeface="Calibri"/>
+                <a:ea typeface="Calibri"/>
+                <a:cs typeface="Calibri"/>
+              </a:defRPr>
+            </a:pPr>
+            <a:r>
+              <a:rPr sz="1350" b="1">
+                <a:solidFill>
+                  <a:srgbClr val="28685E"/>
+                </a:solidFill>
+                <a:latin typeface="Calibri"/>
+                <a:ea typeface="Calibri"/>
+                <a:cs typeface="Calibri"/>
+              </a:rPr>
+              <a:t>04</a:t>
+            </a:r>
+          </a:p>
+        </p:txBody>
+      </p:sp>
+      <p:sp>
+        <p:nvSpPr>
+          <p:cNvPr id="21" name="row-rule-3">
+            <a:extLst xmlns:a="http://schemas.openxmlformats.org/drawingml/2006/main">
+              <a:ext uri="{FF2B5EF4-FFF2-40B4-BE49-F238E27FC236}">
+                <a16:creationId xmlns:a16="http://schemas.microsoft.com/office/drawing/2014/main" id="{2B510709-84E6-4B05-BFA8-E968C82037F0}"/>
+              </a:ext>
+            </a:extLst>
+          </p:cNvPr>
+          <p:cNvSpPr>
+            <a:spLocks xmlns:a="http://schemas.openxmlformats.org/drawingml/2006/main" noGrp="1"/>
+          </p:cNvSpPr>
+          <p:nvPr/>
+        </p:nvSpPr>
+        <p:spPr>
+          <a:xfrm xmlns:a="http://schemas.openxmlformats.org/drawingml/2006/main">
+            <a:off x="1000125" y="4897755"/>
+            <a:ext cx="10334625" cy="0"/>
+          </a:xfrm>
+          <a:prstGeom xmlns:a="http://schemas.openxmlformats.org/drawingml/2006/main" prst="line">
+            <a:avLst/>
+          </a:prstGeom>
+          <a:noFill xmlns:a="http://schemas.openxmlformats.org/drawingml/2006/main"/>
+          <a:ln xmlns:a="http://schemas.openxmlformats.org/drawingml/2006/main" w="9525">
+            <a:solidFill>
+              <a:srgbClr val="CEDBD3"/>
+            </a:solidFill>
+          </a:ln>
+        </p:spPr>
+      </p:sp>
+      <p:sp>
+        <p:nvSpPr>
+          <p:cNvPr id="22" name="cue-4">
+            <a:extLst xmlns:a="http://schemas.openxmlformats.org/drawingml/2006/main">
+              <a:ext uri="{FF2B5EF4-FFF2-40B4-BE49-F238E27FC236}">
+                <a16:creationId xmlns:a16="http://schemas.microsoft.com/office/drawing/2014/main" id="{53A95DD9-929E-4BAD-AD72-7F43C6F8B019}"/>
+              </a:ext>
+            </a:extLst>
+          </p:cNvPr>
+          <p:cNvSpPr>
+            <a:spLocks xmlns:a="http://schemas.openxmlformats.org/drawingml/2006/main" noGrp="1"/>
+          </p:cNvSpPr>
+          <p:nvPr/>
+        </p:nvSpPr>
+        <p:spPr>
+          <a:xfrm xmlns:a="http://schemas.openxmlformats.org/drawingml/2006/main">
+            <a:off x="609600" y="4973955"/>
+            <a:ext cx="323850" cy="323850"/>
+          </a:xfrm>
+          <a:prstGeom xmlns:a="http://schemas.openxmlformats.org/drawingml/2006/main" prst="rect">
+            <a:avLst/>
+          </a:prstGeom>
+          <a:noFill xmlns:a="http://schemas.openxmlformats.org/drawingml/2006/main"/>
+          <a:ln xmlns:a="http://schemas.openxmlformats.org/drawingml/2006/main" w="0">
+            <a:noFill/>
+          </a:ln>
+        </p:spPr>
+        <p:txBody>
+          <a:bodyPr xmlns:a="http://schemas.openxmlformats.org/drawingml/2006/main" lIns="0" tIns="0" rIns="0" bIns="0" anchor="ctr">
+            <a:noAutofit/>
+          </a:bodyPr>
+          <a:lstStyle xmlns:a="http://schemas.openxmlformats.org/drawingml/2006/main"/>
+          <a:p xmlns:a="http://schemas.openxmlformats.org/drawingml/2006/main">
+            <a:pPr algn="l">
+              <a:defRPr sz="1350" b="1">
+                <a:solidFill>
+                  <a:srgbClr val="28685E"/>
+                </a:solidFill>
+                <a:latin typeface="Calibri"/>
+                <a:ea typeface="Calibri"/>
+                <a:cs typeface="Calibri"/>
+              </a:defRPr>
+            </a:pPr>
+            <a:r>
+              <a:rPr sz="1350" b="1">
+                <a:solidFill>
+                  <a:srgbClr val="28685E"/>
+                </a:solidFill>
+                <a:latin typeface="Calibri"/>
+                <a:ea typeface="Calibri"/>
+                <a:cs typeface="Calibri"/>
+              </a:rPr>
+              <a:t>05</a:t>
             </a:r>
           </a:p>
         </p:txBody>
